--- a/Presentation/Global AI Adoption & Workforce Impact Dataset.pptx
+++ b/Presentation/Global AI Adoption & Workforce Impact Dataset.pptx
@@ -4,15 +4,18 @@
   <p:sldMasterIdLst>
     <p:sldMasterId id="2147483648" r:id="rId1"/>
   </p:sldMasterIdLst>
+  <p:notesMasterIdLst>
+    <p:notesMasterId r:id="rId10"/>
+  </p:notesMasterIdLst>
   <p:sldIdLst>
     <p:sldId id="256" r:id="rId2"/>
     <p:sldId id="257" r:id="rId3"/>
     <p:sldId id="258" r:id="rId4"/>
-    <p:sldId id="259" r:id="rId5"/>
-    <p:sldId id="260" r:id="rId6"/>
-    <p:sldId id="261" r:id="rId7"/>
-    <p:sldId id="263" r:id="rId8"/>
-    <p:sldId id="262" r:id="rId9"/>
+    <p:sldId id="265" r:id="rId5"/>
+    <p:sldId id="266" r:id="rId6"/>
+    <p:sldId id="264" r:id="rId7"/>
+    <p:sldId id="262" r:id="rId8"/>
+    <p:sldId id="263" r:id="rId9"/>
   </p:sldIdLst>
   <p:sldSz cx="12192000" cy="6858000"/>
   <p:notesSz cx="6858000" cy="9144000"/>
@@ -112,6 +115,886 @@
     </a:lvl9pPr>
   </p:defaultTextStyle>
 </p:presentation>
+</file>
+
+<file path=ppt/notesMasters/notesMaster1.xml><?xml version="1.0" encoding="utf-8"?>
+<p:notesMaster xmlns:a="http://schemas.openxmlformats.org/drawingml/2006/main" xmlns:r="http://schemas.openxmlformats.org/officeDocument/2006/relationships" xmlns:p="http://schemas.openxmlformats.org/presentationml/2006/main">
+  <p:cSld>
+    <p:bg>
+      <p:bgRef idx="1001">
+        <a:schemeClr val="bg1"/>
+      </p:bgRef>
+    </p:bg>
+    <p:spTree>
+      <p:nvGrpSpPr>
+        <p:cNvPr id="1" name=""/>
+        <p:cNvGrpSpPr/>
+        <p:nvPr/>
+      </p:nvGrpSpPr>
+      <p:grpSpPr>
+        <a:xfrm>
+          <a:off x="0" y="0"/>
+          <a:ext cx="0" cy="0"/>
+          <a:chOff x="0" y="0"/>
+          <a:chExt cx="0" cy="0"/>
+        </a:xfrm>
+      </p:grpSpPr>
+      <p:sp>
+        <p:nvSpPr>
+          <p:cNvPr id="2" name="Header Placeholder 1"/>
+          <p:cNvSpPr>
+            <a:spLocks noGrp="1"/>
+          </p:cNvSpPr>
+          <p:nvPr>
+            <p:ph type="hdr" sz="quarter"/>
+          </p:nvPr>
+        </p:nvSpPr>
+        <p:spPr>
+          <a:xfrm>
+            <a:off x="0" y="0"/>
+            <a:ext cx="2971800" cy="458788"/>
+          </a:xfrm>
+          <a:prstGeom prst="rect">
+            <a:avLst/>
+          </a:prstGeom>
+        </p:spPr>
+        <p:txBody>
+          <a:bodyPr vert="horz" lIns="91440" tIns="45720" rIns="91440" bIns="45720" rtlCol="0"/>
+          <a:lstStyle>
+            <a:lvl1pPr algn="l">
+              <a:defRPr sz="1200"/>
+            </a:lvl1pPr>
+          </a:lstStyle>
+          <a:p>
+            <a:endParaRPr lang="en-US"/>
+          </a:p>
+        </p:txBody>
+      </p:sp>
+      <p:sp>
+        <p:nvSpPr>
+          <p:cNvPr id="3" name="Date Placeholder 2"/>
+          <p:cNvSpPr>
+            <a:spLocks noGrp="1"/>
+          </p:cNvSpPr>
+          <p:nvPr>
+            <p:ph type="dt" idx="1"/>
+          </p:nvPr>
+        </p:nvSpPr>
+        <p:spPr>
+          <a:xfrm>
+            <a:off x="3884613" y="0"/>
+            <a:ext cx="2971800" cy="458788"/>
+          </a:xfrm>
+          <a:prstGeom prst="rect">
+            <a:avLst/>
+          </a:prstGeom>
+        </p:spPr>
+        <p:txBody>
+          <a:bodyPr vert="horz" lIns="91440" tIns="45720" rIns="91440" bIns="45720" rtlCol="0"/>
+          <a:lstStyle>
+            <a:lvl1pPr algn="r">
+              <a:defRPr sz="1200"/>
+            </a:lvl1pPr>
+          </a:lstStyle>
+          <a:p>
+            <a:fld id="{868C6B24-4B47-4CBB-A1F4-8E5735CF3BA4}" type="datetimeFigureOut">
+              <a:rPr lang="en-US" smtClean="0"/>
+              <a:t>6/8/2026</a:t>
+            </a:fld>
+            <a:endParaRPr lang="en-US"/>
+          </a:p>
+        </p:txBody>
+      </p:sp>
+      <p:sp>
+        <p:nvSpPr>
+          <p:cNvPr id="4" name="Slide Image Placeholder 3"/>
+          <p:cNvSpPr>
+            <a:spLocks noGrp="1" noRot="1" noChangeAspect="1"/>
+          </p:cNvSpPr>
+          <p:nvPr>
+            <p:ph type="sldImg" idx="2"/>
+          </p:nvPr>
+        </p:nvSpPr>
+        <p:spPr>
+          <a:xfrm>
+            <a:off x="685800" y="1143000"/>
+            <a:ext cx="5486400" cy="3086100"/>
+          </a:xfrm>
+          <a:prstGeom prst="rect">
+            <a:avLst/>
+          </a:prstGeom>
+          <a:noFill/>
+          <a:ln w="12700">
+            <a:solidFill>
+              <a:prstClr val="black"/>
+            </a:solidFill>
+          </a:ln>
+        </p:spPr>
+        <p:txBody>
+          <a:bodyPr vert="horz" lIns="91440" tIns="45720" rIns="91440" bIns="45720" rtlCol="0" anchor="ctr"/>
+          <a:lstStyle/>
+          <a:p>
+            <a:endParaRPr lang="en-US"/>
+          </a:p>
+        </p:txBody>
+      </p:sp>
+      <p:sp>
+        <p:nvSpPr>
+          <p:cNvPr id="5" name="Notes Placeholder 4"/>
+          <p:cNvSpPr>
+            <a:spLocks noGrp="1"/>
+          </p:cNvSpPr>
+          <p:nvPr>
+            <p:ph type="body" sz="quarter" idx="3"/>
+          </p:nvPr>
+        </p:nvSpPr>
+        <p:spPr>
+          <a:xfrm>
+            <a:off x="685800" y="4400550"/>
+            <a:ext cx="5486400" cy="3600450"/>
+          </a:xfrm>
+          <a:prstGeom prst="rect">
+            <a:avLst/>
+          </a:prstGeom>
+        </p:spPr>
+        <p:txBody>
+          <a:bodyPr vert="horz" lIns="91440" tIns="45720" rIns="91440" bIns="45720" rtlCol="0"/>
+          <a:lstStyle/>
+          <a:p>
+            <a:pPr lvl="0"/>
+            <a:r>
+              <a:rPr lang="en-US"/>
+              <a:t>Click to edit Master text styles</a:t>
+            </a:r>
+          </a:p>
+          <a:p>
+            <a:pPr lvl="1"/>
+            <a:r>
+              <a:rPr lang="en-US"/>
+              <a:t>Second level</a:t>
+            </a:r>
+          </a:p>
+          <a:p>
+            <a:pPr lvl="2"/>
+            <a:r>
+              <a:rPr lang="en-US"/>
+              <a:t>Third level</a:t>
+            </a:r>
+          </a:p>
+          <a:p>
+            <a:pPr lvl="3"/>
+            <a:r>
+              <a:rPr lang="en-US"/>
+              <a:t>Fourth level</a:t>
+            </a:r>
+          </a:p>
+          <a:p>
+            <a:pPr lvl="4"/>
+            <a:r>
+              <a:rPr lang="en-US"/>
+              <a:t>Fifth level</a:t>
+            </a:r>
+          </a:p>
+        </p:txBody>
+      </p:sp>
+      <p:sp>
+        <p:nvSpPr>
+          <p:cNvPr id="6" name="Footer Placeholder 5"/>
+          <p:cNvSpPr>
+            <a:spLocks noGrp="1"/>
+          </p:cNvSpPr>
+          <p:nvPr>
+            <p:ph type="ftr" sz="quarter" idx="4"/>
+          </p:nvPr>
+        </p:nvSpPr>
+        <p:spPr>
+          <a:xfrm>
+            <a:off x="0" y="8685213"/>
+            <a:ext cx="2971800" cy="458787"/>
+          </a:xfrm>
+          <a:prstGeom prst="rect">
+            <a:avLst/>
+          </a:prstGeom>
+        </p:spPr>
+        <p:txBody>
+          <a:bodyPr vert="horz" lIns="91440" tIns="45720" rIns="91440" bIns="45720" rtlCol="0" anchor="b"/>
+          <a:lstStyle>
+            <a:lvl1pPr algn="l">
+              <a:defRPr sz="1200"/>
+            </a:lvl1pPr>
+          </a:lstStyle>
+          <a:p>
+            <a:endParaRPr lang="en-US"/>
+          </a:p>
+        </p:txBody>
+      </p:sp>
+      <p:sp>
+        <p:nvSpPr>
+          <p:cNvPr id="7" name="Slide Number Placeholder 6"/>
+          <p:cNvSpPr>
+            <a:spLocks noGrp="1"/>
+          </p:cNvSpPr>
+          <p:nvPr>
+            <p:ph type="sldNum" sz="quarter" idx="5"/>
+          </p:nvPr>
+        </p:nvSpPr>
+        <p:spPr>
+          <a:xfrm>
+            <a:off x="3884613" y="8685213"/>
+            <a:ext cx="2971800" cy="458787"/>
+          </a:xfrm>
+          <a:prstGeom prst="rect">
+            <a:avLst/>
+          </a:prstGeom>
+        </p:spPr>
+        <p:txBody>
+          <a:bodyPr vert="horz" lIns="91440" tIns="45720" rIns="91440" bIns="45720" rtlCol="0" anchor="b"/>
+          <a:lstStyle>
+            <a:lvl1pPr algn="r">
+              <a:defRPr sz="1200"/>
+            </a:lvl1pPr>
+          </a:lstStyle>
+          <a:p>
+            <a:fld id="{EFEC6C8B-BE8F-47B7-AB4D-01360EFA917A}" type="slidenum">
+              <a:rPr lang="en-US" smtClean="0"/>
+              <a:t>‹#›</a:t>
+            </a:fld>
+            <a:endParaRPr lang="en-US"/>
+          </a:p>
+        </p:txBody>
+      </p:sp>
+    </p:spTree>
+    <p:extLst>
+      <p:ext uri="{BB962C8B-B14F-4D97-AF65-F5344CB8AC3E}">
+        <p14:creationId xmlns:p14="http://schemas.microsoft.com/office/powerpoint/2010/main" val="3956522276"/>
+      </p:ext>
+    </p:extLst>
+  </p:cSld>
+  <p:clrMap bg1="lt1" tx1="dk1" bg2="lt2" tx2="dk2" accent1="accent1" accent2="accent2" accent3="accent3" accent4="accent4" accent5="accent5" accent6="accent6" hlink="hlink" folHlink="folHlink"/>
+  <p:notesStyle>
+    <a:lvl1pPr marL="0" algn="l" defTabSz="914400" rtl="0" eaLnBrk="1" latinLnBrk="0" hangingPunct="1">
+      <a:defRPr sz="1200" kern="1200">
+        <a:solidFill>
+          <a:schemeClr val="tx1"/>
+        </a:solidFill>
+        <a:latin typeface="+mn-lt"/>
+        <a:ea typeface="+mn-ea"/>
+        <a:cs typeface="+mn-cs"/>
+      </a:defRPr>
+    </a:lvl1pPr>
+    <a:lvl2pPr marL="457200" algn="l" defTabSz="914400" rtl="0" eaLnBrk="1" latinLnBrk="0" hangingPunct="1">
+      <a:defRPr sz="1200" kern="1200">
+        <a:solidFill>
+          <a:schemeClr val="tx1"/>
+        </a:solidFill>
+        <a:latin typeface="+mn-lt"/>
+        <a:ea typeface="+mn-ea"/>
+        <a:cs typeface="+mn-cs"/>
+      </a:defRPr>
+    </a:lvl2pPr>
+    <a:lvl3pPr marL="914400" algn="l" defTabSz="914400" rtl="0" eaLnBrk="1" latinLnBrk="0" hangingPunct="1">
+      <a:defRPr sz="1200" kern="1200">
+        <a:solidFill>
+          <a:schemeClr val="tx1"/>
+        </a:solidFill>
+        <a:latin typeface="+mn-lt"/>
+        <a:ea typeface="+mn-ea"/>
+        <a:cs typeface="+mn-cs"/>
+      </a:defRPr>
+    </a:lvl3pPr>
+    <a:lvl4pPr marL="1371600" algn="l" defTabSz="914400" rtl="0" eaLnBrk="1" latinLnBrk="0" hangingPunct="1">
+      <a:defRPr sz="1200" kern="1200">
+        <a:solidFill>
+          <a:schemeClr val="tx1"/>
+        </a:solidFill>
+        <a:latin typeface="+mn-lt"/>
+        <a:ea typeface="+mn-ea"/>
+        <a:cs typeface="+mn-cs"/>
+      </a:defRPr>
+    </a:lvl4pPr>
+    <a:lvl5pPr marL="1828800" algn="l" defTabSz="914400" rtl="0" eaLnBrk="1" latinLnBrk="0" hangingPunct="1">
+      <a:defRPr sz="1200" kern="1200">
+        <a:solidFill>
+          <a:schemeClr val="tx1"/>
+        </a:solidFill>
+        <a:latin typeface="+mn-lt"/>
+        <a:ea typeface="+mn-ea"/>
+        <a:cs typeface="+mn-cs"/>
+      </a:defRPr>
+    </a:lvl5pPr>
+    <a:lvl6pPr marL="2286000" algn="l" defTabSz="914400" rtl="0" eaLnBrk="1" latinLnBrk="0" hangingPunct="1">
+      <a:defRPr sz="1200" kern="1200">
+        <a:solidFill>
+          <a:schemeClr val="tx1"/>
+        </a:solidFill>
+        <a:latin typeface="+mn-lt"/>
+        <a:ea typeface="+mn-ea"/>
+        <a:cs typeface="+mn-cs"/>
+      </a:defRPr>
+    </a:lvl6pPr>
+    <a:lvl7pPr marL="2743200" algn="l" defTabSz="914400" rtl="0" eaLnBrk="1" latinLnBrk="0" hangingPunct="1">
+      <a:defRPr sz="1200" kern="1200">
+        <a:solidFill>
+          <a:schemeClr val="tx1"/>
+        </a:solidFill>
+        <a:latin typeface="+mn-lt"/>
+        <a:ea typeface="+mn-ea"/>
+        <a:cs typeface="+mn-cs"/>
+      </a:defRPr>
+    </a:lvl7pPr>
+    <a:lvl8pPr marL="3200400" algn="l" defTabSz="914400" rtl="0" eaLnBrk="1" latinLnBrk="0" hangingPunct="1">
+      <a:defRPr sz="1200" kern="1200">
+        <a:solidFill>
+          <a:schemeClr val="tx1"/>
+        </a:solidFill>
+        <a:latin typeface="+mn-lt"/>
+        <a:ea typeface="+mn-ea"/>
+        <a:cs typeface="+mn-cs"/>
+      </a:defRPr>
+    </a:lvl8pPr>
+    <a:lvl9pPr marL="3657600" algn="l" defTabSz="914400" rtl="0" eaLnBrk="1" latinLnBrk="0" hangingPunct="1">
+      <a:defRPr sz="1200" kern="1200">
+        <a:solidFill>
+          <a:schemeClr val="tx1"/>
+        </a:solidFill>
+        <a:latin typeface="+mn-lt"/>
+        <a:ea typeface="+mn-ea"/>
+        <a:cs typeface="+mn-cs"/>
+      </a:defRPr>
+    </a:lvl9pPr>
+  </p:notesStyle>
+</p:notesMaster>
+</file>
+
+<file path=ppt/notesSlides/notesSlide1.xml><?xml version="1.0" encoding="utf-8"?>
+<p:notes xmlns:a="http://schemas.openxmlformats.org/drawingml/2006/main" xmlns:r="http://schemas.openxmlformats.org/officeDocument/2006/relationships" xmlns:p="http://schemas.openxmlformats.org/presentationml/2006/main">
+  <p:cSld>
+    <p:spTree>
+      <p:nvGrpSpPr>
+        <p:cNvPr id="1" name=""/>
+        <p:cNvGrpSpPr/>
+        <p:nvPr/>
+      </p:nvGrpSpPr>
+      <p:grpSpPr>
+        <a:xfrm>
+          <a:off x="0" y="0"/>
+          <a:ext cx="0" cy="0"/>
+          <a:chOff x="0" y="0"/>
+          <a:chExt cx="0" cy="0"/>
+        </a:xfrm>
+      </p:grpSpPr>
+      <p:sp>
+        <p:nvSpPr>
+          <p:cNvPr id="2" name="Slide Image Placeholder 1"/>
+          <p:cNvSpPr>
+            <a:spLocks noGrp="1" noRot="1" noChangeAspect="1"/>
+          </p:cNvSpPr>
+          <p:nvPr>
+            <p:ph type="sldImg"/>
+          </p:nvPr>
+        </p:nvSpPr>
+        <p:spPr/>
+      </p:sp>
+      <p:sp>
+        <p:nvSpPr>
+          <p:cNvPr id="3" name="Notes Placeholder 2"/>
+          <p:cNvSpPr>
+            <a:spLocks noGrp="1"/>
+          </p:cNvSpPr>
+          <p:nvPr>
+            <p:ph type="body" idx="1"/>
+          </p:nvPr>
+        </p:nvSpPr>
+        <p:spPr/>
+        <p:txBody>
+          <a:bodyPr/>
+          <a:lstStyle/>
+          <a:p>
+            <a:pPr fontAlgn="base"/>
+            <a:r>
+              <a:rPr lang="en-US" sz="1200" b="1" i="0" kern="1200" dirty="0">
+                <a:solidFill>
+                  <a:schemeClr val="tx1"/>
+                </a:solidFill>
+                <a:effectLst/>
+                <a:latin typeface="+mn-lt"/>
+                <a:ea typeface="+mn-ea"/>
+                <a:cs typeface="+mn-cs"/>
+              </a:rPr>
+              <a:t>About Dataset</a:t>
+            </a:r>
+          </a:p>
+          <a:p>
+            <a:pPr fontAlgn="base"/>
+            <a:r>
+              <a:rPr lang="en-US" sz="1200" b="1" i="0" kern="1200" dirty="0">
+                <a:solidFill>
+                  <a:schemeClr val="tx1"/>
+                </a:solidFill>
+                <a:effectLst/>
+                <a:latin typeface="+mn-lt"/>
+                <a:ea typeface="+mn-ea"/>
+                <a:cs typeface="+mn-cs"/>
+              </a:rPr>
+              <a:t>Global AI Adoption &amp; Workforce Impact Dataset</a:t>
+            </a:r>
+          </a:p>
+          <a:p>
+            <a:pPr fontAlgn="base"/>
+            <a:r>
+              <a:rPr lang="en-US" sz="1200" b="0" i="0" kern="1200" dirty="0">
+                <a:solidFill>
+                  <a:schemeClr val="tx1"/>
+                </a:solidFill>
+                <a:effectLst/>
+                <a:latin typeface="+mn-lt"/>
+                <a:ea typeface="+mn-ea"/>
+                <a:cs typeface="+mn-cs"/>
+              </a:rPr>
+              <a:t>Artificial Intelligence adoption is rapidly transforming how organizations operate, automate tasks, and reshape their workforce. Understanding the relationship between AI adoption, productivity, governance, and workforce changes is critical for researchers, analysts, and policy makers.</a:t>
+            </a:r>
+          </a:p>
+          <a:p>
+            <a:pPr fontAlgn="base"/>
+            <a:r>
+              <a:rPr lang="en-US" sz="1200" b="0" i="0" kern="1200" dirty="0">
+                <a:solidFill>
+                  <a:schemeClr val="tx1"/>
+                </a:solidFill>
+                <a:effectLst/>
+                <a:latin typeface="+mn-lt"/>
+                <a:ea typeface="+mn-ea"/>
+                <a:cs typeface="+mn-cs"/>
+              </a:rPr>
+              <a:t>This dataset provides a structured view of how companies across industries and countries adopt AI technologies and how those decisions affect productivity, workforce dynamics, and operational outcomes.</a:t>
+            </a:r>
+          </a:p>
+          <a:p>
+            <a:pPr fontAlgn="base"/>
+            <a:r>
+              <a:rPr lang="en-US" sz="1200" b="0" i="0" kern="1200" dirty="0">
+                <a:solidFill>
+                  <a:schemeClr val="tx1"/>
+                </a:solidFill>
+                <a:effectLst/>
+                <a:latin typeface="+mn-lt"/>
+                <a:ea typeface="+mn-ea"/>
+                <a:cs typeface="+mn-cs"/>
+              </a:rPr>
+              <a:t>The dataset captures company-level indicators including AI adoption stage, AI investments, automation rates, workforce changes, governance practices, and business performance metrics. It also includes macro-level country indicators that influence digital transformation and AI adoption patterns.</a:t>
+            </a:r>
+          </a:p>
+          <a:p>
+            <a:pPr fontAlgn="base"/>
+            <a:r>
+              <a:rPr lang="en-US" sz="1200" b="0" i="0" kern="1200" dirty="0">
+                <a:solidFill>
+                  <a:schemeClr val="tx1"/>
+                </a:solidFill>
+                <a:effectLst/>
+                <a:latin typeface="+mn-lt"/>
+                <a:ea typeface="+mn-ea"/>
+                <a:cs typeface="+mn-cs"/>
+              </a:rPr>
+              <a:t>The dataset was constructed by aggregating patterns observed in global technology adoption reports, digital transformation studies, workforce analytics publications, and AI governance frameworks. Company characteristics, adoption behavior, workforce impact, productivity changes, and innovation indicators were modeled to reflect realistic organizational behavior across industries and regions.</a:t>
+            </a:r>
+          </a:p>
+          <a:p>
+            <a:pPr fontAlgn="base"/>
+            <a:r>
+              <a:rPr lang="en-US" sz="1200" b="0" i="0" kern="1200" dirty="0">
+                <a:solidFill>
+                  <a:schemeClr val="tx1"/>
+                </a:solidFill>
+                <a:effectLst/>
+                <a:latin typeface="+mn-lt"/>
+                <a:ea typeface="+mn-ea"/>
+                <a:cs typeface="+mn-cs"/>
+              </a:rPr>
+              <a:t>Role distributions, investment levels, automation rates, and workforce adjustments follow structured statistical distributions designed to resemble real-world enterprise analytics datasets. Country-level indicators such as digital maturity, internet penetration, and AI research intensity were modeled to reflect global technology ecosystems.</a:t>
+            </a:r>
+          </a:p>
+          <a:p>
+            <a:pPr fontAlgn="base"/>
+            <a:r>
+              <a:rPr lang="en-US" sz="1200" b="0" i="0" kern="1200" dirty="0">
+                <a:solidFill>
+                  <a:schemeClr val="tx1"/>
+                </a:solidFill>
+                <a:effectLst/>
+                <a:latin typeface="+mn-lt"/>
+                <a:ea typeface="+mn-ea"/>
+                <a:cs typeface="+mn-cs"/>
+              </a:rPr>
+              <a:t>The dataset is fully structured, cleaned, and formatted as tabular CSV files ready for:</a:t>
+            </a:r>
+          </a:p>
+          <a:p>
+            <a:pPr fontAlgn="base"/>
+            <a:r>
+              <a:rPr lang="en-US" sz="1200" b="0" i="0" kern="1200" dirty="0">
+                <a:solidFill>
+                  <a:schemeClr val="tx1"/>
+                </a:solidFill>
+                <a:effectLst/>
+                <a:latin typeface="+mn-lt"/>
+                <a:ea typeface="+mn-ea"/>
+                <a:cs typeface="+mn-cs"/>
+              </a:rPr>
+              <a:t>Exploratory Data Analysis (EDA)</a:t>
+            </a:r>
+          </a:p>
+          <a:p>
+            <a:pPr fontAlgn="base"/>
+            <a:r>
+              <a:rPr lang="en-US" sz="1200" b="0" i="0" kern="1200" dirty="0">
+                <a:solidFill>
+                  <a:schemeClr val="tx1"/>
+                </a:solidFill>
+                <a:effectLst/>
+                <a:latin typeface="+mn-lt"/>
+                <a:ea typeface="+mn-ea"/>
+                <a:cs typeface="+mn-cs"/>
+              </a:rPr>
+              <a:t>Data visualization</a:t>
+            </a:r>
+          </a:p>
+          <a:p>
+            <a:pPr fontAlgn="base"/>
+            <a:r>
+              <a:rPr lang="en-US" sz="1200" b="0" i="0" kern="1200" dirty="0">
+                <a:solidFill>
+                  <a:schemeClr val="tx1"/>
+                </a:solidFill>
+                <a:effectLst/>
+                <a:latin typeface="+mn-lt"/>
+                <a:ea typeface="+mn-ea"/>
+                <a:cs typeface="+mn-cs"/>
+              </a:rPr>
+              <a:t>Machine learning experiments</a:t>
+            </a:r>
+          </a:p>
+          <a:p>
+            <a:pPr fontAlgn="base"/>
+            <a:r>
+              <a:rPr lang="en-US" sz="1200" b="0" i="0" kern="1200" dirty="0">
+                <a:solidFill>
+                  <a:schemeClr val="tx1"/>
+                </a:solidFill>
+                <a:effectLst/>
+                <a:latin typeface="+mn-lt"/>
+                <a:ea typeface="+mn-ea"/>
+                <a:cs typeface="+mn-cs"/>
+              </a:rPr>
+              <a:t>Business analytics projects</a:t>
+            </a:r>
+          </a:p>
+          <a:p>
+            <a:pPr fontAlgn="base"/>
+            <a:r>
+              <a:rPr lang="en-US" sz="1200" b="0" i="0" kern="1200" dirty="0">
+                <a:solidFill>
+                  <a:schemeClr val="tx1"/>
+                </a:solidFill>
+                <a:effectLst/>
+                <a:latin typeface="+mn-lt"/>
+                <a:ea typeface="+mn-ea"/>
+                <a:cs typeface="+mn-cs"/>
+              </a:rPr>
+              <a:t>AI adoption research</a:t>
+            </a:r>
+          </a:p>
+          <a:p>
+            <a:pPr fontAlgn="base"/>
+            <a:r>
+              <a:rPr lang="en-US" sz="1200" b="0" i="0" kern="1200" dirty="0">
+                <a:solidFill>
+                  <a:schemeClr val="tx1"/>
+                </a:solidFill>
+                <a:effectLst/>
+                <a:latin typeface="+mn-lt"/>
+                <a:ea typeface="+mn-ea"/>
+                <a:cs typeface="+mn-cs"/>
+              </a:rPr>
+              <a:t>The dataset includes multiple related tables designed for relational analysis and scalable analytical workflows.</a:t>
+            </a:r>
+          </a:p>
+          <a:p>
+            <a:endParaRPr lang="en-US" dirty="0"/>
+          </a:p>
+        </p:txBody>
+      </p:sp>
+      <p:sp>
+        <p:nvSpPr>
+          <p:cNvPr id="4" name="Slide Number Placeholder 3"/>
+          <p:cNvSpPr>
+            <a:spLocks noGrp="1"/>
+          </p:cNvSpPr>
+          <p:nvPr>
+            <p:ph type="sldNum" sz="quarter" idx="5"/>
+          </p:nvPr>
+        </p:nvSpPr>
+        <p:spPr/>
+        <p:txBody>
+          <a:bodyPr/>
+          <a:lstStyle/>
+          <a:p>
+            <a:fld id="{EFEC6C8B-BE8F-47B7-AB4D-01360EFA917A}" type="slidenum">
+              <a:rPr lang="en-US" smtClean="0"/>
+              <a:t>3</a:t>
+            </a:fld>
+            <a:endParaRPr lang="en-US"/>
+          </a:p>
+        </p:txBody>
+      </p:sp>
+    </p:spTree>
+    <p:extLst>
+      <p:ext uri="{BB962C8B-B14F-4D97-AF65-F5344CB8AC3E}">
+        <p14:creationId xmlns:p14="http://schemas.microsoft.com/office/powerpoint/2010/main" val="2475338681"/>
+      </p:ext>
+    </p:extLst>
+  </p:cSld>
+  <p:clrMapOvr>
+    <a:masterClrMapping/>
+  </p:clrMapOvr>
+</p:notes>
+</file>
+
+<file path=ppt/notesSlides/notesSlide2.xml><?xml version="1.0" encoding="utf-8"?>
+<p:notes xmlns:a="http://schemas.openxmlformats.org/drawingml/2006/main" xmlns:r="http://schemas.openxmlformats.org/officeDocument/2006/relationships" xmlns:p="http://schemas.openxmlformats.org/presentationml/2006/main">
+  <p:cSld>
+    <p:spTree>
+      <p:nvGrpSpPr>
+        <p:cNvPr id="1" name=""/>
+        <p:cNvGrpSpPr/>
+        <p:nvPr/>
+      </p:nvGrpSpPr>
+      <p:grpSpPr>
+        <a:xfrm>
+          <a:off x="0" y="0"/>
+          <a:ext cx="0" cy="0"/>
+          <a:chOff x="0" y="0"/>
+          <a:chExt cx="0" cy="0"/>
+        </a:xfrm>
+      </p:grpSpPr>
+      <p:sp>
+        <p:nvSpPr>
+          <p:cNvPr id="2" name="Slide Image Placeholder 1"/>
+          <p:cNvSpPr>
+            <a:spLocks noGrp="1" noRot="1" noChangeAspect="1"/>
+          </p:cNvSpPr>
+          <p:nvPr>
+            <p:ph type="sldImg"/>
+          </p:nvPr>
+        </p:nvSpPr>
+        <p:spPr/>
+      </p:sp>
+      <p:sp>
+        <p:nvSpPr>
+          <p:cNvPr id="3" name="Notes Placeholder 2"/>
+          <p:cNvSpPr>
+            <a:spLocks noGrp="1"/>
+          </p:cNvSpPr>
+          <p:nvPr>
+            <p:ph type="body" idx="1"/>
+          </p:nvPr>
+        </p:nvSpPr>
+        <p:spPr/>
+        <p:txBody>
+          <a:bodyPr/>
+          <a:lstStyle/>
+          <a:p>
+            <a:r>
+              <a:rPr lang="en-US" dirty="0"/>
+              <a:t>This initial analysis establishes the AI adoption landscape before evaluating business outcomes. The dataset shows variation across both industries and countries, with Technology and Finance reporting the highest average AI adoption rates. These differences provide important context because adoption alone does not necessarily indicate success. The following analysis evaluates whether higher AI adoption and maturity are associated with measurable outcomes such as productivity improvements, revenue growth, and workforce changes.</a:t>
+            </a:r>
+          </a:p>
+          <a:p>
+            <a:endParaRPr lang="en-US" dirty="0"/>
+          </a:p>
+          <a:p>
+            <a:r>
+              <a:rPr lang="en-US" dirty="0"/>
+              <a:t>The choropleth aggregates company-level survey responses into country-level averages. Each country's color represents the mean AI adoption rate reported by organizations located in that country, allowing comparison of AI adoption intensity independent of the number of surveyed companies.</a:t>
+            </a:r>
+          </a:p>
+          <a:p>
+            <a:r>
+              <a:rPr lang="en-US" dirty="0"/>
+              <a:t>Shading represents the average AI adoption rate of organizations in that country, not the total number of AI companies</a:t>
+            </a:r>
+          </a:p>
+          <a:p>
+            <a:r>
+              <a:rPr lang="en-US" dirty="0"/>
+              <a:t>Study includes 30 countries and 9 industries</a:t>
+            </a:r>
+          </a:p>
+          <a:p>
+            <a:endParaRPr lang="en-US" dirty="0"/>
+          </a:p>
+          <a:p>
+            <a:r>
+              <a:rPr lang="en-US" dirty="0"/>
+              <a:t>Geographic lens → where surveyed companies show higher adoption rates</a:t>
+            </a:r>
+          </a:p>
+          <a:p>
+            <a:r>
+              <a:rPr lang="en-US" dirty="0"/>
+              <a:t> Industry lens → which sectors show higher adoption rates</a:t>
+            </a:r>
+          </a:p>
+        </p:txBody>
+      </p:sp>
+      <p:sp>
+        <p:nvSpPr>
+          <p:cNvPr id="4" name="Slide Number Placeholder 3"/>
+          <p:cNvSpPr>
+            <a:spLocks noGrp="1"/>
+          </p:cNvSpPr>
+          <p:nvPr>
+            <p:ph type="sldNum" sz="quarter" idx="5"/>
+          </p:nvPr>
+        </p:nvSpPr>
+        <p:spPr/>
+        <p:txBody>
+          <a:bodyPr/>
+          <a:lstStyle/>
+          <a:p>
+            <a:fld id="{EFEC6C8B-BE8F-47B7-AB4D-01360EFA917A}" type="slidenum">
+              <a:rPr lang="en-US" smtClean="0"/>
+              <a:t>4</a:t>
+            </a:fld>
+            <a:endParaRPr lang="en-US"/>
+          </a:p>
+        </p:txBody>
+      </p:sp>
+    </p:spTree>
+    <p:extLst>
+      <p:ext uri="{BB962C8B-B14F-4D97-AF65-F5344CB8AC3E}">
+        <p14:creationId xmlns:p14="http://schemas.microsoft.com/office/powerpoint/2010/main" val="523487621"/>
+      </p:ext>
+    </p:extLst>
+  </p:cSld>
+  <p:clrMapOvr>
+    <a:masterClrMapping/>
+  </p:clrMapOvr>
+</p:notes>
+</file>
+
+<file path=ppt/notesSlides/notesSlide3.xml><?xml version="1.0" encoding="utf-8"?>
+<p:notes xmlns:a="http://schemas.openxmlformats.org/drawingml/2006/main" xmlns:r="http://schemas.openxmlformats.org/officeDocument/2006/relationships" xmlns:p="http://schemas.openxmlformats.org/presentationml/2006/main">
+  <p:cSld>
+    <p:spTree>
+      <p:nvGrpSpPr>
+        <p:cNvPr id="1" name=""/>
+        <p:cNvGrpSpPr/>
+        <p:nvPr/>
+      </p:nvGrpSpPr>
+      <p:grpSpPr>
+        <a:xfrm>
+          <a:off x="0" y="0"/>
+          <a:ext cx="0" cy="0"/>
+          <a:chOff x="0" y="0"/>
+          <a:chExt cx="0" cy="0"/>
+        </a:xfrm>
+      </p:grpSpPr>
+      <p:sp>
+        <p:nvSpPr>
+          <p:cNvPr id="2" name="Slide Image Placeholder 1"/>
+          <p:cNvSpPr>
+            <a:spLocks noGrp="1" noRot="1" noChangeAspect="1"/>
+          </p:cNvSpPr>
+          <p:nvPr>
+            <p:ph type="sldImg"/>
+          </p:nvPr>
+        </p:nvSpPr>
+        <p:spPr/>
+      </p:sp>
+      <p:sp>
+        <p:nvSpPr>
+          <p:cNvPr id="3" name="Notes Placeholder 2"/>
+          <p:cNvSpPr>
+            <a:spLocks noGrp="1"/>
+          </p:cNvSpPr>
+          <p:nvPr>
+            <p:ph type="body" idx="1"/>
+          </p:nvPr>
+        </p:nvSpPr>
+        <p:spPr/>
+        <p:txBody>
+          <a:bodyPr/>
+          <a:lstStyle/>
+          <a:p>
+            <a:pPr marL="0" marR="0" lvl="0" indent="0" algn="l" defTabSz="914400" rtl="0" eaLnBrk="1" fontAlgn="auto" latinLnBrk="0" hangingPunct="1">
+              <a:lnSpc>
+                <a:spcPct val="100000"/>
+              </a:lnSpc>
+              <a:spcBef>
+                <a:spcPts val="0"/>
+              </a:spcBef>
+              <a:spcAft>
+                <a:spcPts val="0"/>
+              </a:spcAft>
+              <a:buClrTx/>
+              <a:buSzTx/>
+              <a:buFontTx/>
+              <a:buNone/>
+              <a:tabLst/>
+              <a:defRPr/>
+            </a:pPr>
+            <a:r>
+              <a:rPr lang="en-US" sz="1200" kern="1200" dirty="0">
+                <a:solidFill>
+                  <a:schemeClr val="tx1"/>
+                </a:solidFill>
+                <a:latin typeface="+mn-lt"/>
+                <a:ea typeface="+mn-ea"/>
+                <a:cs typeface="+mn-cs"/>
+              </a:rPr>
+              <a:t>Key Finding: AI maturity was strongly associated with improved business outcomes. </a:t>
+            </a:r>
+          </a:p>
+          <a:p>
+            <a:endParaRPr lang="en-US" dirty="0"/>
+          </a:p>
+        </p:txBody>
+      </p:sp>
+      <p:sp>
+        <p:nvSpPr>
+          <p:cNvPr id="4" name="Slide Number Placeholder 3"/>
+          <p:cNvSpPr>
+            <a:spLocks noGrp="1"/>
+          </p:cNvSpPr>
+          <p:nvPr>
+            <p:ph type="sldNum" sz="quarter" idx="5"/>
+          </p:nvPr>
+        </p:nvSpPr>
+        <p:spPr/>
+        <p:txBody>
+          <a:bodyPr/>
+          <a:lstStyle/>
+          <a:p>
+            <a:fld id="{EFEC6C8B-BE8F-47B7-AB4D-01360EFA917A}" type="slidenum">
+              <a:rPr lang="en-US" smtClean="0"/>
+              <a:t>5</a:t>
+            </a:fld>
+            <a:endParaRPr lang="en-US"/>
+          </a:p>
+        </p:txBody>
+      </p:sp>
+    </p:spTree>
+    <p:extLst>
+      <p:ext uri="{BB962C8B-B14F-4D97-AF65-F5344CB8AC3E}">
+        <p14:creationId xmlns:p14="http://schemas.microsoft.com/office/powerpoint/2010/main" val="4196799841"/>
+      </p:ext>
+    </p:extLst>
+  </p:cSld>
+  <p:clrMapOvr>
+    <a:masterClrMapping/>
+  </p:clrMapOvr>
+</p:notes>
 </file>
 
 <file path=ppt/slideLayouts/slideLayout1.xml><?xml version="1.0" encoding="utf-8"?>
@@ -3314,6 +4197,14 @@
 <file path=ppt/slides/slide1.xml><?xml version="1.0" encoding="utf-8"?>
 <p:sld xmlns:a="http://schemas.openxmlformats.org/drawingml/2006/main" xmlns:r="http://schemas.openxmlformats.org/officeDocument/2006/relationships" xmlns:p="http://schemas.openxmlformats.org/presentationml/2006/main">
   <p:cSld>
+    <p:bg>
+      <p:bgPr>
+        <a:solidFill>
+          <a:schemeClr val="bg1"/>
+        </a:solidFill>
+        <a:effectLst/>
+      </p:bgPr>
+    </p:bg>
     <p:spTree>
       <p:nvGrpSpPr>
         <p:cNvPr id="1" name=""/>
@@ -3328,6 +4219,183 @@
           <a:chExt cx="0" cy="0"/>
         </a:xfrm>
       </p:grpSpPr>
+      <p:sp useBgFill="1">
+        <p:nvSpPr>
+          <p:cNvPr id="32" name="Rectangle 31">
+            <a:extLst>
+              <a:ext uri="{FF2B5EF4-FFF2-40B4-BE49-F238E27FC236}">
+                <a16:creationId xmlns:a16="http://schemas.microsoft.com/office/drawing/2014/main" id="{ECC07320-C2CA-4E29-8481-9D9E143C7788}"/>
+              </a:ext>
+              <a:ext uri="{C183D7F6-B498-43B3-948B-1728B52AA6E4}">
+                <adec:decorative xmlns:adec="http://schemas.microsoft.com/office/drawing/2017/decorative" val="1"/>
+              </a:ext>
+            </a:extLst>
+          </p:cNvPr>
+          <p:cNvSpPr>
+            <a:spLocks noGrp="1" noRot="1" noChangeAspect="1" noMove="1" noResize="1" noEditPoints="1" noAdjustHandles="1" noChangeArrowheads="1" noChangeShapeType="1" noTextEdit="1"/>
+          </p:cNvSpPr>
+          <p:nvPr>
+            <p:extLst>
+              <p:ext uri="{386F3935-93C4-4BCD-93E2-E3B085C9AB24}">
+                <p16:designElem xmlns:p16="http://schemas.microsoft.com/office/powerpoint/2015/main" val="1"/>
+              </p:ext>
+            </p:extLst>
+          </p:nvPr>
+        </p:nvSpPr>
+        <p:spPr>
+          <a:xfrm>
+            <a:off x="-1" y="0"/>
+            <a:ext cx="12188952" cy="6858000"/>
+          </a:xfrm>
+          <a:prstGeom prst="rect">
+            <a:avLst/>
+          </a:prstGeom>
+          <a:ln>
+            <a:noFill/>
+          </a:ln>
+        </p:spPr>
+        <p:style>
+          <a:lnRef idx="2">
+            <a:schemeClr val="accent1">
+              <a:shade val="50000"/>
+            </a:schemeClr>
+          </a:lnRef>
+          <a:fillRef idx="1">
+            <a:schemeClr val="accent1"/>
+          </a:fillRef>
+          <a:effectRef idx="0">
+            <a:schemeClr val="accent1"/>
+          </a:effectRef>
+          <a:fontRef idx="minor">
+            <a:schemeClr val="lt1"/>
+          </a:fontRef>
+        </p:style>
+        <p:txBody>
+          <a:bodyPr rtlCol="0" anchor="ctr"/>
+          <a:lstStyle/>
+          <a:p>
+            <a:pPr algn="ctr"/>
+            <a:endParaRPr lang="en-US"/>
+          </a:p>
+        </p:txBody>
+      </p:sp>
+      <p:pic>
+        <p:nvPicPr>
+          <p:cNvPr id="14" name="Picture 13" descr="Digital map with light leak background">
+            <a:extLst>
+              <a:ext uri="{FF2B5EF4-FFF2-40B4-BE49-F238E27FC236}">
+                <a16:creationId xmlns:a16="http://schemas.microsoft.com/office/drawing/2014/main" id="{251DEF39-0BA0-63B0-7596-4B7CBF670F41}"/>
+              </a:ext>
+            </a:extLst>
+          </p:cNvPr>
+          <p:cNvPicPr>
+            <a:picLocks noChangeAspect="1"/>
+          </p:cNvPicPr>
+          <p:nvPr/>
+        </p:nvPicPr>
+        <p:blipFill>
+          <a:blip r:embed="rId2"/>
+          <a:srcRect l="2942" r="2941" b="-1"/>
+          <a:stretch>
+            <a:fillRect/>
+          </a:stretch>
+        </p:blipFill>
+        <p:spPr>
+          <a:xfrm>
+            <a:off x="2522358" y="10"/>
+            <a:ext cx="9669642" cy="6857990"/>
+          </a:xfrm>
+          <a:prstGeom prst="rect">
+            <a:avLst/>
+          </a:prstGeom>
+        </p:spPr>
+      </p:pic>
+      <p:sp>
+        <p:nvSpPr>
+          <p:cNvPr id="60" name="Rectangle 59">
+            <a:extLst>
+              <a:ext uri="{FF2B5EF4-FFF2-40B4-BE49-F238E27FC236}">
+                <a16:creationId xmlns:a16="http://schemas.microsoft.com/office/drawing/2014/main" id="{178FB36B-5BFE-42CA-BC60-1115E0D95EEC}"/>
+              </a:ext>
+              <a:ext uri="{C183D7F6-B498-43B3-948B-1728B52AA6E4}">
+                <adec:decorative xmlns:adec="http://schemas.microsoft.com/office/drawing/2017/decorative" val="1"/>
+              </a:ext>
+            </a:extLst>
+          </p:cNvPr>
+          <p:cNvSpPr>
+            <a:spLocks noGrp="1" noRot="1" noChangeAspect="1" noMove="1" noResize="1" noEditPoints="1" noAdjustHandles="1" noChangeArrowheads="1" noChangeShapeType="1" noTextEdit="1"/>
+          </p:cNvSpPr>
+          <p:nvPr>
+            <p:extLst>
+              <p:ext uri="{386F3935-93C4-4BCD-93E2-E3B085C9AB24}">
+                <p16:designElem xmlns:p16="http://schemas.microsoft.com/office/powerpoint/2015/main" val="1"/>
+              </p:ext>
+            </p:extLst>
+          </p:nvPr>
+        </p:nvSpPr>
+        <p:spPr>
+          <a:xfrm>
+            <a:off x="0" y="0"/>
+            <a:ext cx="7066978" cy="6858000"/>
+          </a:xfrm>
+          <a:prstGeom prst="rect">
+            <a:avLst/>
+          </a:prstGeom>
+          <a:gradFill>
+            <a:gsLst>
+              <a:gs pos="48000">
+                <a:schemeClr val="bg1"/>
+              </a:gs>
+              <a:gs pos="35000">
+                <a:schemeClr val="bg1">
+                  <a:alpha val="77000"/>
+                </a:schemeClr>
+              </a:gs>
+              <a:gs pos="19000">
+                <a:schemeClr val="bg1">
+                  <a:alpha val="38000"/>
+                </a:schemeClr>
+              </a:gs>
+              <a:gs pos="0">
+                <a:schemeClr val="bg1">
+                  <a:alpha val="0"/>
+                </a:schemeClr>
+              </a:gs>
+              <a:gs pos="100000">
+                <a:schemeClr val="bg1"/>
+              </a:gs>
+            </a:gsLst>
+            <a:lin ang="10800000" scaled="0"/>
+          </a:gradFill>
+          <a:ln>
+            <a:noFill/>
+          </a:ln>
+        </p:spPr>
+        <p:style>
+          <a:lnRef idx="2">
+            <a:schemeClr val="accent1">
+              <a:shade val="50000"/>
+            </a:schemeClr>
+          </a:lnRef>
+          <a:fillRef idx="1">
+            <a:schemeClr val="accent1"/>
+          </a:fillRef>
+          <a:effectRef idx="0">
+            <a:schemeClr val="accent1"/>
+          </a:effectRef>
+          <a:fontRef idx="minor">
+            <a:schemeClr val="lt1"/>
+          </a:fontRef>
+        </p:style>
+        <p:txBody>
+          <a:bodyPr rtlCol="0" anchor="ctr"/>
+          <a:lstStyle/>
+          <a:p>
+            <a:pPr algn="ctr"/>
+            <a:endParaRPr lang="en-US" dirty="0"/>
+          </a:p>
+        </p:txBody>
+      </p:sp>
       <p:sp>
         <p:nvSpPr>
           <p:cNvPr id="2" name="Title 1">
@@ -3344,21 +4412,28 @@
             <p:ph type="ctrTitle"/>
           </p:nvPr>
         </p:nvSpPr>
-        <p:spPr/>
+        <p:spPr>
+          <a:xfrm>
+            <a:off x="952228" y="743447"/>
+            <a:ext cx="3973385" cy="3692028"/>
+          </a:xfrm>
+          <a:noFill/>
+        </p:spPr>
         <p:txBody>
           <a:bodyPr>
-            <a:normAutofit fontScale="90000"/>
+            <a:normAutofit/>
           </a:bodyPr>
           <a:lstStyle/>
           <a:p>
-            <a:r>
-              <a:rPr lang="en-US" b="1" dirty="0"/>
-              <a:t>Global AI Adoption &amp; Workforce Impact Dataset</a:t>
+            <a:pPr algn="l"/>
+            <a:r>
+              <a:rPr lang="en-US" sz="4000" b="1"/>
+              <a:t>Global AI Adoption &amp; Workforce Impact Analysis</a:t>
             </a:r>
             <a:br>
-              <a:rPr lang="en-US" b="1" dirty="0"/>
+              <a:rPr lang="en-US" sz="4000" b="1"/>
             </a:br>
-            <a:endParaRPr lang="en-US" dirty="0"/>
+            <a:endParaRPr lang="en-US" sz="4000"/>
           </a:p>
         </p:txBody>
       </p:sp>
@@ -3378,18 +4453,37 @@
             <p:ph type="subTitle" idx="1"/>
           </p:nvPr>
         </p:nvSpPr>
-        <p:spPr/>
-        <p:txBody>
-          <a:bodyPr/>
-          <a:lstStyle/>
-          <a:p>
-            <a:r>
-              <a:rPr lang="en-US" dirty="0" err="1"/>
-              <a:t>Surpa</a:t>
-            </a:r>
-            <a:r>
-              <a:rPr lang="en-US" dirty="0"/>
-              <a:t> Coder DDI Apr2026 Cohort</a:t>
+        <p:spPr>
+          <a:xfrm>
+            <a:off x="952229" y="4629234"/>
+            <a:ext cx="3973386" cy="1485319"/>
+          </a:xfrm>
+          <a:noFill/>
+        </p:spPr>
+        <p:txBody>
+          <a:bodyPr>
+            <a:normAutofit/>
+          </a:bodyPr>
+          <a:lstStyle/>
+          <a:p>
+            <a:pPr algn="l"/>
+            <a:r>
+              <a:rPr lang="en-US" sz="2000" dirty="0"/>
+              <a:t>Sara Shockley</a:t>
+            </a:r>
+          </a:p>
+          <a:p>
+            <a:pPr algn="l"/>
+            <a:r>
+              <a:rPr lang="en-US" sz="2000" dirty="0"/>
+              <a:t>Supra Coder DDI Apr2026 Cohort</a:t>
+            </a:r>
+          </a:p>
+          <a:p>
+            <a:pPr algn="l"/>
+            <a:r>
+              <a:rPr lang="en-US" sz="2000" dirty="0"/>
+              <a:t>CAO: 09JUN26</a:t>
             </a:r>
           </a:p>
         </p:txBody>
@@ -3404,12 +4498,259 @@
   <p:clrMapOvr>
     <a:masterClrMapping/>
   </p:clrMapOvr>
+  <p:timing>
+    <p:tnLst>
+      <p:par>
+        <p:cTn id="1" dur="indefinite" restart="never" nodeType="tmRoot">
+          <p:childTnLst>
+            <p:seq concurrent="1" nextAc="seek">
+              <p:cTn id="2" dur="indefinite" nodeType="mainSeq">
+                <p:childTnLst>
+                  <p:par>
+                    <p:cTn id="3" fill="hold">
+                      <p:stCondLst>
+                        <p:cond delay="indefinite"/>
+                        <p:cond evt="onBegin" delay="0">
+                          <p:tn val="2"/>
+                        </p:cond>
+                      </p:stCondLst>
+                      <p:childTnLst>
+                        <p:par>
+                          <p:cTn id="4" fill="hold">
+                            <p:stCondLst>
+                              <p:cond delay="0"/>
+                            </p:stCondLst>
+                            <p:childTnLst>
+                              <p:par>
+                                <p:cTn id="5" presetID="10" presetClass="entr" presetSubtype="0" fill="hold" grpId="0" nodeType="withEffect">
+                                  <p:stCondLst>
+                                    <p:cond delay="1000"/>
+                                  </p:stCondLst>
+                                  <p:iterate type="lt">
+                                    <p:tmPct val="10000"/>
+                                  </p:iterate>
+                                  <p:childTnLst>
+                                    <p:set>
+                                      <p:cBhvr>
+                                        <p:cTn id="6" dur="1" fill="hold">
+                                          <p:stCondLst>
+                                            <p:cond delay="0"/>
+                                          </p:stCondLst>
+                                        </p:cTn>
+                                        <p:tgtEl>
+                                          <p:spTgt spid="2"/>
+                                        </p:tgtEl>
+                                        <p:attrNameLst>
+                                          <p:attrName>style.visibility</p:attrName>
+                                        </p:attrNameLst>
+                                      </p:cBhvr>
+                                      <p:to>
+                                        <p:strVal val="visible"/>
+                                      </p:to>
+                                    </p:set>
+                                    <p:animEffect transition="in" filter="fade">
+                                      <p:cBhvr>
+                                        <p:cTn id="7" dur="400"/>
+                                        <p:tgtEl>
+                                          <p:spTgt spid="2"/>
+                                        </p:tgtEl>
+                                      </p:cBhvr>
+                                    </p:animEffect>
+                                  </p:childTnLst>
+                                </p:cTn>
+                              </p:par>
+                            </p:childTnLst>
+                          </p:cTn>
+                        </p:par>
+                      </p:childTnLst>
+                    </p:cTn>
+                  </p:par>
+                  <p:par>
+                    <p:cTn id="8" fill="hold">
+                      <p:stCondLst>
+                        <p:cond delay="indefinite"/>
+                      </p:stCondLst>
+                      <p:childTnLst>
+                        <p:par>
+                          <p:cTn id="9" fill="hold">
+                            <p:stCondLst>
+                              <p:cond delay="0"/>
+                            </p:stCondLst>
+                            <p:childTnLst>
+                              <p:par>
+                                <p:cTn id="10" presetID="10" presetClass="entr" presetSubtype="0" fill="hold" nodeType="clickEffect">
+                                  <p:stCondLst>
+                                    <p:cond delay="0"/>
+                                  </p:stCondLst>
+                                  <p:childTnLst>
+                                    <p:set>
+                                      <p:cBhvr>
+                                        <p:cTn id="11" dur="1" fill="hold">
+                                          <p:stCondLst>
+                                            <p:cond delay="0"/>
+                                          </p:stCondLst>
+                                        </p:cTn>
+                                        <p:tgtEl>
+                                          <p:spTgt spid="3">
+                                            <p:txEl>
+                                              <p:pRg st="0" end="0"/>
+                                            </p:txEl>
+                                          </p:spTgt>
+                                        </p:tgtEl>
+                                        <p:attrNameLst>
+                                          <p:attrName>style.visibility</p:attrName>
+                                        </p:attrNameLst>
+                                      </p:cBhvr>
+                                      <p:to>
+                                        <p:strVal val="visible"/>
+                                      </p:to>
+                                    </p:set>
+                                    <p:animEffect transition="in" filter="fade">
+                                      <p:cBhvr>
+                                        <p:cTn id="12" dur="500"/>
+                                        <p:tgtEl>
+                                          <p:spTgt spid="3">
+                                            <p:txEl>
+                                              <p:pRg st="0" end="0"/>
+                                            </p:txEl>
+                                          </p:spTgt>
+                                        </p:tgtEl>
+                                      </p:cBhvr>
+                                    </p:animEffect>
+                                  </p:childTnLst>
+                                </p:cTn>
+                              </p:par>
+                              <p:par>
+                                <p:cTn id="13" presetID="10" presetClass="entr" presetSubtype="0" fill="hold" nodeType="withEffect">
+                                  <p:stCondLst>
+                                    <p:cond delay="0"/>
+                                  </p:stCondLst>
+                                  <p:childTnLst>
+                                    <p:set>
+                                      <p:cBhvr>
+                                        <p:cTn id="14" dur="1" fill="hold">
+                                          <p:stCondLst>
+                                            <p:cond delay="0"/>
+                                          </p:stCondLst>
+                                        </p:cTn>
+                                        <p:tgtEl>
+                                          <p:spTgt spid="3">
+                                            <p:txEl>
+                                              <p:pRg st="1" end="1"/>
+                                            </p:txEl>
+                                          </p:spTgt>
+                                        </p:tgtEl>
+                                        <p:attrNameLst>
+                                          <p:attrName>style.visibility</p:attrName>
+                                        </p:attrNameLst>
+                                      </p:cBhvr>
+                                      <p:to>
+                                        <p:strVal val="visible"/>
+                                      </p:to>
+                                    </p:set>
+                                    <p:animEffect transition="in" filter="fade">
+                                      <p:cBhvr>
+                                        <p:cTn id="15" dur="500"/>
+                                        <p:tgtEl>
+                                          <p:spTgt spid="3">
+                                            <p:txEl>
+                                              <p:pRg st="1" end="1"/>
+                                            </p:txEl>
+                                          </p:spTgt>
+                                        </p:tgtEl>
+                                      </p:cBhvr>
+                                    </p:animEffect>
+                                  </p:childTnLst>
+                                </p:cTn>
+                              </p:par>
+                              <p:par>
+                                <p:cTn id="16" presetID="10" presetClass="entr" presetSubtype="0" fill="hold" nodeType="withEffect">
+                                  <p:stCondLst>
+                                    <p:cond delay="0"/>
+                                  </p:stCondLst>
+                                  <p:childTnLst>
+                                    <p:set>
+                                      <p:cBhvr>
+                                        <p:cTn id="17" dur="1" fill="hold">
+                                          <p:stCondLst>
+                                            <p:cond delay="0"/>
+                                          </p:stCondLst>
+                                        </p:cTn>
+                                        <p:tgtEl>
+                                          <p:spTgt spid="3">
+                                            <p:txEl>
+                                              <p:pRg st="2" end="2"/>
+                                            </p:txEl>
+                                          </p:spTgt>
+                                        </p:tgtEl>
+                                        <p:attrNameLst>
+                                          <p:attrName>style.visibility</p:attrName>
+                                        </p:attrNameLst>
+                                      </p:cBhvr>
+                                      <p:to>
+                                        <p:strVal val="visible"/>
+                                      </p:to>
+                                    </p:set>
+                                    <p:animEffect transition="in" filter="fade">
+                                      <p:cBhvr>
+                                        <p:cTn id="18" dur="500"/>
+                                        <p:tgtEl>
+                                          <p:spTgt spid="3">
+                                            <p:txEl>
+                                              <p:pRg st="2" end="2"/>
+                                            </p:txEl>
+                                          </p:spTgt>
+                                        </p:tgtEl>
+                                      </p:cBhvr>
+                                    </p:animEffect>
+                                  </p:childTnLst>
+                                </p:cTn>
+                              </p:par>
+                            </p:childTnLst>
+                          </p:cTn>
+                        </p:par>
+                      </p:childTnLst>
+                    </p:cTn>
+                  </p:par>
+                </p:childTnLst>
+              </p:cTn>
+              <p:prevCondLst>
+                <p:cond evt="onPrev" delay="0">
+                  <p:tgtEl>
+                    <p:sldTgt/>
+                  </p:tgtEl>
+                </p:cond>
+              </p:prevCondLst>
+              <p:nextCondLst>
+                <p:cond evt="onNext" delay="0">
+                  <p:tgtEl>
+                    <p:sldTgt/>
+                  </p:tgtEl>
+                </p:cond>
+              </p:nextCondLst>
+            </p:seq>
+          </p:childTnLst>
+        </p:cTn>
+      </p:par>
+    </p:tnLst>
+    <p:bldLst>
+      <p:bldP spid="2" grpId="0"/>
+    </p:bldLst>
+  </p:timing>
 </p:sld>
 </file>
 
 <file path=ppt/slides/slide2.xml><?xml version="1.0" encoding="utf-8"?>
 <p:sld xmlns:a="http://schemas.openxmlformats.org/drawingml/2006/main" xmlns:r="http://schemas.openxmlformats.org/officeDocument/2006/relationships" xmlns:p="http://schemas.openxmlformats.org/presentationml/2006/main">
   <p:cSld>
+    <p:bg>
+      <p:bgPr>
+        <a:solidFill>
+          <a:schemeClr val="bg1"/>
+        </a:solidFill>
+        <a:effectLst/>
+      </p:bgPr>
+    </p:bg>
     <p:spTree>
       <p:nvGrpSpPr>
         <p:cNvPr id="1" name=""/>
@@ -3424,6 +4765,66 @@
           <a:chExt cx="0" cy="0"/>
         </a:xfrm>
       </p:grpSpPr>
+      <p:sp useBgFill="1">
+        <p:nvSpPr>
+          <p:cNvPr id="27" name="Rectangle 26">
+            <a:extLst>
+              <a:ext uri="{FF2B5EF4-FFF2-40B4-BE49-F238E27FC236}">
+                <a16:creationId xmlns:a16="http://schemas.microsoft.com/office/drawing/2014/main" id="{5D7F64A8-D625-4F61-A290-B499BB62ACFF}"/>
+              </a:ext>
+              <a:ext uri="{C183D7F6-B498-43B3-948B-1728B52AA6E4}">
+                <adec:decorative xmlns:adec="http://schemas.microsoft.com/office/drawing/2017/decorative" val="1"/>
+              </a:ext>
+            </a:extLst>
+          </p:cNvPr>
+          <p:cNvSpPr>
+            <a:spLocks noGrp="1" noRot="1" noChangeAspect="1" noMove="1" noResize="1" noEditPoints="1" noAdjustHandles="1" noChangeArrowheads="1" noChangeShapeType="1" noTextEdit="1"/>
+          </p:cNvSpPr>
+          <p:nvPr>
+            <p:extLst>
+              <p:ext uri="{386F3935-93C4-4BCD-93E2-E3B085C9AB24}">
+                <p16:designElem xmlns:p16="http://schemas.microsoft.com/office/powerpoint/2015/main" val="1"/>
+              </p:ext>
+            </p:extLst>
+          </p:nvPr>
+        </p:nvSpPr>
+        <p:spPr>
+          <a:xfrm>
+            <a:off x="0" y="0"/>
+            <a:ext cx="12188952" cy="6858000"/>
+          </a:xfrm>
+          <a:prstGeom prst="rect">
+            <a:avLst/>
+          </a:prstGeom>
+          <a:ln>
+            <a:noFill/>
+          </a:ln>
+        </p:spPr>
+        <p:style>
+          <a:lnRef idx="2">
+            <a:schemeClr val="accent1">
+              <a:shade val="50000"/>
+            </a:schemeClr>
+          </a:lnRef>
+          <a:fillRef idx="1">
+            <a:schemeClr val="accent1"/>
+          </a:fillRef>
+          <a:effectRef idx="0">
+            <a:schemeClr val="accent1"/>
+          </a:effectRef>
+          <a:fontRef idx="minor">
+            <a:schemeClr val="lt1"/>
+          </a:fontRef>
+        </p:style>
+        <p:txBody>
+          <a:bodyPr rtlCol="0" anchor="ctr"/>
+          <a:lstStyle/>
+          <a:p>
+            <a:pPr algn="ctr"/>
+            <a:endParaRPr lang="en-US"/>
+          </a:p>
+        </p:txBody>
+      </p:sp>
       <p:sp>
         <p:nvSpPr>
           <p:cNvPr id="2" name="Title 1">
@@ -3440,18 +4841,64 @@
             <p:ph type="title"/>
           </p:nvPr>
         </p:nvSpPr>
-        <p:spPr/>
-        <p:txBody>
-          <a:bodyPr/>
-          <a:lstStyle/>
-          <a:p>
-            <a:r>
-              <a:rPr lang="en-US" dirty="0"/>
-              <a:t>Overview</a:t>
-            </a:r>
-          </a:p>
-        </p:txBody>
-      </p:sp>
+        <p:spPr>
+          <a:xfrm>
+            <a:off x="2187363" y="1671569"/>
+            <a:ext cx="5801917" cy="2228760"/>
+          </a:xfrm>
+        </p:spPr>
+        <p:txBody>
+          <a:bodyPr anchor="b">
+            <a:normAutofit/>
+          </a:bodyPr>
+          <a:lstStyle/>
+          <a:p>
+            <a:r>
+              <a:rPr lang="en-US" sz="4000"/>
+              <a:t>Contents</a:t>
+            </a:r>
+          </a:p>
+        </p:txBody>
+      </p:sp>
+      <p:pic>
+        <p:nvPicPr>
+          <p:cNvPr id="22" name="Graphic 21" descr="Head with Gears">
+            <a:extLst>
+              <a:ext uri="{FF2B5EF4-FFF2-40B4-BE49-F238E27FC236}">
+                <a16:creationId xmlns:a16="http://schemas.microsoft.com/office/drawing/2014/main" id="{26EDC712-8DA1-0CC3-05E7-CD13A60AE68E}"/>
+              </a:ext>
+            </a:extLst>
+          </p:cNvPr>
+          <p:cNvPicPr>
+            <a:picLocks noChangeAspect="1"/>
+          </p:cNvPicPr>
+          <p:nvPr/>
+        </p:nvPicPr>
+        <p:blipFill>
+          <a:blip>
+            <a:extLst>
+              <a:ext uri="{28A0092B-C50C-407E-A947-70E740481C1C}">
+                <a14:useLocalDpi xmlns:a14="http://schemas.microsoft.com/office/drawing/2010/main" val="0"/>
+              </a:ext>
+              <a:ext uri="{96DAC541-7B7A-43D3-8B79-37D633B846F1}">
+                <asvg:svgBlip xmlns:asvg="http://schemas.microsoft.com/office/drawing/2016/SVG/main" r:embed="rId2"/>
+              </a:ext>
+            </a:extLst>
+          </a:blip>
+          <a:stretch>
+            <a:fillRect/>
+          </a:stretch>
+        </p:blipFill>
+        <p:spPr>
+          <a:xfrm>
+            <a:off x="736948" y="2694018"/>
+            <a:ext cx="1198532" cy="1198532"/>
+          </a:xfrm>
+          <a:prstGeom prst="rect">
+            <a:avLst/>
+          </a:prstGeom>
+        </p:spPr>
+      </p:pic>
       <p:sp>
         <p:nvSpPr>
           <p:cNvPr id="3" name="Content Placeholder 2">
@@ -3468,36 +4915,104 @@
             <p:ph idx="1"/>
           </p:nvPr>
         </p:nvSpPr>
-        <p:spPr/>
-        <p:txBody>
-          <a:bodyPr/>
-          <a:lstStyle/>
-          <a:p>
-            <a:r>
-              <a:rPr lang="en-US" dirty="0"/>
-              <a:t>Study Summary</a:t>
-            </a:r>
-          </a:p>
-          <a:p>
-            <a:r>
-              <a:rPr lang="en-US" dirty="0"/>
-              <a:t>AI Adoption Data Distribution Summary</a:t>
-            </a:r>
-          </a:p>
-          <a:p>
-            <a:r>
-              <a:rPr lang="en-US" dirty="0"/>
-              <a:t>Results</a:t>
-            </a:r>
-          </a:p>
-          <a:p>
-            <a:endParaRPr lang="en-US" dirty="0"/>
-          </a:p>
-          <a:p>
-            <a:endParaRPr lang="en-US" dirty="0"/>
-          </a:p>
-        </p:txBody>
-      </p:sp>
+        <p:spPr>
+          <a:xfrm>
+            <a:off x="2187364" y="4072044"/>
+            <a:ext cx="5801917" cy="2057045"/>
+          </a:xfrm>
+        </p:spPr>
+        <p:txBody>
+          <a:bodyPr>
+            <a:normAutofit/>
+          </a:bodyPr>
+          <a:lstStyle/>
+          <a:p>
+            <a:r>
+              <a:rPr lang="en-US" sz="2000" dirty="0"/>
+              <a:t>Study Overview</a:t>
+            </a:r>
+          </a:p>
+          <a:p>
+            <a:r>
+              <a:rPr lang="en-US" sz="2000" dirty="0"/>
+              <a:t>AI Adoption Landscape</a:t>
+            </a:r>
+          </a:p>
+          <a:p>
+            <a:r>
+              <a:rPr lang="en-US" sz="2000" dirty="0"/>
+              <a:t>AI Maturity &amp; Business Outcomes</a:t>
+            </a:r>
+          </a:p>
+          <a:p>
+            <a:r>
+              <a:rPr lang="en-US" sz="2000" dirty="0"/>
+              <a:t>Workforce Impacts</a:t>
+            </a:r>
+          </a:p>
+          <a:p>
+            <a:r>
+              <a:rPr lang="en-US" sz="2000" dirty="0"/>
+              <a:t>Recommendations and Way Forward</a:t>
+            </a:r>
+          </a:p>
+          <a:p>
+            <a:endParaRPr lang="en-US" sz="2000" dirty="0"/>
+          </a:p>
+          <a:p>
+            <a:endParaRPr lang="en-US" sz="2000" dirty="0"/>
+          </a:p>
+        </p:txBody>
+      </p:sp>
+      <p:pic>
+        <p:nvPicPr>
+          <p:cNvPr id="24" name="Graphic 23" descr="Head with Gears">
+            <a:extLst>
+              <a:ext uri="{FF2B5EF4-FFF2-40B4-BE49-F238E27FC236}">
+                <a16:creationId xmlns:a16="http://schemas.microsoft.com/office/drawing/2014/main" id="{BAFE4073-8B51-4CBE-81BD-34981FCC96AD}"/>
+              </a:ext>
+              <a:ext uri="{C183D7F6-B498-43B3-948B-1728B52AA6E4}">
+                <adec:decorative xmlns:adec="http://schemas.microsoft.com/office/drawing/2017/decorative" val="1"/>
+              </a:ext>
+            </a:extLst>
+          </p:cNvPr>
+          <p:cNvPicPr>
+            <a:picLocks noGrp="1" noRot="1" noChangeAspect="1" noMove="1" noResize="1" noEditPoints="1" noAdjustHandles="1" noChangeArrowheads="1" noChangeShapeType="1" noCrop="1"/>
+          </p:cNvPicPr>
+          <p:nvPr>
+            <p:extLst>
+              <p:ext uri="{386F3935-93C4-4BCD-93E2-E3B085C9AB24}">
+                <p16:designElem xmlns:p16="http://schemas.microsoft.com/office/powerpoint/2015/main" val="1"/>
+              </p:ext>
+            </p:extLst>
+          </p:nvPr>
+        </p:nvPicPr>
+        <p:blipFill>
+          <a:blip>
+            <a:alphaModFix amt="15000"/>
+            <a:extLst>
+              <a:ext uri="{28A0092B-C50C-407E-A947-70E740481C1C}">
+                <a14:useLocalDpi xmlns:a14="http://schemas.microsoft.com/office/drawing/2010/main" val="0"/>
+              </a:ext>
+              <a:ext uri="{96DAC541-7B7A-43D3-8B79-37D633B846F1}">
+                <asvg:svgBlip xmlns:asvg="http://schemas.microsoft.com/office/drawing/2016/SVG/main" r:embed="rId2"/>
+              </a:ext>
+            </a:extLst>
+          </a:blip>
+          <a:stretch>
+            <a:fillRect/>
+          </a:stretch>
+        </p:blipFill>
+        <p:spPr>
+          <a:xfrm>
+            <a:off x="6641431" y="816337"/>
+            <a:ext cx="5225327" cy="5225327"/>
+          </a:xfrm>
+          <a:prstGeom prst="rect">
+            <a:avLst/>
+          </a:prstGeom>
+        </p:spPr>
+      </p:pic>
     </p:spTree>
     <p:extLst>
       <p:ext uri="{BB962C8B-B14F-4D97-AF65-F5344CB8AC3E}">
@@ -3514,6 +5029,14 @@
 <file path=ppt/slides/slide3.xml><?xml version="1.0" encoding="utf-8"?>
 <p:sld xmlns:a="http://schemas.openxmlformats.org/drawingml/2006/main" xmlns:r="http://schemas.openxmlformats.org/officeDocument/2006/relationships" xmlns:p="http://schemas.openxmlformats.org/presentationml/2006/main">
   <p:cSld>
+    <p:bg>
+      <p:bgPr>
+        <a:solidFill>
+          <a:schemeClr val="bg1"/>
+        </a:solidFill>
+        <a:effectLst/>
+      </p:bgPr>
+    </p:bg>
     <p:spTree>
       <p:nvGrpSpPr>
         <p:cNvPr id="1" name="">
@@ -3534,518 +5057,409 @@
           <a:chExt cx="0" cy="0"/>
         </a:xfrm>
       </p:grpSpPr>
-      <p:sp>
-        <p:nvSpPr>
-          <p:cNvPr id="2" name="Title 1">
-            <a:extLst>
-              <a:ext uri="{FF2B5EF4-FFF2-40B4-BE49-F238E27FC236}">
-                <a16:creationId xmlns:a16="http://schemas.microsoft.com/office/drawing/2014/main" id="{A06DC3CB-CDD4-2581-FD20-B30D76601A79}"/>
-              </a:ext>
-            </a:extLst>
-          </p:cNvPr>
-          <p:cNvSpPr>
-            <a:spLocks noGrp="1"/>
-          </p:cNvSpPr>
-          <p:nvPr>
-            <p:ph type="title"/>
-          </p:nvPr>
-        </p:nvSpPr>
-        <p:spPr/>
-        <p:txBody>
-          <a:bodyPr/>
-          <a:lstStyle/>
-          <a:p>
-            <a:r>
-              <a:rPr lang="en-US" dirty="0"/>
-              <a:t>Study Summary</a:t>
-            </a:r>
-          </a:p>
-        </p:txBody>
-      </p:sp>
-      <p:sp>
-        <p:nvSpPr>
-          <p:cNvPr id="3" name="Content Placeholder 2">
-            <a:extLst>
-              <a:ext uri="{FF2B5EF4-FFF2-40B4-BE49-F238E27FC236}">
-                <a16:creationId xmlns:a16="http://schemas.microsoft.com/office/drawing/2014/main" id="{161EB9B1-D74A-4A4E-09AE-46871F0C0387}"/>
-              </a:ext>
-            </a:extLst>
-          </p:cNvPr>
-          <p:cNvSpPr>
-            <a:spLocks noGrp="1"/>
-          </p:cNvSpPr>
-          <p:nvPr>
-            <p:ph idx="1"/>
-          </p:nvPr>
-        </p:nvSpPr>
-        <p:spPr/>
-        <p:txBody>
-          <a:bodyPr/>
-          <a:lstStyle/>
-          <a:p>
-            <a:r>
-              <a:rPr lang="en-US" dirty="0"/>
-              <a:t>Explain the dataset</a:t>
-            </a:r>
-          </a:p>
-          <a:p>
-            <a:r>
-              <a:rPr lang="en-US" dirty="0"/>
-              <a:t>Explain the </a:t>
-            </a:r>
-            <a:r>
-              <a:rPr lang="en-US" b="1" dirty="0"/>
-              <a:t>goal</a:t>
-            </a:r>
-            <a:r>
-              <a:rPr lang="en-US" dirty="0"/>
-              <a:t> of the study</a:t>
-            </a:r>
-          </a:p>
-          <a:p>
-            <a:r>
-              <a:rPr lang="en-US" strike="sngStrike" dirty="0"/>
-              <a:t>Consider grabbing next two slides (global and industry distribution) and putting them both on this slide since they describe the data – lay of the land for the conclusions we will draw</a:t>
-            </a:r>
-          </a:p>
-          <a:p>
-            <a:r>
-              <a:rPr lang="en-US" dirty="0"/>
-              <a:t>Go over the goals on this slide, but then layout the data after that</a:t>
-            </a:r>
-          </a:p>
-          <a:p>
-            <a:endParaRPr lang="en-US" dirty="0"/>
-          </a:p>
-          <a:p>
-            <a:endParaRPr lang="en-US" dirty="0"/>
-          </a:p>
-        </p:txBody>
-      </p:sp>
-    </p:spTree>
-    <p:extLst>
-      <p:ext uri="{BB962C8B-B14F-4D97-AF65-F5344CB8AC3E}">
-        <p14:creationId xmlns:p14="http://schemas.microsoft.com/office/powerpoint/2010/main" val="3136209628"/>
-      </p:ext>
-    </p:extLst>
-  </p:cSld>
-  <p:clrMapOvr>
-    <a:masterClrMapping/>
-  </p:clrMapOvr>
-</p:sld>
-</file>
-
-<file path=ppt/slides/slide4.xml><?xml version="1.0" encoding="utf-8"?>
-<p:sld xmlns:a="http://schemas.openxmlformats.org/drawingml/2006/main" xmlns:r="http://schemas.openxmlformats.org/officeDocument/2006/relationships" xmlns:p="http://schemas.openxmlformats.org/presentationml/2006/main" show="0">
-  <p:cSld>
-    <p:spTree>
-      <p:nvGrpSpPr>
-        <p:cNvPr id="1" name="">
-          <a:extLst>
-            <a:ext uri="{FF2B5EF4-FFF2-40B4-BE49-F238E27FC236}">
-              <a16:creationId xmlns:a16="http://schemas.microsoft.com/office/drawing/2014/main" id="{C0E28D6F-FE37-1A99-B87E-98F8BBCF93BE}"/>
-            </a:ext>
-          </a:extLst>
-        </p:cNvPr>
-        <p:cNvGrpSpPr/>
-        <p:nvPr/>
-      </p:nvGrpSpPr>
-      <p:grpSpPr>
-        <a:xfrm>
-          <a:off x="0" y="0"/>
-          <a:ext cx="0" cy="0"/>
-          <a:chOff x="0" y="0"/>
-          <a:chExt cx="0" cy="0"/>
-        </a:xfrm>
-      </p:grpSpPr>
-      <p:sp>
-        <p:nvSpPr>
-          <p:cNvPr id="2" name="Title 1">
-            <a:extLst>
-              <a:ext uri="{FF2B5EF4-FFF2-40B4-BE49-F238E27FC236}">
-                <a16:creationId xmlns:a16="http://schemas.microsoft.com/office/drawing/2014/main" id="{15FC7309-6CDB-19DE-1F3E-080A71394829}"/>
-              </a:ext>
-            </a:extLst>
-          </p:cNvPr>
-          <p:cNvSpPr>
-            <a:spLocks noGrp="1"/>
-          </p:cNvSpPr>
-          <p:nvPr>
-            <p:ph type="title"/>
-          </p:nvPr>
-        </p:nvSpPr>
-        <p:spPr/>
-        <p:txBody>
-          <a:bodyPr/>
-          <a:lstStyle/>
-          <a:p>
-            <a:r>
-              <a:rPr lang="en-US" dirty="0"/>
-              <a:t>Global AI Distribution</a:t>
-            </a:r>
-          </a:p>
-        </p:txBody>
-      </p:sp>
-      <p:pic>
-        <p:nvPicPr>
-          <p:cNvPr id="5" name="Picture 4">
-            <a:extLst>
-              <a:ext uri="{FF2B5EF4-FFF2-40B4-BE49-F238E27FC236}">
-                <a16:creationId xmlns:a16="http://schemas.microsoft.com/office/drawing/2014/main" id="{94038626-6127-FCD8-0C66-A49CF5466189}"/>
-              </a:ext>
-            </a:extLst>
-          </p:cNvPr>
-          <p:cNvPicPr>
-            <a:picLocks noChangeAspect="1"/>
-          </p:cNvPicPr>
-          <p:nvPr/>
-        </p:nvPicPr>
-        <p:blipFill>
-          <a:blip r:embed="rId2"/>
-          <a:stretch>
-            <a:fillRect/>
-          </a:stretch>
-        </p:blipFill>
+      <p:sp useBgFill="1">
+        <p:nvSpPr>
+          <p:cNvPr id="20" name="Rectangle 19">
+            <a:extLst>
+              <a:ext uri="{FF2B5EF4-FFF2-40B4-BE49-F238E27FC236}">
+                <a16:creationId xmlns:a16="http://schemas.microsoft.com/office/drawing/2014/main" id="{F13C74B1-5B17-4795-BED0-7140497B445A}"/>
+              </a:ext>
+              <a:ext uri="{C183D7F6-B498-43B3-948B-1728B52AA6E4}">
+                <adec:decorative xmlns:adec="http://schemas.microsoft.com/office/drawing/2017/decorative" val="1"/>
+              </a:ext>
+            </a:extLst>
+          </p:cNvPr>
+          <p:cNvSpPr>
+            <a:spLocks noGrp="1" noRot="1" noChangeAspect="1" noMove="1" noResize="1" noEditPoints="1" noAdjustHandles="1" noChangeArrowheads="1" noChangeShapeType="1" noTextEdit="1"/>
+          </p:cNvSpPr>
+          <p:nvPr>
+            <p:extLst>
+              <p:ext uri="{386F3935-93C4-4BCD-93E2-E3B085C9AB24}">
+                <p16:designElem xmlns:p16="http://schemas.microsoft.com/office/powerpoint/2015/main" val="1"/>
+              </p:ext>
+            </p:extLst>
+          </p:nvPr>
+        </p:nvSpPr>
         <p:spPr>
           <a:xfrm>
-            <a:off x="5985976" y="583997"/>
-            <a:ext cx="6018640" cy="2483255"/>
+            <a:off x="0" y="0"/>
+            <a:ext cx="12188952" cy="6858000"/>
           </a:xfrm>
           <a:prstGeom prst="rect">
             <a:avLst/>
           </a:prstGeom>
+          <a:ln>
+            <a:noFill/>
+          </a:ln>
         </p:spPr>
-      </p:pic>
-      <p:sp>
-        <p:nvSpPr>
-          <p:cNvPr id="3" name="Content Placeholder 2">
-            <a:extLst>
-              <a:ext uri="{FF2B5EF4-FFF2-40B4-BE49-F238E27FC236}">
-                <a16:creationId xmlns:a16="http://schemas.microsoft.com/office/drawing/2014/main" id="{EAAD53F4-5401-EC96-B580-6F67467DBD30}"/>
-              </a:ext>
-            </a:extLst>
-          </p:cNvPr>
-          <p:cNvSpPr>
-            <a:spLocks noGrp="1"/>
-          </p:cNvSpPr>
-          <p:nvPr>
-            <p:ph idx="1"/>
-          </p:nvPr>
-        </p:nvSpPr>
-        <p:spPr/>
-        <p:txBody>
-          <a:bodyPr/>
-          <a:lstStyle/>
-          <a:p>
-            <a:r>
-              <a:rPr lang="en-US" dirty="0"/>
-              <a:t>Image of global distribution </a:t>
-            </a:r>
-          </a:p>
-          <a:p>
-            <a:pPr lvl="1"/>
-            <a:r>
-              <a:rPr lang="en-US" dirty="0"/>
-              <a:t>Gives visual of how widespread the information is</a:t>
-            </a:r>
-          </a:p>
-          <a:p>
-            <a:pPr lvl="1"/>
-            <a:r>
-              <a:rPr lang="en-US" dirty="0"/>
-              <a:t>Explain that adoption range is fairly narrow</a:t>
-            </a:r>
-          </a:p>
-          <a:p>
-            <a:pPr lvl="1"/>
-            <a:r>
-              <a:rPr lang="en-US" dirty="0"/>
-              <a:t>Explain most values being partial/ pilot adoption</a:t>
-            </a:r>
-          </a:p>
-          <a:p>
-            <a:endParaRPr lang="en-US" dirty="0"/>
-          </a:p>
-          <a:p>
-            <a:endParaRPr lang="en-US" dirty="0"/>
-          </a:p>
-        </p:txBody>
-      </p:sp>
-      <p:pic>
-        <p:nvPicPr>
-          <p:cNvPr id="7" name="Picture 6">
-            <a:extLst>
-              <a:ext uri="{FF2B5EF4-FFF2-40B4-BE49-F238E27FC236}">
-                <a16:creationId xmlns:a16="http://schemas.microsoft.com/office/drawing/2014/main" id="{DC20CAE2-DD6B-7B2C-BCD0-8BF23A987A82}"/>
-              </a:ext>
-            </a:extLst>
-          </p:cNvPr>
-          <p:cNvPicPr>
-            <a:picLocks noChangeAspect="1"/>
-          </p:cNvPicPr>
-          <p:nvPr/>
-        </p:nvPicPr>
-        <p:blipFill>
-          <a:blip r:embed="rId3"/>
-          <a:stretch>
-            <a:fillRect/>
-          </a:stretch>
-        </p:blipFill>
+        <p:style>
+          <a:lnRef idx="2">
+            <a:schemeClr val="accent1">
+              <a:shade val="50000"/>
+            </a:schemeClr>
+          </a:lnRef>
+          <a:fillRef idx="1">
+            <a:schemeClr val="accent1"/>
+          </a:fillRef>
+          <a:effectRef idx="0">
+            <a:schemeClr val="accent1"/>
+          </a:effectRef>
+          <a:fontRef idx="minor">
+            <a:schemeClr val="lt1"/>
+          </a:fontRef>
+        </p:style>
+        <p:txBody>
+          <a:bodyPr rtlCol="0" anchor="ctr"/>
+          <a:lstStyle/>
+          <a:p>
+            <a:pPr algn="ctr"/>
+            <a:endParaRPr lang="en-US"/>
+          </a:p>
+        </p:txBody>
+      </p:sp>
+      <p:sp>
+        <p:nvSpPr>
+          <p:cNvPr id="2" name="Title 1">
+            <a:extLst>
+              <a:ext uri="{FF2B5EF4-FFF2-40B4-BE49-F238E27FC236}">
+                <a16:creationId xmlns:a16="http://schemas.microsoft.com/office/drawing/2014/main" id="{A06DC3CB-CDD4-2581-FD20-B30D76601A79}"/>
+              </a:ext>
+            </a:extLst>
+          </p:cNvPr>
+          <p:cNvSpPr>
+            <a:spLocks noGrp="1"/>
+          </p:cNvSpPr>
+          <p:nvPr>
+            <p:ph type="title"/>
+          </p:nvPr>
+        </p:nvSpPr>
         <p:spPr>
           <a:xfrm>
-            <a:off x="7878773" y="3571260"/>
-            <a:ext cx="3531099" cy="2905800"/>
+            <a:off x="640080" y="325369"/>
+            <a:ext cx="4368602" cy="1956841"/>
           </a:xfrm>
-          <a:prstGeom prst="rect">
-            <a:avLst/>
-          </a:prstGeom>
         </p:spPr>
-      </p:pic>
-    </p:spTree>
-    <p:extLst>
-      <p:ext uri="{BB962C8B-B14F-4D97-AF65-F5344CB8AC3E}">
-        <p14:creationId xmlns:p14="http://schemas.microsoft.com/office/powerpoint/2010/main" val="3570477173"/>
-      </p:ext>
-    </p:extLst>
-  </p:cSld>
-  <p:clrMapOvr>
-    <a:masterClrMapping/>
-  </p:clrMapOvr>
-</p:sld>
-</file>
-
-<file path=ppt/slides/slide5.xml><?xml version="1.0" encoding="utf-8"?>
-<p:sld xmlns:a="http://schemas.openxmlformats.org/drawingml/2006/main" xmlns:r="http://schemas.openxmlformats.org/officeDocument/2006/relationships" xmlns:p="http://schemas.openxmlformats.org/presentationml/2006/main" show="0">
-  <p:cSld>
-    <p:spTree>
-      <p:nvGrpSpPr>
-        <p:cNvPr id="1" name="">
-          <a:extLst>
-            <a:ext uri="{FF2B5EF4-FFF2-40B4-BE49-F238E27FC236}">
-              <a16:creationId xmlns:a16="http://schemas.microsoft.com/office/drawing/2014/main" id="{BCBC9A06-5BDF-636A-E3DA-1FD4832C625A}"/>
-            </a:ext>
-          </a:extLst>
-        </p:cNvPr>
-        <p:cNvGrpSpPr/>
-        <p:nvPr/>
-      </p:nvGrpSpPr>
-      <p:grpSpPr>
-        <a:xfrm>
-          <a:off x="0" y="0"/>
-          <a:ext cx="0" cy="0"/>
-          <a:chOff x="0" y="0"/>
-          <a:chExt cx="0" cy="0"/>
-        </a:xfrm>
-      </p:grpSpPr>
-      <p:pic>
-        <p:nvPicPr>
-          <p:cNvPr id="9" name="Picture 8">
-            <a:extLst>
-              <a:ext uri="{FF2B5EF4-FFF2-40B4-BE49-F238E27FC236}">
-                <a16:creationId xmlns:a16="http://schemas.microsoft.com/office/drawing/2014/main" id="{BDA2B24D-E717-5D0E-9D57-AAD88E542C8E}"/>
-              </a:ext>
-            </a:extLst>
-          </p:cNvPr>
-          <p:cNvPicPr>
-            <a:picLocks noChangeAspect="1"/>
-          </p:cNvPicPr>
-          <p:nvPr/>
-        </p:nvPicPr>
-        <p:blipFill>
-          <a:blip r:embed="rId2"/>
-          <a:stretch>
-            <a:fillRect/>
-          </a:stretch>
-        </p:blipFill>
+        <p:txBody>
+          <a:bodyPr vert="horz" lIns="91440" tIns="45720" rIns="91440" bIns="45720" rtlCol="0" anchor="b">
+            <a:normAutofit/>
+          </a:bodyPr>
+          <a:lstStyle/>
+          <a:p>
+            <a:r>
+              <a:rPr lang="en-US" sz="3000" dirty="0"/>
+              <a:t>Study Overview: </a:t>
+            </a:r>
+            <a:br>
+              <a:rPr lang="en-US" sz="3000" dirty="0"/>
+            </a:br>
+            <a:r>
+              <a:rPr lang="en-US" sz="3000" dirty="0"/>
+              <a:t>Measuring AI Adoption and Organizational Impact</a:t>
+            </a:r>
+          </a:p>
+        </p:txBody>
+      </p:sp>
+      <p:sp>
+        <p:nvSpPr>
+          <p:cNvPr id="32" name="sketchy line">
+            <a:extLst>
+              <a:ext uri="{FF2B5EF4-FFF2-40B4-BE49-F238E27FC236}">
+                <a16:creationId xmlns:a16="http://schemas.microsoft.com/office/drawing/2014/main" id="{D4974D33-8DC5-464E-8C6D-BE58F0669C17}"/>
+              </a:ext>
+              <a:ext uri="{C183D7F6-B498-43B3-948B-1728B52AA6E4}">
+                <adec:decorative xmlns:adec="http://schemas.microsoft.com/office/drawing/2017/decorative" val="1"/>
+              </a:ext>
+            </a:extLst>
+          </p:cNvPr>
+          <p:cNvSpPr>
+            <a:spLocks noGrp="1" noRot="1" noChangeAspect="1" noMove="1" noResize="1" noEditPoints="1" noAdjustHandles="1" noChangeArrowheads="1" noChangeShapeType="1" noTextEdit="1"/>
+          </p:cNvSpPr>
+          <p:nvPr>
+            <p:extLst>
+              <p:ext uri="{386F3935-93C4-4BCD-93E2-E3B085C9AB24}">
+                <p16:designElem xmlns:p16="http://schemas.microsoft.com/office/powerpoint/2015/main" val="1"/>
+              </p:ext>
+            </p:extLst>
+          </p:nvPr>
+        </p:nvSpPr>
         <p:spPr>
           <a:xfrm>
-            <a:off x="8273742" y="259667"/>
-            <a:ext cx="3523404" cy="3131915"/>
+            <a:off x="640080" y="2586994"/>
+            <a:ext cx="3474720" cy="18288"/>
           </a:xfrm>
-          <a:prstGeom prst="rect">
+          <a:custGeom>
             <a:avLst/>
-          </a:prstGeom>
+            <a:gdLst>
+              <a:gd name="csX0" fmla="*/ 0 w 3474720"/>
+              <a:gd name="csY0" fmla="*/ 0 h 18288"/>
+              <a:gd name="csX1" fmla="*/ 694944 w 3474720"/>
+              <a:gd name="csY1" fmla="*/ 0 h 18288"/>
+              <a:gd name="csX2" fmla="*/ 1355141 w 3474720"/>
+              <a:gd name="csY2" fmla="*/ 0 h 18288"/>
+              <a:gd name="csX3" fmla="*/ 2015338 w 3474720"/>
+              <a:gd name="csY3" fmla="*/ 0 h 18288"/>
+              <a:gd name="csX4" fmla="*/ 2779776 w 3474720"/>
+              <a:gd name="csY4" fmla="*/ 0 h 18288"/>
+              <a:gd name="csX5" fmla="*/ 3474720 w 3474720"/>
+              <a:gd name="csY5" fmla="*/ 0 h 18288"/>
+              <a:gd name="csX6" fmla="*/ 3474720 w 3474720"/>
+              <a:gd name="csY6" fmla="*/ 18288 h 18288"/>
+              <a:gd name="csX7" fmla="*/ 2779776 w 3474720"/>
+              <a:gd name="csY7" fmla="*/ 18288 h 18288"/>
+              <a:gd name="csX8" fmla="*/ 2189074 w 3474720"/>
+              <a:gd name="csY8" fmla="*/ 18288 h 18288"/>
+              <a:gd name="csX9" fmla="*/ 1528877 w 3474720"/>
+              <a:gd name="csY9" fmla="*/ 18288 h 18288"/>
+              <a:gd name="csX10" fmla="*/ 868680 w 3474720"/>
+              <a:gd name="csY10" fmla="*/ 18288 h 18288"/>
+              <a:gd name="csX11" fmla="*/ 0 w 3474720"/>
+              <a:gd name="csY11" fmla="*/ 18288 h 18288"/>
+              <a:gd name="csX12" fmla="*/ 0 w 3474720"/>
+              <a:gd name="csY12" fmla="*/ 0 h 18288"/>
+            </a:gdLst>
+            <a:ahLst/>
+            <a:cxnLst>
+              <a:cxn ang="0">
+                <a:pos x="csX0" y="csY0"/>
+              </a:cxn>
+              <a:cxn ang="0">
+                <a:pos x="csX1" y="csY1"/>
+              </a:cxn>
+              <a:cxn ang="0">
+                <a:pos x="csX2" y="csY2"/>
+              </a:cxn>
+              <a:cxn ang="0">
+                <a:pos x="csX3" y="csY3"/>
+              </a:cxn>
+              <a:cxn ang="0">
+                <a:pos x="csX4" y="csY4"/>
+              </a:cxn>
+              <a:cxn ang="0">
+                <a:pos x="csX5" y="csY5"/>
+              </a:cxn>
+              <a:cxn ang="0">
+                <a:pos x="csX6" y="csY6"/>
+              </a:cxn>
+              <a:cxn ang="0">
+                <a:pos x="csX7" y="csY7"/>
+              </a:cxn>
+              <a:cxn ang="0">
+                <a:pos x="csX8" y="csY8"/>
+              </a:cxn>
+              <a:cxn ang="0">
+                <a:pos x="csX9" y="csY9"/>
+              </a:cxn>
+              <a:cxn ang="0">
+                <a:pos x="csX10" y="csY10"/>
+              </a:cxn>
+              <a:cxn ang="0">
+                <a:pos x="csX11" y="csY11"/>
+              </a:cxn>
+              <a:cxn ang="0">
+                <a:pos x="csX12" y="csY12"/>
+              </a:cxn>
+            </a:cxnLst>
+            <a:rect l="l" t="t" r="r" b="b"/>
+            <a:pathLst>
+              <a:path w="3474720" h="18288" fill="none" extrusionOk="0">
+                <a:moveTo>
+                  <a:pt x="0" y="0"/>
+                </a:moveTo>
+                <a:cubicBezTo>
+                  <a:pt x="224454" y="-14544"/>
+                  <a:pt x="495407" y="26540"/>
+                  <a:pt x="694944" y="0"/>
+                </a:cubicBezTo>
+                <a:cubicBezTo>
+                  <a:pt x="894481" y="-26540"/>
+                  <a:pt x="1130063" y="24713"/>
+                  <a:pt x="1355141" y="0"/>
+                </a:cubicBezTo>
+                <a:cubicBezTo>
+                  <a:pt x="1580219" y="-24713"/>
+                  <a:pt x="1820099" y="26695"/>
+                  <a:pt x="2015338" y="0"/>
+                </a:cubicBezTo>
+                <a:cubicBezTo>
+                  <a:pt x="2210577" y="-26695"/>
+                  <a:pt x="2402045" y="165"/>
+                  <a:pt x="2779776" y="0"/>
+                </a:cubicBezTo>
+                <a:cubicBezTo>
+                  <a:pt x="3157507" y="-165"/>
+                  <a:pt x="3286859" y="-15571"/>
+                  <a:pt x="3474720" y="0"/>
+                </a:cubicBezTo>
+                <a:cubicBezTo>
+                  <a:pt x="3474286" y="7551"/>
+                  <a:pt x="3474253" y="9822"/>
+                  <a:pt x="3474720" y="18288"/>
+                </a:cubicBezTo>
+                <a:cubicBezTo>
+                  <a:pt x="3233904" y="29845"/>
+                  <a:pt x="2945134" y="-5256"/>
+                  <a:pt x="2779776" y="18288"/>
+                </a:cubicBezTo>
+                <a:cubicBezTo>
+                  <a:pt x="2614418" y="41832"/>
+                  <a:pt x="2339768" y="22709"/>
+                  <a:pt x="2189074" y="18288"/>
+                </a:cubicBezTo>
+                <a:cubicBezTo>
+                  <a:pt x="2038380" y="13867"/>
+                  <a:pt x="1817434" y="-4947"/>
+                  <a:pt x="1528877" y="18288"/>
+                </a:cubicBezTo>
+                <a:cubicBezTo>
+                  <a:pt x="1240320" y="41523"/>
+                  <a:pt x="1042447" y="37198"/>
+                  <a:pt x="868680" y="18288"/>
+                </a:cubicBezTo>
+                <a:cubicBezTo>
+                  <a:pt x="694913" y="-622"/>
+                  <a:pt x="233232" y="44909"/>
+                  <a:pt x="0" y="18288"/>
+                </a:cubicBezTo>
+                <a:cubicBezTo>
+                  <a:pt x="60" y="11696"/>
+                  <a:pt x="66" y="3758"/>
+                  <a:pt x="0" y="0"/>
+                </a:cubicBezTo>
+                <a:close/>
+              </a:path>
+              <a:path w="3474720" h="18288" stroke="0" extrusionOk="0">
+                <a:moveTo>
+                  <a:pt x="0" y="0"/>
+                </a:moveTo>
+                <a:cubicBezTo>
+                  <a:pt x="202328" y="-14716"/>
+                  <a:pt x="332722" y="-11499"/>
+                  <a:pt x="625450" y="0"/>
+                </a:cubicBezTo>
+                <a:cubicBezTo>
+                  <a:pt x="918178" y="11499"/>
+                  <a:pt x="1096688" y="5123"/>
+                  <a:pt x="1389888" y="0"/>
+                </a:cubicBezTo>
+                <a:cubicBezTo>
+                  <a:pt x="1683088" y="-5123"/>
+                  <a:pt x="1835981" y="-14038"/>
+                  <a:pt x="1980590" y="0"/>
+                </a:cubicBezTo>
+                <a:cubicBezTo>
+                  <a:pt x="2125199" y="14038"/>
+                  <a:pt x="2396099" y="-7203"/>
+                  <a:pt x="2571293" y="0"/>
+                </a:cubicBezTo>
+                <a:cubicBezTo>
+                  <a:pt x="2746487" y="7203"/>
+                  <a:pt x="3041609" y="-12036"/>
+                  <a:pt x="3474720" y="0"/>
+                </a:cubicBezTo>
+                <a:cubicBezTo>
+                  <a:pt x="3474638" y="4406"/>
+                  <a:pt x="3474631" y="9982"/>
+                  <a:pt x="3474720" y="18288"/>
+                </a:cubicBezTo>
+                <a:cubicBezTo>
+                  <a:pt x="3324873" y="21876"/>
+                  <a:pt x="3136771" y="12587"/>
+                  <a:pt x="2814523" y="18288"/>
+                </a:cubicBezTo>
+                <a:cubicBezTo>
+                  <a:pt x="2492275" y="23989"/>
+                  <a:pt x="2294402" y="47111"/>
+                  <a:pt x="2154326" y="18288"/>
+                </a:cubicBezTo>
+                <a:cubicBezTo>
+                  <a:pt x="2014250" y="-10535"/>
+                  <a:pt x="1820317" y="33903"/>
+                  <a:pt x="1494130" y="18288"/>
+                </a:cubicBezTo>
+                <a:cubicBezTo>
+                  <a:pt x="1167943" y="2673"/>
+                  <a:pt x="948432" y="14868"/>
+                  <a:pt x="729691" y="18288"/>
+                </a:cubicBezTo>
+                <a:cubicBezTo>
+                  <a:pt x="510950" y="21708"/>
+                  <a:pt x="264032" y="24354"/>
+                  <a:pt x="0" y="18288"/>
+                </a:cubicBezTo>
+                <a:cubicBezTo>
+                  <a:pt x="189" y="14288"/>
+                  <a:pt x="-703" y="3747"/>
+                  <a:pt x="0" y="0"/>
+                </a:cubicBezTo>
+                <a:close/>
+              </a:path>
+            </a:pathLst>
+          </a:custGeom>
+          <a:solidFill>
+            <a:schemeClr val="accent2"/>
+          </a:solidFill>
+          <a:ln w="44450" cap="rnd">
+            <a:solidFill>
+              <a:schemeClr val="accent2"/>
+            </a:solidFill>
+            <a:round/>
+            <a:extLst>
+              <a:ext uri="{C807C97D-BFC1-408E-A445-0C87EB9F89A2}">
+                <ask:lineSketchStyleProps xmlns:ask="http://schemas.microsoft.com/office/drawing/2018/sketchyshapes" sd="2863741219">
+                  <a:prstGeom prst="rect">
+                    <a:avLst/>
+                  </a:prstGeom>
+                  <ask:type>
+                    <ask:lineSketchFreehand/>
+                  </ask:type>
+                </ask:lineSketchStyleProps>
+              </a:ext>
+            </a:extLst>
+          </a:ln>
         </p:spPr>
-      </p:pic>
-      <p:sp>
-        <p:nvSpPr>
-          <p:cNvPr id="2" name="Title 1">
-            <a:extLst>
-              <a:ext uri="{FF2B5EF4-FFF2-40B4-BE49-F238E27FC236}">
-                <a16:creationId xmlns:a16="http://schemas.microsoft.com/office/drawing/2014/main" id="{1812795B-1069-851D-0861-959BAE73C33C}"/>
-              </a:ext>
-            </a:extLst>
-          </p:cNvPr>
-          <p:cNvSpPr>
-            <a:spLocks noGrp="1"/>
-          </p:cNvSpPr>
-          <p:nvPr>
-            <p:ph type="title"/>
-          </p:nvPr>
-        </p:nvSpPr>
-        <p:spPr/>
-        <p:txBody>
-          <a:bodyPr/>
-          <a:lstStyle/>
-          <a:p>
-            <a:r>
-              <a:rPr lang="en-US" dirty="0"/>
-              <a:t>Industry AI Distribution</a:t>
-            </a:r>
-          </a:p>
-        </p:txBody>
-      </p:sp>
-      <p:sp>
-        <p:nvSpPr>
-          <p:cNvPr id="3" name="Content Placeholder 2">
-            <a:extLst>
-              <a:ext uri="{FF2B5EF4-FFF2-40B4-BE49-F238E27FC236}">
-                <a16:creationId xmlns:a16="http://schemas.microsoft.com/office/drawing/2014/main" id="{19714E0D-9F2F-7E72-ACB5-B22AE7ED60A6}"/>
-              </a:ext>
-            </a:extLst>
-          </p:cNvPr>
-          <p:cNvSpPr>
-            <a:spLocks noGrp="1"/>
-          </p:cNvSpPr>
-          <p:nvPr>
-            <p:ph idx="1"/>
-          </p:nvPr>
-        </p:nvSpPr>
-        <p:spPr/>
-        <p:txBody>
-          <a:bodyPr/>
-          <a:lstStyle/>
-          <a:p>
-            <a:r>
-              <a:rPr lang="en-US" dirty="0"/>
-              <a:t>Bar Chart Industry Distribution</a:t>
-            </a:r>
-          </a:p>
-          <a:p>
-            <a:r>
-              <a:rPr lang="en-US" dirty="0"/>
-              <a:t>Clear lead in tech followed by finance (not surprising)</a:t>
-            </a:r>
-          </a:p>
-          <a:p>
-            <a:endParaRPr lang="en-US" dirty="0"/>
-          </a:p>
-          <a:p>
-            <a:endParaRPr lang="en-US" dirty="0"/>
-          </a:p>
-        </p:txBody>
-      </p:sp>
-    </p:spTree>
-    <p:extLst>
-      <p:ext uri="{BB962C8B-B14F-4D97-AF65-F5344CB8AC3E}">
-        <p14:creationId xmlns:p14="http://schemas.microsoft.com/office/powerpoint/2010/main" val="1665668739"/>
-      </p:ext>
-    </p:extLst>
-  </p:cSld>
-  <p:clrMapOvr>
-    <a:masterClrMapping/>
-  </p:clrMapOvr>
-</p:sld>
-</file>
-
-<file path=ppt/slides/slide6.xml><?xml version="1.0" encoding="utf-8"?>
-<p:sld xmlns:a="http://schemas.openxmlformats.org/drawingml/2006/main" xmlns:r="http://schemas.openxmlformats.org/officeDocument/2006/relationships" xmlns:p="http://schemas.openxmlformats.org/presentationml/2006/main">
-  <p:cSld>
-    <p:spTree>
-      <p:nvGrpSpPr>
-        <p:cNvPr id="1" name=""/>
-        <p:cNvGrpSpPr/>
-        <p:nvPr/>
-      </p:nvGrpSpPr>
-      <p:grpSpPr>
-        <a:xfrm>
-          <a:off x="0" y="0"/>
-          <a:ext cx="0" cy="0"/>
-          <a:chOff x="0" y="0"/>
-          <a:chExt cx="0" cy="0"/>
-        </a:xfrm>
-      </p:grpSpPr>
-      <p:sp>
-        <p:nvSpPr>
-          <p:cNvPr id="2" name="Title 1">
-            <a:extLst>
-              <a:ext uri="{FF2B5EF4-FFF2-40B4-BE49-F238E27FC236}">
-                <a16:creationId xmlns:a16="http://schemas.microsoft.com/office/drawing/2014/main" id="{3F1719AD-B81D-1682-5E1B-8A979F210D95}"/>
-              </a:ext>
-            </a:extLst>
-          </p:cNvPr>
-          <p:cNvSpPr>
-            <a:spLocks noGrp="1"/>
-          </p:cNvSpPr>
-          <p:nvPr>
-            <p:ph type="title"/>
-          </p:nvPr>
+        <p:style>
+          <a:lnRef idx="2">
+            <a:schemeClr val="accent1">
+              <a:shade val="50000"/>
+            </a:schemeClr>
+          </a:lnRef>
+          <a:fillRef idx="1">
+            <a:schemeClr val="accent1"/>
+          </a:fillRef>
+          <a:effectRef idx="0">
+            <a:schemeClr val="accent1"/>
+          </a:effectRef>
+          <a:fontRef idx="minor">
+            <a:schemeClr val="lt1"/>
+          </a:fontRef>
+        </p:style>
+        <p:txBody>
+          <a:bodyPr rtlCol="0" anchor="ctr"/>
+          <a:lstStyle/>
+          <a:p>
+            <a:pPr algn="ctr"/>
+            <a:endParaRPr lang="en-US"/>
+          </a:p>
+        </p:txBody>
+      </p:sp>
+      <p:sp>
+        <p:nvSpPr>
+          <p:cNvPr id="15" name="Content Placeholder 2">
+            <a:extLst>
+              <a:ext uri="{FF2B5EF4-FFF2-40B4-BE49-F238E27FC236}">
+                <a16:creationId xmlns:a16="http://schemas.microsoft.com/office/drawing/2014/main" id="{60ECC35B-21E8-A37F-CE65-8F422F9521E6}"/>
+              </a:ext>
+            </a:extLst>
+          </p:cNvPr>
+          <p:cNvSpPr txBox="1">
+            <a:spLocks/>
+          </p:cNvSpPr>
+          <p:nvPr/>
         </p:nvSpPr>
         <p:spPr>
           <a:xfrm>
-            <a:off x="838200" y="112269"/>
-            <a:ext cx="10515600" cy="779313"/>
-          </a:xfrm>
-        </p:spPr>
-        <p:txBody>
-          <a:bodyPr/>
-          <a:lstStyle/>
-          <a:p>
-            <a:r>
-              <a:rPr lang="en-US" dirty="0"/>
-              <a:t>AI Adoption Data Distribution Summary</a:t>
-            </a:r>
-          </a:p>
-        </p:txBody>
-      </p:sp>
-      <p:pic>
-        <p:nvPicPr>
-          <p:cNvPr id="4" name="Picture 3">
-            <a:extLst>
-              <a:ext uri="{FF2B5EF4-FFF2-40B4-BE49-F238E27FC236}">
-                <a16:creationId xmlns:a16="http://schemas.microsoft.com/office/drawing/2014/main" id="{10895D6D-E458-0095-91B8-EB1D9706A8EB}"/>
-              </a:ext>
-            </a:extLst>
-          </p:cNvPr>
-          <p:cNvPicPr>
-            <a:picLocks noChangeAspect="1"/>
-          </p:cNvPicPr>
-          <p:nvPr/>
-        </p:nvPicPr>
-        <p:blipFill>
-          <a:blip r:embed="rId2"/>
-          <a:stretch>
-            <a:fillRect/>
-          </a:stretch>
-        </p:blipFill>
-        <p:spPr>
-          <a:xfrm>
-            <a:off x="5847953" y="1088005"/>
-            <a:ext cx="6018640" cy="2483255"/>
-          </a:xfrm>
-          <a:prstGeom prst="rect">
-            <a:avLst/>
-          </a:prstGeom>
-        </p:spPr>
-      </p:pic>
-      <p:sp>
-        <p:nvSpPr>
-          <p:cNvPr id="5" name="Content Placeholder 2">
-            <a:extLst>
-              <a:ext uri="{FF2B5EF4-FFF2-40B4-BE49-F238E27FC236}">
-                <a16:creationId xmlns:a16="http://schemas.microsoft.com/office/drawing/2014/main" id="{4D4CBDE1-5237-7081-35F1-1CBDF9471D94}"/>
-              </a:ext>
-            </a:extLst>
-          </p:cNvPr>
-          <p:cNvSpPr txBox="1">
-            <a:spLocks/>
-          </p:cNvSpPr>
-          <p:nvPr/>
-        </p:nvSpPr>
-        <p:spPr>
-          <a:xfrm>
-            <a:off x="193337" y="1615080"/>
-            <a:ext cx="7346149" cy="4351338"/>
+            <a:off x="340467" y="2742033"/>
+            <a:ext cx="7237380" cy="3911686"/>
           </a:xfrm>
           <a:prstGeom prst="rect">
             <a:avLst/>
@@ -4221,45 +5635,784 @@
           </a:lstStyle>
           <a:p>
             <a:r>
-              <a:rPr lang="en-US" dirty="0"/>
-              <a:t>Image of global distribution </a:t>
+              <a:rPr lang="en-US" sz="1600" b="1" dirty="0"/>
+              <a:t>Dataset:</a:t>
+            </a:r>
+            <a:r>
+              <a:rPr lang="en-US" sz="1600" dirty="0"/>
+              <a:t> Global AI Adoption &amp; Workforce Impact Dataset (Kaggle)</a:t>
             </a:r>
           </a:p>
           <a:p>
             <a:pPr lvl="1"/>
             <a:r>
-              <a:rPr lang="en-US" dirty="0"/>
-              <a:t>Gives visual of how widespread the information is</a:t>
+              <a:rPr lang="en-US" sz="1300" dirty="0"/>
+              <a:t>Company-level survey data across industries and countries</a:t>
             </a:r>
           </a:p>
           <a:p>
             <a:pPr lvl="1"/>
             <a:r>
-              <a:rPr lang="en-US" dirty="0"/>
-              <a:t>Explain that adoption range is fairly narrow</a:t>
+              <a:rPr lang="en-US" sz="1300" dirty="0"/>
+              <a:t>Maturity level, adoption rates, investment, and productivity outcomes</a:t>
+            </a:r>
+            <a:endParaRPr lang="en-US" sz="1600" dirty="0"/>
+          </a:p>
+          <a:p>
+            <a:r>
+              <a:rPr lang="en-US" sz="1600" b="1" dirty="0"/>
+              <a:t>Study Goal: </a:t>
+            </a:r>
+            <a:r>
+              <a:rPr lang="en-US" sz="1600" dirty="0"/>
+              <a:t>Evaluate factors associated with successful AI implementation</a:t>
             </a:r>
           </a:p>
           <a:p>
             <a:pPr lvl="1"/>
             <a:r>
-              <a:rPr lang="en-US" dirty="0"/>
-              <a:t>Explain most values being partial/ pilot adoption</a:t>
-            </a:r>
-          </a:p>
-          <a:p>
-            <a:endParaRPr lang="en-US" dirty="0"/>
-          </a:p>
-          <a:p>
-            <a:endParaRPr lang="en-US" dirty="0"/>
+              <a:rPr lang="en-US" sz="1300" dirty="0"/>
+              <a:t>Identify Industries and regions leading AI adoption</a:t>
+            </a:r>
+          </a:p>
+          <a:p>
+            <a:pPr lvl="1"/>
+            <a:r>
+              <a:rPr lang="en-US" sz="1300" dirty="0"/>
+              <a:t>Analyze relationships between AI maturity, investment, and business outcomes</a:t>
+            </a:r>
+          </a:p>
+          <a:p>
+            <a:pPr lvl="1"/>
+            <a:r>
+              <a:rPr lang="en-US" sz="1300" dirty="0"/>
+              <a:t>Assess workforce impacts including displacement and reskilling</a:t>
+            </a:r>
+          </a:p>
+          <a:p>
+            <a:r>
+              <a:rPr lang="en-US" sz="1600" b="1" dirty="0"/>
+              <a:t>Analytical approach: </a:t>
+            </a:r>
+          </a:p>
+          <a:p>
+            <a:pPr lvl="1"/>
+            <a:r>
+              <a:rPr lang="en-US" sz="1300" dirty="0"/>
+              <a:t>Python-based exploratory data analysis</a:t>
+            </a:r>
+          </a:p>
+          <a:p>
+            <a:pPr lvl="1"/>
+            <a:r>
+              <a:rPr lang="en-US" sz="1300" dirty="0"/>
+              <a:t>Correlation analysis to evaluate relationships</a:t>
+            </a:r>
+          </a:p>
+          <a:p>
+            <a:r>
+              <a:rPr lang="en-US" sz="1600" b="1" dirty="0"/>
+              <a:t>Data Considerations and </a:t>
+            </a:r>
+            <a:r>
+              <a:rPr lang="en-US" sz="1600" b="1" dirty="0" err="1"/>
+              <a:t>LimFacs</a:t>
+            </a:r>
+            <a:r>
+              <a:rPr lang="en-US" sz="1600" b="1" dirty="0"/>
+              <a:t>:</a:t>
+            </a:r>
+          </a:p>
+          <a:p>
+            <a:pPr lvl="1"/>
+            <a:r>
+              <a:rPr lang="en-US" sz="1300" dirty="0"/>
+              <a:t>Synthetic dataset designed for analysis and modeling</a:t>
+            </a:r>
+          </a:p>
+          <a:p>
+            <a:pPr lvl="1"/>
+            <a:r>
+              <a:rPr lang="en-US" sz="1300" dirty="0"/>
+              <a:t>Finding identify trends, not direct causation</a:t>
+            </a:r>
+          </a:p>
+          <a:p>
+            <a:pPr lvl="1"/>
+            <a:r>
+              <a:rPr lang="en-US" sz="1300" dirty="0"/>
+              <a:t>Some dataset definitions lack documentation (maturity scoring methodology)</a:t>
+            </a:r>
+          </a:p>
+          <a:p>
+            <a:endParaRPr lang="en-US" sz="1600" dirty="0"/>
+          </a:p>
+          <a:p>
+            <a:endParaRPr lang="en-US" sz="1600" dirty="0"/>
           </a:p>
         </p:txBody>
       </p:sp>
       <p:pic>
         <p:nvPicPr>
-          <p:cNvPr id="6" name="Picture 5">
-            <a:extLst>
-              <a:ext uri="{FF2B5EF4-FFF2-40B4-BE49-F238E27FC236}">
-                <a16:creationId xmlns:a16="http://schemas.microsoft.com/office/drawing/2014/main" id="{7F16BC49-89D9-98CC-BA57-418AB3506F43}"/>
+          <p:cNvPr id="6" name="Picture 5" descr="A digital map">
+            <a:extLst>
+              <a:ext uri="{FF2B5EF4-FFF2-40B4-BE49-F238E27FC236}">
+                <a16:creationId xmlns:a16="http://schemas.microsoft.com/office/drawing/2014/main" id="{3AF2131D-BFAD-3E78-699C-9BA8959FA482}"/>
+              </a:ext>
+            </a:extLst>
+          </p:cNvPr>
+          <p:cNvPicPr>
+            <a:picLocks noChangeAspect="1"/>
+          </p:cNvPicPr>
+          <p:nvPr/>
+        </p:nvPicPr>
+        <p:blipFill>
+          <a:blip r:embed="rId3"/>
+          <a:srcRect l="27621" r="5426" b="-1"/>
+          <a:stretch>
+            <a:fillRect/>
+          </a:stretch>
+        </p:blipFill>
+        <p:spPr>
+          <a:xfrm>
+            <a:off x="7308333" y="10"/>
+            <a:ext cx="4882144" cy="6857990"/>
+          </a:xfrm>
+          <a:custGeom>
+            <a:avLst/>
+            <a:gdLst/>
+            <a:ahLst/>
+            <a:cxnLst/>
+            <a:rect l="l" t="t" r="r" b="b"/>
+            <a:pathLst>
+              <a:path w="6878775" h="6858000">
+                <a:moveTo>
+                  <a:pt x="1102973" y="0"/>
+                </a:moveTo>
+                <a:lnTo>
+                  <a:pt x="1160688" y="0"/>
+                </a:lnTo>
+                <a:lnTo>
+                  <a:pt x="983189" y="331786"/>
+                </a:lnTo>
+                <a:cubicBezTo>
+                  <a:pt x="914866" y="469145"/>
+                  <a:pt x="850355" y="608712"/>
+                  <a:pt x="789261" y="750263"/>
+                </a:cubicBezTo>
+                <a:cubicBezTo>
+                  <a:pt x="774307" y="784928"/>
+                  <a:pt x="759992" y="819849"/>
+                  <a:pt x="745295" y="854514"/>
+                </a:cubicBezTo>
+                <a:cubicBezTo>
+                  <a:pt x="756682" y="845393"/>
+                  <a:pt x="765489" y="833492"/>
+                  <a:pt x="770857" y="819975"/>
+                </a:cubicBezTo>
+                <a:cubicBezTo>
+                  <a:pt x="879943" y="589569"/>
+                  <a:pt x="999605" y="365513"/>
+                  <a:pt x="1131329" y="148742"/>
+                </a:cubicBezTo>
+                <a:lnTo>
+                  <a:pt x="1227589" y="0"/>
+                </a:lnTo>
+                <a:lnTo>
+                  <a:pt x="6878775" y="0"/>
+                </a:lnTo>
+                <a:lnTo>
+                  <a:pt x="6878775" y="6858000"/>
+                </a:lnTo>
+                <a:lnTo>
+                  <a:pt x="713521" y="6858000"/>
+                </a:lnTo>
+                <a:lnTo>
+                  <a:pt x="625642" y="6670527"/>
+                </a:lnTo>
+                <a:cubicBezTo>
+                  <a:pt x="507232" y="6398531"/>
+                  <a:pt x="403083" y="6118381"/>
+                  <a:pt x="312785" y="5830359"/>
+                </a:cubicBezTo>
+                <a:cubicBezTo>
+                  <a:pt x="278149" y="5719759"/>
+                  <a:pt x="248879" y="5607635"/>
+                  <a:pt x="212198" y="5480401"/>
+                </a:cubicBezTo>
+                <a:cubicBezTo>
+                  <a:pt x="212208" y="5491601"/>
+                  <a:pt x="212803" y="5502788"/>
+                  <a:pt x="213988" y="5513923"/>
+                </a:cubicBezTo>
+                <a:cubicBezTo>
+                  <a:pt x="264089" y="5723695"/>
+                  <a:pt x="307290" y="5935370"/>
+                  <a:pt x="365826" y="6142729"/>
+                </a:cubicBezTo>
+                <a:cubicBezTo>
+                  <a:pt x="433152" y="6380817"/>
+                  <a:pt x="510068" y="6614016"/>
+                  <a:pt x="597975" y="6841549"/>
+                </a:cubicBezTo>
+                <a:lnTo>
+                  <a:pt x="604824" y="6858000"/>
+                </a:lnTo>
+                <a:lnTo>
+                  <a:pt x="552056" y="6858000"/>
+                </a:lnTo>
+                <a:lnTo>
+                  <a:pt x="539576" y="6828295"/>
+                </a:lnTo>
+                <a:cubicBezTo>
+                  <a:pt x="380597" y="6414594"/>
+                  <a:pt x="260223" y="5988893"/>
+                  <a:pt x="171555" y="5552906"/>
+                </a:cubicBezTo>
+                <a:cubicBezTo>
+                  <a:pt x="91163" y="5157998"/>
+                  <a:pt x="43746" y="4758899"/>
+                  <a:pt x="12305" y="4357388"/>
+                </a:cubicBezTo>
+                <a:cubicBezTo>
+                  <a:pt x="-14281" y="4013908"/>
+                  <a:pt x="4507" y="3672965"/>
+                  <a:pt x="46684" y="3331516"/>
+                </a:cubicBezTo>
+                <a:cubicBezTo>
+                  <a:pt x="127203" y="2664286"/>
+                  <a:pt x="277819" y="2007265"/>
+                  <a:pt x="496065" y="1371196"/>
+                </a:cubicBezTo>
+                <a:cubicBezTo>
+                  <a:pt x="636273" y="966066"/>
+                  <a:pt x="800445" y="573253"/>
+                  <a:pt x="995723" y="196614"/>
+                </a:cubicBezTo>
+                <a:close/>
+              </a:path>
+            </a:pathLst>
+          </a:custGeom>
+        </p:spPr>
+      </p:pic>
+    </p:spTree>
+    <p:extLst>
+      <p:ext uri="{BB962C8B-B14F-4D97-AF65-F5344CB8AC3E}">
+        <p14:creationId xmlns:p14="http://schemas.microsoft.com/office/powerpoint/2010/main" val="3136209628"/>
+      </p:ext>
+    </p:extLst>
+  </p:cSld>
+  <p:clrMapOvr>
+    <a:masterClrMapping/>
+  </p:clrMapOvr>
+</p:sld>
+</file>
+
+<file path=ppt/slides/slide4.xml><?xml version="1.0" encoding="utf-8"?>
+<p:sld xmlns:a="http://schemas.openxmlformats.org/drawingml/2006/main" xmlns:r="http://schemas.openxmlformats.org/officeDocument/2006/relationships" xmlns:p="http://schemas.openxmlformats.org/presentationml/2006/main">
+  <p:cSld>
+    <p:bg>
+      <p:bgPr>
+        <a:solidFill>
+          <a:schemeClr val="bg1"/>
+        </a:solidFill>
+        <a:effectLst/>
+      </p:bgPr>
+    </p:bg>
+    <p:spTree>
+      <p:nvGrpSpPr>
+        <p:cNvPr id="1" name=""/>
+        <p:cNvGrpSpPr/>
+        <p:nvPr/>
+      </p:nvGrpSpPr>
+      <p:grpSpPr>
+        <a:xfrm>
+          <a:off x="0" y="0"/>
+          <a:ext cx="0" cy="0"/>
+          <a:chOff x="0" y="0"/>
+          <a:chExt cx="0" cy="0"/>
+        </a:xfrm>
+      </p:grpSpPr>
+      <p:sp useBgFill="1">
+        <p:nvSpPr>
+          <p:cNvPr id="24" name="Rectangle 23">
+            <a:extLst>
+              <a:ext uri="{FF2B5EF4-FFF2-40B4-BE49-F238E27FC236}">
+                <a16:creationId xmlns:a16="http://schemas.microsoft.com/office/drawing/2014/main" id="{88263A24-0C1F-4677-B43C-4AE14E276B27}"/>
+              </a:ext>
+              <a:ext uri="{C183D7F6-B498-43B3-948B-1728B52AA6E4}">
+                <adec:decorative xmlns:adec="http://schemas.microsoft.com/office/drawing/2017/decorative" val="1"/>
+              </a:ext>
+            </a:extLst>
+          </p:cNvPr>
+          <p:cNvSpPr>
+            <a:spLocks noGrp="1" noRot="1" noChangeAspect="1" noMove="1" noResize="1" noEditPoints="1" noAdjustHandles="1" noChangeArrowheads="1" noChangeShapeType="1" noTextEdit="1"/>
+          </p:cNvSpPr>
+          <p:nvPr>
+            <p:extLst>
+              <p:ext uri="{386F3935-93C4-4BCD-93E2-E3B085C9AB24}">
+                <p16:designElem xmlns:p16="http://schemas.microsoft.com/office/powerpoint/2015/main" val="1"/>
+              </p:ext>
+            </p:extLst>
+          </p:nvPr>
+        </p:nvSpPr>
+        <p:spPr>
+          <a:xfrm>
+            <a:off x="0" y="0"/>
+            <a:ext cx="12192000" cy="6858000"/>
+          </a:xfrm>
+          <a:prstGeom prst="rect">
+            <a:avLst/>
+          </a:prstGeom>
+          <a:ln>
+            <a:noFill/>
+          </a:ln>
+        </p:spPr>
+        <p:style>
+          <a:lnRef idx="2">
+            <a:schemeClr val="accent1">
+              <a:shade val="50000"/>
+            </a:schemeClr>
+          </a:lnRef>
+          <a:fillRef idx="1">
+            <a:schemeClr val="accent1"/>
+          </a:fillRef>
+          <a:effectRef idx="0">
+            <a:schemeClr val="accent1"/>
+          </a:effectRef>
+          <a:fontRef idx="minor">
+            <a:schemeClr val="lt1"/>
+          </a:fontRef>
+        </p:style>
+        <p:txBody>
+          <a:bodyPr rtlCol="0" anchor="ctr"/>
+          <a:lstStyle/>
+          <a:p>
+            <a:pPr algn="ctr"/>
+            <a:endParaRPr lang="en-US"/>
+          </a:p>
+        </p:txBody>
+      </p:sp>
+      <p:sp useBgFill="1">
+        <p:nvSpPr>
+          <p:cNvPr id="25" name="Rectangle 24">
+            <a:extLst>
+              <a:ext uri="{FF2B5EF4-FFF2-40B4-BE49-F238E27FC236}">
+                <a16:creationId xmlns:a16="http://schemas.microsoft.com/office/drawing/2014/main" id="{0ADDB668-2CA4-4D2B-9C34-3487CA330BA8}"/>
+              </a:ext>
+              <a:ext uri="{C183D7F6-B498-43B3-948B-1728B52AA6E4}">
+                <adec:decorative xmlns:adec="http://schemas.microsoft.com/office/drawing/2017/decorative" val="1"/>
+              </a:ext>
+            </a:extLst>
+          </p:cNvPr>
+          <p:cNvSpPr>
+            <a:spLocks noGrp="1" noRot="1" noChangeAspect="1" noMove="1" noResize="1" noEditPoints="1" noAdjustHandles="1" noChangeArrowheads="1" noChangeShapeType="1" noTextEdit="1"/>
+          </p:cNvSpPr>
+          <p:nvPr>
+            <p:extLst>
+              <p:ext uri="{386F3935-93C4-4BCD-93E2-E3B085C9AB24}">
+                <p16:designElem xmlns:p16="http://schemas.microsoft.com/office/powerpoint/2015/main" val="1"/>
+              </p:ext>
+            </p:extLst>
+          </p:nvPr>
+        </p:nvSpPr>
+        <p:spPr>
+          <a:xfrm>
+            <a:off x="551553" y="304802"/>
+            <a:ext cx="11097349" cy="1573149"/>
+          </a:xfrm>
+          <a:prstGeom prst="rect">
+            <a:avLst/>
+          </a:prstGeom>
+          <a:ln w="12700">
+            <a:solidFill>
+              <a:srgbClr val="DEDEDE"/>
+            </a:solidFill>
+          </a:ln>
+          <a:effectLst>
+            <a:outerShdw blurRad="50800" dist="38100" dir="2700000" algn="tl" rotWithShape="0">
+              <a:schemeClr val="bg2">
+                <a:lumMod val="85000"/>
+                <a:alpha val="50000"/>
+              </a:schemeClr>
+            </a:outerShdw>
+          </a:effectLst>
+        </p:spPr>
+        <p:style>
+          <a:lnRef idx="2">
+            <a:schemeClr val="accent1">
+              <a:shade val="50000"/>
+            </a:schemeClr>
+          </a:lnRef>
+          <a:fillRef idx="1">
+            <a:schemeClr val="accent1"/>
+          </a:fillRef>
+          <a:effectRef idx="0">
+            <a:schemeClr val="accent1"/>
+          </a:effectRef>
+          <a:fontRef idx="minor">
+            <a:schemeClr val="lt1"/>
+          </a:fontRef>
+        </p:style>
+        <p:txBody>
+          <a:bodyPr rtlCol="0" anchor="ctr"/>
+          <a:lstStyle/>
+          <a:p>
+            <a:pPr marL="0" marR="0" lvl="0" indent="0" algn="ctr" defTabSz="914400" rtl="0" eaLnBrk="1" fontAlgn="auto" latinLnBrk="0" hangingPunct="1">
+              <a:lnSpc>
+                <a:spcPct val="100000"/>
+              </a:lnSpc>
+              <a:spcBef>
+                <a:spcPts val="0"/>
+              </a:spcBef>
+              <a:spcAft>
+                <a:spcPts val="0"/>
+              </a:spcAft>
+              <a:buClrTx/>
+              <a:buSzTx/>
+              <a:buFontTx/>
+              <a:buNone/>
+              <a:tabLst/>
+              <a:defRPr/>
+            </a:pPr>
+            <a:endParaRPr kumimoji="0" lang="en-US" sz="1800" b="0" i="0" u="none" strike="noStrike" kern="1200" cap="none" spc="0" normalizeH="0" baseline="0" noProof="0">
+              <a:ln>
+                <a:noFill/>
+              </a:ln>
+              <a:solidFill>
+                <a:prstClr val="white"/>
+              </a:solidFill>
+              <a:effectLst/>
+              <a:uLnTx/>
+              <a:uFillTx/>
+              <a:latin typeface="Calibri" panose="020F0502020204030204"/>
+              <a:ea typeface="+mn-ea"/>
+              <a:cs typeface="+mn-cs"/>
+            </a:endParaRPr>
+          </a:p>
+        </p:txBody>
+      </p:sp>
+      <p:sp>
+        <p:nvSpPr>
+          <p:cNvPr id="2" name="Title 1">
+            <a:extLst>
+              <a:ext uri="{FF2B5EF4-FFF2-40B4-BE49-F238E27FC236}">
+                <a16:creationId xmlns:a16="http://schemas.microsoft.com/office/drawing/2014/main" id="{C3E06DDA-46D6-E501-36EC-8966E74475A9}"/>
+              </a:ext>
+            </a:extLst>
+          </p:cNvPr>
+          <p:cNvSpPr>
+            <a:spLocks noGrp="1"/>
+          </p:cNvSpPr>
+          <p:nvPr>
+            <p:ph type="title"/>
+          </p:nvPr>
+        </p:nvSpPr>
+        <p:spPr>
+          <a:xfrm>
+            <a:off x="868680" y="405575"/>
+            <a:ext cx="5001768" cy="1371600"/>
+          </a:xfrm>
+        </p:spPr>
+        <p:txBody>
+          <a:bodyPr vert="horz" lIns="91440" tIns="45720" rIns="91440" bIns="45720" rtlCol="0" anchor="ctr">
+            <a:normAutofit/>
+          </a:bodyPr>
+          <a:lstStyle/>
+          <a:p>
+            <a:r>
+              <a:rPr lang="en-US" sz="3600" dirty="0"/>
+              <a:t>AI Adoption Landscape: </a:t>
+            </a:r>
+            <a:r>
+              <a:rPr lang="en-US" sz="2000" dirty="0"/>
+              <a:t>Variation Across Regions and Industries</a:t>
+            </a:r>
+            <a:endParaRPr lang="en-US" sz="3600" dirty="0"/>
+          </a:p>
+        </p:txBody>
+      </p:sp>
+      <p:sp>
+        <p:nvSpPr>
+          <p:cNvPr id="3" name="Content Placeholder 2">
+            <a:extLst>
+              <a:ext uri="{FF2B5EF4-FFF2-40B4-BE49-F238E27FC236}">
+                <a16:creationId xmlns:a16="http://schemas.microsoft.com/office/drawing/2014/main" id="{29CA610D-5E9C-F79C-6F16-A7B38AF8142A}"/>
+              </a:ext>
+            </a:extLst>
+          </p:cNvPr>
+          <p:cNvSpPr>
+            <a:spLocks noGrp="1"/>
+          </p:cNvSpPr>
+          <p:nvPr>
+            <p:ph idx="1"/>
+          </p:nvPr>
+        </p:nvSpPr>
+        <p:spPr>
+          <a:xfrm>
+            <a:off x="6382512" y="498698"/>
+            <a:ext cx="4940808" cy="1185353"/>
+          </a:xfrm>
+        </p:spPr>
+        <p:txBody>
+          <a:bodyPr vert="horz" lIns="91440" tIns="45720" rIns="91440" bIns="45720" rtlCol="0" anchor="ctr">
+            <a:normAutofit/>
+          </a:bodyPr>
+          <a:lstStyle/>
+          <a:p>
+            <a:pPr marL="0" indent="0">
+              <a:buNone/>
+            </a:pPr>
+            <a:r>
+              <a:rPr lang="en-US" sz="1800" dirty="0"/>
+              <a:t>Before evaluating outcomes, the first step was understanding where adoption is occurring</a:t>
+            </a:r>
+          </a:p>
+        </p:txBody>
+      </p:sp>
+      <p:sp>
+        <p:nvSpPr>
+          <p:cNvPr id="26" name="Rectangle 25">
+            <a:extLst>
+              <a:ext uri="{FF2B5EF4-FFF2-40B4-BE49-F238E27FC236}">
+                <a16:creationId xmlns:a16="http://schemas.microsoft.com/office/drawing/2014/main" id="{2568BC19-F052-4108-93E1-6A3D1DEC072F}"/>
+              </a:ext>
+              <a:ext uri="{C183D7F6-B498-43B3-948B-1728B52AA6E4}">
+                <adec:decorative xmlns:adec="http://schemas.microsoft.com/office/drawing/2017/decorative" val="1"/>
+              </a:ext>
+            </a:extLst>
+          </p:cNvPr>
+          <p:cNvSpPr>
+            <a:spLocks noGrp="1" noRot="1" noChangeAspect="1" noMove="1" noResize="1" noEditPoints="1" noAdjustHandles="1" noChangeArrowheads="1" noChangeShapeType="1" noTextEdit="1"/>
+          </p:cNvSpPr>
+          <p:nvPr>
+            <p:extLst>
+              <p:ext uri="{386F3935-93C4-4BCD-93E2-E3B085C9AB24}">
+                <p16:designElem xmlns:p16="http://schemas.microsoft.com/office/powerpoint/2015/main" val="1"/>
+              </p:ext>
+            </p:extLst>
+          </p:nvPr>
+        </p:nvSpPr>
+        <p:spPr>
+          <a:xfrm>
+            <a:off x="494784" y="764424"/>
+            <a:ext cx="128016" cy="653903"/>
+          </a:xfrm>
+          <a:prstGeom prst="rect">
+            <a:avLst/>
+          </a:prstGeom>
+          <a:solidFill>
+            <a:schemeClr val="accent2"/>
+          </a:solidFill>
+          <a:ln>
+            <a:noFill/>
+          </a:ln>
+        </p:spPr>
+        <p:style>
+          <a:lnRef idx="2">
+            <a:schemeClr val="accent1">
+              <a:shade val="50000"/>
+            </a:schemeClr>
+          </a:lnRef>
+          <a:fillRef idx="1">
+            <a:schemeClr val="accent1"/>
+          </a:fillRef>
+          <a:effectRef idx="0">
+            <a:schemeClr val="accent1"/>
+          </a:effectRef>
+          <a:fontRef idx="minor">
+            <a:schemeClr val="lt1"/>
+          </a:fontRef>
+        </p:style>
+        <p:txBody>
+          <a:bodyPr rtlCol="0" anchor="ctr"/>
+          <a:lstStyle/>
+          <a:p>
+            <a:pPr marL="0" marR="0" lvl="0" indent="0" algn="ctr" defTabSz="914400" rtl="0" eaLnBrk="1" fontAlgn="auto" latinLnBrk="0" hangingPunct="1">
+              <a:lnSpc>
+                <a:spcPct val="100000"/>
+              </a:lnSpc>
+              <a:spcBef>
+                <a:spcPts val="0"/>
+              </a:spcBef>
+              <a:spcAft>
+                <a:spcPts val="0"/>
+              </a:spcAft>
+              <a:buClrTx/>
+              <a:buSzTx/>
+              <a:buFontTx/>
+              <a:buNone/>
+              <a:tabLst/>
+              <a:defRPr/>
+            </a:pPr>
+            <a:endParaRPr kumimoji="0" lang="en-US" sz="1800" b="0" i="0" u="none" strike="noStrike" kern="1200" cap="none" spc="0" normalizeH="0" baseline="0" noProof="0">
+              <a:ln>
+                <a:noFill/>
+              </a:ln>
+              <a:solidFill>
+                <a:prstClr val="white"/>
+              </a:solidFill>
+              <a:effectLst/>
+              <a:uLnTx/>
+              <a:uFillTx/>
+              <a:latin typeface="Calibri" panose="020F0502020204030204"/>
+              <a:ea typeface="+mn-ea"/>
+              <a:cs typeface="+mn-cs"/>
+            </a:endParaRPr>
+          </a:p>
+        </p:txBody>
+      </p:sp>
+      <p:sp>
+        <p:nvSpPr>
+          <p:cNvPr id="17" name="Rectangle 16">
+            <a:extLst>
+              <a:ext uri="{FF2B5EF4-FFF2-40B4-BE49-F238E27FC236}">
+                <a16:creationId xmlns:a16="http://schemas.microsoft.com/office/drawing/2014/main" id="{D5FD337D-4D6B-4C8B-B6F5-121097E09881}"/>
+              </a:ext>
+              <a:ext uri="{C183D7F6-B498-43B3-948B-1728B52AA6E4}">
+                <adec:decorative xmlns:adec="http://schemas.microsoft.com/office/drawing/2017/decorative" val="1"/>
+              </a:ext>
+            </a:extLst>
+          </p:cNvPr>
+          <p:cNvSpPr>
+            <a:spLocks noGrp="1" noRot="1" noChangeAspect="1" noMove="1" noResize="1" noEditPoints="1" noAdjustHandles="1" noChangeArrowheads="1" noChangeShapeType="1" noTextEdit="1"/>
+          </p:cNvSpPr>
+          <p:nvPr>
+            <p:extLst>
+              <p:ext uri="{386F3935-93C4-4BCD-93E2-E3B085C9AB24}">
+                <p16:designElem xmlns:p16="http://schemas.microsoft.com/office/powerpoint/2015/main" val="1"/>
+              </p:ext>
+            </p:extLst>
+          </p:nvPr>
+        </p:nvSpPr>
+        <p:spPr>
+          <a:xfrm rot="5400000">
+            <a:off x="5586984" y="1071836"/>
+            <a:ext cx="1021458" cy="9144"/>
+          </a:xfrm>
+          <a:prstGeom prst="rect">
+            <a:avLst/>
+          </a:prstGeom>
+          <a:solidFill>
+            <a:srgbClr val="D5D5D5"/>
+          </a:solidFill>
+          <a:ln w="3175">
+            <a:noFill/>
+          </a:ln>
+          <a:effectLst/>
+        </p:spPr>
+        <p:style>
+          <a:lnRef idx="2">
+            <a:schemeClr val="accent1">
+              <a:shade val="50000"/>
+            </a:schemeClr>
+          </a:lnRef>
+          <a:fillRef idx="1">
+            <a:schemeClr val="accent1"/>
+          </a:fillRef>
+          <a:effectRef idx="0">
+            <a:schemeClr val="accent1"/>
+          </a:effectRef>
+          <a:fontRef idx="minor">
+            <a:schemeClr val="lt1"/>
+          </a:fontRef>
+        </p:style>
+        <p:txBody>
+          <a:bodyPr rtlCol="0" anchor="ctr"/>
+          <a:lstStyle/>
+          <a:p>
+            <a:pPr marL="0" marR="0" lvl="0" indent="0" algn="ctr" defTabSz="914400" rtl="0" eaLnBrk="1" fontAlgn="auto" latinLnBrk="0" hangingPunct="1">
+              <a:lnSpc>
+                <a:spcPct val="100000"/>
+              </a:lnSpc>
+              <a:spcBef>
+                <a:spcPts val="0"/>
+              </a:spcBef>
+              <a:spcAft>
+                <a:spcPts val="0"/>
+              </a:spcAft>
+              <a:buClrTx/>
+              <a:buSzTx/>
+              <a:buFontTx/>
+              <a:buNone/>
+              <a:tabLst/>
+              <a:defRPr/>
+            </a:pPr>
+            <a:endParaRPr kumimoji="0" lang="en-US" sz="1800" b="0" i="0" u="none" strike="noStrike" kern="1200" cap="none" spc="0" normalizeH="0" baseline="0" noProof="0">
+              <a:ln>
+                <a:noFill/>
+              </a:ln>
+              <a:solidFill>
+                <a:prstClr val="white"/>
+              </a:solidFill>
+              <a:effectLst/>
+              <a:uLnTx/>
+              <a:uFillTx/>
+              <a:latin typeface="Calibri" panose="020F0502020204030204"/>
+              <a:ea typeface="+mn-ea"/>
+              <a:cs typeface="+mn-cs"/>
+            </a:endParaRPr>
+          </a:p>
+        </p:txBody>
+      </p:sp>
+      <p:sp>
+        <p:nvSpPr>
+          <p:cNvPr id="19" name="Rectangle 18">
+            <a:extLst>
+              <a:ext uri="{FF2B5EF4-FFF2-40B4-BE49-F238E27FC236}">
+                <a16:creationId xmlns:a16="http://schemas.microsoft.com/office/drawing/2014/main" id="{36CD9152-EB5B-853B-2FE1-E0A3AAD03239}"/>
+              </a:ext>
+            </a:extLst>
+          </p:cNvPr>
+          <p:cNvSpPr/>
+          <p:nvPr/>
+        </p:nvSpPr>
+        <p:spPr>
+          <a:xfrm>
+            <a:off x="0" y="2099968"/>
+            <a:ext cx="12192000" cy="3229678"/>
+          </a:xfrm>
+          <a:prstGeom prst="rect">
+            <a:avLst/>
+          </a:prstGeom>
+          <a:solidFill>
+            <a:srgbClr val="F6F8FA"/>
+          </a:solidFill>
+          <a:ln>
+            <a:noFill/>
+          </a:ln>
+        </p:spPr>
+        <p:style>
+          <a:lnRef idx="2">
+            <a:schemeClr val="accent1">
+              <a:shade val="15000"/>
+            </a:schemeClr>
+          </a:lnRef>
+          <a:fillRef idx="1">
+            <a:schemeClr val="accent1"/>
+          </a:fillRef>
+          <a:effectRef idx="0">
+            <a:schemeClr val="accent1"/>
+          </a:effectRef>
+          <a:fontRef idx="minor">
+            <a:schemeClr val="lt1"/>
+          </a:fontRef>
+        </p:style>
+        <p:txBody>
+          <a:bodyPr rtlCol="0" anchor="ctr"/>
+          <a:lstStyle/>
+          <a:p>
+            <a:pPr algn="ctr"/>
+            <a:endParaRPr lang="en-US"/>
+          </a:p>
+        </p:txBody>
+      </p:sp>
+      <p:pic>
+        <p:nvPicPr>
+          <p:cNvPr id="5" name="Picture 4">
+            <a:extLst>
+              <a:ext uri="{FF2B5EF4-FFF2-40B4-BE49-F238E27FC236}">
+                <a16:creationId xmlns:a16="http://schemas.microsoft.com/office/drawing/2014/main" id="{0EA8FFFE-90FB-F66D-266A-E5DF38959F7F}"/>
               </a:ext>
             </a:extLst>
           </p:cNvPr>
@@ -4276,20 +6429,135 @@
         </p:blipFill>
         <p:spPr>
           <a:xfrm>
-            <a:off x="8540131" y="3790749"/>
-            <a:ext cx="3531099" cy="2905800"/>
+            <a:off x="6003241" y="2182753"/>
+            <a:ext cx="5965677" cy="3146893"/>
           </a:xfrm>
           <a:prstGeom prst="rect">
             <a:avLst/>
           </a:prstGeom>
         </p:spPr>
       </p:pic>
+      <p:grpSp>
+        <p:nvGrpSpPr>
+          <p:cNvPr id="9" name="Group 8">
+            <a:extLst>
+              <a:ext uri="{FF2B5EF4-FFF2-40B4-BE49-F238E27FC236}">
+                <a16:creationId xmlns:a16="http://schemas.microsoft.com/office/drawing/2014/main" id="{021F71EF-572C-4257-FF9D-BBD2E9D4D483}"/>
+              </a:ext>
+            </a:extLst>
+          </p:cNvPr>
+          <p:cNvGrpSpPr/>
+          <p:nvPr/>
+        </p:nvGrpSpPr>
+        <p:grpSpPr>
+          <a:xfrm>
+            <a:off x="934360" y="5551663"/>
+            <a:ext cx="10331734" cy="1077737"/>
+            <a:chOff x="1222401" y="5993992"/>
+            <a:chExt cx="9978013" cy="727810"/>
+          </a:xfrm>
+        </p:grpSpPr>
+        <p:sp>
+          <p:nvSpPr>
+            <p:cNvPr id="7" name="Rectangle 6">
+              <a:extLst>
+                <a:ext uri="{FF2B5EF4-FFF2-40B4-BE49-F238E27FC236}">
+                  <a16:creationId xmlns:a16="http://schemas.microsoft.com/office/drawing/2014/main" id="{D3B9B393-56E3-A8D0-6B17-D88F18875878}"/>
+                </a:ext>
+              </a:extLst>
+            </p:cNvPr>
+            <p:cNvSpPr/>
+            <p:nvPr/>
+          </p:nvSpPr>
+          <p:spPr>
+            <a:xfrm>
+              <a:off x="1222401" y="5993992"/>
+              <a:ext cx="9978013" cy="727810"/>
+            </a:xfrm>
+            <a:prstGeom prst="rect">
+              <a:avLst/>
+            </a:prstGeom>
+            <a:solidFill>
+              <a:srgbClr val="C7D7D7"/>
+            </a:solidFill>
+            <a:ln>
+              <a:noFill/>
+            </a:ln>
+          </p:spPr>
+          <p:style>
+            <a:lnRef idx="2">
+              <a:schemeClr val="accent1">
+                <a:shade val="15000"/>
+              </a:schemeClr>
+            </a:lnRef>
+            <a:fillRef idx="1">
+              <a:schemeClr val="accent1"/>
+            </a:fillRef>
+            <a:effectRef idx="0">
+              <a:schemeClr val="accent1"/>
+            </a:effectRef>
+            <a:fontRef idx="minor">
+              <a:schemeClr val="lt1"/>
+            </a:fontRef>
+          </p:style>
+          <p:txBody>
+            <a:bodyPr rtlCol="0" anchor="ctr"/>
+            <a:lstStyle/>
+            <a:p>
+              <a:pPr algn="ctr"/>
+              <a:endParaRPr lang="en-US"/>
+            </a:p>
+          </p:txBody>
+        </p:sp>
+        <p:sp>
+          <p:nvSpPr>
+            <p:cNvPr id="8" name="TextBox 7">
+              <a:extLst>
+                <a:ext uri="{FF2B5EF4-FFF2-40B4-BE49-F238E27FC236}">
+                  <a16:creationId xmlns:a16="http://schemas.microsoft.com/office/drawing/2014/main" id="{1A06BF15-B7EE-00BB-2950-27037AB7EE6E}"/>
+                </a:ext>
+              </a:extLst>
+            </p:cNvPr>
+            <p:cNvSpPr txBox="1"/>
+            <p:nvPr/>
+          </p:nvSpPr>
+          <p:spPr>
+            <a:xfrm>
+              <a:off x="1306286" y="6139683"/>
+              <a:ext cx="9817239" cy="436476"/>
+            </a:xfrm>
+            <a:prstGeom prst="rect">
+              <a:avLst/>
+            </a:prstGeom>
+            <a:noFill/>
+            <a:ln>
+              <a:noFill/>
+            </a:ln>
+          </p:spPr>
+          <p:txBody>
+            <a:bodyPr wrap="square" rtlCol="0">
+              <a:spAutoFit/>
+            </a:bodyPr>
+            <a:lstStyle/>
+            <a:p>
+              <a:r>
+                <a:rPr lang="en-US" b="1" dirty="0"/>
+                <a:t>Key Finding: </a:t>
+              </a:r>
+              <a:r>
+                <a:rPr lang="en-US" dirty="0"/>
+                <a:t>AI adoption showed a broad global footprint with clear industry differences. Technology and Finance led average adoption rates, highlighting variation in AI implementation across sectors.</a:t>
+              </a:r>
+            </a:p>
+          </p:txBody>
+        </p:sp>
+      </p:grpSp>
       <p:pic>
         <p:nvPicPr>
-          <p:cNvPr id="7" name="Picture 6">
-            <a:extLst>
-              <a:ext uri="{FF2B5EF4-FFF2-40B4-BE49-F238E27FC236}">
-                <a16:creationId xmlns:a16="http://schemas.microsoft.com/office/drawing/2014/main" id="{8470CC7E-F97F-E670-3F1D-50A958C3E2B3}"/>
+          <p:cNvPr id="12" name="Picture 11">
+            <a:extLst>
+              <a:ext uri="{FF2B5EF4-FFF2-40B4-BE49-F238E27FC236}">
+                <a16:creationId xmlns:a16="http://schemas.microsoft.com/office/drawing/2014/main" id="{F8A84465-6882-8302-96FF-A5FB4BCE0DE6}"/>
               </a:ext>
             </a:extLst>
           </p:cNvPr>
@@ -4306,8 +6574,8 @@
         </p:blipFill>
         <p:spPr>
           <a:xfrm>
-            <a:off x="596231" y="3361578"/>
-            <a:ext cx="3523404" cy="3131915"/>
+            <a:off x="558792" y="2354703"/>
+            <a:ext cx="5198174" cy="2865135"/>
           </a:xfrm>
           <a:prstGeom prst="rect">
             <a:avLst/>
@@ -4316,53 +6584,1045 @@
       </p:pic>
       <p:sp>
         <p:nvSpPr>
-          <p:cNvPr id="8" name="Content Placeholder 2">
-            <a:extLst>
-              <a:ext uri="{FF2B5EF4-FFF2-40B4-BE49-F238E27FC236}">
-                <a16:creationId xmlns:a16="http://schemas.microsoft.com/office/drawing/2014/main" id="{C292F525-FEA5-8734-C3A4-0D7180C945F8}"/>
-              </a:ext>
-            </a:extLst>
-          </p:cNvPr>
-          <p:cNvSpPr>
-            <a:spLocks noGrp="1"/>
-          </p:cNvSpPr>
-          <p:nvPr>
-            <p:ph idx="1"/>
-          </p:nvPr>
+          <p:cNvPr id="28" name="Left Brace 27">
+            <a:extLst>
+              <a:ext uri="{FF2B5EF4-FFF2-40B4-BE49-F238E27FC236}">
+                <a16:creationId xmlns:a16="http://schemas.microsoft.com/office/drawing/2014/main" id="{CD14936D-F9CA-36B9-BF06-C23B1E526DD6}"/>
+              </a:ext>
+            </a:extLst>
+          </p:cNvPr>
+          <p:cNvSpPr/>
+          <p:nvPr/>
         </p:nvSpPr>
         <p:spPr>
           <a:xfrm>
-            <a:off x="838200" y="5187351"/>
-            <a:ext cx="10515600" cy="989612"/>
+            <a:off x="622800" y="2773063"/>
+            <a:ext cx="103550" cy="301732"/>
           </a:xfrm>
+          <a:prstGeom prst="leftBrace">
+            <a:avLst/>
+          </a:prstGeom>
+          <a:ln>
+            <a:solidFill>
+              <a:srgbClr val="E97132"/>
+            </a:solidFill>
+          </a:ln>
         </p:spPr>
-        <p:txBody>
-          <a:bodyPr/>
-          <a:lstStyle/>
-          <a:p>
-            <a:r>
-              <a:rPr lang="en-US" dirty="0"/>
-              <a:t>Bar Chart Industry Distribution</a:t>
-            </a:r>
-          </a:p>
-          <a:p>
-            <a:r>
-              <a:rPr lang="en-US" dirty="0"/>
-              <a:t>Clear lead in tech followed by finance (not surprising)</a:t>
-            </a:r>
-          </a:p>
-          <a:p>
-            <a:endParaRPr lang="en-US" dirty="0"/>
-          </a:p>
-          <a:p>
-            <a:endParaRPr lang="en-US" dirty="0"/>
+        <p:style>
+          <a:lnRef idx="2">
+            <a:schemeClr val="accent1"/>
+          </a:lnRef>
+          <a:fillRef idx="0">
+            <a:schemeClr val="accent1"/>
+          </a:fillRef>
+          <a:effectRef idx="1">
+            <a:schemeClr val="accent1"/>
+          </a:effectRef>
+          <a:fontRef idx="minor">
+            <a:schemeClr val="tx1"/>
+          </a:fontRef>
+        </p:style>
+        <p:txBody>
+          <a:bodyPr rtlCol="0" anchor="ctr"/>
+          <a:lstStyle/>
+          <a:p>
+            <a:pPr algn="ctr"/>
+            <a:endParaRPr lang="en-US"/>
+          </a:p>
+        </p:txBody>
+      </p:sp>
+      <p:sp>
+        <p:nvSpPr>
+          <p:cNvPr id="29" name="TextBox 28">
+            <a:extLst>
+              <a:ext uri="{FF2B5EF4-FFF2-40B4-BE49-F238E27FC236}">
+                <a16:creationId xmlns:a16="http://schemas.microsoft.com/office/drawing/2014/main" id="{8FC4F569-A296-F7AA-6C7A-20C3FE9C9752}"/>
+              </a:ext>
+            </a:extLst>
+          </p:cNvPr>
+          <p:cNvSpPr txBox="1"/>
+          <p:nvPr/>
+        </p:nvSpPr>
+        <p:spPr>
+          <a:xfrm>
+            <a:off x="36481" y="2662471"/>
+            <a:ext cx="750157" cy="507831"/>
+          </a:xfrm>
+          <a:prstGeom prst="rect">
+            <a:avLst/>
+          </a:prstGeom>
+          <a:noFill/>
+        </p:spPr>
+        <p:txBody>
+          <a:bodyPr wrap="square" rtlCol="0">
+            <a:spAutoFit/>
+          </a:bodyPr>
+          <a:lstStyle/>
+          <a:p>
+            <a:r>
+              <a:rPr lang="en-US" sz="900" dirty="0"/>
+              <a:t>Early Adoption Leaders</a:t>
+            </a:r>
+          </a:p>
+        </p:txBody>
+      </p:sp>
+      <p:sp>
+        <p:nvSpPr>
+          <p:cNvPr id="30" name="TextBox 29">
+            <a:extLst>
+              <a:ext uri="{FF2B5EF4-FFF2-40B4-BE49-F238E27FC236}">
+                <a16:creationId xmlns:a16="http://schemas.microsoft.com/office/drawing/2014/main" id="{6E6DAD5E-0469-A58C-B554-735B4212218A}"/>
+              </a:ext>
+            </a:extLst>
+          </p:cNvPr>
+          <p:cNvSpPr txBox="1"/>
+          <p:nvPr/>
+        </p:nvSpPr>
+        <p:spPr>
+          <a:xfrm>
+            <a:off x="6382512" y="4962144"/>
+            <a:ext cx="4553712" cy="246221"/>
+          </a:xfrm>
+          <a:prstGeom prst="rect">
+            <a:avLst/>
+          </a:prstGeom>
+          <a:noFill/>
+        </p:spPr>
+        <p:txBody>
+          <a:bodyPr wrap="square" rtlCol="0">
+            <a:spAutoFit/>
+          </a:bodyPr>
+          <a:lstStyle/>
+          <a:p>
+            <a:pPr algn="ctr"/>
+            <a:r>
+              <a:rPr lang="en-US" sz="1000" i="1" dirty="0"/>
+              <a:t>Company-level data aggregated into country averages</a:t>
+            </a:r>
           </a:p>
         </p:txBody>
       </p:sp>
     </p:spTree>
     <p:extLst>
       <p:ext uri="{BB962C8B-B14F-4D97-AF65-F5344CB8AC3E}">
-        <p14:creationId xmlns:p14="http://schemas.microsoft.com/office/powerpoint/2010/main" val="3571166741"/>
+        <p14:creationId xmlns:p14="http://schemas.microsoft.com/office/powerpoint/2010/main" val="1015718169"/>
+      </p:ext>
+    </p:extLst>
+  </p:cSld>
+  <p:clrMapOvr>
+    <a:masterClrMapping/>
+  </p:clrMapOvr>
+</p:sld>
+</file>
+
+<file path=ppt/slides/slide5.xml><?xml version="1.0" encoding="utf-8"?>
+<p:sld xmlns:a="http://schemas.openxmlformats.org/drawingml/2006/main" xmlns:r="http://schemas.openxmlformats.org/officeDocument/2006/relationships" xmlns:p="http://schemas.openxmlformats.org/presentationml/2006/main">
+  <p:cSld>
+    <p:bg>
+      <p:bgPr>
+        <a:solidFill>
+          <a:schemeClr val="bg1"/>
+        </a:solidFill>
+        <a:effectLst/>
+      </p:bgPr>
+    </p:bg>
+    <p:spTree>
+      <p:nvGrpSpPr>
+        <p:cNvPr id="1" name=""/>
+        <p:cNvGrpSpPr/>
+        <p:nvPr/>
+      </p:nvGrpSpPr>
+      <p:grpSpPr>
+        <a:xfrm>
+          <a:off x="0" y="0"/>
+          <a:ext cx="0" cy="0"/>
+          <a:chOff x="0" y="0"/>
+          <a:chExt cx="0" cy="0"/>
+        </a:xfrm>
+      </p:grpSpPr>
+      <p:sp useBgFill="1">
+        <p:nvSpPr>
+          <p:cNvPr id="37" name="Rectangle 36">
+            <a:extLst>
+              <a:ext uri="{FF2B5EF4-FFF2-40B4-BE49-F238E27FC236}">
+                <a16:creationId xmlns:a16="http://schemas.microsoft.com/office/drawing/2014/main" id="{017517EF-BD4D-4055-BDB4-A322C53568AD}"/>
+              </a:ext>
+              <a:ext uri="{C183D7F6-B498-43B3-948B-1728B52AA6E4}">
+                <adec:decorative xmlns:adec="http://schemas.microsoft.com/office/drawing/2017/decorative" val="1"/>
+              </a:ext>
+            </a:extLst>
+          </p:cNvPr>
+          <p:cNvSpPr>
+            <a:spLocks noGrp="1" noRot="1" noChangeAspect="1" noMove="1" noResize="1" noEditPoints="1" noAdjustHandles="1" noChangeArrowheads="1" noChangeShapeType="1" noTextEdit="1"/>
+          </p:cNvSpPr>
+          <p:nvPr>
+            <p:extLst>
+              <p:ext uri="{386F3935-93C4-4BCD-93E2-E3B085C9AB24}">
+                <p16:designElem xmlns:p16="http://schemas.microsoft.com/office/powerpoint/2015/main" val="1"/>
+              </p:ext>
+            </p:extLst>
+          </p:nvPr>
+        </p:nvSpPr>
+        <p:spPr>
+          <a:xfrm>
+            <a:off x="0" y="0"/>
+            <a:ext cx="12192000" cy="6858000"/>
+          </a:xfrm>
+          <a:prstGeom prst="rect">
+            <a:avLst/>
+          </a:prstGeom>
+          <a:ln>
+            <a:noFill/>
+          </a:ln>
+        </p:spPr>
+        <p:style>
+          <a:lnRef idx="2">
+            <a:schemeClr val="accent1">
+              <a:shade val="50000"/>
+            </a:schemeClr>
+          </a:lnRef>
+          <a:fillRef idx="1">
+            <a:schemeClr val="accent1"/>
+          </a:fillRef>
+          <a:effectRef idx="0">
+            <a:schemeClr val="accent1"/>
+          </a:effectRef>
+          <a:fontRef idx="minor">
+            <a:schemeClr val="lt1"/>
+          </a:fontRef>
+        </p:style>
+        <p:txBody>
+          <a:bodyPr rtlCol="0" anchor="ctr"/>
+          <a:lstStyle/>
+          <a:p>
+            <a:pPr algn="ctr"/>
+            <a:endParaRPr lang="en-US"/>
+          </a:p>
+        </p:txBody>
+      </p:sp>
+      <p:sp useBgFill="1">
+        <p:nvSpPr>
+          <p:cNvPr id="39" name="Rectangle 38">
+            <a:extLst>
+              <a:ext uri="{FF2B5EF4-FFF2-40B4-BE49-F238E27FC236}">
+                <a16:creationId xmlns:a16="http://schemas.microsoft.com/office/drawing/2014/main" id="{0ADDB668-2CA4-4D2B-9C34-3487CA330BA8}"/>
+              </a:ext>
+              <a:ext uri="{C183D7F6-B498-43B3-948B-1728B52AA6E4}">
+                <adec:decorative xmlns:adec="http://schemas.microsoft.com/office/drawing/2017/decorative" val="1"/>
+              </a:ext>
+            </a:extLst>
+          </p:cNvPr>
+          <p:cNvSpPr>
+            <a:spLocks noGrp="1" noRot="1" noChangeAspect="1" noMove="1" noResize="1" noEditPoints="1" noAdjustHandles="1" noChangeArrowheads="1" noChangeShapeType="1" noTextEdit="1"/>
+          </p:cNvSpPr>
+          <p:nvPr>
+            <p:extLst>
+              <p:ext uri="{386F3935-93C4-4BCD-93E2-E3B085C9AB24}">
+                <p16:designElem xmlns:p16="http://schemas.microsoft.com/office/powerpoint/2015/main" val="1"/>
+              </p:ext>
+            </p:extLst>
+          </p:nvPr>
+        </p:nvSpPr>
+        <p:spPr>
+          <a:xfrm>
+            <a:off x="551553" y="304802"/>
+            <a:ext cx="11097349" cy="1573149"/>
+          </a:xfrm>
+          <a:prstGeom prst="rect">
+            <a:avLst/>
+          </a:prstGeom>
+          <a:ln w="12700">
+            <a:solidFill>
+              <a:srgbClr val="DEDEDE"/>
+            </a:solidFill>
+          </a:ln>
+          <a:effectLst>
+            <a:outerShdw blurRad="50800" dist="38100" dir="2700000" algn="tl" rotWithShape="0">
+              <a:schemeClr val="bg2">
+                <a:lumMod val="85000"/>
+                <a:alpha val="50000"/>
+              </a:schemeClr>
+            </a:outerShdw>
+          </a:effectLst>
+        </p:spPr>
+        <p:style>
+          <a:lnRef idx="2">
+            <a:schemeClr val="accent1">
+              <a:shade val="50000"/>
+            </a:schemeClr>
+          </a:lnRef>
+          <a:fillRef idx="1">
+            <a:schemeClr val="accent1"/>
+          </a:fillRef>
+          <a:effectRef idx="0">
+            <a:schemeClr val="accent1"/>
+          </a:effectRef>
+          <a:fontRef idx="minor">
+            <a:schemeClr val="lt1"/>
+          </a:fontRef>
+        </p:style>
+        <p:txBody>
+          <a:bodyPr rtlCol="0" anchor="ctr"/>
+          <a:lstStyle/>
+          <a:p>
+            <a:pPr marL="0" marR="0" lvl="0" indent="0" algn="ctr" defTabSz="914400" rtl="0" eaLnBrk="1" fontAlgn="auto" latinLnBrk="0" hangingPunct="1">
+              <a:lnSpc>
+                <a:spcPct val="100000"/>
+              </a:lnSpc>
+              <a:spcBef>
+                <a:spcPts val="0"/>
+              </a:spcBef>
+              <a:spcAft>
+                <a:spcPts val="0"/>
+              </a:spcAft>
+              <a:buClrTx/>
+              <a:buSzTx/>
+              <a:buFontTx/>
+              <a:buNone/>
+              <a:tabLst/>
+              <a:defRPr/>
+            </a:pPr>
+            <a:endParaRPr kumimoji="0" lang="en-US" sz="1800" b="0" i="0" u="none" strike="noStrike" kern="1200" cap="none" spc="0" normalizeH="0" baseline="0" noProof="0">
+              <a:ln>
+                <a:noFill/>
+              </a:ln>
+              <a:solidFill>
+                <a:prstClr val="white"/>
+              </a:solidFill>
+              <a:effectLst/>
+              <a:uLnTx/>
+              <a:uFillTx/>
+              <a:latin typeface="Calibri" panose="020F0502020204030204"/>
+              <a:ea typeface="+mn-ea"/>
+              <a:cs typeface="+mn-cs"/>
+            </a:endParaRPr>
+          </a:p>
+        </p:txBody>
+      </p:sp>
+      <p:sp>
+        <p:nvSpPr>
+          <p:cNvPr id="2" name="Title 1">
+            <a:extLst>
+              <a:ext uri="{FF2B5EF4-FFF2-40B4-BE49-F238E27FC236}">
+                <a16:creationId xmlns:a16="http://schemas.microsoft.com/office/drawing/2014/main" id="{38A02AE3-1D02-D7AA-D633-F7C2384604A5}"/>
+              </a:ext>
+            </a:extLst>
+          </p:cNvPr>
+          <p:cNvSpPr>
+            <a:spLocks noGrp="1"/>
+          </p:cNvSpPr>
+          <p:nvPr>
+            <p:ph type="title"/>
+          </p:nvPr>
+        </p:nvSpPr>
+        <p:spPr>
+          <a:xfrm>
+            <a:off x="901690" y="405575"/>
+            <a:ext cx="6430414" cy="1371600"/>
+          </a:xfrm>
+        </p:spPr>
+        <p:txBody>
+          <a:bodyPr vert="horz" lIns="91440" tIns="45720" rIns="91440" bIns="45720" rtlCol="0" anchor="ctr">
+            <a:normAutofit/>
+          </a:bodyPr>
+          <a:lstStyle/>
+          <a:p>
+            <a:r>
+              <a:rPr lang="en-US" sz="3600" kern="1200" dirty="0">
+                <a:solidFill>
+                  <a:schemeClr val="tx1"/>
+                </a:solidFill>
+                <a:latin typeface="+mj-lt"/>
+                <a:ea typeface="+mj-ea"/>
+                <a:cs typeface="+mj-cs"/>
+              </a:rPr>
+              <a:t>AI Maturity &amp; Business Outcomes</a:t>
+            </a:r>
+          </a:p>
+        </p:txBody>
+      </p:sp>
+      <p:sp>
+        <p:nvSpPr>
+          <p:cNvPr id="3" name="Content Placeholder 2">
+            <a:extLst>
+              <a:ext uri="{FF2B5EF4-FFF2-40B4-BE49-F238E27FC236}">
+                <a16:creationId xmlns:a16="http://schemas.microsoft.com/office/drawing/2014/main" id="{EBB29A5B-9800-983D-7DB9-E503BCEA5412}"/>
+              </a:ext>
+            </a:extLst>
+          </p:cNvPr>
+          <p:cNvSpPr>
+            <a:spLocks noGrp="1"/>
+          </p:cNvSpPr>
+          <p:nvPr>
+            <p:ph idx="1"/>
+          </p:nvPr>
+        </p:nvSpPr>
+        <p:spPr>
+          <a:xfrm>
+            <a:off x="7924796" y="498698"/>
+            <a:ext cx="2893382" cy="1185353"/>
+          </a:xfrm>
+        </p:spPr>
+        <p:txBody>
+          <a:bodyPr vert="horz" lIns="91440" tIns="45720" rIns="91440" bIns="45720" rtlCol="0" anchor="ctr">
+            <a:normAutofit fontScale="92500" lnSpcReduction="10000"/>
+          </a:bodyPr>
+          <a:lstStyle/>
+          <a:p>
+            <a:pPr marL="0" indent="0">
+              <a:buNone/>
+            </a:pPr>
+            <a:r>
+              <a:rPr lang="en-US" sz="1800" dirty="0"/>
+              <a:t>Evaluating whether AI implementation maturity is associated with measurable improvements in organizational performance</a:t>
+            </a:r>
+            <a:endParaRPr lang="en-US" sz="1800" kern="1200" dirty="0">
+              <a:solidFill>
+                <a:schemeClr val="tx1"/>
+              </a:solidFill>
+              <a:latin typeface="+mn-lt"/>
+              <a:ea typeface="+mn-ea"/>
+              <a:cs typeface="+mn-cs"/>
+            </a:endParaRPr>
+          </a:p>
+        </p:txBody>
+      </p:sp>
+      <p:sp>
+        <p:nvSpPr>
+          <p:cNvPr id="41" name="Rectangle 40">
+            <a:extLst>
+              <a:ext uri="{FF2B5EF4-FFF2-40B4-BE49-F238E27FC236}">
+                <a16:creationId xmlns:a16="http://schemas.microsoft.com/office/drawing/2014/main" id="{2568BC19-F052-4108-93E1-6A3D1DEC072F}"/>
+              </a:ext>
+              <a:ext uri="{C183D7F6-B498-43B3-948B-1728B52AA6E4}">
+                <adec:decorative xmlns:adec="http://schemas.microsoft.com/office/drawing/2017/decorative" val="1"/>
+              </a:ext>
+            </a:extLst>
+          </p:cNvPr>
+          <p:cNvSpPr>
+            <a:spLocks noGrp="1" noRot="1" noChangeAspect="1" noMove="1" noResize="1" noEditPoints="1" noAdjustHandles="1" noChangeArrowheads="1" noChangeShapeType="1" noTextEdit="1"/>
+          </p:cNvSpPr>
+          <p:nvPr>
+            <p:extLst>
+              <p:ext uri="{386F3935-93C4-4BCD-93E2-E3B085C9AB24}">
+                <p16:designElem xmlns:p16="http://schemas.microsoft.com/office/powerpoint/2015/main" val="1"/>
+              </p:ext>
+            </p:extLst>
+          </p:nvPr>
+        </p:nvSpPr>
+        <p:spPr>
+          <a:xfrm>
+            <a:off x="494784" y="764424"/>
+            <a:ext cx="128016" cy="653903"/>
+          </a:xfrm>
+          <a:prstGeom prst="rect">
+            <a:avLst/>
+          </a:prstGeom>
+          <a:solidFill>
+            <a:schemeClr val="accent2"/>
+          </a:solidFill>
+          <a:ln>
+            <a:noFill/>
+          </a:ln>
+        </p:spPr>
+        <p:style>
+          <a:lnRef idx="2">
+            <a:schemeClr val="accent1">
+              <a:shade val="50000"/>
+            </a:schemeClr>
+          </a:lnRef>
+          <a:fillRef idx="1">
+            <a:schemeClr val="accent1"/>
+          </a:fillRef>
+          <a:effectRef idx="0">
+            <a:schemeClr val="accent1"/>
+          </a:effectRef>
+          <a:fontRef idx="minor">
+            <a:schemeClr val="lt1"/>
+          </a:fontRef>
+        </p:style>
+        <p:txBody>
+          <a:bodyPr rtlCol="0" anchor="ctr"/>
+          <a:lstStyle/>
+          <a:p>
+            <a:pPr algn="ctr"/>
+            <a:endParaRPr lang="en-US">
+              <a:solidFill>
+                <a:prstClr val="white"/>
+              </a:solidFill>
+              <a:latin typeface="Calibri" panose="020F0502020204030204"/>
+            </a:endParaRPr>
+          </a:p>
+        </p:txBody>
+      </p:sp>
+      <p:sp>
+        <p:nvSpPr>
+          <p:cNvPr id="43" name="Rectangle 42">
+            <a:extLst>
+              <a:ext uri="{FF2B5EF4-FFF2-40B4-BE49-F238E27FC236}">
+                <a16:creationId xmlns:a16="http://schemas.microsoft.com/office/drawing/2014/main" id="{D5FD337D-4D6B-4C8B-B6F5-121097E09881}"/>
+              </a:ext>
+              <a:ext uri="{C183D7F6-B498-43B3-948B-1728B52AA6E4}">
+                <adec:decorative xmlns:adec="http://schemas.microsoft.com/office/drawing/2017/decorative" val="1"/>
+              </a:ext>
+            </a:extLst>
+          </p:cNvPr>
+          <p:cNvSpPr>
+            <a:spLocks noGrp="1" noRot="1" noChangeAspect="1" noMove="1" noResize="1" noEditPoints="1" noAdjustHandles="1" noChangeArrowheads="1" noChangeShapeType="1" noTextEdit="1"/>
+          </p:cNvSpPr>
+          <p:nvPr>
+            <p:extLst>
+              <p:ext uri="{386F3935-93C4-4BCD-93E2-E3B085C9AB24}">
+                <p16:designElem xmlns:p16="http://schemas.microsoft.com/office/powerpoint/2015/main" val="1"/>
+              </p:ext>
+            </p:extLst>
+          </p:nvPr>
+        </p:nvSpPr>
+        <p:spPr>
+          <a:xfrm rot="5400000">
+            <a:off x="7126032" y="1067264"/>
+            <a:ext cx="1021458" cy="18288"/>
+          </a:xfrm>
+          <a:prstGeom prst="rect">
+            <a:avLst/>
+          </a:prstGeom>
+          <a:solidFill>
+            <a:srgbClr val="D5D5D5"/>
+          </a:solidFill>
+          <a:ln w="3175">
+            <a:noFill/>
+          </a:ln>
+          <a:effectLst/>
+        </p:spPr>
+        <p:style>
+          <a:lnRef idx="2">
+            <a:schemeClr val="accent1">
+              <a:shade val="50000"/>
+            </a:schemeClr>
+          </a:lnRef>
+          <a:fillRef idx="1">
+            <a:schemeClr val="accent1"/>
+          </a:fillRef>
+          <a:effectRef idx="0">
+            <a:schemeClr val="accent1"/>
+          </a:effectRef>
+          <a:fontRef idx="minor">
+            <a:schemeClr val="lt1"/>
+          </a:fontRef>
+        </p:style>
+        <p:txBody>
+          <a:bodyPr rtlCol="0" anchor="ctr"/>
+          <a:lstStyle/>
+          <a:p>
+            <a:pPr algn="ctr"/>
+            <a:endParaRPr lang="en-US">
+              <a:solidFill>
+                <a:prstClr val="white"/>
+              </a:solidFill>
+              <a:latin typeface="Calibri" panose="020F0502020204030204"/>
+            </a:endParaRPr>
+          </a:p>
+        </p:txBody>
+      </p:sp>
+      <p:pic>
+        <p:nvPicPr>
+          <p:cNvPr id="5" name="Picture 4">
+            <a:extLst>
+              <a:ext uri="{FF2B5EF4-FFF2-40B4-BE49-F238E27FC236}">
+                <a16:creationId xmlns:a16="http://schemas.microsoft.com/office/drawing/2014/main" id="{B096357F-A1F4-0E28-436F-D2C4BA37AE1A}"/>
+              </a:ext>
+            </a:extLst>
+          </p:cNvPr>
+          <p:cNvPicPr>
+            <a:picLocks noChangeAspect="1"/>
+          </p:cNvPicPr>
+          <p:nvPr/>
+        </p:nvPicPr>
+        <p:blipFill>
+          <a:blip r:embed="rId3"/>
+          <a:srcRect l="2153" r="644" b="1"/>
+          <a:stretch>
+            <a:fillRect/>
+          </a:stretch>
+        </p:blipFill>
+        <p:spPr>
+          <a:xfrm>
+            <a:off x="2676282" y="1971072"/>
+            <a:ext cx="6494348" cy="3991990"/>
+          </a:xfrm>
+          <a:prstGeom prst="rect">
+            <a:avLst/>
+          </a:prstGeom>
+        </p:spPr>
+      </p:pic>
+      <p:grpSp>
+        <p:nvGrpSpPr>
+          <p:cNvPr id="7" name="Group 6">
+            <a:extLst>
+              <a:ext uri="{FF2B5EF4-FFF2-40B4-BE49-F238E27FC236}">
+                <a16:creationId xmlns:a16="http://schemas.microsoft.com/office/drawing/2014/main" id="{5810047C-8B4E-526F-4DA6-E3A105328308}"/>
+              </a:ext>
+            </a:extLst>
+          </p:cNvPr>
+          <p:cNvGrpSpPr/>
+          <p:nvPr/>
+        </p:nvGrpSpPr>
+        <p:grpSpPr>
+          <a:xfrm>
+            <a:off x="934360" y="5913119"/>
+            <a:ext cx="10331734" cy="813817"/>
+            <a:chOff x="1222401" y="5468089"/>
+            <a:chExt cx="9978013" cy="1253713"/>
+          </a:xfrm>
+        </p:grpSpPr>
+        <p:sp>
+          <p:nvSpPr>
+            <p:cNvPr id="8" name="Rectangle 7">
+              <a:extLst>
+                <a:ext uri="{FF2B5EF4-FFF2-40B4-BE49-F238E27FC236}">
+                  <a16:creationId xmlns:a16="http://schemas.microsoft.com/office/drawing/2014/main" id="{E577087C-5C6A-2776-A04E-45971388940C}"/>
+                </a:ext>
+              </a:extLst>
+            </p:cNvPr>
+            <p:cNvSpPr/>
+            <p:nvPr/>
+          </p:nvSpPr>
+          <p:spPr>
+            <a:xfrm>
+              <a:off x="1222401" y="5468089"/>
+              <a:ext cx="9978013" cy="1253713"/>
+            </a:xfrm>
+            <a:prstGeom prst="rect">
+              <a:avLst/>
+            </a:prstGeom>
+            <a:solidFill>
+              <a:srgbClr val="C7D7D7"/>
+            </a:solidFill>
+            <a:ln>
+              <a:noFill/>
+            </a:ln>
+          </p:spPr>
+          <p:style>
+            <a:lnRef idx="2">
+              <a:schemeClr val="accent1">
+                <a:shade val="15000"/>
+              </a:schemeClr>
+            </a:lnRef>
+            <a:fillRef idx="1">
+              <a:schemeClr val="accent1"/>
+            </a:fillRef>
+            <a:effectRef idx="0">
+              <a:schemeClr val="accent1"/>
+            </a:effectRef>
+            <a:fontRef idx="minor">
+              <a:schemeClr val="lt1"/>
+            </a:fontRef>
+          </p:style>
+          <p:txBody>
+            <a:bodyPr rtlCol="0" anchor="ctr"/>
+            <a:lstStyle/>
+            <a:p>
+              <a:pPr algn="ctr"/>
+              <a:endParaRPr lang="en-US"/>
+            </a:p>
+          </p:txBody>
+        </p:sp>
+        <p:sp>
+          <p:nvSpPr>
+            <p:cNvPr id="9" name="TextBox 8">
+              <a:extLst>
+                <a:ext uri="{FF2B5EF4-FFF2-40B4-BE49-F238E27FC236}">
+                  <a16:creationId xmlns:a16="http://schemas.microsoft.com/office/drawing/2014/main" id="{00CCECA2-BD6C-1033-B581-554783600C05}"/>
+                </a:ext>
+              </a:extLst>
+            </p:cNvPr>
+            <p:cNvSpPr txBox="1"/>
+            <p:nvPr/>
+          </p:nvSpPr>
+          <p:spPr>
+            <a:xfrm>
+              <a:off x="1306286" y="5557435"/>
+              <a:ext cx="9817239" cy="995694"/>
+            </a:xfrm>
+            <a:prstGeom prst="rect">
+              <a:avLst/>
+            </a:prstGeom>
+            <a:noFill/>
+            <a:ln>
+              <a:noFill/>
+            </a:ln>
+          </p:spPr>
+          <p:txBody>
+            <a:bodyPr wrap="square" rtlCol="0">
+              <a:spAutoFit/>
+            </a:bodyPr>
+            <a:lstStyle/>
+            <a:p>
+              <a:r>
+                <a:rPr lang="en-US" b="1" dirty="0"/>
+                <a:t>Key Finding: </a:t>
+              </a:r>
+              <a:r>
+                <a:rPr lang="en-US" dirty="0"/>
+                <a:t>Higher AI maturity was associated with stronger business outcomes, with </a:t>
+              </a:r>
+              <a:r>
+                <a:rPr lang="en-US" b="1" dirty="0"/>
+                <a:t>full adoption associated with the greatest improvements</a:t>
+              </a:r>
+              <a:r>
+                <a:rPr lang="en-US" dirty="0"/>
+                <a:t> across productivity, revenue, and cost efficiency</a:t>
+              </a:r>
+            </a:p>
+          </p:txBody>
+        </p:sp>
+      </p:grpSp>
+      <p:grpSp>
+        <p:nvGrpSpPr>
+          <p:cNvPr id="15" name="Group 14">
+            <a:extLst>
+              <a:ext uri="{FF2B5EF4-FFF2-40B4-BE49-F238E27FC236}">
+                <a16:creationId xmlns:a16="http://schemas.microsoft.com/office/drawing/2014/main" id="{B7DBBB07-B288-0EC2-91FB-4289FC05E172}"/>
+              </a:ext>
+            </a:extLst>
+          </p:cNvPr>
+          <p:cNvGrpSpPr/>
+          <p:nvPr/>
+        </p:nvGrpSpPr>
+        <p:grpSpPr>
+          <a:xfrm>
+            <a:off x="9265916" y="2182752"/>
+            <a:ext cx="2021840" cy="1032858"/>
+            <a:chOff x="9990435" y="2182752"/>
+            <a:chExt cx="1131565" cy="1032858"/>
+          </a:xfrm>
+        </p:grpSpPr>
+        <p:sp>
+          <p:nvSpPr>
+            <p:cNvPr id="11" name="Rectangle 10">
+              <a:extLst>
+                <a:ext uri="{FF2B5EF4-FFF2-40B4-BE49-F238E27FC236}">
+                  <a16:creationId xmlns:a16="http://schemas.microsoft.com/office/drawing/2014/main" id="{B53EB4D7-C041-9B42-AB26-515AF27945C3}"/>
+                </a:ext>
+              </a:extLst>
+            </p:cNvPr>
+            <p:cNvSpPr/>
+            <p:nvPr/>
+          </p:nvSpPr>
+          <p:spPr>
+            <a:xfrm>
+              <a:off x="9990435" y="2182752"/>
+              <a:ext cx="1114506" cy="1027807"/>
+            </a:xfrm>
+            <a:prstGeom prst="rect">
+              <a:avLst/>
+            </a:prstGeom>
+            <a:solidFill>
+              <a:srgbClr val="E6E6E6"/>
+            </a:solidFill>
+            <a:ln>
+              <a:noFill/>
+            </a:ln>
+          </p:spPr>
+          <p:style>
+            <a:lnRef idx="2">
+              <a:schemeClr val="accent1">
+                <a:shade val="15000"/>
+              </a:schemeClr>
+            </a:lnRef>
+            <a:fillRef idx="1">
+              <a:schemeClr val="accent1"/>
+            </a:fillRef>
+            <a:effectRef idx="0">
+              <a:schemeClr val="accent1"/>
+            </a:effectRef>
+            <a:fontRef idx="minor">
+              <a:schemeClr val="lt1"/>
+            </a:fontRef>
+          </p:style>
+          <p:txBody>
+            <a:bodyPr rtlCol="0" anchor="ctr"/>
+            <a:lstStyle/>
+            <a:p>
+              <a:pPr algn="ctr"/>
+              <a:endParaRPr lang="en-US"/>
+            </a:p>
+          </p:txBody>
+        </p:sp>
+        <p:sp>
+          <p:nvSpPr>
+            <p:cNvPr id="13" name="TextBox 12">
+              <a:extLst>
+                <a:ext uri="{FF2B5EF4-FFF2-40B4-BE49-F238E27FC236}">
+                  <a16:creationId xmlns:a16="http://schemas.microsoft.com/office/drawing/2014/main" id="{E48FC5D1-8D23-C721-1171-E1E271CE5ECF}"/>
+                </a:ext>
+              </a:extLst>
+            </p:cNvPr>
+            <p:cNvSpPr txBox="1"/>
+            <p:nvPr/>
+          </p:nvSpPr>
+          <p:spPr>
+            <a:xfrm>
+              <a:off x="10007494" y="2261503"/>
+              <a:ext cx="1114506" cy="954107"/>
+            </a:xfrm>
+            <a:prstGeom prst="rect">
+              <a:avLst/>
+            </a:prstGeom>
+            <a:noFill/>
+          </p:spPr>
+          <p:txBody>
+            <a:bodyPr wrap="square" rtlCol="0">
+              <a:spAutoFit/>
+            </a:bodyPr>
+            <a:lstStyle/>
+            <a:p>
+              <a:r>
+                <a:rPr lang="en-US" sz="1200" dirty="0"/>
+                <a:t>AI Maturity          Productivity</a:t>
+              </a:r>
+            </a:p>
+            <a:p>
+              <a:pPr algn="ctr"/>
+              <a:r>
+                <a:rPr lang="en-US" sz="1500" dirty="0"/>
+                <a:t>r = 0.74</a:t>
+              </a:r>
+            </a:p>
+            <a:p>
+              <a:pPr algn="ctr"/>
+              <a:r>
+                <a:rPr lang="en-US" sz="1500" dirty="0"/>
+                <a:t>p &lt; 0.001</a:t>
+              </a:r>
+            </a:p>
+            <a:p>
+              <a:r>
+                <a:rPr lang="en-US" sz="1200" dirty="0"/>
+                <a:t>Strong Positive Correlation</a:t>
+              </a:r>
+              <a:endParaRPr lang="en-US" sz="1400" dirty="0"/>
+            </a:p>
+          </p:txBody>
+        </p:sp>
+      </p:grpSp>
+      <p:sp>
+        <p:nvSpPr>
+          <p:cNvPr id="24" name="Arrow: Left-Right 23">
+            <a:extLst>
+              <a:ext uri="{FF2B5EF4-FFF2-40B4-BE49-F238E27FC236}">
+                <a16:creationId xmlns:a16="http://schemas.microsoft.com/office/drawing/2014/main" id="{D875435A-82B7-505B-7107-0D84FE30BE74}"/>
+              </a:ext>
+            </a:extLst>
+          </p:cNvPr>
+          <p:cNvSpPr/>
+          <p:nvPr/>
+        </p:nvSpPr>
+        <p:spPr>
+          <a:xfrm>
+            <a:off x="10175240" y="2387600"/>
+            <a:ext cx="121920" cy="45719"/>
+          </a:xfrm>
+          <a:prstGeom prst="leftRightArrow">
+            <a:avLst/>
+          </a:prstGeom>
+        </p:spPr>
+        <p:style>
+          <a:lnRef idx="2">
+            <a:schemeClr val="accent1">
+              <a:shade val="15000"/>
+            </a:schemeClr>
+          </a:lnRef>
+          <a:fillRef idx="1">
+            <a:schemeClr val="accent1"/>
+          </a:fillRef>
+          <a:effectRef idx="0">
+            <a:schemeClr val="accent1"/>
+          </a:effectRef>
+          <a:fontRef idx="minor">
+            <a:schemeClr val="lt1"/>
+          </a:fontRef>
+        </p:style>
+        <p:txBody>
+          <a:bodyPr rtlCol="0" anchor="ctr"/>
+          <a:lstStyle/>
+          <a:p>
+            <a:pPr algn="ctr"/>
+            <a:endParaRPr lang="en-US"/>
+          </a:p>
+        </p:txBody>
+      </p:sp>
+    </p:spTree>
+    <p:extLst>
+      <p:ext uri="{BB962C8B-B14F-4D97-AF65-F5344CB8AC3E}">
+        <p14:creationId xmlns:p14="http://schemas.microsoft.com/office/powerpoint/2010/main" val="2750376120"/>
+      </p:ext>
+    </p:extLst>
+  </p:cSld>
+  <p:clrMapOvr>
+    <a:masterClrMapping/>
+  </p:clrMapOvr>
+</p:sld>
+</file>
+
+<file path=ppt/slides/slide6.xml><?xml version="1.0" encoding="utf-8"?>
+<p:sld xmlns:a="http://schemas.openxmlformats.org/drawingml/2006/main" xmlns:r="http://schemas.openxmlformats.org/officeDocument/2006/relationships" xmlns:p="http://schemas.openxmlformats.org/presentationml/2006/main">
+  <p:cSld>
+    <p:spTree>
+      <p:nvGrpSpPr>
+        <p:cNvPr id="1" name=""/>
+        <p:cNvGrpSpPr/>
+        <p:nvPr/>
+      </p:nvGrpSpPr>
+      <p:grpSpPr>
+        <a:xfrm>
+          <a:off x="0" y="0"/>
+          <a:ext cx="0" cy="0"/>
+          <a:chOff x="0" y="0"/>
+          <a:chExt cx="0" cy="0"/>
+        </a:xfrm>
+      </p:grpSpPr>
+      <p:sp>
+        <p:nvSpPr>
+          <p:cNvPr id="2" name="Title 1">
+            <a:extLst>
+              <a:ext uri="{FF2B5EF4-FFF2-40B4-BE49-F238E27FC236}">
+                <a16:creationId xmlns:a16="http://schemas.microsoft.com/office/drawing/2014/main" id="{702C627F-769A-755A-7E96-96F4E60ACC7F}"/>
+              </a:ext>
+            </a:extLst>
+          </p:cNvPr>
+          <p:cNvSpPr>
+            <a:spLocks noGrp="1"/>
+          </p:cNvSpPr>
+          <p:nvPr>
+            <p:ph type="title"/>
+          </p:nvPr>
+        </p:nvSpPr>
+        <p:spPr>
+          <a:xfrm>
+            <a:off x="0" y="21804"/>
+            <a:ext cx="10515600" cy="1325563"/>
+          </a:xfrm>
+        </p:spPr>
+        <p:txBody>
+          <a:bodyPr/>
+          <a:lstStyle/>
+          <a:p>
+            <a:r>
+              <a:rPr lang="en-US" dirty="0"/>
+              <a:t>Workforce Impact- </a:t>
+            </a:r>
+            <a:br>
+              <a:rPr lang="en-US" dirty="0"/>
+            </a:br>
+            <a:r>
+              <a:rPr lang="en-US" sz="2800" dirty="0"/>
+              <a:t>Company Size and Workforce Transformation</a:t>
+            </a:r>
+            <a:endParaRPr lang="en-US" dirty="0"/>
+          </a:p>
+        </p:txBody>
+      </p:sp>
+      <p:sp>
+        <p:nvSpPr>
+          <p:cNvPr id="3" name="Content Placeholder 2">
+            <a:extLst>
+              <a:ext uri="{FF2B5EF4-FFF2-40B4-BE49-F238E27FC236}">
+                <a16:creationId xmlns:a16="http://schemas.microsoft.com/office/drawing/2014/main" id="{A07C6C6A-C2B6-FE76-0B8C-D7784D45C408}"/>
+              </a:ext>
+            </a:extLst>
+          </p:cNvPr>
+          <p:cNvSpPr>
+            <a:spLocks noGrp="1"/>
+          </p:cNvSpPr>
+          <p:nvPr>
+            <p:ph idx="1"/>
+          </p:nvPr>
+        </p:nvSpPr>
+        <p:spPr>
+          <a:xfrm>
+            <a:off x="952174" y="5897621"/>
+            <a:ext cx="10515600" cy="828136"/>
+          </a:xfrm>
+        </p:spPr>
+        <p:txBody>
+          <a:bodyPr>
+            <a:normAutofit fontScale="55000" lnSpcReduction="20000"/>
+          </a:bodyPr>
+          <a:lstStyle/>
+          <a:p>
+            <a:r>
+              <a:rPr lang="en-US" dirty="0"/>
+              <a:t>The left chart explains the correlation between company size and workforce transformation. The larger the company, the more change there is. The right chart expands on this by normalizing the data and displaying that the transformation happens at similar scales, despite larger companies appearing to be more impacted. The net change for each is slightly positive, with the majority of companies reporting high workforce reskilling. </a:t>
+            </a:r>
+          </a:p>
+        </p:txBody>
+      </p:sp>
+      <p:pic>
+        <p:nvPicPr>
+          <p:cNvPr id="5" name="Picture 4">
+            <a:extLst>
+              <a:ext uri="{FF2B5EF4-FFF2-40B4-BE49-F238E27FC236}">
+                <a16:creationId xmlns:a16="http://schemas.microsoft.com/office/drawing/2014/main" id="{16D0A72B-13D3-A10A-CAAD-75A1AD0A4F6C}"/>
+              </a:ext>
+            </a:extLst>
+          </p:cNvPr>
+          <p:cNvPicPr>
+            <a:picLocks noChangeAspect="1"/>
+          </p:cNvPicPr>
+          <p:nvPr/>
+        </p:nvPicPr>
+        <p:blipFill>
+          <a:blip r:embed="rId2"/>
+          <a:stretch>
+            <a:fillRect/>
+          </a:stretch>
+        </p:blipFill>
+        <p:spPr>
+          <a:xfrm>
+            <a:off x="0" y="1316941"/>
+            <a:ext cx="12192000" cy="4560045"/>
+          </a:xfrm>
+          <a:prstGeom prst="rect">
+            <a:avLst/>
+          </a:prstGeom>
+        </p:spPr>
+      </p:pic>
+      <p:pic>
+        <p:nvPicPr>
+          <p:cNvPr id="7" name="Picture 6">
+            <a:extLst>
+              <a:ext uri="{FF2B5EF4-FFF2-40B4-BE49-F238E27FC236}">
+                <a16:creationId xmlns:a16="http://schemas.microsoft.com/office/drawing/2014/main" id="{BF9A1AC2-4BF2-79A5-6E18-AE2BD1C9DA72}"/>
+              </a:ext>
+            </a:extLst>
+          </p:cNvPr>
+          <p:cNvPicPr>
+            <a:picLocks noChangeAspect="1"/>
+          </p:cNvPicPr>
+          <p:nvPr/>
+        </p:nvPicPr>
+        <p:blipFill>
+          <a:blip r:embed="rId3"/>
+          <a:stretch>
+            <a:fillRect/>
+          </a:stretch>
+        </p:blipFill>
+        <p:spPr>
+          <a:xfrm>
+            <a:off x="-3093873" y="2989577"/>
+            <a:ext cx="3529890" cy="2908044"/>
+          </a:xfrm>
+          <a:prstGeom prst="rect">
+            <a:avLst/>
+          </a:prstGeom>
+        </p:spPr>
+      </p:pic>
+    </p:spTree>
+    <p:extLst>
+      <p:ext uri="{BB962C8B-B14F-4D97-AF65-F5344CB8AC3E}">
+        <p14:creationId xmlns:p14="http://schemas.microsoft.com/office/powerpoint/2010/main" val="252665425"/>
       </p:ext>
     </p:extLst>
   </p:cSld>
@@ -4373,6 +7633,92 @@
 </file>
 
 <file path=ppt/slides/slide7.xml><?xml version="1.0" encoding="utf-8"?>
+<p:sld xmlns:a="http://schemas.openxmlformats.org/drawingml/2006/main" xmlns:r="http://schemas.openxmlformats.org/officeDocument/2006/relationships" xmlns:p="http://schemas.openxmlformats.org/presentationml/2006/main">
+  <p:cSld>
+    <p:spTree>
+      <p:nvGrpSpPr>
+        <p:cNvPr id="1" name=""/>
+        <p:cNvGrpSpPr/>
+        <p:nvPr/>
+      </p:nvGrpSpPr>
+      <p:grpSpPr>
+        <a:xfrm>
+          <a:off x="0" y="0"/>
+          <a:ext cx="0" cy="0"/>
+          <a:chOff x="0" y="0"/>
+          <a:chExt cx="0" cy="0"/>
+        </a:xfrm>
+      </p:grpSpPr>
+      <p:sp>
+        <p:nvSpPr>
+          <p:cNvPr id="2" name="Title 1">
+            <a:extLst>
+              <a:ext uri="{FF2B5EF4-FFF2-40B4-BE49-F238E27FC236}">
+                <a16:creationId xmlns:a16="http://schemas.microsoft.com/office/drawing/2014/main" id="{1A4D5854-B4D0-4DD5-8A4A-F946AF856786}"/>
+              </a:ext>
+            </a:extLst>
+          </p:cNvPr>
+          <p:cNvSpPr>
+            <a:spLocks noGrp="1"/>
+          </p:cNvSpPr>
+          <p:nvPr>
+            <p:ph type="title"/>
+          </p:nvPr>
+        </p:nvSpPr>
+        <p:spPr/>
+        <p:txBody>
+          <a:bodyPr/>
+          <a:lstStyle/>
+          <a:p>
+            <a:r>
+              <a:rPr lang="en-US" dirty="0"/>
+              <a:t>Recommendation and Way Forward</a:t>
+            </a:r>
+          </a:p>
+        </p:txBody>
+      </p:sp>
+      <p:sp>
+        <p:nvSpPr>
+          <p:cNvPr id="3" name="Content Placeholder 2">
+            <a:extLst>
+              <a:ext uri="{FF2B5EF4-FFF2-40B4-BE49-F238E27FC236}">
+                <a16:creationId xmlns:a16="http://schemas.microsoft.com/office/drawing/2014/main" id="{EBF325F0-63EA-4B60-67CF-5972F3A46B02}"/>
+              </a:ext>
+            </a:extLst>
+          </p:cNvPr>
+          <p:cNvSpPr>
+            <a:spLocks noGrp="1"/>
+          </p:cNvSpPr>
+          <p:nvPr>
+            <p:ph idx="1"/>
+          </p:nvPr>
+        </p:nvSpPr>
+        <p:spPr/>
+        <p:txBody>
+          <a:bodyPr/>
+          <a:lstStyle/>
+          <a:p>
+            <a:r>
+              <a:rPr lang="en-US" dirty="0"/>
+              <a:t>AI is super rad, people should take a minute to learn about it</a:t>
+            </a:r>
+          </a:p>
+        </p:txBody>
+      </p:sp>
+    </p:spTree>
+    <p:extLst>
+      <p:ext uri="{BB962C8B-B14F-4D97-AF65-F5344CB8AC3E}">
+        <p14:creationId xmlns:p14="http://schemas.microsoft.com/office/powerpoint/2010/main" val="2406880652"/>
+      </p:ext>
+    </p:extLst>
+  </p:cSld>
+  <p:clrMapOvr>
+    <a:masterClrMapping/>
+  </p:clrMapOvr>
+</p:sld>
+</file>
+
+<file path=ppt/slides/slide8.xml><?xml version="1.0" encoding="utf-8"?>
 <p:sld xmlns:a="http://schemas.openxmlformats.org/drawingml/2006/main" xmlns:r="http://schemas.openxmlformats.org/officeDocument/2006/relationships" xmlns:p="http://schemas.openxmlformats.org/presentationml/2006/main">
   <p:cSld>
     <p:spTree>
@@ -4473,89 +7819,6 @@
     <p:extLst>
       <p:ext uri="{BB962C8B-B14F-4D97-AF65-F5344CB8AC3E}">
         <p14:creationId xmlns:p14="http://schemas.microsoft.com/office/powerpoint/2010/main" val="3846943167"/>
-      </p:ext>
-    </p:extLst>
-  </p:cSld>
-  <p:clrMapOvr>
-    <a:masterClrMapping/>
-  </p:clrMapOvr>
-</p:sld>
-</file>
-
-<file path=ppt/slides/slide8.xml><?xml version="1.0" encoding="utf-8"?>
-<p:sld xmlns:a="http://schemas.openxmlformats.org/drawingml/2006/main" xmlns:r="http://schemas.openxmlformats.org/officeDocument/2006/relationships" xmlns:p="http://schemas.openxmlformats.org/presentationml/2006/main">
-  <p:cSld>
-    <p:spTree>
-      <p:nvGrpSpPr>
-        <p:cNvPr id="1" name=""/>
-        <p:cNvGrpSpPr/>
-        <p:nvPr/>
-      </p:nvGrpSpPr>
-      <p:grpSpPr>
-        <a:xfrm>
-          <a:off x="0" y="0"/>
-          <a:ext cx="0" cy="0"/>
-          <a:chOff x="0" y="0"/>
-          <a:chExt cx="0" cy="0"/>
-        </a:xfrm>
-      </p:grpSpPr>
-      <p:sp>
-        <p:nvSpPr>
-          <p:cNvPr id="2" name="Title 1">
-            <a:extLst>
-              <a:ext uri="{FF2B5EF4-FFF2-40B4-BE49-F238E27FC236}">
-                <a16:creationId xmlns:a16="http://schemas.microsoft.com/office/drawing/2014/main" id="{1A4D5854-B4D0-4DD5-8A4A-F946AF856786}"/>
-              </a:ext>
-            </a:extLst>
-          </p:cNvPr>
-          <p:cNvSpPr>
-            <a:spLocks noGrp="1"/>
-          </p:cNvSpPr>
-          <p:nvPr>
-            <p:ph type="title"/>
-          </p:nvPr>
-        </p:nvSpPr>
-        <p:spPr/>
-        <p:txBody>
-          <a:bodyPr/>
-          <a:lstStyle/>
-          <a:p>
-            <a:r>
-              <a:rPr lang="en-US" dirty="0"/>
-              <a:t>Results- specify here</a:t>
-            </a:r>
-          </a:p>
-        </p:txBody>
-      </p:sp>
-      <p:sp>
-        <p:nvSpPr>
-          <p:cNvPr id="3" name="Content Placeholder 2">
-            <a:extLst>
-              <a:ext uri="{FF2B5EF4-FFF2-40B4-BE49-F238E27FC236}">
-                <a16:creationId xmlns:a16="http://schemas.microsoft.com/office/drawing/2014/main" id="{EBF325F0-63EA-4B60-67CF-5972F3A46B02}"/>
-              </a:ext>
-            </a:extLst>
-          </p:cNvPr>
-          <p:cNvSpPr>
-            <a:spLocks noGrp="1"/>
-          </p:cNvSpPr>
-          <p:nvPr>
-            <p:ph idx="1"/>
-          </p:nvPr>
-        </p:nvSpPr>
-        <p:spPr/>
-        <p:txBody>
-          <a:bodyPr/>
-          <a:lstStyle/>
-          <a:p>
-            <a:endParaRPr lang="en-US"/>
-          </a:p>
-        </p:txBody>
-      </p:sp>
-    </p:spTree>
-    <p:extLst>
-      <p:ext uri="{BB962C8B-B14F-4D97-AF65-F5344CB8AC3E}">
-        <p14:creationId xmlns:p14="http://schemas.microsoft.com/office/powerpoint/2010/main" val="2406880652"/>
       </p:ext>
     </p:extLst>
   </p:cSld>
@@ -4878,4 +8141,319 @@
     </a:ext>
   </a:extLst>
 </a:theme>
+</file>
+
+<file path=ppt/theme/theme2.xml><?xml version="1.0" encoding="utf-8"?>
+<a:theme xmlns:a="http://schemas.openxmlformats.org/drawingml/2006/main" name="Office Theme">
+  <a:themeElements>
+    <a:clrScheme name="Office">
+      <a:dk1>
+        <a:sysClr val="windowText" lastClr="000000"/>
+      </a:dk1>
+      <a:lt1>
+        <a:sysClr val="window" lastClr="FFFFFF"/>
+      </a:lt1>
+      <a:dk2>
+        <a:srgbClr val="0E2841"/>
+      </a:dk2>
+      <a:lt2>
+        <a:srgbClr val="E8E8E8"/>
+      </a:lt2>
+      <a:accent1>
+        <a:srgbClr val="156082"/>
+      </a:accent1>
+      <a:accent2>
+        <a:srgbClr val="E97132"/>
+      </a:accent2>
+      <a:accent3>
+        <a:srgbClr val="196B24"/>
+      </a:accent3>
+      <a:accent4>
+        <a:srgbClr val="0F9ED5"/>
+      </a:accent4>
+      <a:accent5>
+        <a:srgbClr val="A02B93"/>
+      </a:accent5>
+      <a:accent6>
+        <a:srgbClr val="4EA72E"/>
+      </a:accent6>
+      <a:hlink>
+        <a:srgbClr val="467886"/>
+      </a:hlink>
+      <a:folHlink>
+        <a:srgbClr val="96607D"/>
+      </a:folHlink>
+    </a:clrScheme>
+    <a:fontScheme name="Office">
+      <a:majorFont>
+        <a:latin typeface="Aptos Display" panose="02110004020202020204"/>
+        <a:ea typeface=""/>
+        <a:cs typeface=""/>
+        <a:font script="Jpan" typeface="游ゴシック Light"/>
+        <a:font script="Hang" typeface="맑은 고딕"/>
+        <a:font script="Hans" typeface="等线 Light"/>
+        <a:font script="Hant" typeface="新細明體"/>
+        <a:font script="Arab" typeface="Times New Roman"/>
+        <a:font script="Hebr" typeface="Times New Roman"/>
+        <a:font script="Thai" typeface="Angsana New"/>
+        <a:font script="Ethi" typeface="Nyala"/>
+        <a:font script="Beng" typeface="Vrinda"/>
+        <a:font script="Gujr" typeface="Shruti"/>
+        <a:font script="Khmr" typeface="MoolBoran"/>
+        <a:font script="Knda" typeface="Tunga"/>
+        <a:font script="Guru" typeface="Raavi"/>
+        <a:font script="Cans" typeface="Euphemia"/>
+        <a:font script="Cher" typeface="Plantagenet Cherokee"/>
+        <a:font script="Yiii" typeface="Microsoft Yi Baiti"/>
+        <a:font script="Tibt" typeface="Microsoft Himalaya"/>
+        <a:font script="Thaa" typeface="MV Boli"/>
+        <a:font script="Deva" typeface="Mangal"/>
+        <a:font script="Telu" typeface="Gautami"/>
+        <a:font script="Taml" typeface="Latha"/>
+        <a:font script="Syrc" typeface="Estrangelo Edessa"/>
+        <a:font script="Orya" typeface="Kalinga"/>
+        <a:font script="Mlym" typeface="Kartika"/>
+        <a:font script="Laoo" typeface="DokChampa"/>
+        <a:font script="Sinh" typeface="Iskoola Pota"/>
+        <a:font script="Mong" typeface="Mongolian Baiti"/>
+        <a:font script="Viet" typeface="Times New Roman"/>
+        <a:font script="Uigh" typeface="Microsoft Uighur"/>
+        <a:font script="Geor" typeface="Sylfaen"/>
+        <a:font script="Armn" typeface="Arial"/>
+        <a:font script="Bugi" typeface="Leelawadee UI"/>
+        <a:font script="Bopo" typeface="Microsoft JhengHei"/>
+        <a:font script="Java" typeface="Javanese Text"/>
+        <a:font script="Lisu" typeface="Segoe UI"/>
+        <a:font script="Mymr" typeface="Myanmar Text"/>
+        <a:font script="Nkoo" typeface="Ebrima"/>
+        <a:font script="Olck" typeface="Nirmala UI"/>
+        <a:font script="Osma" typeface="Ebrima"/>
+        <a:font script="Phag" typeface="Phagspa"/>
+        <a:font script="Syrn" typeface="Estrangelo Edessa"/>
+        <a:font script="Syrj" typeface="Estrangelo Edessa"/>
+        <a:font script="Syre" typeface="Estrangelo Edessa"/>
+        <a:font script="Sora" typeface="Nirmala UI"/>
+        <a:font script="Tale" typeface="Microsoft Tai Le"/>
+        <a:font script="Talu" typeface="Microsoft New Tai Lue"/>
+        <a:font script="Tfng" typeface="Ebrima"/>
+      </a:majorFont>
+      <a:minorFont>
+        <a:latin typeface="Aptos" panose="02110004020202020204"/>
+        <a:ea typeface=""/>
+        <a:cs typeface=""/>
+        <a:font script="Jpan" typeface="游ゴシック"/>
+        <a:font script="Hang" typeface="맑은 고딕"/>
+        <a:font script="Hans" typeface="等线"/>
+        <a:font script="Hant" typeface="新細明體"/>
+        <a:font script="Arab" typeface="Arial"/>
+        <a:font script="Hebr" typeface="Arial"/>
+        <a:font script="Thai" typeface="Cordia New"/>
+        <a:font script="Ethi" typeface="Nyala"/>
+        <a:font script="Beng" typeface="Vrinda"/>
+        <a:font script="Gujr" typeface="Shruti"/>
+        <a:font script="Khmr" typeface="DaunPenh"/>
+        <a:font script="Knda" typeface="Tunga"/>
+        <a:font script="Guru" typeface="Raavi"/>
+        <a:font script="Cans" typeface="Euphemia"/>
+        <a:font script="Cher" typeface="Plantagenet Cherokee"/>
+        <a:font script="Yiii" typeface="Microsoft Yi Baiti"/>
+        <a:font script="Tibt" typeface="Microsoft Himalaya"/>
+        <a:font script="Thaa" typeface="MV Boli"/>
+        <a:font script="Deva" typeface="Mangal"/>
+        <a:font script="Telu" typeface="Gautami"/>
+        <a:font script="Taml" typeface="Latha"/>
+        <a:font script="Syrc" typeface="Estrangelo Edessa"/>
+        <a:font script="Orya" typeface="Kalinga"/>
+        <a:font script="Mlym" typeface="Kartika"/>
+        <a:font script="Laoo" typeface="DokChampa"/>
+        <a:font script="Sinh" typeface="Iskoola Pota"/>
+        <a:font script="Mong" typeface="Mongolian Baiti"/>
+        <a:font script="Viet" typeface="Arial"/>
+        <a:font script="Uigh" typeface="Microsoft Uighur"/>
+        <a:font script="Geor" typeface="Sylfaen"/>
+        <a:font script="Armn" typeface="Arial"/>
+        <a:font script="Bugi" typeface="Leelawadee UI"/>
+        <a:font script="Bopo" typeface="Microsoft JhengHei"/>
+        <a:font script="Java" typeface="Javanese Text"/>
+        <a:font script="Lisu" typeface="Segoe UI"/>
+        <a:font script="Mymr" typeface="Myanmar Text"/>
+        <a:font script="Nkoo" typeface="Ebrima"/>
+        <a:font script="Olck" typeface="Nirmala UI"/>
+        <a:font script="Osma" typeface="Ebrima"/>
+        <a:font script="Phag" typeface="Phagspa"/>
+        <a:font script="Syrn" typeface="Estrangelo Edessa"/>
+        <a:font script="Syrj" typeface="Estrangelo Edessa"/>
+        <a:font script="Syre" typeface="Estrangelo Edessa"/>
+        <a:font script="Sora" typeface="Nirmala UI"/>
+        <a:font script="Tale" typeface="Microsoft Tai Le"/>
+        <a:font script="Talu" typeface="Microsoft New Tai Lue"/>
+        <a:font script="Tfng" typeface="Ebrima"/>
+      </a:minorFont>
+    </a:fontScheme>
+    <a:fmtScheme name="Office">
+      <a:fillStyleLst>
+        <a:solidFill>
+          <a:schemeClr val="phClr"/>
+        </a:solidFill>
+        <a:gradFill rotWithShape="1">
+          <a:gsLst>
+            <a:gs pos="0">
+              <a:schemeClr val="phClr">
+                <a:lumMod val="110000"/>
+                <a:satMod val="105000"/>
+                <a:tint val="67000"/>
+              </a:schemeClr>
+            </a:gs>
+            <a:gs pos="50000">
+              <a:schemeClr val="phClr">
+                <a:lumMod val="105000"/>
+                <a:satMod val="103000"/>
+                <a:tint val="73000"/>
+              </a:schemeClr>
+            </a:gs>
+            <a:gs pos="100000">
+              <a:schemeClr val="phClr">
+                <a:lumMod val="105000"/>
+                <a:satMod val="109000"/>
+                <a:tint val="81000"/>
+              </a:schemeClr>
+            </a:gs>
+          </a:gsLst>
+          <a:lin ang="5400000" scaled="0"/>
+        </a:gradFill>
+        <a:gradFill rotWithShape="1">
+          <a:gsLst>
+            <a:gs pos="0">
+              <a:schemeClr val="phClr">
+                <a:satMod val="103000"/>
+                <a:lumMod val="102000"/>
+                <a:tint val="94000"/>
+              </a:schemeClr>
+            </a:gs>
+            <a:gs pos="50000">
+              <a:schemeClr val="phClr">
+                <a:satMod val="110000"/>
+                <a:lumMod val="100000"/>
+                <a:shade val="100000"/>
+              </a:schemeClr>
+            </a:gs>
+            <a:gs pos="100000">
+              <a:schemeClr val="phClr">
+                <a:lumMod val="99000"/>
+                <a:satMod val="120000"/>
+                <a:shade val="78000"/>
+              </a:schemeClr>
+            </a:gs>
+          </a:gsLst>
+          <a:lin ang="5400000" scaled="0"/>
+        </a:gradFill>
+      </a:fillStyleLst>
+      <a:lnStyleLst>
+        <a:ln w="12700" cap="flat" cmpd="sng" algn="ctr">
+          <a:solidFill>
+            <a:schemeClr val="phClr"/>
+          </a:solidFill>
+          <a:prstDash val="solid"/>
+          <a:miter lim="800000"/>
+        </a:ln>
+        <a:ln w="19050" cap="flat" cmpd="sng" algn="ctr">
+          <a:solidFill>
+            <a:schemeClr val="phClr"/>
+          </a:solidFill>
+          <a:prstDash val="solid"/>
+          <a:miter lim="800000"/>
+        </a:ln>
+        <a:ln w="25400" cap="flat" cmpd="sng" algn="ctr">
+          <a:solidFill>
+            <a:schemeClr val="phClr"/>
+          </a:solidFill>
+          <a:prstDash val="solid"/>
+          <a:miter lim="800000"/>
+        </a:ln>
+      </a:lnStyleLst>
+      <a:effectStyleLst>
+        <a:effectStyle>
+          <a:effectLst/>
+        </a:effectStyle>
+        <a:effectStyle>
+          <a:effectLst/>
+        </a:effectStyle>
+        <a:effectStyle>
+          <a:effectLst>
+            <a:outerShdw blurRad="57150" dist="19050" dir="5400000" algn="ctr" rotWithShape="0">
+              <a:srgbClr val="000000">
+                <a:alpha val="63000"/>
+              </a:srgbClr>
+            </a:outerShdw>
+          </a:effectLst>
+        </a:effectStyle>
+      </a:effectStyleLst>
+      <a:bgFillStyleLst>
+        <a:solidFill>
+          <a:schemeClr val="phClr"/>
+        </a:solidFill>
+        <a:solidFill>
+          <a:schemeClr val="phClr">
+            <a:tint val="95000"/>
+            <a:satMod val="170000"/>
+          </a:schemeClr>
+        </a:solidFill>
+        <a:gradFill rotWithShape="1">
+          <a:gsLst>
+            <a:gs pos="0">
+              <a:schemeClr val="phClr">
+                <a:tint val="93000"/>
+                <a:satMod val="150000"/>
+                <a:shade val="98000"/>
+                <a:lumMod val="102000"/>
+              </a:schemeClr>
+            </a:gs>
+            <a:gs pos="50000">
+              <a:schemeClr val="phClr">
+                <a:tint val="98000"/>
+                <a:satMod val="130000"/>
+                <a:shade val="90000"/>
+                <a:lumMod val="103000"/>
+              </a:schemeClr>
+            </a:gs>
+            <a:gs pos="100000">
+              <a:schemeClr val="phClr">
+                <a:shade val="63000"/>
+                <a:satMod val="120000"/>
+              </a:schemeClr>
+            </a:gs>
+          </a:gsLst>
+          <a:lin ang="5400000" scaled="0"/>
+        </a:gradFill>
+      </a:bgFillStyleLst>
+    </a:fmtScheme>
+  </a:themeElements>
+  <a:objectDefaults>
+    <a:lnDef>
+      <a:spPr/>
+      <a:bodyPr/>
+      <a:lstStyle/>
+      <a:style>
+        <a:lnRef idx="2">
+          <a:schemeClr val="accent1"/>
+        </a:lnRef>
+        <a:fillRef idx="0">
+          <a:schemeClr val="accent1"/>
+        </a:fillRef>
+        <a:effectRef idx="1">
+          <a:schemeClr val="accent1"/>
+        </a:effectRef>
+        <a:fontRef idx="minor">
+          <a:schemeClr val="tx1"/>
+        </a:fontRef>
+      </a:style>
+    </a:lnDef>
+  </a:objectDefaults>
+  <a:extraClrSchemeLst/>
+  <a:extLst>
+    <a:ext uri="{05A4C25C-085E-4340-85A3-A5531E510DB2}">
+      <thm15:themeFamily xmlns:thm15="http://schemas.microsoft.com/office/thememl/2012/main" name="Office Theme" id="{2E142A2C-CD16-42D6-873A-C26D2A0506FA}" vid="{1BDDFF52-6CD6-40A5-AB3C-68EB2F1E4D0A}"/>
+    </a:ext>
+  </a:extLst>
+</a:theme>
 </file>
--- a/Presentation/Global AI Adoption & Workforce Impact Dataset.pptx
+++ b/Presentation/Global AI Adoption & Workforce Impact Dataset.pptx
@@ -14,8 +14,8 @@
     <p:sldId id="265" r:id="rId5"/>
     <p:sldId id="266" r:id="rId6"/>
     <p:sldId id="264" r:id="rId7"/>
-    <p:sldId id="262" r:id="rId8"/>
-    <p:sldId id="263" r:id="rId9"/>
+    <p:sldId id="267" r:id="rId8"/>
+    <p:sldId id="268" r:id="rId9"/>
   </p:sldIdLst>
   <p:sldSz cx="12192000" cy="6858000"/>
   <p:notesSz cx="6858000" cy="9144000"/>
@@ -115,6 +115,4041 @@
     </a:lvl9pPr>
   </p:defaultTextStyle>
 </p:presentation>
+</file>
+
+<file path=ppt/diagrams/colors1.xml><?xml version="1.0" encoding="utf-8"?>
+<dgm:colorsDef xmlns:dgm="http://schemas.openxmlformats.org/drawingml/2006/diagram" xmlns:a="http://schemas.openxmlformats.org/drawingml/2006/main" uniqueId="urn:microsoft.com/office/officeart/2005/8/colors/accent2_2">
+  <dgm:title val=""/>
+  <dgm:desc val=""/>
+  <dgm:catLst>
+    <dgm:cat type="accent2" pri="11200"/>
+  </dgm:catLst>
+  <dgm:styleLbl name="node0">
+    <dgm:fillClrLst meth="repeat">
+      <a:schemeClr val="accent2"/>
+    </dgm:fillClrLst>
+    <dgm:linClrLst meth="repeat">
+      <a:schemeClr val="lt1"/>
+    </dgm:linClrLst>
+    <dgm:effectClrLst/>
+    <dgm:txLinClrLst/>
+    <dgm:txFillClrLst/>
+    <dgm:txEffectClrLst/>
+  </dgm:styleLbl>
+  <dgm:styleLbl name="node1">
+    <dgm:fillClrLst meth="repeat">
+      <a:schemeClr val="accent2"/>
+    </dgm:fillClrLst>
+    <dgm:linClrLst meth="repeat">
+      <a:schemeClr val="lt1"/>
+    </dgm:linClrLst>
+    <dgm:effectClrLst/>
+    <dgm:txLinClrLst/>
+    <dgm:txFillClrLst/>
+    <dgm:txEffectClrLst/>
+  </dgm:styleLbl>
+  <dgm:styleLbl name="alignNode1">
+    <dgm:fillClrLst meth="repeat">
+      <a:schemeClr val="accent2"/>
+    </dgm:fillClrLst>
+    <dgm:linClrLst meth="repeat">
+      <a:schemeClr val="accent2"/>
+    </dgm:linClrLst>
+    <dgm:effectClrLst/>
+    <dgm:txLinClrLst/>
+    <dgm:txFillClrLst/>
+    <dgm:txEffectClrLst/>
+  </dgm:styleLbl>
+  <dgm:styleLbl name="lnNode1">
+    <dgm:fillClrLst meth="repeat">
+      <a:schemeClr val="accent2"/>
+    </dgm:fillClrLst>
+    <dgm:linClrLst meth="repeat">
+      <a:schemeClr val="lt1"/>
+    </dgm:linClrLst>
+    <dgm:effectClrLst/>
+    <dgm:txLinClrLst/>
+    <dgm:txFillClrLst/>
+    <dgm:txEffectClrLst/>
+  </dgm:styleLbl>
+  <dgm:styleLbl name="vennNode1">
+    <dgm:fillClrLst meth="repeat">
+      <a:schemeClr val="accent2">
+        <a:alpha val="50000"/>
+      </a:schemeClr>
+    </dgm:fillClrLst>
+    <dgm:linClrLst meth="repeat">
+      <a:schemeClr val="lt1"/>
+    </dgm:linClrLst>
+    <dgm:effectClrLst/>
+    <dgm:txLinClrLst/>
+    <dgm:txFillClrLst/>
+    <dgm:txEffectClrLst/>
+  </dgm:styleLbl>
+  <dgm:styleLbl name="node2">
+    <dgm:fillClrLst meth="repeat">
+      <a:schemeClr val="accent2"/>
+    </dgm:fillClrLst>
+    <dgm:linClrLst meth="repeat">
+      <a:schemeClr val="lt1"/>
+    </dgm:linClrLst>
+    <dgm:effectClrLst/>
+    <dgm:txLinClrLst/>
+    <dgm:txFillClrLst/>
+    <dgm:txEffectClrLst/>
+  </dgm:styleLbl>
+  <dgm:styleLbl name="node3">
+    <dgm:fillClrLst meth="repeat">
+      <a:schemeClr val="accent2"/>
+    </dgm:fillClrLst>
+    <dgm:linClrLst meth="repeat">
+      <a:schemeClr val="lt1"/>
+    </dgm:linClrLst>
+    <dgm:effectClrLst/>
+    <dgm:txLinClrLst/>
+    <dgm:txFillClrLst/>
+    <dgm:txEffectClrLst/>
+  </dgm:styleLbl>
+  <dgm:styleLbl name="node4">
+    <dgm:fillClrLst meth="repeat">
+      <a:schemeClr val="accent2"/>
+    </dgm:fillClrLst>
+    <dgm:linClrLst meth="repeat">
+      <a:schemeClr val="lt1"/>
+    </dgm:linClrLst>
+    <dgm:effectClrLst/>
+    <dgm:txLinClrLst/>
+    <dgm:txFillClrLst/>
+    <dgm:txEffectClrLst/>
+  </dgm:styleLbl>
+  <dgm:styleLbl name="fgImgPlace1">
+    <dgm:fillClrLst meth="repeat">
+      <a:schemeClr val="accent2">
+        <a:tint val="50000"/>
+      </a:schemeClr>
+    </dgm:fillClrLst>
+    <dgm:linClrLst meth="repeat">
+      <a:schemeClr val="lt1"/>
+    </dgm:linClrLst>
+    <dgm:effectClrLst/>
+    <dgm:txLinClrLst/>
+    <dgm:txFillClrLst meth="repeat">
+      <a:schemeClr val="lt1"/>
+    </dgm:txFillClrLst>
+    <dgm:txEffectClrLst/>
+  </dgm:styleLbl>
+  <dgm:styleLbl name="alignImgPlace1">
+    <dgm:fillClrLst meth="repeat">
+      <a:schemeClr val="accent2">
+        <a:tint val="50000"/>
+      </a:schemeClr>
+    </dgm:fillClrLst>
+    <dgm:linClrLst meth="repeat">
+      <a:schemeClr val="lt1"/>
+    </dgm:linClrLst>
+    <dgm:effectClrLst/>
+    <dgm:txLinClrLst/>
+    <dgm:txFillClrLst meth="repeat">
+      <a:schemeClr val="lt1"/>
+    </dgm:txFillClrLst>
+    <dgm:txEffectClrLst/>
+  </dgm:styleLbl>
+  <dgm:styleLbl name="bgImgPlace1">
+    <dgm:fillClrLst meth="repeat">
+      <a:schemeClr val="accent2">
+        <a:tint val="50000"/>
+      </a:schemeClr>
+    </dgm:fillClrLst>
+    <dgm:linClrLst meth="repeat">
+      <a:schemeClr val="lt1"/>
+    </dgm:linClrLst>
+    <dgm:effectClrLst/>
+    <dgm:txLinClrLst/>
+    <dgm:txFillClrLst meth="repeat">
+      <a:schemeClr val="lt1"/>
+    </dgm:txFillClrLst>
+    <dgm:txEffectClrLst/>
+  </dgm:styleLbl>
+  <dgm:styleLbl name="sibTrans2D1">
+    <dgm:fillClrLst meth="repeat">
+      <a:schemeClr val="accent2">
+        <a:tint val="60000"/>
+      </a:schemeClr>
+    </dgm:fillClrLst>
+    <dgm:linClrLst meth="repeat">
+      <a:schemeClr val="accent2">
+        <a:tint val="60000"/>
+      </a:schemeClr>
+    </dgm:linClrLst>
+    <dgm:effectClrLst/>
+    <dgm:txLinClrLst/>
+    <dgm:txFillClrLst/>
+    <dgm:txEffectClrLst/>
+  </dgm:styleLbl>
+  <dgm:styleLbl name="fgSibTrans2D1">
+    <dgm:fillClrLst meth="repeat">
+      <a:schemeClr val="accent2">
+        <a:tint val="60000"/>
+      </a:schemeClr>
+    </dgm:fillClrLst>
+    <dgm:linClrLst meth="repeat">
+      <a:schemeClr val="accent2">
+        <a:tint val="60000"/>
+      </a:schemeClr>
+    </dgm:linClrLst>
+    <dgm:effectClrLst/>
+    <dgm:txLinClrLst/>
+    <dgm:txFillClrLst/>
+    <dgm:txEffectClrLst/>
+  </dgm:styleLbl>
+  <dgm:styleLbl name="bgSibTrans2D1">
+    <dgm:fillClrLst meth="repeat">
+      <a:schemeClr val="accent2">
+        <a:tint val="60000"/>
+      </a:schemeClr>
+    </dgm:fillClrLst>
+    <dgm:linClrLst meth="repeat">
+      <a:schemeClr val="accent2">
+        <a:tint val="60000"/>
+      </a:schemeClr>
+    </dgm:linClrLst>
+    <dgm:effectClrLst/>
+    <dgm:txLinClrLst/>
+    <dgm:txFillClrLst/>
+    <dgm:txEffectClrLst/>
+  </dgm:styleLbl>
+  <dgm:styleLbl name="sibTrans1D1">
+    <dgm:fillClrLst meth="repeat">
+      <a:schemeClr val="accent2"/>
+    </dgm:fillClrLst>
+    <dgm:linClrLst meth="repeat">
+      <a:schemeClr val="accent2"/>
+    </dgm:linClrLst>
+    <dgm:effectClrLst/>
+    <dgm:txLinClrLst/>
+    <dgm:txFillClrLst meth="repeat">
+      <a:schemeClr val="tx1"/>
+    </dgm:txFillClrLst>
+    <dgm:txEffectClrLst/>
+  </dgm:styleLbl>
+  <dgm:styleLbl name="callout">
+    <dgm:fillClrLst meth="repeat">
+      <a:schemeClr val="accent2"/>
+    </dgm:fillClrLst>
+    <dgm:linClrLst meth="repeat">
+      <a:schemeClr val="accent2">
+        <a:tint val="50000"/>
+      </a:schemeClr>
+    </dgm:linClrLst>
+    <dgm:effectClrLst/>
+    <dgm:txLinClrLst/>
+    <dgm:txFillClrLst meth="repeat">
+      <a:schemeClr val="tx1"/>
+    </dgm:txFillClrLst>
+    <dgm:txEffectClrLst/>
+  </dgm:styleLbl>
+  <dgm:styleLbl name="asst0">
+    <dgm:fillClrLst meth="repeat">
+      <a:schemeClr val="accent2"/>
+    </dgm:fillClrLst>
+    <dgm:linClrLst meth="repeat">
+      <a:schemeClr val="lt1"/>
+    </dgm:linClrLst>
+    <dgm:effectClrLst/>
+    <dgm:txLinClrLst/>
+    <dgm:txFillClrLst/>
+    <dgm:txEffectClrLst/>
+  </dgm:styleLbl>
+  <dgm:styleLbl name="asst1">
+    <dgm:fillClrLst meth="repeat">
+      <a:schemeClr val="accent2"/>
+    </dgm:fillClrLst>
+    <dgm:linClrLst meth="repeat">
+      <a:schemeClr val="lt1"/>
+    </dgm:linClrLst>
+    <dgm:effectClrLst/>
+    <dgm:txLinClrLst/>
+    <dgm:txFillClrLst/>
+    <dgm:txEffectClrLst/>
+  </dgm:styleLbl>
+  <dgm:styleLbl name="asst2">
+    <dgm:fillClrLst meth="repeat">
+      <a:schemeClr val="accent2"/>
+    </dgm:fillClrLst>
+    <dgm:linClrLst meth="repeat">
+      <a:schemeClr val="lt1"/>
+    </dgm:linClrLst>
+    <dgm:effectClrLst/>
+    <dgm:txLinClrLst/>
+    <dgm:txFillClrLst/>
+    <dgm:txEffectClrLst/>
+  </dgm:styleLbl>
+  <dgm:styleLbl name="asst3">
+    <dgm:fillClrLst meth="repeat">
+      <a:schemeClr val="accent2"/>
+    </dgm:fillClrLst>
+    <dgm:linClrLst meth="repeat">
+      <a:schemeClr val="lt1"/>
+    </dgm:linClrLst>
+    <dgm:effectClrLst/>
+    <dgm:txLinClrLst/>
+    <dgm:txFillClrLst/>
+    <dgm:txEffectClrLst/>
+  </dgm:styleLbl>
+  <dgm:styleLbl name="asst4">
+    <dgm:fillClrLst meth="repeat">
+      <a:schemeClr val="accent2"/>
+    </dgm:fillClrLst>
+    <dgm:linClrLst meth="repeat">
+      <a:schemeClr val="lt1"/>
+    </dgm:linClrLst>
+    <dgm:effectClrLst/>
+    <dgm:txLinClrLst/>
+    <dgm:txFillClrLst/>
+    <dgm:txEffectClrLst/>
+  </dgm:styleLbl>
+  <dgm:styleLbl name="parChTrans2D1">
+    <dgm:fillClrLst meth="repeat">
+      <a:schemeClr val="accent2">
+        <a:tint val="60000"/>
+      </a:schemeClr>
+    </dgm:fillClrLst>
+    <dgm:linClrLst meth="repeat">
+      <a:schemeClr val="accent2">
+        <a:tint val="60000"/>
+      </a:schemeClr>
+    </dgm:linClrLst>
+    <dgm:effectClrLst/>
+    <dgm:txLinClrLst/>
+    <dgm:txFillClrLst meth="repeat">
+      <a:schemeClr val="lt1"/>
+    </dgm:txFillClrLst>
+    <dgm:txEffectClrLst/>
+  </dgm:styleLbl>
+  <dgm:styleLbl name="parChTrans2D2">
+    <dgm:fillClrLst meth="repeat">
+      <a:schemeClr val="accent2"/>
+    </dgm:fillClrLst>
+    <dgm:linClrLst meth="repeat">
+      <a:schemeClr val="accent2"/>
+    </dgm:linClrLst>
+    <dgm:effectClrLst/>
+    <dgm:txLinClrLst/>
+    <dgm:txFillClrLst meth="repeat">
+      <a:schemeClr val="lt1"/>
+    </dgm:txFillClrLst>
+    <dgm:txEffectClrLst/>
+  </dgm:styleLbl>
+  <dgm:styleLbl name="parChTrans2D3">
+    <dgm:fillClrLst meth="repeat">
+      <a:schemeClr val="accent2"/>
+    </dgm:fillClrLst>
+    <dgm:linClrLst meth="repeat">
+      <a:schemeClr val="accent2"/>
+    </dgm:linClrLst>
+    <dgm:effectClrLst/>
+    <dgm:txLinClrLst/>
+    <dgm:txFillClrLst meth="repeat">
+      <a:schemeClr val="lt1"/>
+    </dgm:txFillClrLst>
+    <dgm:txEffectClrLst/>
+  </dgm:styleLbl>
+  <dgm:styleLbl name="parChTrans2D4">
+    <dgm:fillClrLst meth="repeat">
+      <a:schemeClr val="accent2"/>
+    </dgm:fillClrLst>
+    <dgm:linClrLst meth="repeat">
+      <a:schemeClr val="accent2"/>
+    </dgm:linClrLst>
+    <dgm:effectClrLst/>
+    <dgm:txLinClrLst/>
+    <dgm:txFillClrLst meth="repeat">
+      <a:schemeClr val="lt1"/>
+    </dgm:txFillClrLst>
+    <dgm:txEffectClrLst/>
+  </dgm:styleLbl>
+  <dgm:styleLbl name="parChTrans1D1">
+    <dgm:fillClrLst meth="repeat">
+      <a:schemeClr val="accent2"/>
+    </dgm:fillClrLst>
+    <dgm:linClrLst meth="repeat">
+      <a:schemeClr val="accent2">
+        <a:shade val="60000"/>
+      </a:schemeClr>
+    </dgm:linClrLst>
+    <dgm:effectClrLst/>
+    <dgm:txLinClrLst/>
+    <dgm:txFillClrLst meth="repeat">
+      <a:schemeClr val="tx1"/>
+    </dgm:txFillClrLst>
+    <dgm:txEffectClrLst/>
+  </dgm:styleLbl>
+  <dgm:styleLbl name="parChTrans1D2">
+    <dgm:fillClrLst meth="repeat">
+      <a:schemeClr val="accent2"/>
+    </dgm:fillClrLst>
+    <dgm:linClrLst meth="repeat">
+      <a:schemeClr val="accent2">
+        <a:shade val="60000"/>
+      </a:schemeClr>
+    </dgm:linClrLst>
+    <dgm:effectClrLst/>
+    <dgm:txLinClrLst/>
+    <dgm:txFillClrLst meth="repeat">
+      <a:schemeClr val="tx1"/>
+    </dgm:txFillClrLst>
+    <dgm:txEffectClrLst/>
+  </dgm:styleLbl>
+  <dgm:styleLbl name="parChTrans1D3">
+    <dgm:fillClrLst meth="repeat">
+      <a:schemeClr val="accent2"/>
+    </dgm:fillClrLst>
+    <dgm:linClrLst meth="repeat">
+      <a:schemeClr val="accent2">
+        <a:shade val="80000"/>
+      </a:schemeClr>
+    </dgm:linClrLst>
+    <dgm:effectClrLst/>
+    <dgm:txLinClrLst/>
+    <dgm:txFillClrLst meth="repeat">
+      <a:schemeClr val="tx1"/>
+    </dgm:txFillClrLst>
+    <dgm:txEffectClrLst/>
+  </dgm:styleLbl>
+  <dgm:styleLbl name="parChTrans1D4">
+    <dgm:fillClrLst meth="repeat">
+      <a:schemeClr val="accent2"/>
+    </dgm:fillClrLst>
+    <dgm:linClrLst meth="repeat">
+      <a:schemeClr val="accent2">
+        <a:shade val="80000"/>
+      </a:schemeClr>
+    </dgm:linClrLst>
+    <dgm:effectClrLst/>
+    <dgm:txLinClrLst/>
+    <dgm:txFillClrLst meth="repeat">
+      <a:schemeClr val="tx1"/>
+    </dgm:txFillClrLst>
+    <dgm:txEffectClrLst/>
+  </dgm:styleLbl>
+  <dgm:styleLbl name="fgAcc1">
+    <dgm:fillClrLst meth="repeat">
+      <a:schemeClr val="lt1">
+        <a:alpha val="90000"/>
+      </a:schemeClr>
+    </dgm:fillClrLst>
+    <dgm:linClrLst meth="repeat">
+      <a:schemeClr val="accent2"/>
+    </dgm:linClrLst>
+    <dgm:effectClrLst/>
+    <dgm:txLinClrLst/>
+    <dgm:txFillClrLst meth="repeat">
+      <a:schemeClr val="dk1"/>
+    </dgm:txFillClrLst>
+    <dgm:txEffectClrLst/>
+  </dgm:styleLbl>
+  <dgm:styleLbl name="conFgAcc1">
+    <dgm:fillClrLst meth="repeat">
+      <a:schemeClr val="lt1">
+        <a:alpha val="90000"/>
+      </a:schemeClr>
+    </dgm:fillClrLst>
+    <dgm:linClrLst meth="repeat">
+      <a:schemeClr val="accent2"/>
+    </dgm:linClrLst>
+    <dgm:effectClrLst/>
+    <dgm:txLinClrLst/>
+    <dgm:txFillClrLst meth="repeat">
+      <a:schemeClr val="dk1"/>
+    </dgm:txFillClrLst>
+    <dgm:txEffectClrLst/>
+  </dgm:styleLbl>
+  <dgm:styleLbl name="alignAcc1">
+    <dgm:fillClrLst meth="repeat">
+      <a:schemeClr val="lt1">
+        <a:alpha val="90000"/>
+      </a:schemeClr>
+    </dgm:fillClrLst>
+    <dgm:linClrLst meth="repeat">
+      <a:schemeClr val="accent2"/>
+    </dgm:linClrLst>
+    <dgm:effectClrLst/>
+    <dgm:txLinClrLst/>
+    <dgm:txFillClrLst meth="repeat">
+      <a:schemeClr val="dk1"/>
+    </dgm:txFillClrLst>
+    <dgm:txEffectClrLst/>
+  </dgm:styleLbl>
+  <dgm:styleLbl name="trAlignAcc1">
+    <dgm:fillClrLst meth="repeat">
+      <a:schemeClr val="lt1">
+        <a:alpha val="40000"/>
+      </a:schemeClr>
+    </dgm:fillClrLst>
+    <dgm:linClrLst meth="repeat">
+      <a:schemeClr val="accent2"/>
+    </dgm:linClrLst>
+    <dgm:effectClrLst/>
+    <dgm:txLinClrLst/>
+    <dgm:txFillClrLst meth="repeat">
+      <a:schemeClr val="dk1"/>
+    </dgm:txFillClrLst>
+    <dgm:txEffectClrLst/>
+  </dgm:styleLbl>
+  <dgm:styleLbl name="bgAcc1">
+    <dgm:fillClrLst meth="repeat">
+      <a:schemeClr val="lt1">
+        <a:alpha val="90000"/>
+      </a:schemeClr>
+    </dgm:fillClrLst>
+    <dgm:linClrLst meth="repeat">
+      <a:schemeClr val="accent2"/>
+    </dgm:linClrLst>
+    <dgm:effectClrLst/>
+    <dgm:txLinClrLst/>
+    <dgm:txFillClrLst meth="repeat">
+      <a:schemeClr val="dk1"/>
+    </dgm:txFillClrLst>
+    <dgm:txEffectClrLst/>
+  </dgm:styleLbl>
+  <dgm:styleLbl name="solidFgAcc1">
+    <dgm:fillClrLst meth="repeat">
+      <a:schemeClr val="lt1"/>
+    </dgm:fillClrLst>
+    <dgm:linClrLst meth="repeat">
+      <a:schemeClr val="accent2"/>
+    </dgm:linClrLst>
+    <dgm:effectClrLst/>
+    <dgm:txLinClrLst/>
+    <dgm:txFillClrLst meth="repeat">
+      <a:schemeClr val="dk1"/>
+    </dgm:txFillClrLst>
+    <dgm:txEffectClrLst/>
+  </dgm:styleLbl>
+  <dgm:styleLbl name="solidAlignAcc1">
+    <dgm:fillClrLst meth="repeat">
+      <a:schemeClr val="lt1"/>
+    </dgm:fillClrLst>
+    <dgm:linClrLst meth="repeat">
+      <a:schemeClr val="accent2"/>
+    </dgm:linClrLst>
+    <dgm:effectClrLst/>
+    <dgm:txLinClrLst/>
+    <dgm:txFillClrLst meth="repeat">
+      <a:schemeClr val="dk1"/>
+    </dgm:txFillClrLst>
+    <dgm:txEffectClrLst/>
+  </dgm:styleLbl>
+  <dgm:styleLbl name="solidBgAcc1">
+    <dgm:fillClrLst meth="repeat">
+      <a:schemeClr val="lt1"/>
+    </dgm:fillClrLst>
+    <dgm:linClrLst meth="repeat">
+      <a:schemeClr val="accent2"/>
+    </dgm:linClrLst>
+    <dgm:effectClrLst/>
+    <dgm:txLinClrLst/>
+    <dgm:txFillClrLst meth="repeat">
+      <a:schemeClr val="dk1"/>
+    </dgm:txFillClrLst>
+    <dgm:txEffectClrLst/>
+  </dgm:styleLbl>
+  <dgm:styleLbl name="fgAccFollowNode1">
+    <dgm:fillClrLst meth="repeat">
+      <a:schemeClr val="accent2">
+        <a:alpha val="90000"/>
+        <a:tint val="40000"/>
+      </a:schemeClr>
+    </dgm:fillClrLst>
+    <dgm:linClrLst meth="repeat">
+      <a:schemeClr val="accent2">
+        <a:alpha val="90000"/>
+        <a:tint val="40000"/>
+      </a:schemeClr>
+    </dgm:linClrLst>
+    <dgm:effectClrLst/>
+    <dgm:txLinClrLst/>
+    <dgm:txFillClrLst meth="repeat">
+      <a:schemeClr val="dk1"/>
+    </dgm:txFillClrLst>
+    <dgm:txEffectClrLst/>
+  </dgm:styleLbl>
+  <dgm:styleLbl name="alignAccFollowNode1">
+    <dgm:fillClrLst meth="repeat">
+      <a:schemeClr val="accent2">
+        <a:alpha val="90000"/>
+        <a:tint val="40000"/>
+      </a:schemeClr>
+    </dgm:fillClrLst>
+    <dgm:linClrLst meth="repeat">
+      <a:schemeClr val="accent2">
+        <a:alpha val="90000"/>
+        <a:tint val="40000"/>
+      </a:schemeClr>
+    </dgm:linClrLst>
+    <dgm:effectClrLst/>
+    <dgm:txLinClrLst/>
+    <dgm:txFillClrLst meth="repeat">
+      <a:schemeClr val="dk1"/>
+    </dgm:txFillClrLst>
+    <dgm:txEffectClrLst/>
+  </dgm:styleLbl>
+  <dgm:styleLbl name="bgAccFollowNode1">
+    <dgm:fillClrLst meth="repeat">
+      <a:schemeClr val="accent2">
+        <a:alpha val="90000"/>
+        <a:tint val="40000"/>
+      </a:schemeClr>
+    </dgm:fillClrLst>
+    <dgm:linClrLst meth="repeat">
+      <a:schemeClr val="accent2">
+        <a:alpha val="90000"/>
+        <a:tint val="40000"/>
+      </a:schemeClr>
+    </dgm:linClrLst>
+    <dgm:effectClrLst/>
+    <dgm:txLinClrLst/>
+    <dgm:txFillClrLst meth="repeat">
+      <a:schemeClr val="dk1"/>
+    </dgm:txFillClrLst>
+    <dgm:txEffectClrLst/>
+  </dgm:styleLbl>
+  <dgm:styleLbl name="fgAcc0">
+    <dgm:fillClrLst meth="repeat">
+      <a:schemeClr val="lt1">
+        <a:alpha val="90000"/>
+      </a:schemeClr>
+    </dgm:fillClrLst>
+    <dgm:linClrLst meth="repeat">
+      <a:schemeClr val="accent2"/>
+    </dgm:linClrLst>
+    <dgm:effectClrLst/>
+    <dgm:txLinClrLst/>
+    <dgm:txFillClrLst meth="repeat">
+      <a:schemeClr val="dk1"/>
+    </dgm:txFillClrLst>
+    <dgm:txEffectClrLst/>
+  </dgm:styleLbl>
+  <dgm:styleLbl name="fgAcc2">
+    <dgm:fillClrLst meth="repeat">
+      <a:schemeClr val="lt1">
+        <a:alpha val="90000"/>
+      </a:schemeClr>
+    </dgm:fillClrLst>
+    <dgm:linClrLst meth="repeat">
+      <a:schemeClr val="accent2"/>
+    </dgm:linClrLst>
+    <dgm:effectClrLst/>
+    <dgm:txLinClrLst/>
+    <dgm:txFillClrLst meth="repeat">
+      <a:schemeClr val="dk1"/>
+    </dgm:txFillClrLst>
+    <dgm:txEffectClrLst/>
+  </dgm:styleLbl>
+  <dgm:styleLbl name="fgAcc3">
+    <dgm:fillClrLst meth="repeat">
+      <a:schemeClr val="lt1">
+        <a:alpha val="90000"/>
+      </a:schemeClr>
+    </dgm:fillClrLst>
+    <dgm:linClrLst meth="repeat">
+      <a:schemeClr val="accent2"/>
+    </dgm:linClrLst>
+    <dgm:effectClrLst/>
+    <dgm:txLinClrLst/>
+    <dgm:txFillClrLst meth="repeat">
+      <a:schemeClr val="dk1"/>
+    </dgm:txFillClrLst>
+    <dgm:txEffectClrLst/>
+  </dgm:styleLbl>
+  <dgm:styleLbl name="fgAcc4">
+    <dgm:fillClrLst meth="repeat">
+      <a:schemeClr val="lt1">
+        <a:alpha val="90000"/>
+      </a:schemeClr>
+    </dgm:fillClrLst>
+    <dgm:linClrLst meth="repeat">
+      <a:schemeClr val="accent2"/>
+    </dgm:linClrLst>
+    <dgm:effectClrLst/>
+    <dgm:txLinClrLst/>
+    <dgm:txFillClrLst meth="repeat">
+      <a:schemeClr val="dk1"/>
+    </dgm:txFillClrLst>
+    <dgm:txEffectClrLst/>
+  </dgm:styleLbl>
+  <dgm:styleLbl name="bgShp">
+    <dgm:fillClrLst meth="repeat">
+      <a:schemeClr val="accent2">
+        <a:tint val="40000"/>
+      </a:schemeClr>
+    </dgm:fillClrLst>
+    <dgm:linClrLst meth="repeat">
+      <a:schemeClr val="accent2"/>
+    </dgm:linClrLst>
+    <dgm:effectClrLst/>
+    <dgm:txLinClrLst/>
+    <dgm:txFillClrLst meth="repeat">
+      <a:schemeClr val="dk1"/>
+    </dgm:txFillClrLst>
+    <dgm:txEffectClrLst/>
+  </dgm:styleLbl>
+  <dgm:styleLbl name="dkBgShp">
+    <dgm:fillClrLst meth="repeat">
+      <a:schemeClr val="accent2">
+        <a:shade val="80000"/>
+      </a:schemeClr>
+    </dgm:fillClrLst>
+    <dgm:linClrLst meth="repeat">
+      <a:schemeClr val="accent2"/>
+    </dgm:linClrLst>
+    <dgm:effectClrLst/>
+    <dgm:txLinClrLst/>
+    <dgm:txFillClrLst meth="repeat">
+      <a:schemeClr val="lt1"/>
+    </dgm:txFillClrLst>
+    <dgm:txEffectClrLst/>
+  </dgm:styleLbl>
+  <dgm:styleLbl name="trBgShp">
+    <dgm:fillClrLst meth="repeat">
+      <a:schemeClr val="accent2">
+        <a:tint val="50000"/>
+        <a:alpha val="40000"/>
+      </a:schemeClr>
+    </dgm:fillClrLst>
+    <dgm:linClrLst meth="repeat">
+      <a:schemeClr val="accent2"/>
+    </dgm:linClrLst>
+    <dgm:effectClrLst/>
+    <dgm:txLinClrLst/>
+    <dgm:txFillClrLst meth="repeat">
+      <a:schemeClr val="lt1"/>
+    </dgm:txFillClrLst>
+    <dgm:txEffectClrLst/>
+  </dgm:styleLbl>
+  <dgm:styleLbl name="fgShp">
+    <dgm:fillClrLst meth="repeat">
+      <a:schemeClr val="accent2">
+        <a:tint val="60000"/>
+      </a:schemeClr>
+    </dgm:fillClrLst>
+    <dgm:linClrLst meth="repeat">
+      <a:schemeClr val="lt1"/>
+    </dgm:linClrLst>
+    <dgm:effectClrLst/>
+    <dgm:txLinClrLst/>
+    <dgm:txFillClrLst meth="repeat">
+      <a:schemeClr val="dk1"/>
+    </dgm:txFillClrLst>
+    <dgm:txEffectClrLst/>
+  </dgm:styleLbl>
+  <dgm:styleLbl name="revTx">
+    <dgm:fillClrLst meth="repeat">
+      <a:schemeClr val="lt1">
+        <a:alpha val="0"/>
+      </a:schemeClr>
+    </dgm:fillClrLst>
+    <dgm:linClrLst meth="repeat">
+      <a:schemeClr val="dk1">
+        <a:alpha val="0"/>
+      </a:schemeClr>
+    </dgm:linClrLst>
+    <dgm:effectClrLst/>
+    <dgm:txLinClrLst/>
+    <dgm:txFillClrLst meth="repeat">
+      <a:schemeClr val="tx1"/>
+    </dgm:txFillClrLst>
+    <dgm:txEffectClrLst/>
+  </dgm:styleLbl>
+</dgm:colorsDef>
+</file>
+
+<file path=ppt/diagrams/data1.xml><?xml version="1.0" encoding="utf-8"?>
+<dgm:dataModel xmlns:dgm="http://schemas.openxmlformats.org/drawingml/2006/diagram" xmlns:a="http://schemas.openxmlformats.org/drawingml/2006/main">
+  <dgm:ptLst>
+    <dgm:pt modelId="{F127E61C-FD4C-4866-BA3D-CB159576111D}" type="doc">
+      <dgm:prSet loTypeId="urn:microsoft.com/office/officeart/2008/layout/SquareAccentList" loCatId="list" qsTypeId="urn:microsoft.com/office/officeart/2005/8/quickstyle/simple1" qsCatId="simple" csTypeId="urn:microsoft.com/office/officeart/2005/8/colors/accent2_2" csCatId="accent2" phldr="1"/>
+      <dgm:spPr/>
+      <dgm:t>
+        <a:bodyPr/>
+        <a:lstStyle/>
+        <a:p>
+          <a:endParaRPr lang="en-US"/>
+        </a:p>
+      </dgm:t>
+    </dgm:pt>
+    <dgm:pt modelId="{9C41E2D0-4C56-49D6-92B8-60893AA91F2A}">
+      <dgm:prSet phldrT="[Text]" phldr="0" custT="1"/>
+      <dgm:spPr/>
+      <dgm:t>
+        <a:bodyPr/>
+        <a:lstStyle/>
+        <a:p>
+          <a:r>
+            <a:rPr lang="en-US" sz="2000" dirty="0"/>
+            <a:t>Scale Beyond Pilot Implementation</a:t>
+          </a:r>
+        </a:p>
+      </dgm:t>
+    </dgm:pt>
+    <dgm:pt modelId="{0EE6A6E4-00E0-4870-948E-B348E3F35D0A}" type="parTrans" cxnId="{E18CD88C-450F-42B5-8E21-6D009A14B447}">
+      <dgm:prSet/>
+      <dgm:spPr/>
+      <dgm:t>
+        <a:bodyPr/>
+        <a:lstStyle/>
+        <a:p>
+          <a:endParaRPr lang="en-US"/>
+        </a:p>
+      </dgm:t>
+    </dgm:pt>
+    <dgm:pt modelId="{D567AB34-7C48-4FFA-B71B-D6A421C0B406}" type="sibTrans" cxnId="{E18CD88C-450F-42B5-8E21-6D009A14B447}">
+      <dgm:prSet/>
+      <dgm:spPr/>
+      <dgm:t>
+        <a:bodyPr/>
+        <a:lstStyle/>
+        <a:p>
+          <a:endParaRPr lang="en-US"/>
+        </a:p>
+      </dgm:t>
+    </dgm:pt>
+    <dgm:pt modelId="{259827CF-A65D-4F58-9748-FD6AC8BDF372}">
+      <dgm:prSet phldrT="[Text]" phldr="0" custT="1"/>
+      <dgm:spPr/>
+      <dgm:t>
+        <a:bodyPr/>
+        <a:lstStyle/>
+        <a:p>
+          <a:r>
+            <a:rPr lang="en-US" sz="2000" dirty="0"/>
+            <a:t>Prioritize Workforce Transformation</a:t>
+          </a:r>
+        </a:p>
+      </dgm:t>
+    </dgm:pt>
+    <dgm:pt modelId="{B4BE2A73-7554-4642-8D28-35F699A14478}" type="parTrans" cxnId="{DFE3D1AA-21FF-4F03-AF99-25355437F39C}">
+      <dgm:prSet/>
+      <dgm:spPr/>
+      <dgm:t>
+        <a:bodyPr/>
+        <a:lstStyle/>
+        <a:p>
+          <a:endParaRPr lang="en-US"/>
+        </a:p>
+      </dgm:t>
+    </dgm:pt>
+    <dgm:pt modelId="{7C9D9D85-6724-42D7-BAEE-EBD151179478}" type="sibTrans" cxnId="{DFE3D1AA-21FF-4F03-AF99-25355437F39C}">
+      <dgm:prSet/>
+      <dgm:spPr/>
+      <dgm:t>
+        <a:bodyPr/>
+        <a:lstStyle/>
+        <a:p>
+          <a:endParaRPr lang="en-US"/>
+        </a:p>
+      </dgm:t>
+    </dgm:pt>
+    <dgm:pt modelId="{4D83FE52-4CCC-44AA-8B42-AE050CAED7B6}">
+      <dgm:prSet phldrT="[Text]" phldr="0" custT="1"/>
+      <dgm:spPr/>
+      <dgm:t>
+        <a:bodyPr/>
+        <a:lstStyle/>
+        <a:p>
+          <a:r>
+            <a:rPr lang="en-US" sz="2000" dirty="0"/>
+            <a:t>Target Adoption Gaps</a:t>
+          </a:r>
+        </a:p>
+      </dgm:t>
+    </dgm:pt>
+    <dgm:pt modelId="{D757B012-5075-4F1E-A7FC-BA1464EAF310}" type="parTrans" cxnId="{75C4457F-36EE-4291-86EA-925FF78CDE6F}">
+      <dgm:prSet/>
+      <dgm:spPr/>
+      <dgm:t>
+        <a:bodyPr/>
+        <a:lstStyle/>
+        <a:p>
+          <a:endParaRPr lang="en-US"/>
+        </a:p>
+      </dgm:t>
+    </dgm:pt>
+    <dgm:pt modelId="{5D194BBF-6810-4B08-B767-32DA05F015C0}" type="sibTrans" cxnId="{75C4457F-36EE-4291-86EA-925FF78CDE6F}">
+      <dgm:prSet/>
+      <dgm:spPr/>
+      <dgm:t>
+        <a:bodyPr/>
+        <a:lstStyle/>
+        <a:p>
+          <a:endParaRPr lang="en-US"/>
+        </a:p>
+      </dgm:t>
+    </dgm:pt>
+    <dgm:pt modelId="{B187C365-E632-4D72-9EBC-8268B764B7FE}">
+      <dgm:prSet phldrT="[Text]" phldr="0"/>
+      <dgm:spPr/>
+      <dgm:t>
+        <a:bodyPr/>
+        <a:lstStyle/>
+        <a:p>
+          <a:r>
+            <a:rPr lang="en-US" b="1" dirty="0"/>
+            <a:t>Action:</a:t>
+          </a:r>
+          <a:r>
+            <a:rPr lang="en-US" dirty="0"/>
+            <a:t> Move beyond pilot efforts toward structured AI integration strategies</a:t>
+          </a:r>
+        </a:p>
+      </dgm:t>
+    </dgm:pt>
+    <dgm:pt modelId="{E2299D8D-C6FC-4FE2-91B9-280FEEBEFD2C}" type="parTrans" cxnId="{47C0F392-3046-49A3-B792-D11BBB554D9F}">
+      <dgm:prSet/>
+      <dgm:spPr/>
+      <dgm:t>
+        <a:bodyPr/>
+        <a:lstStyle/>
+        <a:p>
+          <a:endParaRPr lang="en-US"/>
+        </a:p>
+      </dgm:t>
+    </dgm:pt>
+    <dgm:pt modelId="{DB463B97-27C3-449D-8202-49AD919951F9}" type="sibTrans" cxnId="{47C0F392-3046-49A3-B792-D11BBB554D9F}">
+      <dgm:prSet/>
+      <dgm:spPr/>
+      <dgm:t>
+        <a:bodyPr/>
+        <a:lstStyle/>
+        <a:p>
+          <a:endParaRPr lang="en-US"/>
+        </a:p>
+      </dgm:t>
+    </dgm:pt>
+    <dgm:pt modelId="{DB6CB981-4EA1-41C8-8D94-7EF2D708D663}">
+      <dgm:prSet phldrT="[Text]" phldr="0"/>
+      <dgm:spPr/>
+      <dgm:t>
+        <a:bodyPr/>
+        <a:lstStyle/>
+        <a:p>
+          <a:r>
+            <a:rPr lang="en-US" b="1" dirty="0"/>
+            <a:t>Why:</a:t>
+          </a:r>
+          <a:r>
+            <a:rPr lang="en-US" dirty="0"/>
+            <a:t> Mature adoption demonstrated stronger business outcomes</a:t>
+          </a:r>
+        </a:p>
+      </dgm:t>
+    </dgm:pt>
+    <dgm:pt modelId="{F22B91F6-32CA-45C8-8318-9A024593C6CD}" type="parTrans" cxnId="{4396901F-DEB2-4355-9FCF-7FB665647C64}">
+      <dgm:prSet/>
+      <dgm:spPr/>
+      <dgm:t>
+        <a:bodyPr/>
+        <a:lstStyle/>
+        <a:p>
+          <a:endParaRPr lang="en-US"/>
+        </a:p>
+      </dgm:t>
+    </dgm:pt>
+    <dgm:pt modelId="{FAB07AD4-1260-456C-A478-56FD2CF5F0A1}" type="sibTrans" cxnId="{4396901F-DEB2-4355-9FCF-7FB665647C64}">
+      <dgm:prSet/>
+      <dgm:spPr/>
+      <dgm:t>
+        <a:bodyPr/>
+        <a:lstStyle/>
+        <a:p>
+          <a:endParaRPr lang="en-US"/>
+        </a:p>
+      </dgm:t>
+    </dgm:pt>
+    <dgm:pt modelId="{61662FB2-B989-4543-81DB-F937552B4AB8}">
+      <dgm:prSet phldrT="[Text]" phldr="0"/>
+      <dgm:spPr/>
+      <dgm:t>
+        <a:bodyPr/>
+        <a:lstStyle/>
+        <a:p>
+          <a:r>
+            <a:rPr lang="en-US" b="1" dirty="0"/>
+            <a:t>Action:</a:t>
+          </a:r>
+          <a:r>
+            <a:rPr lang="en-US" dirty="0"/>
+            <a:t> Integrate reskilling into AI adoption plans</a:t>
+          </a:r>
+        </a:p>
+      </dgm:t>
+    </dgm:pt>
+    <dgm:pt modelId="{FD3DA2CA-B911-4E62-97A6-303B2A48F024}" type="parTrans" cxnId="{C36447D6-9A92-42EB-921B-70CB25D4B001}">
+      <dgm:prSet/>
+      <dgm:spPr/>
+      <dgm:t>
+        <a:bodyPr/>
+        <a:lstStyle/>
+        <a:p>
+          <a:endParaRPr lang="en-US"/>
+        </a:p>
+      </dgm:t>
+    </dgm:pt>
+    <dgm:pt modelId="{7892333E-DAA3-4F5F-9CEC-B4E9CD4050A7}" type="sibTrans" cxnId="{C36447D6-9A92-42EB-921B-70CB25D4B001}">
+      <dgm:prSet/>
+      <dgm:spPr/>
+      <dgm:t>
+        <a:bodyPr/>
+        <a:lstStyle/>
+        <a:p>
+          <a:endParaRPr lang="en-US"/>
+        </a:p>
+      </dgm:t>
+    </dgm:pt>
+    <dgm:pt modelId="{3AFBC9AD-B796-4015-8346-21EC96C05240}">
+      <dgm:prSet phldrT="[Text]" phldr="0"/>
+      <dgm:spPr/>
+      <dgm:t>
+        <a:bodyPr/>
+        <a:lstStyle/>
+        <a:p>
+          <a:r>
+            <a:rPr lang="en-US" b="1" dirty="0"/>
+            <a:t>Why:</a:t>
+          </a:r>
+          <a:r>
+            <a:rPr lang="en-US" dirty="0"/>
+            <a:t> Reskilling represented the largest workforce response across company sizes</a:t>
+          </a:r>
+        </a:p>
+      </dgm:t>
+    </dgm:pt>
+    <dgm:pt modelId="{AD7EBAF4-C60C-4AD9-B19B-A2B6CCD0700A}" type="parTrans" cxnId="{1E3B5861-F4B0-4A0D-AAB4-40E4E0812F12}">
+      <dgm:prSet/>
+      <dgm:spPr/>
+      <dgm:t>
+        <a:bodyPr/>
+        <a:lstStyle/>
+        <a:p>
+          <a:endParaRPr lang="en-US"/>
+        </a:p>
+      </dgm:t>
+    </dgm:pt>
+    <dgm:pt modelId="{A6730F01-3B4D-48AD-92E7-42FCB822F4DA}" type="sibTrans" cxnId="{1E3B5861-F4B0-4A0D-AAB4-40E4E0812F12}">
+      <dgm:prSet/>
+      <dgm:spPr/>
+      <dgm:t>
+        <a:bodyPr/>
+        <a:lstStyle/>
+        <a:p>
+          <a:endParaRPr lang="en-US"/>
+        </a:p>
+      </dgm:t>
+    </dgm:pt>
+    <dgm:pt modelId="{C724AB61-0F86-4DE0-B195-305876AFE768}">
+      <dgm:prSet phldrT="[Text]" phldr="0"/>
+      <dgm:spPr/>
+      <dgm:t>
+        <a:bodyPr/>
+        <a:lstStyle/>
+        <a:p>
+          <a:r>
+            <a:rPr lang="en-US" b="1" dirty="0"/>
+            <a:t>Action:</a:t>
+          </a:r>
+          <a:r>
+            <a:rPr lang="en-US" dirty="0"/>
+            <a:t> Identify and address barriers limiting AI maturity</a:t>
+          </a:r>
+        </a:p>
+      </dgm:t>
+    </dgm:pt>
+    <dgm:pt modelId="{D81D00DA-8753-432C-BCE7-E25D00CA49D1}" type="parTrans" cxnId="{A7B12F7B-AD67-4C0A-861F-EF537D48E6F9}">
+      <dgm:prSet/>
+      <dgm:spPr/>
+      <dgm:t>
+        <a:bodyPr/>
+        <a:lstStyle/>
+        <a:p>
+          <a:endParaRPr lang="en-US"/>
+        </a:p>
+      </dgm:t>
+    </dgm:pt>
+    <dgm:pt modelId="{BCB161A7-7777-4AD2-8DF3-56CDE0DEAB99}" type="sibTrans" cxnId="{A7B12F7B-AD67-4C0A-861F-EF537D48E6F9}">
+      <dgm:prSet/>
+      <dgm:spPr/>
+      <dgm:t>
+        <a:bodyPr/>
+        <a:lstStyle/>
+        <a:p>
+          <a:endParaRPr lang="en-US"/>
+        </a:p>
+      </dgm:t>
+    </dgm:pt>
+    <dgm:pt modelId="{CD034366-8F79-4934-8E07-32137322B313}">
+      <dgm:prSet phldrT="[Text]" phldr="0"/>
+      <dgm:spPr/>
+      <dgm:t>
+        <a:bodyPr/>
+        <a:lstStyle/>
+        <a:p>
+          <a:r>
+            <a:rPr lang="en-US" b="1" dirty="0"/>
+            <a:t>Why:</a:t>
+          </a:r>
+          <a:r>
+            <a:rPr lang="en-US" dirty="0"/>
+            <a:t> Successful adoption requires aligning technology, processes, and workforce readiness</a:t>
+          </a:r>
+        </a:p>
+      </dgm:t>
+    </dgm:pt>
+    <dgm:pt modelId="{DC97E991-DA74-40C0-AF5D-F5EE73AE911A}" type="parTrans" cxnId="{0DE23EDF-4377-4041-9D59-A111E8A6C65B}">
+      <dgm:prSet/>
+      <dgm:spPr/>
+      <dgm:t>
+        <a:bodyPr/>
+        <a:lstStyle/>
+        <a:p>
+          <a:endParaRPr lang="en-US"/>
+        </a:p>
+      </dgm:t>
+    </dgm:pt>
+    <dgm:pt modelId="{FB99A59D-7289-4F64-9065-1897B35904FA}" type="sibTrans" cxnId="{0DE23EDF-4377-4041-9D59-A111E8A6C65B}">
+      <dgm:prSet/>
+      <dgm:spPr/>
+      <dgm:t>
+        <a:bodyPr/>
+        <a:lstStyle/>
+        <a:p>
+          <a:endParaRPr lang="en-US"/>
+        </a:p>
+      </dgm:t>
+    </dgm:pt>
+    <dgm:pt modelId="{620098BC-09AB-4ED2-B960-558061B87B12}" type="pres">
+      <dgm:prSet presAssocID="{F127E61C-FD4C-4866-BA3D-CB159576111D}" presName="layout" presStyleCnt="0">
+        <dgm:presLayoutVars>
+          <dgm:chMax/>
+          <dgm:chPref/>
+          <dgm:dir/>
+          <dgm:resizeHandles/>
+        </dgm:presLayoutVars>
+      </dgm:prSet>
+      <dgm:spPr/>
+    </dgm:pt>
+    <dgm:pt modelId="{77808EE7-9CE8-4691-AF59-D69CAC93892D}" type="pres">
+      <dgm:prSet presAssocID="{9C41E2D0-4C56-49D6-92B8-60893AA91F2A}" presName="root" presStyleCnt="0">
+        <dgm:presLayoutVars>
+          <dgm:chMax/>
+          <dgm:chPref/>
+        </dgm:presLayoutVars>
+      </dgm:prSet>
+      <dgm:spPr/>
+    </dgm:pt>
+    <dgm:pt modelId="{E346D839-5E9F-4F5A-AA75-1B77DC61401D}" type="pres">
+      <dgm:prSet presAssocID="{9C41E2D0-4C56-49D6-92B8-60893AA91F2A}" presName="rootComposite" presStyleCnt="0">
+        <dgm:presLayoutVars/>
+      </dgm:prSet>
+      <dgm:spPr/>
+    </dgm:pt>
+    <dgm:pt modelId="{049385B7-4DBD-438C-8FE3-AF06DB0B7A5C}" type="pres">
+      <dgm:prSet presAssocID="{9C41E2D0-4C56-49D6-92B8-60893AA91F2A}" presName="ParentAccent" presStyleLbl="alignNode1" presStyleIdx="0" presStyleCnt="3"/>
+      <dgm:spPr/>
+    </dgm:pt>
+    <dgm:pt modelId="{D6F612AE-0252-40F9-AA06-DC466B01707C}" type="pres">
+      <dgm:prSet presAssocID="{9C41E2D0-4C56-49D6-92B8-60893AA91F2A}" presName="ParentSmallAccent" presStyleLbl="fgAcc1" presStyleIdx="0" presStyleCnt="3"/>
+      <dgm:spPr/>
+    </dgm:pt>
+    <dgm:pt modelId="{DFCD9B2A-8769-4963-AA7F-6A0C29B4FFF1}" type="pres">
+      <dgm:prSet presAssocID="{9C41E2D0-4C56-49D6-92B8-60893AA91F2A}" presName="Parent" presStyleLbl="revTx" presStyleIdx="0" presStyleCnt="9">
+        <dgm:presLayoutVars>
+          <dgm:chMax/>
+          <dgm:chPref val="4"/>
+          <dgm:bulletEnabled val="1"/>
+        </dgm:presLayoutVars>
+      </dgm:prSet>
+      <dgm:spPr/>
+    </dgm:pt>
+    <dgm:pt modelId="{55EC029D-1F23-49CC-8449-487E15DBF05A}" type="pres">
+      <dgm:prSet presAssocID="{9C41E2D0-4C56-49D6-92B8-60893AA91F2A}" presName="childShape" presStyleCnt="0">
+        <dgm:presLayoutVars>
+          <dgm:chMax val="0"/>
+          <dgm:chPref val="0"/>
+        </dgm:presLayoutVars>
+      </dgm:prSet>
+      <dgm:spPr/>
+    </dgm:pt>
+    <dgm:pt modelId="{9C616291-6A28-459F-8000-FE6AB32C8F16}" type="pres">
+      <dgm:prSet presAssocID="{B187C365-E632-4D72-9EBC-8268B764B7FE}" presName="childComposite" presStyleCnt="0">
+        <dgm:presLayoutVars>
+          <dgm:chMax val="0"/>
+          <dgm:chPref val="0"/>
+        </dgm:presLayoutVars>
+      </dgm:prSet>
+      <dgm:spPr/>
+    </dgm:pt>
+    <dgm:pt modelId="{F99323EA-3004-4402-8F83-5ECED4762AE5}" type="pres">
+      <dgm:prSet presAssocID="{B187C365-E632-4D72-9EBC-8268B764B7FE}" presName="ChildAccent" presStyleLbl="solidFgAcc1" presStyleIdx="0" presStyleCnt="6"/>
+      <dgm:spPr/>
+    </dgm:pt>
+    <dgm:pt modelId="{5932BD51-9B3C-4916-A6EB-D793BBB4E850}" type="pres">
+      <dgm:prSet presAssocID="{B187C365-E632-4D72-9EBC-8268B764B7FE}" presName="Child" presStyleLbl="revTx" presStyleIdx="1" presStyleCnt="9">
+        <dgm:presLayoutVars>
+          <dgm:chMax val="0"/>
+          <dgm:chPref val="0"/>
+          <dgm:bulletEnabled val="1"/>
+        </dgm:presLayoutVars>
+      </dgm:prSet>
+      <dgm:spPr/>
+    </dgm:pt>
+    <dgm:pt modelId="{10025545-6C17-4391-84FB-A9EA1024595E}" type="pres">
+      <dgm:prSet presAssocID="{DB6CB981-4EA1-41C8-8D94-7EF2D708D663}" presName="childComposite" presStyleCnt="0">
+        <dgm:presLayoutVars>
+          <dgm:chMax val="0"/>
+          <dgm:chPref val="0"/>
+        </dgm:presLayoutVars>
+      </dgm:prSet>
+      <dgm:spPr/>
+    </dgm:pt>
+    <dgm:pt modelId="{814BB851-51AE-4B5A-AA27-AA8725E890A0}" type="pres">
+      <dgm:prSet presAssocID="{DB6CB981-4EA1-41C8-8D94-7EF2D708D663}" presName="ChildAccent" presStyleLbl="solidFgAcc1" presStyleIdx="1" presStyleCnt="6"/>
+      <dgm:spPr/>
+    </dgm:pt>
+    <dgm:pt modelId="{E15652FB-C854-413E-940E-9D91024AD1F7}" type="pres">
+      <dgm:prSet presAssocID="{DB6CB981-4EA1-41C8-8D94-7EF2D708D663}" presName="Child" presStyleLbl="revTx" presStyleIdx="2" presStyleCnt="9">
+        <dgm:presLayoutVars>
+          <dgm:chMax val="0"/>
+          <dgm:chPref val="0"/>
+          <dgm:bulletEnabled val="1"/>
+        </dgm:presLayoutVars>
+      </dgm:prSet>
+      <dgm:spPr/>
+    </dgm:pt>
+    <dgm:pt modelId="{E495D90C-5937-442B-9EA2-D8E0E7AD6590}" type="pres">
+      <dgm:prSet presAssocID="{259827CF-A65D-4F58-9748-FD6AC8BDF372}" presName="root" presStyleCnt="0">
+        <dgm:presLayoutVars>
+          <dgm:chMax/>
+          <dgm:chPref/>
+        </dgm:presLayoutVars>
+      </dgm:prSet>
+      <dgm:spPr/>
+    </dgm:pt>
+    <dgm:pt modelId="{4151616F-A625-4396-A802-3E2986B21D4D}" type="pres">
+      <dgm:prSet presAssocID="{259827CF-A65D-4F58-9748-FD6AC8BDF372}" presName="rootComposite" presStyleCnt="0">
+        <dgm:presLayoutVars/>
+      </dgm:prSet>
+      <dgm:spPr/>
+    </dgm:pt>
+    <dgm:pt modelId="{064B4E41-CAAC-4C38-A49F-5333C7B8CE70}" type="pres">
+      <dgm:prSet presAssocID="{259827CF-A65D-4F58-9748-FD6AC8BDF372}" presName="ParentAccent" presStyleLbl="alignNode1" presStyleIdx="1" presStyleCnt="3"/>
+      <dgm:spPr/>
+    </dgm:pt>
+    <dgm:pt modelId="{69D5510A-2DAD-494A-8F45-B9B32CE8B5E1}" type="pres">
+      <dgm:prSet presAssocID="{259827CF-A65D-4F58-9748-FD6AC8BDF372}" presName="ParentSmallAccent" presStyleLbl="fgAcc1" presStyleIdx="1" presStyleCnt="3"/>
+      <dgm:spPr/>
+    </dgm:pt>
+    <dgm:pt modelId="{546D977F-E5CD-42D8-B8CD-BA2AC750972B}" type="pres">
+      <dgm:prSet presAssocID="{259827CF-A65D-4F58-9748-FD6AC8BDF372}" presName="Parent" presStyleLbl="revTx" presStyleIdx="3" presStyleCnt="9">
+        <dgm:presLayoutVars>
+          <dgm:chMax/>
+          <dgm:chPref val="4"/>
+          <dgm:bulletEnabled val="1"/>
+        </dgm:presLayoutVars>
+      </dgm:prSet>
+      <dgm:spPr/>
+    </dgm:pt>
+    <dgm:pt modelId="{1C862122-0C21-4E8A-BC27-36D5AEABB49F}" type="pres">
+      <dgm:prSet presAssocID="{259827CF-A65D-4F58-9748-FD6AC8BDF372}" presName="childShape" presStyleCnt="0">
+        <dgm:presLayoutVars>
+          <dgm:chMax val="0"/>
+          <dgm:chPref val="0"/>
+        </dgm:presLayoutVars>
+      </dgm:prSet>
+      <dgm:spPr/>
+    </dgm:pt>
+    <dgm:pt modelId="{775BD3AC-C091-498F-9071-DDE62A87E5CD}" type="pres">
+      <dgm:prSet presAssocID="{61662FB2-B989-4543-81DB-F937552B4AB8}" presName="childComposite" presStyleCnt="0">
+        <dgm:presLayoutVars>
+          <dgm:chMax val="0"/>
+          <dgm:chPref val="0"/>
+        </dgm:presLayoutVars>
+      </dgm:prSet>
+      <dgm:spPr/>
+    </dgm:pt>
+    <dgm:pt modelId="{1498DD5A-EC0F-444D-9BD0-9A4B15BC82D1}" type="pres">
+      <dgm:prSet presAssocID="{61662FB2-B989-4543-81DB-F937552B4AB8}" presName="ChildAccent" presStyleLbl="solidFgAcc1" presStyleIdx="2" presStyleCnt="6"/>
+      <dgm:spPr/>
+    </dgm:pt>
+    <dgm:pt modelId="{07ACA282-2398-493D-A64B-BCA36DFCD99B}" type="pres">
+      <dgm:prSet presAssocID="{61662FB2-B989-4543-81DB-F937552B4AB8}" presName="Child" presStyleLbl="revTx" presStyleIdx="4" presStyleCnt="9">
+        <dgm:presLayoutVars>
+          <dgm:chMax val="0"/>
+          <dgm:chPref val="0"/>
+          <dgm:bulletEnabled val="1"/>
+        </dgm:presLayoutVars>
+      </dgm:prSet>
+      <dgm:spPr/>
+    </dgm:pt>
+    <dgm:pt modelId="{2DC28C84-EAD0-42FD-974F-F776BD03597A}" type="pres">
+      <dgm:prSet presAssocID="{3AFBC9AD-B796-4015-8346-21EC96C05240}" presName="childComposite" presStyleCnt="0">
+        <dgm:presLayoutVars>
+          <dgm:chMax val="0"/>
+          <dgm:chPref val="0"/>
+        </dgm:presLayoutVars>
+      </dgm:prSet>
+      <dgm:spPr/>
+    </dgm:pt>
+    <dgm:pt modelId="{9D762747-99EA-435D-AFCE-0A91873E4F44}" type="pres">
+      <dgm:prSet presAssocID="{3AFBC9AD-B796-4015-8346-21EC96C05240}" presName="ChildAccent" presStyleLbl="solidFgAcc1" presStyleIdx="3" presStyleCnt="6"/>
+      <dgm:spPr/>
+    </dgm:pt>
+    <dgm:pt modelId="{73C9F4C8-4D85-4C6F-9A4F-FF40D0DCE643}" type="pres">
+      <dgm:prSet presAssocID="{3AFBC9AD-B796-4015-8346-21EC96C05240}" presName="Child" presStyleLbl="revTx" presStyleIdx="5" presStyleCnt="9">
+        <dgm:presLayoutVars>
+          <dgm:chMax val="0"/>
+          <dgm:chPref val="0"/>
+          <dgm:bulletEnabled val="1"/>
+        </dgm:presLayoutVars>
+      </dgm:prSet>
+      <dgm:spPr/>
+    </dgm:pt>
+    <dgm:pt modelId="{3E3F4699-024B-4AE9-987A-1A566B322272}" type="pres">
+      <dgm:prSet presAssocID="{4D83FE52-4CCC-44AA-8B42-AE050CAED7B6}" presName="root" presStyleCnt="0">
+        <dgm:presLayoutVars>
+          <dgm:chMax/>
+          <dgm:chPref/>
+        </dgm:presLayoutVars>
+      </dgm:prSet>
+      <dgm:spPr/>
+    </dgm:pt>
+    <dgm:pt modelId="{97AF592B-E32E-4C22-8B4E-747DAE980DCB}" type="pres">
+      <dgm:prSet presAssocID="{4D83FE52-4CCC-44AA-8B42-AE050CAED7B6}" presName="rootComposite" presStyleCnt="0">
+        <dgm:presLayoutVars/>
+      </dgm:prSet>
+      <dgm:spPr/>
+    </dgm:pt>
+    <dgm:pt modelId="{62983734-7DE0-4908-84B7-06DB4D60B87A}" type="pres">
+      <dgm:prSet presAssocID="{4D83FE52-4CCC-44AA-8B42-AE050CAED7B6}" presName="ParentAccent" presStyleLbl="alignNode1" presStyleIdx="2" presStyleCnt="3"/>
+      <dgm:spPr/>
+    </dgm:pt>
+    <dgm:pt modelId="{BB8CC828-5743-4CAC-8EA7-0136619E175B}" type="pres">
+      <dgm:prSet presAssocID="{4D83FE52-4CCC-44AA-8B42-AE050CAED7B6}" presName="ParentSmallAccent" presStyleLbl="fgAcc1" presStyleIdx="2" presStyleCnt="3"/>
+      <dgm:spPr/>
+    </dgm:pt>
+    <dgm:pt modelId="{D7787BA8-8030-467B-BEE0-64C8790FCFB7}" type="pres">
+      <dgm:prSet presAssocID="{4D83FE52-4CCC-44AA-8B42-AE050CAED7B6}" presName="Parent" presStyleLbl="revTx" presStyleIdx="6" presStyleCnt="9">
+        <dgm:presLayoutVars>
+          <dgm:chMax/>
+          <dgm:chPref val="4"/>
+          <dgm:bulletEnabled val="1"/>
+        </dgm:presLayoutVars>
+      </dgm:prSet>
+      <dgm:spPr/>
+    </dgm:pt>
+    <dgm:pt modelId="{659AA02D-247E-44D0-B686-CB5285C320C5}" type="pres">
+      <dgm:prSet presAssocID="{4D83FE52-4CCC-44AA-8B42-AE050CAED7B6}" presName="childShape" presStyleCnt="0">
+        <dgm:presLayoutVars>
+          <dgm:chMax val="0"/>
+          <dgm:chPref val="0"/>
+        </dgm:presLayoutVars>
+      </dgm:prSet>
+      <dgm:spPr/>
+    </dgm:pt>
+    <dgm:pt modelId="{3A80BCD5-52A0-4828-A809-76B7B7862229}" type="pres">
+      <dgm:prSet presAssocID="{C724AB61-0F86-4DE0-B195-305876AFE768}" presName="childComposite" presStyleCnt="0">
+        <dgm:presLayoutVars>
+          <dgm:chMax val="0"/>
+          <dgm:chPref val="0"/>
+        </dgm:presLayoutVars>
+      </dgm:prSet>
+      <dgm:spPr/>
+    </dgm:pt>
+    <dgm:pt modelId="{36DEC363-524D-4561-908A-5EC4EF8C1E6D}" type="pres">
+      <dgm:prSet presAssocID="{C724AB61-0F86-4DE0-B195-305876AFE768}" presName="ChildAccent" presStyleLbl="solidFgAcc1" presStyleIdx="4" presStyleCnt="6"/>
+      <dgm:spPr/>
+    </dgm:pt>
+    <dgm:pt modelId="{FA903836-17FC-4554-B59C-42AEB4099400}" type="pres">
+      <dgm:prSet presAssocID="{C724AB61-0F86-4DE0-B195-305876AFE768}" presName="Child" presStyleLbl="revTx" presStyleIdx="7" presStyleCnt="9">
+        <dgm:presLayoutVars>
+          <dgm:chMax val="0"/>
+          <dgm:chPref val="0"/>
+          <dgm:bulletEnabled val="1"/>
+        </dgm:presLayoutVars>
+      </dgm:prSet>
+      <dgm:spPr/>
+    </dgm:pt>
+    <dgm:pt modelId="{BBE97843-A793-4C9E-951D-D6B9BF5C9E54}" type="pres">
+      <dgm:prSet presAssocID="{CD034366-8F79-4934-8E07-32137322B313}" presName="childComposite" presStyleCnt="0">
+        <dgm:presLayoutVars>
+          <dgm:chMax val="0"/>
+          <dgm:chPref val="0"/>
+        </dgm:presLayoutVars>
+      </dgm:prSet>
+      <dgm:spPr/>
+    </dgm:pt>
+    <dgm:pt modelId="{5763965D-1049-414B-8810-7E2C45D67ECC}" type="pres">
+      <dgm:prSet presAssocID="{CD034366-8F79-4934-8E07-32137322B313}" presName="ChildAccent" presStyleLbl="solidFgAcc1" presStyleIdx="5" presStyleCnt="6"/>
+      <dgm:spPr/>
+    </dgm:pt>
+    <dgm:pt modelId="{1540C454-32D8-44D7-8B9F-A3858EB73D0E}" type="pres">
+      <dgm:prSet presAssocID="{CD034366-8F79-4934-8E07-32137322B313}" presName="Child" presStyleLbl="revTx" presStyleIdx="8" presStyleCnt="9">
+        <dgm:presLayoutVars>
+          <dgm:chMax val="0"/>
+          <dgm:chPref val="0"/>
+          <dgm:bulletEnabled val="1"/>
+        </dgm:presLayoutVars>
+      </dgm:prSet>
+      <dgm:spPr/>
+    </dgm:pt>
+  </dgm:ptLst>
+  <dgm:cxnLst>
+    <dgm:cxn modelId="{8B26B112-D1ED-46D7-A135-7D7BC8154F03}" type="presOf" srcId="{61662FB2-B989-4543-81DB-F937552B4AB8}" destId="{07ACA282-2398-493D-A64B-BCA36DFCD99B}" srcOrd="0" destOrd="0" presId="urn:microsoft.com/office/officeart/2008/layout/SquareAccentList"/>
+    <dgm:cxn modelId="{FBFE7913-429D-48EB-969D-8CE10020AE82}" type="presOf" srcId="{C724AB61-0F86-4DE0-B195-305876AFE768}" destId="{FA903836-17FC-4554-B59C-42AEB4099400}" srcOrd="0" destOrd="0" presId="urn:microsoft.com/office/officeart/2008/layout/SquareAccentList"/>
+    <dgm:cxn modelId="{4396901F-DEB2-4355-9FCF-7FB665647C64}" srcId="{9C41E2D0-4C56-49D6-92B8-60893AA91F2A}" destId="{DB6CB981-4EA1-41C8-8D94-7EF2D708D663}" srcOrd="1" destOrd="0" parTransId="{F22B91F6-32CA-45C8-8318-9A024593C6CD}" sibTransId="{FAB07AD4-1260-456C-A478-56FD2CF5F0A1}"/>
+    <dgm:cxn modelId="{1E3B5861-F4B0-4A0D-AAB4-40E4E0812F12}" srcId="{259827CF-A65D-4F58-9748-FD6AC8BDF372}" destId="{3AFBC9AD-B796-4015-8346-21EC96C05240}" srcOrd="1" destOrd="0" parTransId="{AD7EBAF4-C60C-4AD9-B19B-A2B6CCD0700A}" sibTransId="{A6730F01-3B4D-48AD-92E7-42FCB822F4DA}"/>
+    <dgm:cxn modelId="{ADC63163-ACBC-4215-8A45-41069501C7B1}" type="presOf" srcId="{CD034366-8F79-4934-8E07-32137322B313}" destId="{1540C454-32D8-44D7-8B9F-A3858EB73D0E}" srcOrd="0" destOrd="0" presId="urn:microsoft.com/office/officeart/2008/layout/SquareAccentList"/>
+    <dgm:cxn modelId="{7A0D326C-7143-4F1D-9653-FBA289BABC56}" type="presOf" srcId="{F127E61C-FD4C-4866-BA3D-CB159576111D}" destId="{620098BC-09AB-4ED2-B960-558061B87B12}" srcOrd="0" destOrd="0" presId="urn:microsoft.com/office/officeart/2008/layout/SquareAccentList"/>
+    <dgm:cxn modelId="{633A0A51-1817-481B-B169-5579193DCB0B}" type="presOf" srcId="{9C41E2D0-4C56-49D6-92B8-60893AA91F2A}" destId="{DFCD9B2A-8769-4963-AA7F-6A0C29B4FFF1}" srcOrd="0" destOrd="0" presId="urn:microsoft.com/office/officeart/2008/layout/SquareAccentList"/>
+    <dgm:cxn modelId="{8FF3075A-EC9C-470C-9EC1-13D92CE7CC88}" type="presOf" srcId="{3AFBC9AD-B796-4015-8346-21EC96C05240}" destId="{73C9F4C8-4D85-4C6F-9A4F-FF40D0DCE643}" srcOrd="0" destOrd="0" presId="urn:microsoft.com/office/officeart/2008/layout/SquareAccentList"/>
+    <dgm:cxn modelId="{A7B12F7B-AD67-4C0A-861F-EF537D48E6F9}" srcId="{4D83FE52-4CCC-44AA-8B42-AE050CAED7B6}" destId="{C724AB61-0F86-4DE0-B195-305876AFE768}" srcOrd="0" destOrd="0" parTransId="{D81D00DA-8753-432C-BCE7-E25D00CA49D1}" sibTransId="{BCB161A7-7777-4AD2-8DF3-56CDE0DEAB99}"/>
+    <dgm:cxn modelId="{75C4457F-36EE-4291-86EA-925FF78CDE6F}" srcId="{F127E61C-FD4C-4866-BA3D-CB159576111D}" destId="{4D83FE52-4CCC-44AA-8B42-AE050CAED7B6}" srcOrd="2" destOrd="0" parTransId="{D757B012-5075-4F1E-A7FC-BA1464EAF310}" sibTransId="{5D194BBF-6810-4B08-B767-32DA05F015C0}"/>
+    <dgm:cxn modelId="{E18CD88C-450F-42B5-8E21-6D009A14B447}" srcId="{F127E61C-FD4C-4866-BA3D-CB159576111D}" destId="{9C41E2D0-4C56-49D6-92B8-60893AA91F2A}" srcOrd="0" destOrd="0" parTransId="{0EE6A6E4-00E0-4870-948E-B348E3F35D0A}" sibTransId="{D567AB34-7C48-4FFA-B71B-D6A421C0B406}"/>
+    <dgm:cxn modelId="{7E7BEC8D-45B5-476F-8237-8440F048990A}" type="presOf" srcId="{259827CF-A65D-4F58-9748-FD6AC8BDF372}" destId="{546D977F-E5CD-42D8-B8CD-BA2AC750972B}" srcOrd="0" destOrd="0" presId="urn:microsoft.com/office/officeart/2008/layout/SquareAccentList"/>
+    <dgm:cxn modelId="{47C0F392-3046-49A3-B792-D11BBB554D9F}" srcId="{9C41E2D0-4C56-49D6-92B8-60893AA91F2A}" destId="{B187C365-E632-4D72-9EBC-8268B764B7FE}" srcOrd="0" destOrd="0" parTransId="{E2299D8D-C6FC-4FE2-91B9-280FEEBEFD2C}" sibTransId="{DB463B97-27C3-449D-8202-49AD919951F9}"/>
+    <dgm:cxn modelId="{8E8C49A6-DE3B-4250-8334-4B2B82DDF170}" type="presOf" srcId="{4D83FE52-4CCC-44AA-8B42-AE050CAED7B6}" destId="{D7787BA8-8030-467B-BEE0-64C8790FCFB7}" srcOrd="0" destOrd="0" presId="urn:microsoft.com/office/officeart/2008/layout/SquareAccentList"/>
+    <dgm:cxn modelId="{DFE3D1AA-21FF-4F03-AF99-25355437F39C}" srcId="{F127E61C-FD4C-4866-BA3D-CB159576111D}" destId="{259827CF-A65D-4F58-9748-FD6AC8BDF372}" srcOrd="1" destOrd="0" parTransId="{B4BE2A73-7554-4642-8D28-35F699A14478}" sibTransId="{7C9D9D85-6724-42D7-BAEE-EBD151179478}"/>
+    <dgm:cxn modelId="{9F8375AE-F97B-4E42-9641-CCC87B212B01}" type="presOf" srcId="{B187C365-E632-4D72-9EBC-8268B764B7FE}" destId="{5932BD51-9B3C-4916-A6EB-D793BBB4E850}" srcOrd="0" destOrd="0" presId="urn:microsoft.com/office/officeart/2008/layout/SquareAccentList"/>
+    <dgm:cxn modelId="{5943ADC8-9D01-44E3-9D00-23E930DA060A}" type="presOf" srcId="{DB6CB981-4EA1-41C8-8D94-7EF2D708D663}" destId="{E15652FB-C854-413E-940E-9D91024AD1F7}" srcOrd="0" destOrd="0" presId="urn:microsoft.com/office/officeart/2008/layout/SquareAccentList"/>
+    <dgm:cxn modelId="{C36447D6-9A92-42EB-921B-70CB25D4B001}" srcId="{259827CF-A65D-4F58-9748-FD6AC8BDF372}" destId="{61662FB2-B989-4543-81DB-F937552B4AB8}" srcOrd="0" destOrd="0" parTransId="{FD3DA2CA-B911-4E62-97A6-303B2A48F024}" sibTransId="{7892333E-DAA3-4F5F-9CEC-B4E9CD4050A7}"/>
+    <dgm:cxn modelId="{0DE23EDF-4377-4041-9D59-A111E8A6C65B}" srcId="{4D83FE52-4CCC-44AA-8B42-AE050CAED7B6}" destId="{CD034366-8F79-4934-8E07-32137322B313}" srcOrd="1" destOrd="0" parTransId="{DC97E991-DA74-40C0-AF5D-F5EE73AE911A}" sibTransId="{FB99A59D-7289-4F64-9065-1897B35904FA}"/>
+    <dgm:cxn modelId="{B5F3BC31-A186-41F4-825A-936C72F4E963}" type="presParOf" srcId="{620098BC-09AB-4ED2-B960-558061B87B12}" destId="{77808EE7-9CE8-4691-AF59-D69CAC93892D}" srcOrd="0" destOrd="0" presId="urn:microsoft.com/office/officeart/2008/layout/SquareAccentList"/>
+    <dgm:cxn modelId="{DE85A28E-B41B-402F-8037-473806456A66}" type="presParOf" srcId="{77808EE7-9CE8-4691-AF59-D69CAC93892D}" destId="{E346D839-5E9F-4F5A-AA75-1B77DC61401D}" srcOrd="0" destOrd="0" presId="urn:microsoft.com/office/officeart/2008/layout/SquareAccentList"/>
+    <dgm:cxn modelId="{356F12FD-E3BD-4A08-88A0-93694807793B}" type="presParOf" srcId="{E346D839-5E9F-4F5A-AA75-1B77DC61401D}" destId="{049385B7-4DBD-438C-8FE3-AF06DB0B7A5C}" srcOrd="0" destOrd="0" presId="urn:microsoft.com/office/officeart/2008/layout/SquareAccentList"/>
+    <dgm:cxn modelId="{F78692D5-D37C-42B1-97EC-7162C54249FC}" type="presParOf" srcId="{E346D839-5E9F-4F5A-AA75-1B77DC61401D}" destId="{D6F612AE-0252-40F9-AA06-DC466B01707C}" srcOrd="1" destOrd="0" presId="urn:microsoft.com/office/officeart/2008/layout/SquareAccentList"/>
+    <dgm:cxn modelId="{CB7E0260-F18F-4646-BDB1-3DA4A5F079AA}" type="presParOf" srcId="{E346D839-5E9F-4F5A-AA75-1B77DC61401D}" destId="{DFCD9B2A-8769-4963-AA7F-6A0C29B4FFF1}" srcOrd="2" destOrd="0" presId="urn:microsoft.com/office/officeart/2008/layout/SquareAccentList"/>
+    <dgm:cxn modelId="{969A89FF-EA1D-4958-8DFC-E646D8F3D170}" type="presParOf" srcId="{77808EE7-9CE8-4691-AF59-D69CAC93892D}" destId="{55EC029D-1F23-49CC-8449-487E15DBF05A}" srcOrd="1" destOrd="0" presId="urn:microsoft.com/office/officeart/2008/layout/SquareAccentList"/>
+    <dgm:cxn modelId="{EE15B821-39E6-4E94-9C88-231DE7FF1F8C}" type="presParOf" srcId="{55EC029D-1F23-49CC-8449-487E15DBF05A}" destId="{9C616291-6A28-459F-8000-FE6AB32C8F16}" srcOrd="0" destOrd="0" presId="urn:microsoft.com/office/officeart/2008/layout/SquareAccentList"/>
+    <dgm:cxn modelId="{B3CBDF4D-2B49-41D2-8C49-82974DB8A4CF}" type="presParOf" srcId="{9C616291-6A28-459F-8000-FE6AB32C8F16}" destId="{F99323EA-3004-4402-8F83-5ECED4762AE5}" srcOrd="0" destOrd="0" presId="urn:microsoft.com/office/officeart/2008/layout/SquareAccentList"/>
+    <dgm:cxn modelId="{44D9C8DB-7FF1-44D5-8E25-178C995169EE}" type="presParOf" srcId="{9C616291-6A28-459F-8000-FE6AB32C8F16}" destId="{5932BD51-9B3C-4916-A6EB-D793BBB4E850}" srcOrd="1" destOrd="0" presId="urn:microsoft.com/office/officeart/2008/layout/SquareAccentList"/>
+    <dgm:cxn modelId="{FD1744C0-28CD-4E23-B31B-F3199ED5A802}" type="presParOf" srcId="{55EC029D-1F23-49CC-8449-487E15DBF05A}" destId="{10025545-6C17-4391-84FB-A9EA1024595E}" srcOrd="1" destOrd="0" presId="urn:microsoft.com/office/officeart/2008/layout/SquareAccentList"/>
+    <dgm:cxn modelId="{AAB4374F-FD90-4BE0-9A9E-8AB02FC8F513}" type="presParOf" srcId="{10025545-6C17-4391-84FB-A9EA1024595E}" destId="{814BB851-51AE-4B5A-AA27-AA8725E890A0}" srcOrd="0" destOrd="0" presId="urn:microsoft.com/office/officeart/2008/layout/SquareAccentList"/>
+    <dgm:cxn modelId="{04E685EA-4966-4982-BC89-FCA03B72C0EF}" type="presParOf" srcId="{10025545-6C17-4391-84FB-A9EA1024595E}" destId="{E15652FB-C854-413E-940E-9D91024AD1F7}" srcOrd="1" destOrd="0" presId="urn:microsoft.com/office/officeart/2008/layout/SquareAccentList"/>
+    <dgm:cxn modelId="{6D00ECAB-8050-48D7-9E80-B4153663AEEA}" type="presParOf" srcId="{620098BC-09AB-4ED2-B960-558061B87B12}" destId="{E495D90C-5937-442B-9EA2-D8E0E7AD6590}" srcOrd="1" destOrd="0" presId="urn:microsoft.com/office/officeart/2008/layout/SquareAccentList"/>
+    <dgm:cxn modelId="{32E5C7C7-F63C-45F1-8ECD-068A0E631ED3}" type="presParOf" srcId="{E495D90C-5937-442B-9EA2-D8E0E7AD6590}" destId="{4151616F-A625-4396-A802-3E2986B21D4D}" srcOrd="0" destOrd="0" presId="urn:microsoft.com/office/officeart/2008/layout/SquareAccentList"/>
+    <dgm:cxn modelId="{62D641A1-D5BB-4CE0-8D2B-F9F45834618E}" type="presParOf" srcId="{4151616F-A625-4396-A802-3E2986B21D4D}" destId="{064B4E41-CAAC-4C38-A49F-5333C7B8CE70}" srcOrd="0" destOrd="0" presId="urn:microsoft.com/office/officeart/2008/layout/SquareAccentList"/>
+    <dgm:cxn modelId="{4E72DF60-CF85-490C-B539-3ADDFA316458}" type="presParOf" srcId="{4151616F-A625-4396-A802-3E2986B21D4D}" destId="{69D5510A-2DAD-494A-8F45-B9B32CE8B5E1}" srcOrd="1" destOrd="0" presId="urn:microsoft.com/office/officeart/2008/layout/SquareAccentList"/>
+    <dgm:cxn modelId="{6D97B807-2FF7-4832-A66B-781D40F7968C}" type="presParOf" srcId="{4151616F-A625-4396-A802-3E2986B21D4D}" destId="{546D977F-E5CD-42D8-B8CD-BA2AC750972B}" srcOrd="2" destOrd="0" presId="urn:microsoft.com/office/officeart/2008/layout/SquareAccentList"/>
+    <dgm:cxn modelId="{5DF40392-0991-48AC-9187-F94EEE27E6CA}" type="presParOf" srcId="{E495D90C-5937-442B-9EA2-D8E0E7AD6590}" destId="{1C862122-0C21-4E8A-BC27-36D5AEABB49F}" srcOrd="1" destOrd="0" presId="urn:microsoft.com/office/officeart/2008/layout/SquareAccentList"/>
+    <dgm:cxn modelId="{A4B078FC-5E81-425E-A81B-F40A2333667F}" type="presParOf" srcId="{1C862122-0C21-4E8A-BC27-36D5AEABB49F}" destId="{775BD3AC-C091-498F-9071-DDE62A87E5CD}" srcOrd="0" destOrd="0" presId="urn:microsoft.com/office/officeart/2008/layout/SquareAccentList"/>
+    <dgm:cxn modelId="{5B8A4A8B-FDD6-4FD9-8B3F-1917980E7EB9}" type="presParOf" srcId="{775BD3AC-C091-498F-9071-DDE62A87E5CD}" destId="{1498DD5A-EC0F-444D-9BD0-9A4B15BC82D1}" srcOrd="0" destOrd="0" presId="urn:microsoft.com/office/officeart/2008/layout/SquareAccentList"/>
+    <dgm:cxn modelId="{93B72F1A-3EC5-4C19-B4E6-0E1ED47F62D4}" type="presParOf" srcId="{775BD3AC-C091-498F-9071-DDE62A87E5CD}" destId="{07ACA282-2398-493D-A64B-BCA36DFCD99B}" srcOrd="1" destOrd="0" presId="urn:microsoft.com/office/officeart/2008/layout/SquareAccentList"/>
+    <dgm:cxn modelId="{82802E1D-270E-4C98-B395-B670AD8628AD}" type="presParOf" srcId="{1C862122-0C21-4E8A-BC27-36D5AEABB49F}" destId="{2DC28C84-EAD0-42FD-974F-F776BD03597A}" srcOrd="1" destOrd="0" presId="urn:microsoft.com/office/officeart/2008/layout/SquareAccentList"/>
+    <dgm:cxn modelId="{F635D2A8-FE9A-4B2E-9255-355A1B3A11E4}" type="presParOf" srcId="{2DC28C84-EAD0-42FD-974F-F776BD03597A}" destId="{9D762747-99EA-435D-AFCE-0A91873E4F44}" srcOrd="0" destOrd="0" presId="urn:microsoft.com/office/officeart/2008/layout/SquareAccentList"/>
+    <dgm:cxn modelId="{AFBE67CB-FF0C-4359-A69D-21A254DCEE2A}" type="presParOf" srcId="{2DC28C84-EAD0-42FD-974F-F776BD03597A}" destId="{73C9F4C8-4D85-4C6F-9A4F-FF40D0DCE643}" srcOrd="1" destOrd="0" presId="urn:microsoft.com/office/officeart/2008/layout/SquareAccentList"/>
+    <dgm:cxn modelId="{5F1D79DB-944F-4CF5-81BD-1B7AFA67015E}" type="presParOf" srcId="{620098BC-09AB-4ED2-B960-558061B87B12}" destId="{3E3F4699-024B-4AE9-987A-1A566B322272}" srcOrd="2" destOrd="0" presId="urn:microsoft.com/office/officeart/2008/layout/SquareAccentList"/>
+    <dgm:cxn modelId="{4AC6C50F-863E-4EBD-B00F-DFB7F4C51558}" type="presParOf" srcId="{3E3F4699-024B-4AE9-987A-1A566B322272}" destId="{97AF592B-E32E-4C22-8B4E-747DAE980DCB}" srcOrd="0" destOrd="0" presId="urn:microsoft.com/office/officeart/2008/layout/SquareAccentList"/>
+    <dgm:cxn modelId="{5CDBA3AE-3751-4BB4-81EB-2C2910ABF428}" type="presParOf" srcId="{97AF592B-E32E-4C22-8B4E-747DAE980DCB}" destId="{62983734-7DE0-4908-84B7-06DB4D60B87A}" srcOrd="0" destOrd="0" presId="urn:microsoft.com/office/officeart/2008/layout/SquareAccentList"/>
+    <dgm:cxn modelId="{24DB6A71-F841-47B2-9311-798BB53AC109}" type="presParOf" srcId="{97AF592B-E32E-4C22-8B4E-747DAE980DCB}" destId="{BB8CC828-5743-4CAC-8EA7-0136619E175B}" srcOrd="1" destOrd="0" presId="urn:microsoft.com/office/officeart/2008/layout/SquareAccentList"/>
+    <dgm:cxn modelId="{A93F78DB-E19B-41A0-9999-C2A9B9C3424F}" type="presParOf" srcId="{97AF592B-E32E-4C22-8B4E-747DAE980DCB}" destId="{D7787BA8-8030-467B-BEE0-64C8790FCFB7}" srcOrd="2" destOrd="0" presId="urn:microsoft.com/office/officeart/2008/layout/SquareAccentList"/>
+    <dgm:cxn modelId="{8988765C-9754-42E1-9DA4-F9E3822959EB}" type="presParOf" srcId="{3E3F4699-024B-4AE9-987A-1A566B322272}" destId="{659AA02D-247E-44D0-B686-CB5285C320C5}" srcOrd="1" destOrd="0" presId="urn:microsoft.com/office/officeart/2008/layout/SquareAccentList"/>
+    <dgm:cxn modelId="{73BC8BF6-BFF2-49A6-8881-C947F7A7FC0D}" type="presParOf" srcId="{659AA02D-247E-44D0-B686-CB5285C320C5}" destId="{3A80BCD5-52A0-4828-A809-76B7B7862229}" srcOrd="0" destOrd="0" presId="urn:microsoft.com/office/officeart/2008/layout/SquareAccentList"/>
+    <dgm:cxn modelId="{45D38C1C-EFC1-4F42-9B55-D963A2525D93}" type="presParOf" srcId="{3A80BCD5-52A0-4828-A809-76B7B7862229}" destId="{36DEC363-524D-4561-908A-5EC4EF8C1E6D}" srcOrd="0" destOrd="0" presId="urn:microsoft.com/office/officeart/2008/layout/SquareAccentList"/>
+    <dgm:cxn modelId="{4ECD431C-D559-4090-9561-91BF5CFD81DC}" type="presParOf" srcId="{3A80BCD5-52A0-4828-A809-76B7B7862229}" destId="{FA903836-17FC-4554-B59C-42AEB4099400}" srcOrd="1" destOrd="0" presId="urn:microsoft.com/office/officeart/2008/layout/SquareAccentList"/>
+    <dgm:cxn modelId="{0564390E-731C-475B-AA91-CAB9E40A3AFC}" type="presParOf" srcId="{659AA02D-247E-44D0-B686-CB5285C320C5}" destId="{BBE97843-A793-4C9E-951D-D6B9BF5C9E54}" srcOrd="1" destOrd="0" presId="urn:microsoft.com/office/officeart/2008/layout/SquareAccentList"/>
+    <dgm:cxn modelId="{C3090575-E098-4244-BB36-D7F7BE3F8C93}" type="presParOf" srcId="{BBE97843-A793-4C9E-951D-D6B9BF5C9E54}" destId="{5763965D-1049-414B-8810-7E2C45D67ECC}" srcOrd="0" destOrd="0" presId="urn:microsoft.com/office/officeart/2008/layout/SquareAccentList"/>
+    <dgm:cxn modelId="{CA5509DF-3F39-4E23-91C0-154EECE158F8}" type="presParOf" srcId="{BBE97843-A793-4C9E-951D-D6B9BF5C9E54}" destId="{1540C454-32D8-44D7-8B9F-A3858EB73D0E}" srcOrd="1" destOrd="0" presId="urn:microsoft.com/office/officeart/2008/layout/SquareAccentList"/>
+  </dgm:cxnLst>
+  <dgm:bg/>
+  <dgm:whole/>
+  <dgm:extLst>
+    <a:ext uri="http://schemas.microsoft.com/office/drawing/2008/diagram">
+      <dsp:dataModelExt xmlns:dsp="http://schemas.microsoft.com/office/drawing/2008/diagram" relId="rId7" minVer="http://schemas.openxmlformats.org/drawingml/2006/diagram"/>
+    </a:ext>
+  </dgm:extLst>
+</dgm:dataModel>
+</file>
+
+<file path=ppt/diagrams/drawing1.xml><?xml version="1.0" encoding="utf-8"?>
+<dsp:drawing xmlns:dgm="http://schemas.openxmlformats.org/drawingml/2006/diagram" xmlns:dsp="http://schemas.microsoft.com/office/drawing/2008/diagram" xmlns:a="http://schemas.openxmlformats.org/drawingml/2006/main">
+  <dsp:spTree>
+    <dsp:nvGrpSpPr>
+      <dsp:cNvPr id="0" name=""/>
+      <dsp:cNvGrpSpPr/>
+    </dsp:nvGrpSpPr>
+    <dsp:grpSpPr/>
+    <dsp:sp modelId="{049385B7-4DBD-438C-8FE3-AF06DB0B7A5C}">
+      <dsp:nvSpPr>
+        <dsp:cNvPr id="0" name=""/>
+        <dsp:cNvSpPr/>
+      </dsp:nvSpPr>
+      <dsp:spPr>
+        <a:xfrm>
+          <a:off x="1825" y="756316"/>
+          <a:ext cx="3578612" cy="421013"/>
+        </a:xfrm>
+        <a:prstGeom prst="rect">
+          <a:avLst/>
+        </a:prstGeom>
+        <a:solidFill>
+          <a:schemeClr val="accent2">
+            <a:hueOff val="0"/>
+            <a:satOff val="0"/>
+            <a:lumOff val="0"/>
+            <a:alphaOff val="0"/>
+          </a:schemeClr>
+        </a:solidFill>
+        <a:ln w="19050" cap="flat" cmpd="sng" algn="ctr">
+          <a:solidFill>
+            <a:schemeClr val="accent2">
+              <a:hueOff val="0"/>
+              <a:satOff val="0"/>
+              <a:lumOff val="0"/>
+              <a:alphaOff val="0"/>
+            </a:schemeClr>
+          </a:solidFill>
+          <a:prstDash val="solid"/>
+          <a:miter lim="800000"/>
+        </a:ln>
+        <a:effectLst/>
+      </dsp:spPr>
+      <dsp:style>
+        <a:lnRef idx="2">
+          <a:scrgbClr r="0" g="0" b="0"/>
+        </a:lnRef>
+        <a:fillRef idx="1">
+          <a:scrgbClr r="0" g="0" b="0"/>
+        </a:fillRef>
+        <a:effectRef idx="0">
+          <a:scrgbClr r="0" g="0" b="0"/>
+        </a:effectRef>
+        <a:fontRef idx="minor">
+          <a:schemeClr val="lt1"/>
+        </a:fontRef>
+      </dsp:style>
+    </dsp:sp>
+    <dsp:sp modelId="{D6F612AE-0252-40F9-AA06-DC466B01707C}">
+      <dsp:nvSpPr>
+        <dsp:cNvPr id="0" name=""/>
+        <dsp:cNvSpPr/>
+      </dsp:nvSpPr>
+      <dsp:spPr>
+        <a:xfrm>
+          <a:off x="1825" y="914432"/>
+          <a:ext cx="262897" cy="262897"/>
+        </a:xfrm>
+        <a:prstGeom prst="rect">
+          <a:avLst/>
+        </a:prstGeom>
+        <a:solidFill>
+          <a:schemeClr val="lt1">
+            <a:alpha val="90000"/>
+            <a:hueOff val="0"/>
+            <a:satOff val="0"/>
+            <a:lumOff val="0"/>
+            <a:alphaOff val="0"/>
+          </a:schemeClr>
+        </a:solidFill>
+        <a:ln w="19050" cap="flat" cmpd="sng" algn="ctr">
+          <a:solidFill>
+            <a:schemeClr val="accent2">
+              <a:hueOff val="0"/>
+              <a:satOff val="0"/>
+              <a:lumOff val="0"/>
+              <a:alphaOff val="0"/>
+            </a:schemeClr>
+          </a:solidFill>
+          <a:prstDash val="solid"/>
+          <a:miter lim="800000"/>
+        </a:ln>
+        <a:effectLst/>
+      </dsp:spPr>
+      <dsp:style>
+        <a:lnRef idx="2">
+          <a:scrgbClr r="0" g="0" b="0"/>
+        </a:lnRef>
+        <a:fillRef idx="1">
+          <a:scrgbClr r="0" g="0" b="0"/>
+        </a:fillRef>
+        <a:effectRef idx="0">
+          <a:scrgbClr r="0" g="0" b="0"/>
+        </a:effectRef>
+        <a:fontRef idx="minor"/>
+      </dsp:style>
+    </dsp:sp>
+    <dsp:sp modelId="{DFCD9B2A-8769-4963-AA7F-6A0C29B4FFF1}">
+      <dsp:nvSpPr>
+        <dsp:cNvPr id="0" name=""/>
+        <dsp:cNvSpPr/>
+      </dsp:nvSpPr>
+      <dsp:spPr>
+        <a:xfrm>
+          <a:off x="1825" y="0"/>
+          <a:ext cx="3578612" cy="756316"/>
+        </a:xfrm>
+        <a:prstGeom prst="rect">
+          <a:avLst/>
+        </a:prstGeom>
+        <a:noFill/>
+        <a:ln>
+          <a:noFill/>
+        </a:ln>
+        <a:effectLst/>
+      </dsp:spPr>
+      <dsp:style>
+        <a:lnRef idx="0">
+          <a:scrgbClr r="0" g="0" b="0"/>
+        </a:lnRef>
+        <a:fillRef idx="0">
+          <a:scrgbClr r="0" g="0" b="0"/>
+        </a:fillRef>
+        <a:effectRef idx="0">
+          <a:scrgbClr r="0" g="0" b="0"/>
+        </a:effectRef>
+        <a:fontRef idx="minor"/>
+      </dsp:style>
+      <dsp:txBody>
+        <a:bodyPr spcFirstLastPara="0" vert="horz" wrap="square" lIns="38100" tIns="25400" rIns="38100" bIns="25400" numCol="1" spcCol="1270" anchor="ctr" anchorCtr="0">
+          <a:noAutofit/>
+        </a:bodyPr>
+        <a:lstStyle/>
+        <a:p>
+          <a:pPr marL="0" lvl="0" indent="0" algn="l" defTabSz="889000">
+            <a:lnSpc>
+              <a:spcPct val="90000"/>
+            </a:lnSpc>
+            <a:spcBef>
+              <a:spcPct val="0"/>
+            </a:spcBef>
+            <a:spcAft>
+              <a:spcPct val="35000"/>
+            </a:spcAft>
+            <a:buNone/>
+          </a:pPr>
+          <a:r>
+            <a:rPr lang="en-US" sz="2000" kern="1200" dirty="0"/>
+            <a:t>Scale Beyond Pilot Implementation</a:t>
+          </a:r>
+        </a:p>
+      </dsp:txBody>
+      <dsp:txXfrm>
+        <a:off x="1825" y="0"/>
+        <a:ext cx="3578612" cy="756316"/>
+      </dsp:txXfrm>
+    </dsp:sp>
+    <dsp:sp modelId="{F99323EA-3004-4402-8F83-5ECED4762AE5}">
+      <dsp:nvSpPr>
+        <dsp:cNvPr id="0" name=""/>
+        <dsp:cNvSpPr/>
+      </dsp:nvSpPr>
+      <dsp:spPr>
+        <a:xfrm>
+          <a:off x="1825" y="1527238"/>
+          <a:ext cx="262891" cy="262891"/>
+        </a:xfrm>
+        <a:prstGeom prst="rect">
+          <a:avLst/>
+        </a:prstGeom>
+        <a:solidFill>
+          <a:schemeClr val="lt1">
+            <a:hueOff val="0"/>
+            <a:satOff val="0"/>
+            <a:lumOff val="0"/>
+            <a:alphaOff val="0"/>
+          </a:schemeClr>
+        </a:solidFill>
+        <a:ln w="19050" cap="flat" cmpd="sng" algn="ctr">
+          <a:solidFill>
+            <a:schemeClr val="accent2">
+              <a:hueOff val="0"/>
+              <a:satOff val="0"/>
+              <a:lumOff val="0"/>
+              <a:alphaOff val="0"/>
+            </a:schemeClr>
+          </a:solidFill>
+          <a:prstDash val="solid"/>
+          <a:miter lim="800000"/>
+        </a:ln>
+        <a:effectLst/>
+      </dsp:spPr>
+      <dsp:style>
+        <a:lnRef idx="2">
+          <a:scrgbClr r="0" g="0" b="0"/>
+        </a:lnRef>
+        <a:fillRef idx="1">
+          <a:scrgbClr r="0" g="0" b="0"/>
+        </a:fillRef>
+        <a:effectRef idx="0">
+          <a:scrgbClr r="0" g="0" b="0"/>
+        </a:effectRef>
+        <a:fontRef idx="minor"/>
+      </dsp:style>
+    </dsp:sp>
+    <dsp:sp modelId="{5932BD51-9B3C-4916-A6EB-D793BBB4E850}">
+      <dsp:nvSpPr>
+        <dsp:cNvPr id="0" name=""/>
+        <dsp:cNvSpPr/>
+      </dsp:nvSpPr>
+      <dsp:spPr>
+        <a:xfrm>
+          <a:off x="252328" y="1352284"/>
+          <a:ext cx="3328109" cy="612800"/>
+        </a:xfrm>
+        <a:prstGeom prst="rect">
+          <a:avLst/>
+        </a:prstGeom>
+        <a:noFill/>
+        <a:ln>
+          <a:noFill/>
+        </a:ln>
+        <a:effectLst/>
+      </dsp:spPr>
+      <dsp:style>
+        <a:lnRef idx="0">
+          <a:scrgbClr r="0" g="0" b="0"/>
+        </a:lnRef>
+        <a:fillRef idx="0">
+          <a:scrgbClr r="0" g="0" b="0"/>
+        </a:fillRef>
+        <a:effectRef idx="0">
+          <a:scrgbClr r="0" g="0" b="0"/>
+        </a:effectRef>
+        <a:fontRef idx="minor"/>
+      </dsp:style>
+      <dsp:txBody>
+        <a:bodyPr spcFirstLastPara="0" vert="horz" wrap="square" lIns="85344" tIns="85344" rIns="85344" bIns="85344" numCol="1" spcCol="1270" anchor="ctr" anchorCtr="0">
+          <a:noAutofit/>
+        </a:bodyPr>
+        <a:lstStyle/>
+        <a:p>
+          <a:pPr marL="0" lvl="0" indent="0" algn="l" defTabSz="533400">
+            <a:lnSpc>
+              <a:spcPct val="90000"/>
+            </a:lnSpc>
+            <a:spcBef>
+              <a:spcPct val="0"/>
+            </a:spcBef>
+            <a:spcAft>
+              <a:spcPct val="35000"/>
+            </a:spcAft>
+            <a:buNone/>
+          </a:pPr>
+          <a:r>
+            <a:rPr lang="en-US" sz="1200" b="1" kern="1200" dirty="0"/>
+            <a:t>Action:</a:t>
+          </a:r>
+          <a:r>
+            <a:rPr lang="en-US" sz="1200" kern="1200" dirty="0"/>
+            <a:t> Move beyond pilot efforts toward structured AI integration strategies</a:t>
+          </a:r>
+        </a:p>
+      </dsp:txBody>
+      <dsp:txXfrm>
+        <a:off x="252328" y="1352284"/>
+        <a:ext cx="3328109" cy="612800"/>
+      </dsp:txXfrm>
+    </dsp:sp>
+    <dsp:sp modelId="{814BB851-51AE-4B5A-AA27-AA8725E890A0}">
+      <dsp:nvSpPr>
+        <dsp:cNvPr id="0" name=""/>
+        <dsp:cNvSpPr/>
+      </dsp:nvSpPr>
+      <dsp:spPr>
+        <a:xfrm>
+          <a:off x="1825" y="2140039"/>
+          <a:ext cx="262891" cy="262891"/>
+        </a:xfrm>
+        <a:prstGeom prst="rect">
+          <a:avLst/>
+        </a:prstGeom>
+        <a:solidFill>
+          <a:schemeClr val="lt1">
+            <a:hueOff val="0"/>
+            <a:satOff val="0"/>
+            <a:lumOff val="0"/>
+            <a:alphaOff val="0"/>
+          </a:schemeClr>
+        </a:solidFill>
+        <a:ln w="19050" cap="flat" cmpd="sng" algn="ctr">
+          <a:solidFill>
+            <a:schemeClr val="accent2">
+              <a:hueOff val="0"/>
+              <a:satOff val="0"/>
+              <a:lumOff val="0"/>
+              <a:alphaOff val="0"/>
+            </a:schemeClr>
+          </a:solidFill>
+          <a:prstDash val="solid"/>
+          <a:miter lim="800000"/>
+        </a:ln>
+        <a:effectLst/>
+      </dsp:spPr>
+      <dsp:style>
+        <a:lnRef idx="2">
+          <a:scrgbClr r="0" g="0" b="0"/>
+        </a:lnRef>
+        <a:fillRef idx="1">
+          <a:scrgbClr r="0" g="0" b="0"/>
+        </a:fillRef>
+        <a:effectRef idx="0">
+          <a:scrgbClr r="0" g="0" b="0"/>
+        </a:effectRef>
+        <a:fontRef idx="minor"/>
+      </dsp:style>
+    </dsp:sp>
+    <dsp:sp modelId="{E15652FB-C854-413E-940E-9D91024AD1F7}">
+      <dsp:nvSpPr>
+        <dsp:cNvPr id="0" name=""/>
+        <dsp:cNvSpPr/>
+      </dsp:nvSpPr>
+      <dsp:spPr>
+        <a:xfrm>
+          <a:off x="252328" y="1965084"/>
+          <a:ext cx="3328109" cy="612800"/>
+        </a:xfrm>
+        <a:prstGeom prst="rect">
+          <a:avLst/>
+        </a:prstGeom>
+        <a:noFill/>
+        <a:ln>
+          <a:noFill/>
+        </a:ln>
+        <a:effectLst/>
+      </dsp:spPr>
+      <dsp:style>
+        <a:lnRef idx="0">
+          <a:scrgbClr r="0" g="0" b="0"/>
+        </a:lnRef>
+        <a:fillRef idx="0">
+          <a:scrgbClr r="0" g="0" b="0"/>
+        </a:fillRef>
+        <a:effectRef idx="0">
+          <a:scrgbClr r="0" g="0" b="0"/>
+        </a:effectRef>
+        <a:fontRef idx="minor"/>
+      </dsp:style>
+      <dsp:txBody>
+        <a:bodyPr spcFirstLastPara="0" vert="horz" wrap="square" lIns="85344" tIns="85344" rIns="85344" bIns="85344" numCol="1" spcCol="1270" anchor="ctr" anchorCtr="0">
+          <a:noAutofit/>
+        </a:bodyPr>
+        <a:lstStyle/>
+        <a:p>
+          <a:pPr marL="0" lvl="0" indent="0" algn="l" defTabSz="533400">
+            <a:lnSpc>
+              <a:spcPct val="90000"/>
+            </a:lnSpc>
+            <a:spcBef>
+              <a:spcPct val="0"/>
+            </a:spcBef>
+            <a:spcAft>
+              <a:spcPct val="35000"/>
+            </a:spcAft>
+            <a:buNone/>
+          </a:pPr>
+          <a:r>
+            <a:rPr lang="en-US" sz="1200" b="1" kern="1200" dirty="0"/>
+            <a:t>Why:</a:t>
+          </a:r>
+          <a:r>
+            <a:rPr lang="en-US" sz="1200" kern="1200" dirty="0"/>
+            <a:t> Mature adoption demonstrated stronger business outcomes</a:t>
+          </a:r>
+        </a:p>
+      </dsp:txBody>
+      <dsp:txXfrm>
+        <a:off x="252328" y="1965084"/>
+        <a:ext cx="3328109" cy="612800"/>
+      </dsp:txXfrm>
+    </dsp:sp>
+    <dsp:sp modelId="{064B4E41-CAAC-4C38-A49F-5333C7B8CE70}">
+      <dsp:nvSpPr>
+        <dsp:cNvPr id="0" name=""/>
+        <dsp:cNvSpPr/>
+      </dsp:nvSpPr>
+      <dsp:spPr>
+        <a:xfrm>
+          <a:off x="3759368" y="756316"/>
+          <a:ext cx="3578612" cy="421013"/>
+        </a:xfrm>
+        <a:prstGeom prst="rect">
+          <a:avLst/>
+        </a:prstGeom>
+        <a:solidFill>
+          <a:schemeClr val="accent2">
+            <a:hueOff val="0"/>
+            <a:satOff val="0"/>
+            <a:lumOff val="0"/>
+            <a:alphaOff val="0"/>
+          </a:schemeClr>
+        </a:solidFill>
+        <a:ln w="19050" cap="flat" cmpd="sng" algn="ctr">
+          <a:solidFill>
+            <a:schemeClr val="accent2">
+              <a:hueOff val="0"/>
+              <a:satOff val="0"/>
+              <a:lumOff val="0"/>
+              <a:alphaOff val="0"/>
+            </a:schemeClr>
+          </a:solidFill>
+          <a:prstDash val="solid"/>
+          <a:miter lim="800000"/>
+        </a:ln>
+        <a:effectLst/>
+      </dsp:spPr>
+      <dsp:style>
+        <a:lnRef idx="2">
+          <a:scrgbClr r="0" g="0" b="0"/>
+        </a:lnRef>
+        <a:fillRef idx="1">
+          <a:scrgbClr r="0" g="0" b="0"/>
+        </a:fillRef>
+        <a:effectRef idx="0">
+          <a:scrgbClr r="0" g="0" b="0"/>
+        </a:effectRef>
+        <a:fontRef idx="minor">
+          <a:schemeClr val="lt1"/>
+        </a:fontRef>
+      </dsp:style>
+    </dsp:sp>
+    <dsp:sp modelId="{69D5510A-2DAD-494A-8F45-B9B32CE8B5E1}">
+      <dsp:nvSpPr>
+        <dsp:cNvPr id="0" name=""/>
+        <dsp:cNvSpPr/>
+      </dsp:nvSpPr>
+      <dsp:spPr>
+        <a:xfrm>
+          <a:off x="3759368" y="914432"/>
+          <a:ext cx="262897" cy="262897"/>
+        </a:xfrm>
+        <a:prstGeom prst="rect">
+          <a:avLst/>
+        </a:prstGeom>
+        <a:solidFill>
+          <a:schemeClr val="lt1">
+            <a:alpha val="90000"/>
+            <a:hueOff val="0"/>
+            <a:satOff val="0"/>
+            <a:lumOff val="0"/>
+            <a:alphaOff val="0"/>
+          </a:schemeClr>
+        </a:solidFill>
+        <a:ln w="19050" cap="flat" cmpd="sng" algn="ctr">
+          <a:solidFill>
+            <a:schemeClr val="accent2">
+              <a:hueOff val="0"/>
+              <a:satOff val="0"/>
+              <a:lumOff val="0"/>
+              <a:alphaOff val="0"/>
+            </a:schemeClr>
+          </a:solidFill>
+          <a:prstDash val="solid"/>
+          <a:miter lim="800000"/>
+        </a:ln>
+        <a:effectLst/>
+      </dsp:spPr>
+      <dsp:style>
+        <a:lnRef idx="2">
+          <a:scrgbClr r="0" g="0" b="0"/>
+        </a:lnRef>
+        <a:fillRef idx="1">
+          <a:scrgbClr r="0" g="0" b="0"/>
+        </a:fillRef>
+        <a:effectRef idx="0">
+          <a:scrgbClr r="0" g="0" b="0"/>
+        </a:effectRef>
+        <a:fontRef idx="minor"/>
+      </dsp:style>
+    </dsp:sp>
+    <dsp:sp modelId="{546D977F-E5CD-42D8-B8CD-BA2AC750972B}">
+      <dsp:nvSpPr>
+        <dsp:cNvPr id="0" name=""/>
+        <dsp:cNvSpPr/>
+      </dsp:nvSpPr>
+      <dsp:spPr>
+        <a:xfrm>
+          <a:off x="3759368" y="0"/>
+          <a:ext cx="3578612" cy="756316"/>
+        </a:xfrm>
+        <a:prstGeom prst="rect">
+          <a:avLst/>
+        </a:prstGeom>
+        <a:noFill/>
+        <a:ln>
+          <a:noFill/>
+        </a:ln>
+        <a:effectLst/>
+      </dsp:spPr>
+      <dsp:style>
+        <a:lnRef idx="0">
+          <a:scrgbClr r="0" g="0" b="0"/>
+        </a:lnRef>
+        <a:fillRef idx="0">
+          <a:scrgbClr r="0" g="0" b="0"/>
+        </a:fillRef>
+        <a:effectRef idx="0">
+          <a:scrgbClr r="0" g="0" b="0"/>
+        </a:effectRef>
+        <a:fontRef idx="minor"/>
+      </dsp:style>
+      <dsp:txBody>
+        <a:bodyPr spcFirstLastPara="0" vert="horz" wrap="square" lIns="38100" tIns="25400" rIns="38100" bIns="25400" numCol="1" spcCol="1270" anchor="ctr" anchorCtr="0">
+          <a:noAutofit/>
+        </a:bodyPr>
+        <a:lstStyle/>
+        <a:p>
+          <a:pPr marL="0" lvl="0" indent="0" algn="l" defTabSz="889000">
+            <a:lnSpc>
+              <a:spcPct val="90000"/>
+            </a:lnSpc>
+            <a:spcBef>
+              <a:spcPct val="0"/>
+            </a:spcBef>
+            <a:spcAft>
+              <a:spcPct val="35000"/>
+            </a:spcAft>
+            <a:buNone/>
+          </a:pPr>
+          <a:r>
+            <a:rPr lang="en-US" sz="2000" kern="1200" dirty="0"/>
+            <a:t>Prioritize Workforce Transformation</a:t>
+          </a:r>
+        </a:p>
+      </dsp:txBody>
+      <dsp:txXfrm>
+        <a:off x="3759368" y="0"/>
+        <a:ext cx="3578612" cy="756316"/>
+      </dsp:txXfrm>
+    </dsp:sp>
+    <dsp:sp modelId="{1498DD5A-EC0F-444D-9BD0-9A4B15BC82D1}">
+      <dsp:nvSpPr>
+        <dsp:cNvPr id="0" name=""/>
+        <dsp:cNvSpPr/>
+      </dsp:nvSpPr>
+      <dsp:spPr>
+        <a:xfrm>
+          <a:off x="3759368" y="1527238"/>
+          <a:ext cx="262891" cy="262891"/>
+        </a:xfrm>
+        <a:prstGeom prst="rect">
+          <a:avLst/>
+        </a:prstGeom>
+        <a:solidFill>
+          <a:schemeClr val="lt1">
+            <a:hueOff val="0"/>
+            <a:satOff val="0"/>
+            <a:lumOff val="0"/>
+            <a:alphaOff val="0"/>
+          </a:schemeClr>
+        </a:solidFill>
+        <a:ln w="19050" cap="flat" cmpd="sng" algn="ctr">
+          <a:solidFill>
+            <a:schemeClr val="accent2">
+              <a:hueOff val="0"/>
+              <a:satOff val="0"/>
+              <a:lumOff val="0"/>
+              <a:alphaOff val="0"/>
+            </a:schemeClr>
+          </a:solidFill>
+          <a:prstDash val="solid"/>
+          <a:miter lim="800000"/>
+        </a:ln>
+        <a:effectLst/>
+      </dsp:spPr>
+      <dsp:style>
+        <a:lnRef idx="2">
+          <a:scrgbClr r="0" g="0" b="0"/>
+        </a:lnRef>
+        <a:fillRef idx="1">
+          <a:scrgbClr r="0" g="0" b="0"/>
+        </a:fillRef>
+        <a:effectRef idx="0">
+          <a:scrgbClr r="0" g="0" b="0"/>
+        </a:effectRef>
+        <a:fontRef idx="minor"/>
+      </dsp:style>
+    </dsp:sp>
+    <dsp:sp modelId="{07ACA282-2398-493D-A64B-BCA36DFCD99B}">
+      <dsp:nvSpPr>
+        <dsp:cNvPr id="0" name=""/>
+        <dsp:cNvSpPr/>
+      </dsp:nvSpPr>
+      <dsp:spPr>
+        <a:xfrm>
+          <a:off x="4009871" y="1352284"/>
+          <a:ext cx="3328109" cy="612800"/>
+        </a:xfrm>
+        <a:prstGeom prst="rect">
+          <a:avLst/>
+        </a:prstGeom>
+        <a:noFill/>
+        <a:ln>
+          <a:noFill/>
+        </a:ln>
+        <a:effectLst/>
+      </dsp:spPr>
+      <dsp:style>
+        <a:lnRef idx="0">
+          <a:scrgbClr r="0" g="0" b="0"/>
+        </a:lnRef>
+        <a:fillRef idx="0">
+          <a:scrgbClr r="0" g="0" b="0"/>
+        </a:fillRef>
+        <a:effectRef idx="0">
+          <a:scrgbClr r="0" g="0" b="0"/>
+        </a:effectRef>
+        <a:fontRef idx="minor"/>
+      </dsp:style>
+      <dsp:txBody>
+        <a:bodyPr spcFirstLastPara="0" vert="horz" wrap="square" lIns="85344" tIns="85344" rIns="85344" bIns="85344" numCol="1" spcCol="1270" anchor="ctr" anchorCtr="0">
+          <a:noAutofit/>
+        </a:bodyPr>
+        <a:lstStyle/>
+        <a:p>
+          <a:pPr marL="0" lvl="0" indent="0" algn="l" defTabSz="533400">
+            <a:lnSpc>
+              <a:spcPct val="90000"/>
+            </a:lnSpc>
+            <a:spcBef>
+              <a:spcPct val="0"/>
+            </a:spcBef>
+            <a:spcAft>
+              <a:spcPct val="35000"/>
+            </a:spcAft>
+            <a:buNone/>
+          </a:pPr>
+          <a:r>
+            <a:rPr lang="en-US" sz="1200" b="1" kern="1200" dirty="0"/>
+            <a:t>Action:</a:t>
+          </a:r>
+          <a:r>
+            <a:rPr lang="en-US" sz="1200" kern="1200" dirty="0"/>
+            <a:t> Integrate reskilling into AI adoption plans</a:t>
+          </a:r>
+        </a:p>
+      </dsp:txBody>
+      <dsp:txXfrm>
+        <a:off x="4009871" y="1352284"/>
+        <a:ext cx="3328109" cy="612800"/>
+      </dsp:txXfrm>
+    </dsp:sp>
+    <dsp:sp modelId="{9D762747-99EA-435D-AFCE-0A91873E4F44}">
+      <dsp:nvSpPr>
+        <dsp:cNvPr id="0" name=""/>
+        <dsp:cNvSpPr/>
+      </dsp:nvSpPr>
+      <dsp:spPr>
+        <a:xfrm>
+          <a:off x="3759368" y="2140039"/>
+          <a:ext cx="262891" cy="262891"/>
+        </a:xfrm>
+        <a:prstGeom prst="rect">
+          <a:avLst/>
+        </a:prstGeom>
+        <a:solidFill>
+          <a:schemeClr val="lt1">
+            <a:hueOff val="0"/>
+            <a:satOff val="0"/>
+            <a:lumOff val="0"/>
+            <a:alphaOff val="0"/>
+          </a:schemeClr>
+        </a:solidFill>
+        <a:ln w="19050" cap="flat" cmpd="sng" algn="ctr">
+          <a:solidFill>
+            <a:schemeClr val="accent2">
+              <a:hueOff val="0"/>
+              <a:satOff val="0"/>
+              <a:lumOff val="0"/>
+              <a:alphaOff val="0"/>
+            </a:schemeClr>
+          </a:solidFill>
+          <a:prstDash val="solid"/>
+          <a:miter lim="800000"/>
+        </a:ln>
+        <a:effectLst/>
+      </dsp:spPr>
+      <dsp:style>
+        <a:lnRef idx="2">
+          <a:scrgbClr r="0" g="0" b="0"/>
+        </a:lnRef>
+        <a:fillRef idx="1">
+          <a:scrgbClr r="0" g="0" b="0"/>
+        </a:fillRef>
+        <a:effectRef idx="0">
+          <a:scrgbClr r="0" g="0" b="0"/>
+        </a:effectRef>
+        <a:fontRef idx="minor"/>
+      </dsp:style>
+    </dsp:sp>
+    <dsp:sp modelId="{73C9F4C8-4D85-4C6F-9A4F-FF40D0DCE643}">
+      <dsp:nvSpPr>
+        <dsp:cNvPr id="0" name=""/>
+        <dsp:cNvSpPr/>
+      </dsp:nvSpPr>
+      <dsp:spPr>
+        <a:xfrm>
+          <a:off x="4009871" y="1965084"/>
+          <a:ext cx="3328109" cy="612800"/>
+        </a:xfrm>
+        <a:prstGeom prst="rect">
+          <a:avLst/>
+        </a:prstGeom>
+        <a:noFill/>
+        <a:ln>
+          <a:noFill/>
+        </a:ln>
+        <a:effectLst/>
+      </dsp:spPr>
+      <dsp:style>
+        <a:lnRef idx="0">
+          <a:scrgbClr r="0" g="0" b="0"/>
+        </a:lnRef>
+        <a:fillRef idx="0">
+          <a:scrgbClr r="0" g="0" b="0"/>
+        </a:fillRef>
+        <a:effectRef idx="0">
+          <a:scrgbClr r="0" g="0" b="0"/>
+        </a:effectRef>
+        <a:fontRef idx="minor"/>
+      </dsp:style>
+      <dsp:txBody>
+        <a:bodyPr spcFirstLastPara="0" vert="horz" wrap="square" lIns="85344" tIns="85344" rIns="85344" bIns="85344" numCol="1" spcCol="1270" anchor="ctr" anchorCtr="0">
+          <a:noAutofit/>
+        </a:bodyPr>
+        <a:lstStyle/>
+        <a:p>
+          <a:pPr marL="0" lvl="0" indent="0" algn="l" defTabSz="533400">
+            <a:lnSpc>
+              <a:spcPct val="90000"/>
+            </a:lnSpc>
+            <a:spcBef>
+              <a:spcPct val="0"/>
+            </a:spcBef>
+            <a:spcAft>
+              <a:spcPct val="35000"/>
+            </a:spcAft>
+            <a:buNone/>
+          </a:pPr>
+          <a:r>
+            <a:rPr lang="en-US" sz="1200" b="1" kern="1200" dirty="0"/>
+            <a:t>Why:</a:t>
+          </a:r>
+          <a:r>
+            <a:rPr lang="en-US" sz="1200" kern="1200" dirty="0"/>
+            <a:t> Reskilling represented the largest workforce response across company sizes</a:t>
+          </a:r>
+        </a:p>
+      </dsp:txBody>
+      <dsp:txXfrm>
+        <a:off x="4009871" y="1965084"/>
+        <a:ext cx="3328109" cy="612800"/>
+      </dsp:txXfrm>
+    </dsp:sp>
+    <dsp:sp modelId="{62983734-7DE0-4908-84B7-06DB4D60B87A}">
+      <dsp:nvSpPr>
+        <dsp:cNvPr id="0" name=""/>
+        <dsp:cNvSpPr/>
+      </dsp:nvSpPr>
+      <dsp:spPr>
+        <a:xfrm>
+          <a:off x="7516911" y="756316"/>
+          <a:ext cx="3578612" cy="421013"/>
+        </a:xfrm>
+        <a:prstGeom prst="rect">
+          <a:avLst/>
+        </a:prstGeom>
+        <a:solidFill>
+          <a:schemeClr val="accent2">
+            <a:hueOff val="0"/>
+            <a:satOff val="0"/>
+            <a:lumOff val="0"/>
+            <a:alphaOff val="0"/>
+          </a:schemeClr>
+        </a:solidFill>
+        <a:ln w="19050" cap="flat" cmpd="sng" algn="ctr">
+          <a:solidFill>
+            <a:schemeClr val="accent2">
+              <a:hueOff val="0"/>
+              <a:satOff val="0"/>
+              <a:lumOff val="0"/>
+              <a:alphaOff val="0"/>
+            </a:schemeClr>
+          </a:solidFill>
+          <a:prstDash val="solid"/>
+          <a:miter lim="800000"/>
+        </a:ln>
+        <a:effectLst/>
+      </dsp:spPr>
+      <dsp:style>
+        <a:lnRef idx="2">
+          <a:scrgbClr r="0" g="0" b="0"/>
+        </a:lnRef>
+        <a:fillRef idx="1">
+          <a:scrgbClr r="0" g="0" b="0"/>
+        </a:fillRef>
+        <a:effectRef idx="0">
+          <a:scrgbClr r="0" g="0" b="0"/>
+        </a:effectRef>
+        <a:fontRef idx="minor">
+          <a:schemeClr val="lt1"/>
+        </a:fontRef>
+      </dsp:style>
+    </dsp:sp>
+    <dsp:sp modelId="{BB8CC828-5743-4CAC-8EA7-0136619E175B}">
+      <dsp:nvSpPr>
+        <dsp:cNvPr id="0" name=""/>
+        <dsp:cNvSpPr/>
+      </dsp:nvSpPr>
+      <dsp:spPr>
+        <a:xfrm>
+          <a:off x="7516911" y="914432"/>
+          <a:ext cx="262897" cy="262897"/>
+        </a:xfrm>
+        <a:prstGeom prst="rect">
+          <a:avLst/>
+        </a:prstGeom>
+        <a:solidFill>
+          <a:schemeClr val="lt1">
+            <a:alpha val="90000"/>
+            <a:hueOff val="0"/>
+            <a:satOff val="0"/>
+            <a:lumOff val="0"/>
+            <a:alphaOff val="0"/>
+          </a:schemeClr>
+        </a:solidFill>
+        <a:ln w="19050" cap="flat" cmpd="sng" algn="ctr">
+          <a:solidFill>
+            <a:schemeClr val="accent2">
+              <a:hueOff val="0"/>
+              <a:satOff val="0"/>
+              <a:lumOff val="0"/>
+              <a:alphaOff val="0"/>
+            </a:schemeClr>
+          </a:solidFill>
+          <a:prstDash val="solid"/>
+          <a:miter lim="800000"/>
+        </a:ln>
+        <a:effectLst/>
+      </dsp:spPr>
+      <dsp:style>
+        <a:lnRef idx="2">
+          <a:scrgbClr r="0" g="0" b="0"/>
+        </a:lnRef>
+        <a:fillRef idx="1">
+          <a:scrgbClr r="0" g="0" b="0"/>
+        </a:fillRef>
+        <a:effectRef idx="0">
+          <a:scrgbClr r="0" g="0" b="0"/>
+        </a:effectRef>
+        <a:fontRef idx="minor"/>
+      </dsp:style>
+    </dsp:sp>
+    <dsp:sp modelId="{D7787BA8-8030-467B-BEE0-64C8790FCFB7}">
+      <dsp:nvSpPr>
+        <dsp:cNvPr id="0" name=""/>
+        <dsp:cNvSpPr/>
+      </dsp:nvSpPr>
+      <dsp:spPr>
+        <a:xfrm>
+          <a:off x="7516911" y="0"/>
+          <a:ext cx="3578612" cy="756316"/>
+        </a:xfrm>
+        <a:prstGeom prst="rect">
+          <a:avLst/>
+        </a:prstGeom>
+        <a:noFill/>
+        <a:ln>
+          <a:noFill/>
+        </a:ln>
+        <a:effectLst/>
+      </dsp:spPr>
+      <dsp:style>
+        <a:lnRef idx="0">
+          <a:scrgbClr r="0" g="0" b="0"/>
+        </a:lnRef>
+        <a:fillRef idx="0">
+          <a:scrgbClr r="0" g="0" b="0"/>
+        </a:fillRef>
+        <a:effectRef idx="0">
+          <a:scrgbClr r="0" g="0" b="0"/>
+        </a:effectRef>
+        <a:fontRef idx="minor"/>
+      </dsp:style>
+      <dsp:txBody>
+        <a:bodyPr spcFirstLastPara="0" vert="horz" wrap="square" lIns="38100" tIns="25400" rIns="38100" bIns="25400" numCol="1" spcCol="1270" anchor="ctr" anchorCtr="0">
+          <a:noAutofit/>
+        </a:bodyPr>
+        <a:lstStyle/>
+        <a:p>
+          <a:pPr marL="0" lvl="0" indent="0" algn="l" defTabSz="889000">
+            <a:lnSpc>
+              <a:spcPct val="90000"/>
+            </a:lnSpc>
+            <a:spcBef>
+              <a:spcPct val="0"/>
+            </a:spcBef>
+            <a:spcAft>
+              <a:spcPct val="35000"/>
+            </a:spcAft>
+            <a:buNone/>
+          </a:pPr>
+          <a:r>
+            <a:rPr lang="en-US" sz="2000" kern="1200" dirty="0"/>
+            <a:t>Target Adoption Gaps</a:t>
+          </a:r>
+        </a:p>
+      </dsp:txBody>
+      <dsp:txXfrm>
+        <a:off x="7516911" y="0"/>
+        <a:ext cx="3578612" cy="756316"/>
+      </dsp:txXfrm>
+    </dsp:sp>
+    <dsp:sp modelId="{36DEC363-524D-4561-908A-5EC4EF8C1E6D}">
+      <dsp:nvSpPr>
+        <dsp:cNvPr id="0" name=""/>
+        <dsp:cNvSpPr/>
+      </dsp:nvSpPr>
+      <dsp:spPr>
+        <a:xfrm>
+          <a:off x="7516911" y="1527238"/>
+          <a:ext cx="262891" cy="262891"/>
+        </a:xfrm>
+        <a:prstGeom prst="rect">
+          <a:avLst/>
+        </a:prstGeom>
+        <a:solidFill>
+          <a:schemeClr val="lt1">
+            <a:hueOff val="0"/>
+            <a:satOff val="0"/>
+            <a:lumOff val="0"/>
+            <a:alphaOff val="0"/>
+          </a:schemeClr>
+        </a:solidFill>
+        <a:ln w="19050" cap="flat" cmpd="sng" algn="ctr">
+          <a:solidFill>
+            <a:schemeClr val="accent2">
+              <a:hueOff val="0"/>
+              <a:satOff val="0"/>
+              <a:lumOff val="0"/>
+              <a:alphaOff val="0"/>
+            </a:schemeClr>
+          </a:solidFill>
+          <a:prstDash val="solid"/>
+          <a:miter lim="800000"/>
+        </a:ln>
+        <a:effectLst/>
+      </dsp:spPr>
+      <dsp:style>
+        <a:lnRef idx="2">
+          <a:scrgbClr r="0" g="0" b="0"/>
+        </a:lnRef>
+        <a:fillRef idx="1">
+          <a:scrgbClr r="0" g="0" b="0"/>
+        </a:fillRef>
+        <a:effectRef idx="0">
+          <a:scrgbClr r="0" g="0" b="0"/>
+        </a:effectRef>
+        <a:fontRef idx="minor"/>
+      </dsp:style>
+    </dsp:sp>
+    <dsp:sp modelId="{FA903836-17FC-4554-B59C-42AEB4099400}">
+      <dsp:nvSpPr>
+        <dsp:cNvPr id="0" name=""/>
+        <dsp:cNvSpPr/>
+      </dsp:nvSpPr>
+      <dsp:spPr>
+        <a:xfrm>
+          <a:off x="7767414" y="1352284"/>
+          <a:ext cx="3328109" cy="612800"/>
+        </a:xfrm>
+        <a:prstGeom prst="rect">
+          <a:avLst/>
+        </a:prstGeom>
+        <a:noFill/>
+        <a:ln>
+          <a:noFill/>
+        </a:ln>
+        <a:effectLst/>
+      </dsp:spPr>
+      <dsp:style>
+        <a:lnRef idx="0">
+          <a:scrgbClr r="0" g="0" b="0"/>
+        </a:lnRef>
+        <a:fillRef idx="0">
+          <a:scrgbClr r="0" g="0" b="0"/>
+        </a:fillRef>
+        <a:effectRef idx="0">
+          <a:scrgbClr r="0" g="0" b="0"/>
+        </a:effectRef>
+        <a:fontRef idx="minor"/>
+      </dsp:style>
+      <dsp:txBody>
+        <a:bodyPr spcFirstLastPara="0" vert="horz" wrap="square" lIns="85344" tIns="85344" rIns="85344" bIns="85344" numCol="1" spcCol="1270" anchor="ctr" anchorCtr="0">
+          <a:noAutofit/>
+        </a:bodyPr>
+        <a:lstStyle/>
+        <a:p>
+          <a:pPr marL="0" lvl="0" indent="0" algn="l" defTabSz="533400">
+            <a:lnSpc>
+              <a:spcPct val="90000"/>
+            </a:lnSpc>
+            <a:spcBef>
+              <a:spcPct val="0"/>
+            </a:spcBef>
+            <a:spcAft>
+              <a:spcPct val="35000"/>
+            </a:spcAft>
+            <a:buNone/>
+          </a:pPr>
+          <a:r>
+            <a:rPr lang="en-US" sz="1200" b="1" kern="1200" dirty="0"/>
+            <a:t>Action:</a:t>
+          </a:r>
+          <a:r>
+            <a:rPr lang="en-US" sz="1200" kern="1200" dirty="0"/>
+            <a:t> Identify and address barriers limiting AI maturity</a:t>
+          </a:r>
+        </a:p>
+      </dsp:txBody>
+      <dsp:txXfrm>
+        <a:off x="7767414" y="1352284"/>
+        <a:ext cx="3328109" cy="612800"/>
+      </dsp:txXfrm>
+    </dsp:sp>
+    <dsp:sp modelId="{5763965D-1049-414B-8810-7E2C45D67ECC}">
+      <dsp:nvSpPr>
+        <dsp:cNvPr id="0" name=""/>
+        <dsp:cNvSpPr/>
+      </dsp:nvSpPr>
+      <dsp:spPr>
+        <a:xfrm>
+          <a:off x="7516911" y="2140039"/>
+          <a:ext cx="262891" cy="262891"/>
+        </a:xfrm>
+        <a:prstGeom prst="rect">
+          <a:avLst/>
+        </a:prstGeom>
+        <a:solidFill>
+          <a:schemeClr val="lt1">
+            <a:hueOff val="0"/>
+            <a:satOff val="0"/>
+            <a:lumOff val="0"/>
+            <a:alphaOff val="0"/>
+          </a:schemeClr>
+        </a:solidFill>
+        <a:ln w="19050" cap="flat" cmpd="sng" algn="ctr">
+          <a:solidFill>
+            <a:schemeClr val="accent2">
+              <a:hueOff val="0"/>
+              <a:satOff val="0"/>
+              <a:lumOff val="0"/>
+              <a:alphaOff val="0"/>
+            </a:schemeClr>
+          </a:solidFill>
+          <a:prstDash val="solid"/>
+          <a:miter lim="800000"/>
+        </a:ln>
+        <a:effectLst/>
+      </dsp:spPr>
+      <dsp:style>
+        <a:lnRef idx="2">
+          <a:scrgbClr r="0" g="0" b="0"/>
+        </a:lnRef>
+        <a:fillRef idx="1">
+          <a:scrgbClr r="0" g="0" b="0"/>
+        </a:fillRef>
+        <a:effectRef idx="0">
+          <a:scrgbClr r="0" g="0" b="0"/>
+        </a:effectRef>
+        <a:fontRef idx="minor"/>
+      </dsp:style>
+    </dsp:sp>
+    <dsp:sp modelId="{1540C454-32D8-44D7-8B9F-A3858EB73D0E}">
+      <dsp:nvSpPr>
+        <dsp:cNvPr id="0" name=""/>
+        <dsp:cNvSpPr/>
+      </dsp:nvSpPr>
+      <dsp:spPr>
+        <a:xfrm>
+          <a:off x="7767414" y="1965084"/>
+          <a:ext cx="3328109" cy="612800"/>
+        </a:xfrm>
+        <a:prstGeom prst="rect">
+          <a:avLst/>
+        </a:prstGeom>
+        <a:noFill/>
+        <a:ln>
+          <a:noFill/>
+        </a:ln>
+        <a:effectLst/>
+      </dsp:spPr>
+      <dsp:style>
+        <a:lnRef idx="0">
+          <a:scrgbClr r="0" g="0" b="0"/>
+        </a:lnRef>
+        <a:fillRef idx="0">
+          <a:scrgbClr r="0" g="0" b="0"/>
+        </a:fillRef>
+        <a:effectRef idx="0">
+          <a:scrgbClr r="0" g="0" b="0"/>
+        </a:effectRef>
+        <a:fontRef idx="minor"/>
+      </dsp:style>
+      <dsp:txBody>
+        <a:bodyPr spcFirstLastPara="0" vert="horz" wrap="square" lIns="85344" tIns="85344" rIns="85344" bIns="85344" numCol="1" spcCol="1270" anchor="ctr" anchorCtr="0">
+          <a:noAutofit/>
+        </a:bodyPr>
+        <a:lstStyle/>
+        <a:p>
+          <a:pPr marL="0" lvl="0" indent="0" algn="l" defTabSz="533400">
+            <a:lnSpc>
+              <a:spcPct val="90000"/>
+            </a:lnSpc>
+            <a:spcBef>
+              <a:spcPct val="0"/>
+            </a:spcBef>
+            <a:spcAft>
+              <a:spcPct val="35000"/>
+            </a:spcAft>
+            <a:buNone/>
+          </a:pPr>
+          <a:r>
+            <a:rPr lang="en-US" sz="1200" b="1" kern="1200" dirty="0"/>
+            <a:t>Why:</a:t>
+          </a:r>
+          <a:r>
+            <a:rPr lang="en-US" sz="1200" kern="1200" dirty="0"/>
+            <a:t> Successful adoption requires aligning technology, processes, and workforce readiness</a:t>
+          </a:r>
+        </a:p>
+      </dsp:txBody>
+      <dsp:txXfrm>
+        <a:off x="7767414" y="1965084"/>
+        <a:ext cx="3328109" cy="612800"/>
+      </dsp:txXfrm>
+    </dsp:sp>
+  </dsp:spTree>
+</dsp:drawing>
+</file>
+
+<file path=ppt/diagrams/layout1.xml><?xml version="1.0" encoding="utf-8"?>
+<dgm:layoutDef xmlns:dgm="http://schemas.openxmlformats.org/drawingml/2006/diagram" xmlns:a="http://schemas.openxmlformats.org/drawingml/2006/main" uniqueId="urn:microsoft.com/office/officeart/2008/layout/SquareAccentList">
+  <dgm:title val=""/>
+  <dgm:desc val=""/>
+  <dgm:catLst>
+    <dgm:cat type="list" pri="5500"/>
+  </dgm:catLst>
+  <dgm:sampData>
+    <dgm:dataModel>
+      <dgm:ptLst>
+        <dgm:pt modelId="0" type="doc"/>
+        <dgm:pt modelId="10">
+          <dgm:prSet phldr="1"/>
+        </dgm:pt>
+        <dgm:pt modelId="11">
+          <dgm:prSet phldr="1"/>
+        </dgm:pt>
+        <dgm:pt modelId="12">
+          <dgm:prSet phldr="1"/>
+        </dgm:pt>
+        <dgm:pt modelId="13">
+          <dgm:prSet phldr="1"/>
+        </dgm:pt>
+        <dgm:pt modelId="20">
+          <dgm:prSet phldr="1"/>
+        </dgm:pt>
+        <dgm:pt modelId="21">
+          <dgm:prSet phldr="1"/>
+        </dgm:pt>
+        <dgm:pt modelId="22">
+          <dgm:prSet phldr="1"/>
+        </dgm:pt>
+        <dgm:pt modelId="23">
+          <dgm:prSet phldr="1"/>
+        </dgm:pt>
+      </dgm:ptLst>
+      <dgm:cxnLst>
+        <dgm:cxn modelId="1" srcId="0" destId="10" srcOrd="0" destOrd="0"/>
+        <dgm:cxn modelId="2" srcId="10" destId="11" srcOrd="0" destOrd="0"/>
+        <dgm:cxn modelId="3" srcId="10" destId="12" srcOrd="1" destOrd="0"/>
+        <dgm:cxn modelId="4" srcId="10" destId="13" srcOrd="2" destOrd="0"/>
+        <dgm:cxn modelId="5" srcId="0" destId="20" srcOrd="0" destOrd="0"/>
+        <dgm:cxn modelId="6" srcId="20" destId="21" srcOrd="0" destOrd="0"/>
+        <dgm:cxn modelId="7" srcId="20" destId="22" srcOrd="1" destOrd="0"/>
+        <dgm:cxn modelId="8" srcId="20" destId="23" srcOrd="2" destOrd="0"/>
+      </dgm:cxnLst>
+      <dgm:bg/>
+      <dgm:whole/>
+    </dgm:dataModel>
+  </dgm:sampData>
+  <dgm:styleData>
+    <dgm:dataModel>
+      <dgm:ptLst>
+        <dgm:pt modelId="0" type="doc"/>
+        <dgm:pt modelId="10">
+          <dgm:prSet phldr="1"/>
+        </dgm:pt>
+        <dgm:pt modelId="11">
+          <dgm:prSet phldr="1"/>
+        </dgm:pt>
+        <dgm:pt modelId="12">
+          <dgm:prSet phldr="1"/>
+        </dgm:pt>
+        <dgm:pt modelId="13">
+          <dgm:prSet phldr="1"/>
+        </dgm:pt>
+        <dgm:pt modelId="20">
+          <dgm:prSet phldr="1"/>
+        </dgm:pt>
+        <dgm:pt modelId="21">
+          <dgm:prSet phldr="1"/>
+        </dgm:pt>
+        <dgm:pt modelId="22">
+          <dgm:prSet phldr="1"/>
+        </dgm:pt>
+        <dgm:pt modelId="23">
+          <dgm:prSet phldr="1"/>
+        </dgm:pt>
+      </dgm:ptLst>
+      <dgm:cxnLst>
+        <dgm:cxn modelId="1" srcId="0" destId="10" srcOrd="0" destOrd="0"/>
+        <dgm:cxn modelId="2" srcId="10" destId="11" srcOrd="0" destOrd="0"/>
+        <dgm:cxn modelId="3" srcId="10" destId="12" srcOrd="1" destOrd="0"/>
+        <dgm:cxn modelId="4" srcId="10" destId="13" srcOrd="2" destOrd="0"/>
+        <dgm:cxn modelId="5" srcId="0" destId="20" srcOrd="0" destOrd="0"/>
+        <dgm:cxn modelId="6" srcId="20" destId="21" srcOrd="0" destOrd="0"/>
+        <dgm:cxn modelId="7" srcId="20" destId="22" srcOrd="1" destOrd="0"/>
+        <dgm:cxn modelId="8" srcId="20" destId="23" srcOrd="2" destOrd="0"/>
+      </dgm:cxnLst>
+      <dgm:bg/>
+      <dgm:whole/>
+    </dgm:dataModel>
+  </dgm:styleData>
+  <dgm:clrData>
+    <dgm:dataModel>
+      <dgm:ptLst>
+        <dgm:pt modelId="0" type="doc"/>
+        <dgm:pt modelId="10">
+          <dgm:prSet phldr="1"/>
+        </dgm:pt>
+        <dgm:pt modelId="11">
+          <dgm:prSet phldr="1"/>
+        </dgm:pt>
+        <dgm:pt modelId="12">
+          <dgm:prSet phldr="1"/>
+        </dgm:pt>
+        <dgm:pt modelId="13">
+          <dgm:prSet phldr="1"/>
+        </dgm:pt>
+        <dgm:pt modelId="20">
+          <dgm:prSet phldr="1"/>
+        </dgm:pt>
+        <dgm:pt modelId="21">
+          <dgm:prSet phldr="1"/>
+        </dgm:pt>
+        <dgm:pt modelId="22">
+          <dgm:prSet phldr="1"/>
+        </dgm:pt>
+        <dgm:pt modelId="23">
+          <dgm:prSet phldr="1"/>
+        </dgm:pt>
+      </dgm:ptLst>
+      <dgm:cxnLst>
+        <dgm:cxn modelId="1" srcId="0" destId="10" srcOrd="0" destOrd="0"/>
+        <dgm:cxn modelId="2" srcId="10" destId="11" srcOrd="0" destOrd="0"/>
+        <dgm:cxn modelId="3" srcId="10" destId="12" srcOrd="1" destOrd="0"/>
+        <dgm:cxn modelId="4" srcId="10" destId="13" srcOrd="2" destOrd="0"/>
+        <dgm:cxn modelId="5" srcId="0" destId="20" srcOrd="0" destOrd="0"/>
+        <dgm:cxn modelId="6" srcId="20" destId="21" srcOrd="0" destOrd="0"/>
+        <dgm:cxn modelId="7" srcId="20" destId="22" srcOrd="1" destOrd="0"/>
+        <dgm:cxn modelId="8" srcId="20" destId="23" srcOrd="2" destOrd="0"/>
+      </dgm:cxnLst>
+      <dgm:bg/>
+      <dgm:whole/>
+    </dgm:dataModel>
+  </dgm:clrData>
+  <dgm:layoutNode name="layout">
+    <dgm:varLst>
+      <dgm:chMax/>
+      <dgm:chPref/>
+      <dgm:dir/>
+      <dgm:resizeHandles/>
+    </dgm:varLst>
+    <dgm:choose name="Name0">
+      <dgm:if name="Name1" func="var" arg="dir" op="equ" val="norm">
+        <dgm:alg type="hierChild">
+          <dgm:param type="linDir" val="fromL"/>
+          <dgm:param type="vertAlign" val="t"/>
+          <dgm:param type="nodeVertAlign" val="t"/>
+          <dgm:param type="horzAlign" val="ctr"/>
+          <dgm:param type="fallback" val="1D"/>
+        </dgm:alg>
+      </dgm:if>
+      <dgm:else name="Name2">
+        <dgm:alg type="hierChild">
+          <dgm:param type="linDir" val="fromR"/>
+          <dgm:param type="vertAlign" val="t"/>
+          <dgm:param type="nodeVertAlign" val="t"/>
+          <dgm:param type="horzAlign" val="ctr"/>
+          <dgm:param type="fallback" val="1D"/>
+        </dgm:alg>
+      </dgm:else>
+    </dgm:choose>
+    <dgm:shape xmlns:r="http://schemas.openxmlformats.org/officeDocument/2006/relationships" r:blip="">
+      <dgm:adjLst/>
+    </dgm:shape>
+    <dgm:presOf/>
+    <dgm:constrLst>
+      <dgm:constr type="primFontSz" for="des" forName="Parent" op="equ" val="65"/>
+      <dgm:constr type="primFontSz" for="des" forName="Child" op="equ" val="65"/>
+      <dgm:constr type="primFontSz" for="des" forName="Child" refType="primFontSz" refFor="des" refForName="Parent" op="lte"/>
+      <dgm:constr type="w" for="des" forName="rootComposite" refType="h" refFor="des" refForName="rootComposite" fact="3.0396"/>
+      <dgm:constr type="h" for="des" forName="rootComposite" refType="h"/>
+      <dgm:constr type="w" for="des" forName="childComposite" refType="w" refFor="des" refForName="rootComposite"/>
+      <dgm:constr type="h" for="des" forName="childComposite" refType="h" refFor="des" refForName="rootComposite" fact="0.5205"/>
+      <dgm:constr type="sibSp" refType="w" refFor="des" refForName="rootComposite" fact="0.05"/>
+      <dgm:constr type="sp" for="des" forName="root" refType="h" refFor="des" refForName="childComposite" fact="0.2855"/>
+    </dgm:constrLst>
+    <dgm:ruleLst/>
+    <dgm:forEach name="Name3" axis="ch">
+      <dgm:forEach name="Name4" axis="self" ptType="node" cnt="1">
+        <dgm:layoutNode name="root">
+          <dgm:varLst>
+            <dgm:chMax/>
+            <dgm:chPref/>
+          </dgm:varLst>
+          <dgm:alg type="hierRoot">
+            <dgm:param type="hierAlign" val="tL"/>
+          </dgm:alg>
+          <dgm:shape xmlns:r="http://schemas.openxmlformats.org/officeDocument/2006/relationships" r:blip="">
+            <dgm:adjLst/>
+          </dgm:shape>
+          <dgm:presOf/>
+          <dgm:constrLst/>
+          <dgm:ruleLst/>
+          <dgm:layoutNode name="rootComposite">
+            <dgm:varLst/>
+            <dgm:alg type="composite"/>
+            <dgm:shape xmlns:r="http://schemas.openxmlformats.org/officeDocument/2006/relationships" r:blip="">
+              <dgm:adjLst/>
+            </dgm:shape>
+            <dgm:presOf axis="self" ptType="node" cnt="1"/>
+            <dgm:choose name="Name5">
+              <dgm:if name="Name6" func="var" arg="dir" op="equ" val="norm">
+                <dgm:constrLst>
+                  <dgm:constr type="l" for="ch" forName="Parent" refType="w" fact="0"/>
+                  <dgm:constr type="t" for="ch" forName="Parent" refType="h" fact="0"/>
+                  <dgm:constr type="w" for="ch" forName="Parent" refType="w"/>
+                  <dgm:constr type="h" for="ch" forName="Parent" refType="h" fact="0.6424"/>
+                  <dgm:constr type="l" for="ch" forName="ParentAccent" refType="w" fact="0"/>
+                  <dgm:constr type="b" for="ch" forName="ParentAccent" refType="h"/>
+                  <dgm:constr type="w" for="ch" forName="ParentAccent" refType="w"/>
+                  <dgm:constr type="h" for="ch" forName="ParentAccent" refType="h" fact="0.3576"/>
+                  <dgm:constr type="l" for="ch" forName="ParentSmallAccent" refType="w" fact="0"/>
+                  <dgm:constr type="b" for="ch" forName="ParentSmallAccent" refType="h"/>
+                  <dgm:constr type="w" for="ch" forName="ParentSmallAccent" refType="h" fact="0.2233"/>
+                  <dgm:constr type="h" for="ch" forName="ParentSmallAccent" refType="h" fact="0.2233"/>
+                </dgm:constrLst>
+              </dgm:if>
+              <dgm:else name="Name7">
+                <dgm:constrLst>
+                  <dgm:constr type="l" for="ch" forName="Parent" refType="w" fact="0"/>
+                  <dgm:constr type="t" for="ch" forName="Parent" refType="h" fact="0"/>
+                  <dgm:constr type="w" for="ch" forName="Parent" refType="w"/>
+                  <dgm:constr type="h" for="ch" forName="Parent" refType="h" fact="0.6424"/>
+                  <dgm:constr type="l" for="ch" forName="ParentAccent" refType="w" fact="0"/>
+                  <dgm:constr type="b" for="ch" forName="ParentAccent" refType="h"/>
+                  <dgm:constr type="w" for="ch" forName="ParentAccent" refType="w"/>
+                  <dgm:constr type="h" for="ch" forName="ParentAccent" refType="h" fact="0.3576"/>
+                  <dgm:constr type="r" for="ch" forName="ParentSmallAccent" refType="w"/>
+                  <dgm:constr type="b" for="ch" forName="ParentSmallAccent" refType="h"/>
+                  <dgm:constr type="w" for="ch" forName="ParentSmallAccent" refType="h" fact="0.2233"/>
+                  <dgm:constr type="h" for="ch" forName="ParentSmallAccent" refType="h" fact="0.2233"/>
+                </dgm:constrLst>
+              </dgm:else>
+            </dgm:choose>
+            <dgm:ruleLst/>
+            <dgm:layoutNode name="ParentAccent" styleLbl="alignNode1">
+              <dgm:alg type="sp"/>
+              <dgm:shape xmlns:r="http://schemas.openxmlformats.org/officeDocument/2006/relationships" type="rect" r:blip="">
+                <dgm:adjLst/>
+              </dgm:shape>
+              <dgm:presOf/>
+            </dgm:layoutNode>
+            <dgm:layoutNode name="ParentSmallAccent" styleLbl="fgAcc1">
+              <dgm:alg type="sp"/>
+              <dgm:shape xmlns:r="http://schemas.openxmlformats.org/officeDocument/2006/relationships" type="rect" r:blip="">
+                <dgm:adjLst/>
+              </dgm:shape>
+              <dgm:presOf/>
+            </dgm:layoutNode>
+            <dgm:layoutNode name="Parent" styleLbl="revTx">
+              <dgm:varLst>
+                <dgm:chMax/>
+                <dgm:chPref val="4"/>
+                <dgm:bulletEnabled val="1"/>
+              </dgm:varLst>
+              <dgm:choose name="Name8">
+                <dgm:if name="Name9" func="var" arg="dir" op="equ" val="norm">
+                  <dgm:alg type="tx">
+                    <dgm:param type="txAnchorVertCh" val="mid"/>
+                    <dgm:param type="parTxLTRAlign" val="l"/>
+                  </dgm:alg>
+                </dgm:if>
+                <dgm:else name="Name10">
+                  <dgm:alg type="tx">
+                    <dgm:param type="txAnchorVertCh" val="mid"/>
+                    <dgm:param type="parTxLTRAlign" val="r"/>
+                  </dgm:alg>
+                </dgm:else>
+              </dgm:choose>
+              <dgm:shape xmlns:r="http://schemas.openxmlformats.org/officeDocument/2006/relationships" type="rect" r:blip="">
+                <dgm:adjLst/>
+              </dgm:shape>
+              <dgm:presOf axis="self" ptType="node"/>
+              <dgm:constrLst>
+                <dgm:constr type="tMarg" refType="primFontSz" fact="0.1"/>
+                <dgm:constr type="bMarg" refType="primFontSz" fact="0.1"/>
+                <dgm:constr type="lMarg" refType="primFontSz" fact="0.15"/>
+                <dgm:constr type="rMarg" refType="primFontSz" fact="0.15"/>
+              </dgm:constrLst>
+              <dgm:ruleLst>
+                <dgm:rule type="primFontSz" val="5" fact="NaN" max="NaN"/>
+                <dgm:rule type="primFontSz" val="65" fact="NaN" max="NaN"/>
+              </dgm:ruleLst>
+            </dgm:layoutNode>
+          </dgm:layoutNode>
+          <dgm:layoutNode name="childShape">
+            <dgm:varLst>
+              <dgm:chMax val="0"/>
+              <dgm:chPref val="0"/>
+            </dgm:varLst>
+            <dgm:alg type="hierChild">
+              <dgm:param type="chAlign" val="r"/>
+              <dgm:param type="linDir" val="fromT"/>
+              <dgm:param type="fallback" val="2D"/>
+            </dgm:alg>
+            <dgm:shape xmlns:r="http://schemas.openxmlformats.org/officeDocument/2006/relationships" r:blip="">
+              <dgm:adjLst/>
+            </dgm:shape>
+            <dgm:presOf/>
+            <dgm:constrLst/>
+            <dgm:ruleLst/>
+            <dgm:forEach name="Name11" axis="ch">
+              <dgm:forEach name="Name12" axis="self" ptType="node">
+                <dgm:layoutNode name="childComposite">
+                  <dgm:varLst>
+                    <dgm:chMax val="0"/>
+                    <dgm:chPref val="0"/>
+                  </dgm:varLst>
+                  <dgm:alg type="composite"/>
+                  <dgm:shape xmlns:r="http://schemas.openxmlformats.org/officeDocument/2006/relationships" r:blip="">
+                    <dgm:adjLst/>
+                  </dgm:shape>
+                  <dgm:presOf/>
+                  <dgm:choose name="Name13">
+                    <dgm:if name="Name14" func="var" arg="dir" op="equ" val="norm">
+                      <dgm:constrLst>
+                        <dgm:constr type="w" for="ch" forName="ChildAccent" refType="h" fact="0.429"/>
+                        <dgm:constr type="h" for="ch" forName="ChildAccent" refType="h" fact="0.429"/>
+                        <dgm:constr type="l" for="ch" forName="ChildAccent" refType="w" fact="0"/>
+                        <dgm:constr type="t" for="ch" forName="ChildAccent" refType="h" fact="0.2855"/>
+                        <dgm:constr type="w" for="ch" forName="Child" refType="w" fact="0.93"/>
+                        <dgm:constr type="h" for="ch" forName="Child" refType="h"/>
+                        <dgm:constr type="l" for="ch" forName="Child" refType="w" fact="0.07"/>
+                        <dgm:constr type="t" for="ch" forName="Child" refType="h" fact="0"/>
+                      </dgm:constrLst>
+                    </dgm:if>
+                    <dgm:else name="Name15">
+                      <dgm:constrLst>
+                        <dgm:constr type="w" for="ch" forName="ChildAccent" refType="h" fact="0.429"/>
+                        <dgm:constr type="h" for="ch" forName="ChildAccent" refType="h" fact="0.429"/>
+                        <dgm:constr type="r" for="ch" forName="ChildAccent" refType="w"/>
+                        <dgm:constr type="t" for="ch" forName="ChildAccent" refType="h" fact="0.2855"/>
+                        <dgm:constr type="w" for="ch" forName="Child" refType="w" fact="0.93"/>
+                        <dgm:constr type="h" for="ch" forName="Child" refType="h"/>
+                        <dgm:constr type="r" for="ch" forName="Child" refType="w" fact="0.93"/>
+                        <dgm:constr type="t" for="ch" forName="Child" refType="h" fact="0"/>
+                      </dgm:constrLst>
+                    </dgm:else>
+                  </dgm:choose>
+                  <dgm:ruleLst/>
+                  <dgm:layoutNode name="ChildAccent" styleLbl="solidFgAcc1">
+                    <dgm:alg type="sp"/>
+                    <dgm:shape xmlns:r="http://schemas.openxmlformats.org/officeDocument/2006/relationships" type="rect" r:blip="">
+                      <dgm:adjLst/>
+                    </dgm:shape>
+                    <dgm:presOf/>
+                  </dgm:layoutNode>
+                  <dgm:layoutNode name="Child" styleLbl="revTx">
+                    <dgm:varLst>
+                      <dgm:chMax val="0"/>
+                      <dgm:chPref val="0"/>
+                      <dgm:bulletEnabled val="1"/>
+                    </dgm:varLst>
+                    <dgm:choose name="Name16">
+                      <dgm:if name="Name17" func="var" arg="dir" op="equ" val="norm">
+                        <dgm:alg type="tx">
+                          <dgm:param type="txAnchorVertCh" val="mid"/>
+                          <dgm:param type="parTxLTRAlign" val="l"/>
+                        </dgm:alg>
+                      </dgm:if>
+                      <dgm:else name="Name18">
+                        <dgm:alg type="tx">
+                          <dgm:param type="txAnchorVertCh" val="mid"/>
+                          <dgm:param type="parTxLTRAlign" val="r"/>
+                        </dgm:alg>
+                      </dgm:else>
+                    </dgm:choose>
+                    <dgm:shape xmlns:r="http://schemas.openxmlformats.org/officeDocument/2006/relationships" type="rect" r:blip="">
+                      <dgm:adjLst/>
+                    </dgm:shape>
+                    <dgm:presOf axis="desOrSelf" ptType="node node"/>
+                    <dgm:ruleLst>
+                      <dgm:rule type="primFontSz" val="5" fact="NaN" max="NaN"/>
+                    </dgm:ruleLst>
+                  </dgm:layoutNode>
+                </dgm:layoutNode>
+              </dgm:forEach>
+            </dgm:forEach>
+          </dgm:layoutNode>
+        </dgm:layoutNode>
+      </dgm:forEach>
+    </dgm:forEach>
+  </dgm:layoutNode>
+</dgm:layoutDef>
+</file>
+
+<file path=ppt/diagrams/quickStyle1.xml><?xml version="1.0" encoding="utf-8"?>
+<dgm:styleDef xmlns:dgm="http://schemas.openxmlformats.org/drawingml/2006/diagram" xmlns:a="http://schemas.openxmlformats.org/drawingml/2006/main" uniqueId="urn:microsoft.com/office/officeart/2005/8/quickstyle/simple1">
+  <dgm:title val=""/>
+  <dgm:desc val=""/>
+  <dgm:catLst>
+    <dgm:cat type="simple" pri="10100"/>
+  </dgm:catLst>
+  <dgm:scene3d>
+    <a:camera prst="orthographicFront"/>
+    <a:lightRig rig="threePt" dir="t"/>
+  </dgm:scene3d>
+  <dgm:styleLbl name="node0">
+    <dgm:scene3d>
+      <a:camera prst="orthographicFront"/>
+      <a:lightRig rig="threePt" dir="t"/>
+    </dgm:scene3d>
+    <dgm:sp3d/>
+    <dgm:txPr/>
+    <dgm:style>
+      <a:lnRef idx="2">
+        <a:scrgbClr r="0" g="0" b="0"/>
+      </a:lnRef>
+      <a:fillRef idx="1">
+        <a:scrgbClr r="0" g="0" b="0"/>
+      </a:fillRef>
+      <a:effectRef idx="0">
+        <a:scrgbClr r="0" g="0" b="0"/>
+      </a:effectRef>
+      <a:fontRef idx="minor">
+        <a:schemeClr val="lt1"/>
+      </a:fontRef>
+    </dgm:style>
+  </dgm:styleLbl>
+  <dgm:styleLbl name="lnNode1">
+    <dgm:scene3d>
+      <a:camera prst="orthographicFront"/>
+      <a:lightRig rig="threePt" dir="t"/>
+    </dgm:scene3d>
+    <dgm:sp3d/>
+    <dgm:txPr/>
+    <dgm:style>
+      <a:lnRef idx="2">
+        <a:scrgbClr r="0" g="0" b="0"/>
+      </a:lnRef>
+      <a:fillRef idx="1">
+        <a:scrgbClr r="0" g="0" b="0"/>
+      </a:fillRef>
+      <a:effectRef idx="0">
+        <a:scrgbClr r="0" g="0" b="0"/>
+      </a:effectRef>
+      <a:fontRef idx="minor">
+        <a:schemeClr val="lt1"/>
+      </a:fontRef>
+    </dgm:style>
+  </dgm:styleLbl>
+  <dgm:styleLbl name="vennNode1">
+    <dgm:scene3d>
+      <a:camera prst="orthographicFront"/>
+      <a:lightRig rig="threePt" dir="t"/>
+    </dgm:scene3d>
+    <dgm:sp3d/>
+    <dgm:txPr/>
+    <dgm:style>
+      <a:lnRef idx="2">
+        <a:scrgbClr r="0" g="0" b="0"/>
+      </a:lnRef>
+      <a:fillRef idx="1">
+        <a:scrgbClr r="0" g="0" b="0"/>
+      </a:fillRef>
+      <a:effectRef idx="0">
+        <a:scrgbClr r="0" g="0" b="0"/>
+      </a:effectRef>
+      <a:fontRef idx="minor">
+        <a:schemeClr val="tx1"/>
+      </a:fontRef>
+    </dgm:style>
+  </dgm:styleLbl>
+  <dgm:styleLbl name="alignNode1">
+    <dgm:scene3d>
+      <a:camera prst="orthographicFront"/>
+      <a:lightRig rig="threePt" dir="t"/>
+    </dgm:scene3d>
+    <dgm:sp3d/>
+    <dgm:txPr/>
+    <dgm:style>
+      <a:lnRef idx="2">
+        <a:scrgbClr r="0" g="0" b="0"/>
+      </a:lnRef>
+      <a:fillRef idx="1">
+        <a:scrgbClr r="0" g="0" b="0"/>
+      </a:fillRef>
+      <a:effectRef idx="0">
+        <a:scrgbClr r="0" g="0" b="0"/>
+      </a:effectRef>
+      <a:fontRef idx="minor">
+        <a:schemeClr val="lt1"/>
+      </a:fontRef>
+    </dgm:style>
+  </dgm:styleLbl>
+  <dgm:styleLbl name="node1">
+    <dgm:scene3d>
+      <a:camera prst="orthographicFront"/>
+      <a:lightRig rig="threePt" dir="t"/>
+    </dgm:scene3d>
+    <dgm:sp3d/>
+    <dgm:txPr/>
+    <dgm:style>
+      <a:lnRef idx="2">
+        <a:scrgbClr r="0" g="0" b="0"/>
+      </a:lnRef>
+      <a:fillRef idx="1">
+        <a:scrgbClr r="0" g="0" b="0"/>
+      </a:fillRef>
+      <a:effectRef idx="0">
+        <a:scrgbClr r="0" g="0" b="0"/>
+      </a:effectRef>
+      <a:fontRef idx="minor">
+        <a:schemeClr val="lt1"/>
+      </a:fontRef>
+    </dgm:style>
+  </dgm:styleLbl>
+  <dgm:styleLbl name="node2">
+    <dgm:scene3d>
+      <a:camera prst="orthographicFront"/>
+      <a:lightRig rig="threePt" dir="t"/>
+    </dgm:scene3d>
+    <dgm:sp3d/>
+    <dgm:txPr/>
+    <dgm:style>
+      <a:lnRef idx="2">
+        <a:scrgbClr r="0" g="0" b="0"/>
+      </a:lnRef>
+      <a:fillRef idx="1">
+        <a:scrgbClr r="0" g="0" b="0"/>
+      </a:fillRef>
+      <a:effectRef idx="0">
+        <a:scrgbClr r="0" g="0" b="0"/>
+      </a:effectRef>
+      <a:fontRef idx="minor">
+        <a:schemeClr val="lt1"/>
+      </a:fontRef>
+    </dgm:style>
+  </dgm:styleLbl>
+  <dgm:styleLbl name="node3">
+    <dgm:scene3d>
+      <a:camera prst="orthographicFront"/>
+      <a:lightRig rig="threePt" dir="t"/>
+    </dgm:scene3d>
+    <dgm:sp3d/>
+    <dgm:txPr/>
+    <dgm:style>
+      <a:lnRef idx="2">
+        <a:scrgbClr r="0" g="0" b="0"/>
+      </a:lnRef>
+      <a:fillRef idx="1">
+        <a:scrgbClr r="0" g="0" b="0"/>
+      </a:fillRef>
+      <a:effectRef idx="0">
+        <a:scrgbClr r="0" g="0" b="0"/>
+      </a:effectRef>
+      <a:fontRef idx="minor">
+        <a:schemeClr val="lt1"/>
+      </a:fontRef>
+    </dgm:style>
+  </dgm:styleLbl>
+  <dgm:styleLbl name="node4">
+    <dgm:scene3d>
+      <a:camera prst="orthographicFront"/>
+      <a:lightRig rig="threePt" dir="t"/>
+    </dgm:scene3d>
+    <dgm:sp3d/>
+    <dgm:txPr/>
+    <dgm:style>
+      <a:lnRef idx="2">
+        <a:scrgbClr r="0" g="0" b="0"/>
+      </a:lnRef>
+      <a:fillRef idx="1">
+        <a:scrgbClr r="0" g="0" b="0"/>
+      </a:fillRef>
+      <a:effectRef idx="0">
+        <a:scrgbClr r="0" g="0" b="0"/>
+      </a:effectRef>
+      <a:fontRef idx="minor">
+        <a:schemeClr val="lt1"/>
+      </a:fontRef>
+    </dgm:style>
+  </dgm:styleLbl>
+  <dgm:styleLbl name="fgImgPlace1">
+    <dgm:scene3d>
+      <a:camera prst="orthographicFront"/>
+      <a:lightRig rig="threePt" dir="t"/>
+    </dgm:scene3d>
+    <dgm:sp3d/>
+    <dgm:txPr/>
+    <dgm:style>
+      <a:lnRef idx="2">
+        <a:scrgbClr r="0" g="0" b="0"/>
+      </a:lnRef>
+      <a:fillRef idx="1">
+        <a:scrgbClr r="0" g="0" b="0"/>
+      </a:fillRef>
+      <a:effectRef idx="0">
+        <a:scrgbClr r="0" g="0" b="0"/>
+      </a:effectRef>
+      <a:fontRef idx="minor"/>
+    </dgm:style>
+  </dgm:styleLbl>
+  <dgm:styleLbl name="alignImgPlace1">
+    <dgm:scene3d>
+      <a:camera prst="orthographicFront"/>
+      <a:lightRig rig="threePt" dir="t"/>
+    </dgm:scene3d>
+    <dgm:sp3d/>
+    <dgm:txPr/>
+    <dgm:style>
+      <a:lnRef idx="2">
+        <a:scrgbClr r="0" g="0" b="0"/>
+      </a:lnRef>
+      <a:fillRef idx="1">
+        <a:scrgbClr r="0" g="0" b="0"/>
+      </a:fillRef>
+      <a:effectRef idx="0">
+        <a:scrgbClr r="0" g="0" b="0"/>
+      </a:effectRef>
+      <a:fontRef idx="minor"/>
+    </dgm:style>
+  </dgm:styleLbl>
+  <dgm:styleLbl name="bgImgPlace1">
+    <dgm:scene3d>
+      <a:camera prst="orthographicFront"/>
+      <a:lightRig rig="threePt" dir="t"/>
+    </dgm:scene3d>
+    <dgm:sp3d/>
+    <dgm:txPr/>
+    <dgm:style>
+      <a:lnRef idx="2">
+        <a:scrgbClr r="0" g="0" b="0"/>
+      </a:lnRef>
+      <a:fillRef idx="1">
+        <a:scrgbClr r="0" g="0" b="0"/>
+      </a:fillRef>
+      <a:effectRef idx="0">
+        <a:scrgbClr r="0" g="0" b="0"/>
+      </a:effectRef>
+      <a:fontRef idx="minor"/>
+    </dgm:style>
+  </dgm:styleLbl>
+  <dgm:styleLbl name="sibTrans2D1">
+    <dgm:scene3d>
+      <a:camera prst="orthographicFront"/>
+      <a:lightRig rig="threePt" dir="t"/>
+    </dgm:scene3d>
+    <dgm:sp3d/>
+    <dgm:txPr/>
+    <dgm:style>
+      <a:lnRef idx="0">
+        <a:scrgbClr r="0" g="0" b="0"/>
+      </a:lnRef>
+      <a:fillRef idx="1">
+        <a:scrgbClr r="0" g="0" b="0"/>
+      </a:fillRef>
+      <a:effectRef idx="0">
+        <a:scrgbClr r="0" g="0" b="0"/>
+      </a:effectRef>
+      <a:fontRef idx="minor">
+        <a:schemeClr val="lt1"/>
+      </a:fontRef>
+    </dgm:style>
+  </dgm:styleLbl>
+  <dgm:styleLbl name="fgSibTrans2D1">
+    <dgm:scene3d>
+      <a:camera prst="orthographicFront"/>
+      <a:lightRig rig="threePt" dir="t"/>
+    </dgm:scene3d>
+    <dgm:sp3d/>
+    <dgm:txPr/>
+    <dgm:style>
+      <a:lnRef idx="0">
+        <a:scrgbClr r="0" g="0" b="0"/>
+      </a:lnRef>
+      <a:fillRef idx="1">
+        <a:scrgbClr r="0" g="0" b="0"/>
+      </a:fillRef>
+      <a:effectRef idx="0">
+        <a:scrgbClr r="0" g="0" b="0"/>
+      </a:effectRef>
+      <a:fontRef idx="minor">
+        <a:schemeClr val="lt1"/>
+      </a:fontRef>
+    </dgm:style>
+  </dgm:styleLbl>
+  <dgm:styleLbl name="bgSibTrans2D1">
+    <dgm:scene3d>
+      <a:camera prst="orthographicFront"/>
+      <a:lightRig rig="threePt" dir="t"/>
+    </dgm:scene3d>
+    <dgm:sp3d/>
+    <dgm:txPr/>
+    <dgm:style>
+      <a:lnRef idx="0">
+        <a:scrgbClr r="0" g="0" b="0"/>
+      </a:lnRef>
+      <a:fillRef idx="1">
+        <a:scrgbClr r="0" g="0" b="0"/>
+      </a:fillRef>
+      <a:effectRef idx="0">
+        <a:scrgbClr r="0" g="0" b="0"/>
+      </a:effectRef>
+      <a:fontRef idx="minor">
+        <a:schemeClr val="lt1"/>
+      </a:fontRef>
+    </dgm:style>
+  </dgm:styleLbl>
+  <dgm:styleLbl name="sibTrans1D1">
+    <dgm:scene3d>
+      <a:camera prst="orthographicFront"/>
+      <a:lightRig rig="threePt" dir="t"/>
+    </dgm:scene3d>
+    <dgm:sp3d/>
+    <dgm:txPr/>
+    <dgm:style>
+      <a:lnRef idx="1">
+        <a:scrgbClr r="0" g="0" b="0"/>
+      </a:lnRef>
+      <a:fillRef idx="0">
+        <a:scrgbClr r="0" g="0" b="0"/>
+      </a:fillRef>
+      <a:effectRef idx="0">
+        <a:scrgbClr r="0" g="0" b="0"/>
+      </a:effectRef>
+      <a:fontRef idx="minor"/>
+    </dgm:style>
+  </dgm:styleLbl>
+  <dgm:styleLbl name="callout">
+    <dgm:scene3d>
+      <a:camera prst="orthographicFront"/>
+      <a:lightRig rig="threePt" dir="t"/>
+    </dgm:scene3d>
+    <dgm:sp3d/>
+    <dgm:txPr/>
+    <dgm:style>
+      <a:lnRef idx="2">
+        <a:scrgbClr r="0" g="0" b="0"/>
+      </a:lnRef>
+      <a:fillRef idx="1">
+        <a:scrgbClr r="0" g="0" b="0"/>
+      </a:fillRef>
+      <a:effectRef idx="0">
+        <a:scrgbClr r="0" g="0" b="0"/>
+      </a:effectRef>
+      <a:fontRef idx="minor"/>
+    </dgm:style>
+  </dgm:styleLbl>
+  <dgm:styleLbl name="asst0">
+    <dgm:scene3d>
+      <a:camera prst="orthographicFront"/>
+      <a:lightRig rig="threePt" dir="t"/>
+    </dgm:scene3d>
+    <dgm:sp3d/>
+    <dgm:txPr/>
+    <dgm:style>
+      <a:lnRef idx="2">
+        <a:scrgbClr r="0" g="0" b="0"/>
+      </a:lnRef>
+      <a:fillRef idx="1">
+        <a:scrgbClr r="0" g="0" b="0"/>
+      </a:fillRef>
+      <a:effectRef idx="0">
+        <a:scrgbClr r="0" g="0" b="0"/>
+      </a:effectRef>
+      <a:fontRef idx="minor">
+        <a:schemeClr val="lt1"/>
+      </a:fontRef>
+    </dgm:style>
+  </dgm:styleLbl>
+  <dgm:styleLbl name="asst1">
+    <dgm:scene3d>
+      <a:camera prst="orthographicFront"/>
+      <a:lightRig rig="threePt" dir="t"/>
+    </dgm:scene3d>
+    <dgm:sp3d/>
+    <dgm:txPr/>
+    <dgm:style>
+      <a:lnRef idx="2">
+        <a:scrgbClr r="0" g="0" b="0"/>
+      </a:lnRef>
+      <a:fillRef idx="1">
+        <a:scrgbClr r="0" g="0" b="0"/>
+      </a:fillRef>
+      <a:effectRef idx="0">
+        <a:scrgbClr r="0" g="0" b="0"/>
+      </a:effectRef>
+      <a:fontRef idx="minor">
+        <a:schemeClr val="lt1"/>
+      </a:fontRef>
+    </dgm:style>
+  </dgm:styleLbl>
+  <dgm:styleLbl name="asst2">
+    <dgm:scene3d>
+      <a:camera prst="orthographicFront"/>
+      <a:lightRig rig="threePt" dir="t"/>
+    </dgm:scene3d>
+    <dgm:sp3d/>
+    <dgm:txPr/>
+    <dgm:style>
+      <a:lnRef idx="2">
+        <a:scrgbClr r="0" g="0" b="0"/>
+      </a:lnRef>
+      <a:fillRef idx="1">
+        <a:scrgbClr r="0" g="0" b="0"/>
+      </a:fillRef>
+      <a:effectRef idx="0">
+        <a:scrgbClr r="0" g="0" b="0"/>
+      </a:effectRef>
+      <a:fontRef idx="minor">
+        <a:schemeClr val="lt1"/>
+      </a:fontRef>
+    </dgm:style>
+  </dgm:styleLbl>
+  <dgm:styleLbl name="asst3">
+    <dgm:scene3d>
+      <a:camera prst="orthographicFront"/>
+      <a:lightRig rig="threePt" dir="t"/>
+    </dgm:scene3d>
+    <dgm:sp3d/>
+    <dgm:txPr/>
+    <dgm:style>
+      <a:lnRef idx="2">
+        <a:scrgbClr r="0" g="0" b="0"/>
+      </a:lnRef>
+      <a:fillRef idx="1">
+        <a:scrgbClr r="0" g="0" b="0"/>
+      </a:fillRef>
+      <a:effectRef idx="0">
+        <a:scrgbClr r="0" g="0" b="0"/>
+      </a:effectRef>
+      <a:fontRef idx="minor">
+        <a:schemeClr val="lt1"/>
+      </a:fontRef>
+    </dgm:style>
+  </dgm:styleLbl>
+  <dgm:styleLbl name="asst4">
+    <dgm:scene3d>
+      <a:camera prst="orthographicFront"/>
+      <a:lightRig rig="threePt" dir="t"/>
+    </dgm:scene3d>
+    <dgm:sp3d/>
+    <dgm:txPr/>
+    <dgm:style>
+      <a:lnRef idx="2">
+        <a:scrgbClr r="0" g="0" b="0"/>
+      </a:lnRef>
+      <a:fillRef idx="1">
+        <a:scrgbClr r="0" g="0" b="0"/>
+      </a:fillRef>
+      <a:effectRef idx="0">
+        <a:scrgbClr r="0" g="0" b="0"/>
+      </a:effectRef>
+      <a:fontRef idx="minor">
+        <a:schemeClr val="lt1"/>
+      </a:fontRef>
+    </dgm:style>
+  </dgm:styleLbl>
+  <dgm:styleLbl name="parChTrans2D1">
+    <dgm:scene3d>
+      <a:camera prst="orthographicFront"/>
+      <a:lightRig rig="threePt" dir="t"/>
+    </dgm:scene3d>
+    <dgm:sp3d/>
+    <dgm:txPr/>
+    <dgm:style>
+      <a:lnRef idx="2">
+        <a:scrgbClr r="0" g="0" b="0"/>
+      </a:lnRef>
+      <a:fillRef idx="1">
+        <a:scrgbClr r="0" g="0" b="0"/>
+      </a:fillRef>
+      <a:effectRef idx="0">
+        <a:scrgbClr r="0" g="0" b="0"/>
+      </a:effectRef>
+      <a:fontRef idx="minor">
+        <a:schemeClr val="lt1"/>
+      </a:fontRef>
+    </dgm:style>
+  </dgm:styleLbl>
+  <dgm:styleLbl name="parChTrans2D2">
+    <dgm:scene3d>
+      <a:camera prst="orthographicFront"/>
+      <a:lightRig rig="threePt" dir="t"/>
+    </dgm:scene3d>
+    <dgm:sp3d/>
+    <dgm:txPr/>
+    <dgm:style>
+      <a:lnRef idx="2">
+        <a:scrgbClr r="0" g="0" b="0"/>
+      </a:lnRef>
+      <a:fillRef idx="1">
+        <a:scrgbClr r="0" g="0" b="0"/>
+      </a:fillRef>
+      <a:effectRef idx="0">
+        <a:scrgbClr r="0" g="0" b="0"/>
+      </a:effectRef>
+      <a:fontRef idx="minor">
+        <a:schemeClr val="lt1"/>
+      </a:fontRef>
+    </dgm:style>
+  </dgm:styleLbl>
+  <dgm:styleLbl name="parChTrans2D3">
+    <dgm:scene3d>
+      <a:camera prst="orthographicFront"/>
+      <a:lightRig rig="threePt" dir="t"/>
+    </dgm:scene3d>
+    <dgm:sp3d/>
+    <dgm:txPr/>
+    <dgm:style>
+      <a:lnRef idx="2">
+        <a:scrgbClr r="0" g="0" b="0"/>
+      </a:lnRef>
+      <a:fillRef idx="1">
+        <a:scrgbClr r="0" g="0" b="0"/>
+      </a:fillRef>
+      <a:effectRef idx="0">
+        <a:scrgbClr r="0" g="0" b="0"/>
+      </a:effectRef>
+      <a:fontRef idx="minor">
+        <a:schemeClr val="lt1"/>
+      </a:fontRef>
+    </dgm:style>
+  </dgm:styleLbl>
+  <dgm:styleLbl name="parChTrans2D4">
+    <dgm:scene3d>
+      <a:camera prst="orthographicFront"/>
+      <a:lightRig rig="threePt" dir="t"/>
+    </dgm:scene3d>
+    <dgm:sp3d/>
+    <dgm:txPr/>
+    <dgm:style>
+      <a:lnRef idx="2">
+        <a:scrgbClr r="0" g="0" b="0"/>
+      </a:lnRef>
+      <a:fillRef idx="1">
+        <a:scrgbClr r="0" g="0" b="0"/>
+      </a:fillRef>
+      <a:effectRef idx="0">
+        <a:scrgbClr r="0" g="0" b="0"/>
+      </a:effectRef>
+      <a:fontRef idx="minor">
+        <a:schemeClr val="lt1"/>
+      </a:fontRef>
+    </dgm:style>
+  </dgm:styleLbl>
+  <dgm:styleLbl name="parChTrans1D1">
+    <dgm:scene3d>
+      <a:camera prst="orthographicFront"/>
+      <a:lightRig rig="threePt" dir="t"/>
+    </dgm:scene3d>
+    <dgm:sp3d/>
+    <dgm:txPr/>
+    <dgm:style>
+      <a:lnRef idx="2">
+        <a:scrgbClr r="0" g="0" b="0"/>
+      </a:lnRef>
+      <a:fillRef idx="0">
+        <a:scrgbClr r="0" g="0" b="0"/>
+      </a:fillRef>
+      <a:effectRef idx="0">
+        <a:scrgbClr r="0" g="0" b="0"/>
+      </a:effectRef>
+      <a:fontRef idx="minor"/>
+    </dgm:style>
+  </dgm:styleLbl>
+  <dgm:styleLbl name="parChTrans1D2">
+    <dgm:scene3d>
+      <a:camera prst="orthographicFront"/>
+      <a:lightRig rig="threePt" dir="t"/>
+    </dgm:scene3d>
+    <dgm:sp3d/>
+    <dgm:txPr/>
+    <dgm:style>
+      <a:lnRef idx="2">
+        <a:scrgbClr r="0" g="0" b="0"/>
+      </a:lnRef>
+      <a:fillRef idx="0">
+        <a:scrgbClr r="0" g="0" b="0"/>
+      </a:fillRef>
+      <a:effectRef idx="0">
+        <a:scrgbClr r="0" g="0" b="0"/>
+      </a:effectRef>
+      <a:fontRef idx="minor"/>
+    </dgm:style>
+  </dgm:styleLbl>
+  <dgm:styleLbl name="parChTrans1D3">
+    <dgm:scene3d>
+      <a:camera prst="orthographicFront"/>
+      <a:lightRig rig="threePt" dir="t"/>
+    </dgm:scene3d>
+    <dgm:sp3d/>
+    <dgm:txPr/>
+    <dgm:style>
+      <a:lnRef idx="2">
+        <a:scrgbClr r="0" g="0" b="0"/>
+      </a:lnRef>
+      <a:fillRef idx="0">
+        <a:scrgbClr r="0" g="0" b="0"/>
+      </a:fillRef>
+      <a:effectRef idx="0">
+        <a:scrgbClr r="0" g="0" b="0"/>
+      </a:effectRef>
+      <a:fontRef idx="minor"/>
+    </dgm:style>
+  </dgm:styleLbl>
+  <dgm:styleLbl name="parChTrans1D4">
+    <dgm:scene3d>
+      <a:camera prst="orthographicFront"/>
+      <a:lightRig rig="threePt" dir="t"/>
+    </dgm:scene3d>
+    <dgm:sp3d/>
+    <dgm:txPr/>
+    <dgm:style>
+      <a:lnRef idx="2">
+        <a:scrgbClr r="0" g="0" b="0"/>
+      </a:lnRef>
+      <a:fillRef idx="0">
+        <a:scrgbClr r="0" g="0" b="0"/>
+      </a:fillRef>
+      <a:effectRef idx="0">
+        <a:scrgbClr r="0" g="0" b="0"/>
+      </a:effectRef>
+      <a:fontRef idx="minor"/>
+    </dgm:style>
+  </dgm:styleLbl>
+  <dgm:styleLbl name="fgAcc1">
+    <dgm:scene3d>
+      <a:camera prst="orthographicFront"/>
+      <a:lightRig rig="threePt" dir="t"/>
+    </dgm:scene3d>
+    <dgm:sp3d/>
+    <dgm:txPr/>
+    <dgm:style>
+      <a:lnRef idx="2">
+        <a:scrgbClr r="0" g="0" b="0"/>
+      </a:lnRef>
+      <a:fillRef idx="1">
+        <a:scrgbClr r="0" g="0" b="0"/>
+      </a:fillRef>
+      <a:effectRef idx="0">
+        <a:scrgbClr r="0" g="0" b="0"/>
+      </a:effectRef>
+      <a:fontRef idx="minor"/>
+    </dgm:style>
+  </dgm:styleLbl>
+  <dgm:styleLbl name="conFgAcc1">
+    <dgm:scene3d>
+      <a:camera prst="orthographicFront"/>
+      <a:lightRig rig="threePt" dir="t"/>
+    </dgm:scene3d>
+    <dgm:sp3d/>
+    <dgm:txPr/>
+    <dgm:style>
+      <a:lnRef idx="2">
+        <a:scrgbClr r="0" g="0" b="0"/>
+      </a:lnRef>
+      <a:fillRef idx="1">
+        <a:scrgbClr r="0" g="0" b="0"/>
+      </a:fillRef>
+      <a:effectRef idx="0">
+        <a:scrgbClr r="0" g="0" b="0"/>
+      </a:effectRef>
+      <a:fontRef idx="minor"/>
+    </dgm:style>
+  </dgm:styleLbl>
+  <dgm:styleLbl name="alignAcc1">
+    <dgm:scene3d>
+      <a:camera prst="orthographicFront"/>
+      <a:lightRig rig="threePt" dir="t"/>
+    </dgm:scene3d>
+    <dgm:sp3d/>
+    <dgm:txPr/>
+    <dgm:style>
+      <a:lnRef idx="2">
+        <a:scrgbClr r="0" g="0" b="0"/>
+      </a:lnRef>
+      <a:fillRef idx="1">
+        <a:scrgbClr r="0" g="0" b="0"/>
+      </a:fillRef>
+      <a:effectRef idx="0">
+        <a:scrgbClr r="0" g="0" b="0"/>
+      </a:effectRef>
+      <a:fontRef idx="minor"/>
+    </dgm:style>
+  </dgm:styleLbl>
+  <dgm:styleLbl name="trAlignAcc1">
+    <dgm:scene3d>
+      <a:camera prst="orthographicFront"/>
+      <a:lightRig rig="threePt" dir="t"/>
+    </dgm:scene3d>
+    <dgm:sp3d/>
+    <dgm:txPr/>
+    <dgm:style>
+      <a:lnRef idx="1">
+        <a:scrgbClr r="0" g="0" b="0"/>
+      </a:lnRef>
+      <a:fillRef idx="1">
+        <a:scrgbClr r="0" g="0" b="0"/>
+      </a:fillRef>
+      <a:effectRef idx="0">
+        <a:scrgbClr r="0" g="0" b="0"/>
+      </a:effectRef>
+      <a:fontRef idx="minor"/>
+    </dgm:style>
+  </dgm:styleLbl>
+  <dgm:styleLbl name="bgAcc1">
+    <dgm:scene3d>
+      <a:camera prst="orthographicFront"/>
+      <a:lightRig rig="threePt" dir="t"/>
+    </dgm:scene3d>
+    <dgm:sp3d/>
+    <dgm:txPr/>
+    <dgm:style>
+      <a:lnRef idx="2">
+        <a:scrgbClr r="0" g="0" b="0"/>
+      </a:lnRef>
+      <a:fillRef idx="1">
+        <a:scrgbClr r="0" g="0" b="0"/>
+      </a:fillRef>
+      <a:effectRef idx="0">
+        <a:scrgbClr r="0" g="0" b="0"/>
+      </a:effectRef>
+      <a:fontRef idx="minor"/>
+    </dgm:style>
+  </dgm:styleLbl>
+  <dgm:styleLbl name="solidFgAcc1">
+    <dgm:scene3d>
+      <a:camera prst="orthographicFront"/>
+      <a:lightRig rig="threePt" dir="t"/>
+    </dgm:scene3d>
+    <dgm:sp3d/>
+    <dgm:txPr/>
+    <dgm:style>
+      <a:lnRef idx="2">
+        <a:scrgbClr r="0" g="0" b="0"/>
+      </a:lnRef>
+      <a:fillRef idx="1">
+        <a:scrgbClr r="0" g="0" b="0"/>
+      </a:fillRef>
+      <a:effectRef idx="0">
+        <a:scrgbClr r="0" g="0" b="0"/>
+      </a:effectRef>
+      <a:fontRef idx="minor"/>
+    </dgm:style>
+  </dgm:styleLbl>
+  <dgm:styleLbl name="solidAlignAcc1">
+    <dgm:scene3d>
+      <a:camera prst="orthographicFront"/>
+      <a:lightRig rig="threePt" dir="t"/>
+    </dgm:scene3d>
+    <dgm:sp3d/>
+    <dgm:txPr/>
+    <dgm:style>
+      <a:lnRef idx="2">
+        <a:scrgbClr r="0" g="0" b="0"/>
+      </a:lnRef>
+      <a:fillRef idx="1">
+        <a:scrgbClr r="0" g="0" b="0"/>
+      </a:fillRef>
+      <a:effectRef idx="0">
+        <a:scrgbClr r="0" g="0" b="0"/>
+      </a:effectRef>
+      <a:fontRef idx="minor"/>
+    </dgm:style>
+  </dgm:styleLbl>
+  <dgm:styleLbl name="solidBgAcc1">
+    <dgm:scene3d>
+      <a:camera prst="orthographicFront"/>
+      <a:lightRig rig="threePt" dir="t"/>
+    </dgm:scene3d>
+    <dgm:sp3d/>
+    <dgm:txPr/>
+    <dgm:style>
+      <a:lnRef idx="2">
+        <a:scrgbClr r="0" g="0" b="0"/>
+      </a:lnRef>
+      <a:fillRef idx="1">
+        <a:scrgbClr r="0" g="0" b="0"/>
+      </a:fillRef>
+      <a:effectRef idx="0">
+        <a:scrgbClr r="0" g="0" b="0"/>
+      </a:effectRef>
+      <a:fontRef idx="minor"/>
+    </dgm:style>
+  </dgm:styleLbl>
+  <dgm:styleLbl name="fgAccFollowNode1">
+    <dgm:scene3d>
+      <a:camera prst="orthographicFront"/>
+      <a:lightRig rig="threePt" dir="t"/>
+    </dgm:scene3d>
+    <dgm:sp3d/>
+    <dgm:txPr/>
+    <dgm:style>
+      <a:lnRef idx="2">
+        <a:scrgbClr r="0" g="0" b="0"/>
+      </a:lnRef>
+      <a:fillRef idx="1">
+        <a:scrgbClr r="0" g="0" b="0"/>
+      </a:fillRef>
+      <a:effectRef idx="0">
+        <a:scrgbClr r="0" g="0" b="0"/>
+      </a:effectRef>
+      <a:fontRef idx="minor"/>
+    </dgm:style>
+  </dgm:styleLbl>
+  <dgm:styleLbl name="alignAccFollowNode1">
+    <dgm:scene3d>
+      <a:camera prst="orthographicFront"/>
+      <a:lightRig rig="threePt" dir="t"/>
+    </dgm:scene3d>
+    <dgm:sp3d/>
+    <dgm:txPr/>
+    <dgm:style>
+      <a:lnRef idx="2">
+        <a:scrgbClr r="0" g="0" b="0"/>
+      </a:lnRef>
+      <a:fillRef idx="1">
+        <a:scrgbClr r="0" g="0" b="0"/>
+      </a:fillRef>
+      <a:effectRef idx="0">
+        <a:scrgbClr r="0" g="0" b="0"/>
+      </a:effectRef>
+      <a:fontRef idx="minor"/>
+    </dgm:style>
+  </dgm:styleLbl>
+  <dgm:styleLbl name="bgAccFollowNode1">
+    <dgm:scene3d>
+      <a:camera prst="orthographicFront"/>
+      <a:lightRig rig="threePt" dir="t"/>
+    </dgm:scene3d>
+    <dgm:sp3d/>
+    <dgm:txPr/>
+    <dgm:style>
+      <a:lnRef idx="2">
+        <a:scrgbClr r="0" g="0" b="0"/>
+      </a:lnRef>
+      <a:fillRef idx="1">
+        <a:scrgbClr r="0" g="0" b="0"/>
+      </a:fillRef>
+      <a:effectRef idx="0">
+        <a:scrgbClr r="0" g="0" b="0"/>
+      </a:effectRef>
+      <a:fontRef idx="minor"/>
+    </dgm:style>
+  </dgm:styleLbl>
+  <dgm:styleLbl name="fgAcc0">
+    <dgm:scene3d>
+      <a:camera prst="orthographicFront"/>
+      <a:lightRig rig="threePt" dir="t"/>
+    </dgm:scene3d>
+    <dgm:sp3d/>
+    <dgm:txPr/>
+    <dgm:style>
+      <a:lnRef idx="2">
+        <a:scrgbClr r="0" g="0" b="0"/>
+      </a:lnRef>
+      <a:fillRef idx="1">
+        <a:scrgbClr r="0" g="0" b="0"/>
+      </a:fillRef>
+      <a:effectRef idx="0">
+        <a:scrgbClr r="0" g="0" b="0"/>
+      </a:effectRef>
+      <a:fontRef idx="minor"/>
+    </dgm:style>
+  </dgm:styleLbl>
+  <dgm:styleLbl name="fgAcc2">
+    <dgm:scene3d>
+      <a:camera prst="orthographicFront"/>
+      <a:lightRig rig="threePt" dir="t"/>
+    </dgm:scene3d>
+    <dgm:sp3d/>
+    <dgm:txPr/>
+    <dgm:style>
+      <a:lnRef idx="2">
+        <a:scrgbClr r="0" g="0" b="0"/>
+      </a:lnRef>
+      <a:fillRef idx="1">
+        <a:scrgbClr r="0" g="0" b="0"/>
+      </a:fillRef>
+      <a:effectRef idx="0">
+        <a:scrgbClr r="0" g="0" b="0"/>
+      </a:effectRef>
+      <a:fontRef idx="minor"/>
+    </dgm:style>
+  </dgm:styleLbl>
+  <dgm:styleLbl name="fgAcc3">
+    <dgm:scene3d>
+      <a:camera prst="orthographicFront"/>
+      <a:lightRig rig="threePt" dir="t"/>
+    </dgm:scene3d>
+    <dgm:sp3d/>
+    <dgm:txPr/>
+    <dgm:style>
+      <a:lnRef idx="2">
+        <a:scrgbClr r="0" g="0" b="0"/>
+      </a:lnRef>
+      <a:fillRef idx="1">
+        <a:scrgbClr r="0" g="0" b="0"/>
+      </a:fillRef>
+      <a:effectRef idx="0">
+        <a:scrgbClr r="0" g="0" b="0"/>
+      </a:effectRef>
+      <a:fontRef idx="minor"/>
+    </dgm:style>
+  </dgm:styleLbl>
+  <dgm:styleLbl name="fgAcc4">
+    <dgm:scene3d>
+      <a:camera prst="orthographicFront"/>
+      <a:lightRig rig="threePt" dir="t"/>
+    </dgm:scene3d>
+    <dgm:sp3d/>
+    <dgm:txPr/>
+    <dgm:style>
+      <a:lnRef idx="2">
+        <a:scrgbClr r="0" g="0" b="0"/>
+      </a:lnRef>
+      <a:fillRef idx="1">
+        <a:scrgbClr r="0" g="0" b="0"/>
+      </a:fillRef>
+      <a:effectRef idx="0">
+        <a:scrgbClr r="0" g="0" b="0"/>
+      </a:effectRef>
+      <a:fontRef idx="minor"/>
+    </dgm:style>
+  </dgm:styleLbl>
+  <dgm:styleLbl name="bgShp">
+    <dgm:scene3d>
+      <a:camera prst="orthographicFront"/>
+      <a:lightRig rig="threePt" dir="t"/>
+    </dgm:scene3d>
+    <dgm:sp3d/>
+    <dgm:txPr/>
+    <dgm:style>
+      <a:lnRef idx="0">
+        <a:scrgbClr r="0" g="0" b="0"/>
+      </a:lnRef>
+      <a:fillRef idx="1">
+        <a:scrgbClr r="0" g="0" b="0"/>
+      </a:fillRef>
+      <a:effectRef idx="0">
+        <a:scrgbClr r="0" g="0" b="0"/>
+      </a:effectRef>
+      <a:fontRef idx="minor"/>
+    </dgm:style>
+  </dgm:styleLbl>
+  <dgm:styleLbl name="dkBgShp">
+    <dgm:scene3d>
+      <a:camera prst="orthographicFront"/>
+      <a:lightRig rig="threePt" dir="t"/>
+    </dgm:scene3d>
+    <dgm:sp3d/>
+    <dgm:txPr/>
+    <dgm:style>
+      <a:lnRef idx="0">
+        <a:scrgbClr r="0" g="0" b="0"/>
+      </a:lnRef>
+      <a:fillRef idx="1">
+        <a:scrgbClr r="0" g="0" b="0"/>
+      </a:fillRef>
+      <a:effectRef idx="0">
+        <a:scrgbClr r="0" g="0" b="0"/>
+      </a:effectRef>
+      <a:fontRef idx="minor"/>
+    </dgm:style>
+  </dgm:styleLbl>
+  <dgm:styleLbl name="trBgShp">
+    <dgm:scene3d>
+      <a:camera prst="orthographicFront"/>
+      <a:lightRig rig="threePt" dir="t"/>
+    </dgm:scene3d>
+    <dgm:sp3d/>
+    <dgm:txPr/>
+    <dgm:style>
+      <a:lnRef idx="0">
+        <a:scrgbClr r="0" g="0" b="0"/>
+      </a:lnRef>
+      <a:fillRef idx="1">
+        <a:scrgbClr r="0" g="0" b="0"/>
+      </a:fillRef>
+      <a:effectRef idx="0">
+        <a:scrgbClr r="0" g="0" b="0"/>
+      </a:effectRef>
+      <a:fontRef idx="minor"/>
+    </dgm:style>
+  </dgm:styleLbl>
+  <dgm:styleLbl name="fgShp">
+    <dgm:scene3d>
+      <a:camera prst="orthographicFront"/>
+      <a:lightRig rig="threePt" dir="t"/>
+    </dgm:scene3d>
+    <dgm:sp3d/>
+    <dgm:txPr/>
+    <dgm:style>
+      <a:lnRef idx="2">
+        <a:scrgbClr r="0" g="0" b="0"/>
+      </a:lnRef>
+      <a:fillRef idx="1">
+        <a:scrgbClr r="0" g="0" b="0"/>
+      </a:fillRef>
+      <a:effectRef idx="0">
+        <a:scrgbClr r="0" g="0" b="0"/>
+      </a:effectRef>
+      <a:fontRef idx="minor"/>
+    </dgm:style>
+  </dgm:styleLbl>
+  <dgm:styleLbl name="revTx">
+    <dgm:scene3d>
+      <a:camera prst="orthographicFront"/>
+      <a:lightRig rig="threePt" dir="t"/>
+    </dgm:scene3d>
+    <dgm:sp3d/>
+    <dgm:txPr/>
+    <dgm:style>
+      <a:lnRef idx="0">
+        <a:scrgbClr r="0" g="0" b="0"/>
+      </a:lnRef>
+      <a:fillRef idx="0">
+        <a:scrgbClr r="0" g="0" b="0"/>
+      </a:fillRef>
+      <a:effectRef idx="0">
+        <a:scrgbClr r="0" g="0" b="0"/>
+      </a:effectRef>
+      <a:fontRef idx="minor"/>
+    </dgm:style>
+  </dgm:styleLbl>
+</dgm:styleDef>
 </file>
 
 <file path=ppt/notesMasters/notesMaster1.xml><?xml version="1.0" encoding="utf-8"?>
@@ -988,6 +5023,204 @@
     <p:extLst>
       <p:ext uri="{BB962C8B-B14F-4D97-AF65-F5344CB8AC3E}">
         <p14:creationId xmlns:p14="http://schemas.microsoft.com/office/powerpoint/2010/main" val="4196799841"/>
+      </p:ext>
+    </p:extLst>
+  </p:cSld>
+  <p:clrMapOvr>
+    <a:masterClrMapping/>
+  </p:clrMapOvr>
+</p:notes>
+</file>
+
+<file path=ppt/notesSlides/notesSlide4.xml><?xml version="1.0" encoding="utf-8"?>
+<p:notes xmlns:a="http://schemas.openxmlformats.org/drawingml/2006/main" xmlns:r="http://schemas.openxmlformats.org/officeDocument/2006/relationships" xmlns:p="http://schemas.openxmlformats.org/presentationml/2006/main">
+  <p:cSld>
+    <p:spTree>
+      <p:nvGrpSpPr>
+        <p:cNvPr id="1" name=""/>
+        <p:cNvGrpSpPr/>
+        <p:nvPr/>
+      </p:nvGrpSpPr>
+      <p:grpSpPr>
+        <a:xfrm>
+          <a:off x="0" y="0"/>
+          <a:ext cx="0" cy="0"/>
+          <a:chOff x="0" y="0"/>
+          <a:chExt cx="0" cy="0"/>
+        </a:xfrm>
+      </p:grpSpPr>
+      <p:sp>
+        <p:nvSpPr>
+          <p:cNvPr id="2" name="Slide Image Placeholder 1"/>
+          <p:cNvSpPr>
+            <a:spLocks noGrp="1" noRot="1" noChangeAspect="1"/>
+          </p:cNvSpPr>
+          <p:nvPr>
+            <p:ph type="sldImg"/>
+          </p:nvPr>
+        </p:nvSpPr>
+        <p:spPr/>
+      </p:sp>
+      <p:sp>
+        <p:nvSpPr>
+          <p:cNvPr id="3" name="Notes Placeholder 2"/>
+          <p:cNvSpPr>
+            <a:spLocks noGrp="1"/>
+          </p:cNvSpPr>
+          <p:nvPr>
+            <p:ph type="body" idx="1"/>
+          </p:nvPr>
+        </p:nvSpPr>
+        <p:spPr/>
+        <p:txBody>
+          <a:bodyPr/>
+          <a:lstStyle/>
+          <a:p>
+            <a:r>
+              <a:rPr lang="en-US" dirty="0"/>
+              <a:t>Initially, I looked only at total workforce numbers, but that favored enterprise companies because of their size. To compare the impact more fairly, I normalized the results by company size. The trend shows AI creates workforce disruption, but organizations are also investing heavily in reskilling.</a:t>
+            </a:r>
+          </a:p>
+        </p:txBody>
+      </p:sp>
+      <p:sp>
+        <p:nvSpPr>
+          <p:cNvPr id="4" name="Slide Number Placeholder 3"/>
+          <p:cNvSpPr>
+            <a:spLocks noGrp="1"/>
+          </p:cNvSpPr>
+          <p:nvPr>
+            <p:ph type="sldNum" sz="quarter" idx="5"/>
+          </p:nvPr>
+        </p:nvSpPr>
+        <p:spPr/>
+        <p:txBody>
+          <a:bodyPr/>
+          <a:lstStyle/>
+          <a:p>
+            <a:fld id="{EFEC6C8B-BE8F-47B7-AB4D-01360EFA917A}" type="slidenum">
+              <a:rPr lang="en-US" smtClean="0"/>
+              <a:t>6</a:t>
+            </a:fld>
+            <a:endParaRPr lang="en-US"/>
+          </a:p>
+        </p:txBody>
+      </p:sp>
+    </p:spTree>
+    <p:extLst>
+      <p:ext uri="{BB962C8B-B14F-4D97-AF65-F5344CB8AC3E}">
+        <p14:creationId xmlns:p14="http://schemas.microsoft.com/office/powerpoint/2010/main" val="506769389"/>
+      </p:ext>
+    </p:extLst>
+  </p:cSld>
+  <p:clrMapOvr>
+    <a:masterClrMapping/>
+  </p:clrMapOvr>
+</p:notes>
+</file>
+
+<file path=ppt/notesSlides/notesSlide5.xml><?xml version="1.0" encoding="utf-8"?>
+<p:notes xmlns:a="http://schemas.openxmlformats.org/drawingml/2006/main" xmlns:r="http://schemas.openxmlformats.org/officeDocument/2006/relationships" xmlns:p="http://schemas.openxmlformats.org/presentationml/2006/main">
+  <p:cSld>
+    <p:spTree>
+      <p:nvGrpSpPr>
+        <p:cNvPr id="1" name="">
+          <a:extLst>
+            <a:ext uri="{FF2B5EF4-FFF2-40B4-BE49-F238E27FC236}">
+              <a16:creationId xmlns:a16="http://schemas.microsoft.com/office/drawing/2014/main" id="{FD03D2C7-1A2E-B73E-D818-57D009B2E1C8}"/>
+            </a:ext>
+          </a:extLst>
+        </p:cNvPr>
+        <p:cNvGrpSpPr/>
+        <p:nvPr/>
+      </p:nvGrpSpPr>
+      <p:grpSpPr>
+        <a:xfrm>
+          <a:off x="0" y="0"/>
+          <a:ext cx="0" cy="0"/>
+          <a:chOff x="0" y="0"/>
+          <a:chExt cx="0" cy="0"/>
+        </a:xfrm>
+      </p:grpSpPr>
+      <p:sp>
+        <p:nvSpPr>
+          <p:cNvPr id="2" name="Slide Image Placeholder 1">
+            <a:extLst>
+              <a:ext uri="{FF2B5EF4-FFF2-40B4-BE49-F238E27FC236}">
+                <a16:creationId xmlns:a16="http://schemas.microsoft.com/office/drawing/2014/main" id="{1B3FC4C4-B93B-6F6C-793A-30ED3B5D9CEF}"/>
+              </a:ext>
+            </a:extLst>
+          </p:cNvPr>
+          <p:cNvSpPr>
+            <a:spLocks noGrp="1" noRot="1" noChangeAspect="1"/>
+          </p:cNvSpPr>
+          <p:nvPr>
+            <p:ph type="sldImg"/>
+          </p:nvPr>
+        </p:nvSpPr>
+        <p:spPr/>
+      </p:sp>
+      <p:sp>
+        <p:nvSpPr>
+          <p:cNvPr id="3" name="Notes Placeholder 2">
+            <a:extLst>
+              <a:ext uri="{FF2B5EF4-FFF2-40B4-BE49-F238E27FC236}">
+                <a16:creationId xmlns:a16="http://schemas.microsoft.com/office/drawing/2014/main" id="{FFFD28FD-5508-BCA9-7FE2-B3AC1439C510}"/>
+              </a:ext>
+            </a:extLst>
+          </p:cNvPr>
+          <p:cNvSpPr>
+            <a:spLocks noGrp="1"/>
+          </p:cNvSpPr>
+          <p:nvPr>
+            <p:ph type="body" idx="1"/>
+          </p:nvPr>
+        </p:nvSpPr>
+        <p:spPr/>
+        <p:txBody>
+          <a:bodyPr/>
+          <a:lstStyle/>
+          <a:p>
+            <a:r>
+              <a:rPr lang="en-US" dirty="0"/>
+              <a:t>Initially, I looked only at total workforce numbers, but that favored enterprise companies because of their size. To compare the impact more fairly, I normalized the results by company size. The trend shows AI creates workforce disruption, but organizations are also investing heavily in reskilling.</a:t>
+            </a:r>
+          </a:p>
+        </p:txBody>
+      </p:sp>
+      <p:sp>
+        <p:nvSpPr>
+          <p:cNvPr id="4" name="Slide Number Placeholder 3">
+            <a:extLst>
+              <a:ext uri="{FF2B5EF4-FFF2-40B4-BE49-F238E27FC236}">
+                <a16:creationId xmlns:a16="http://schemas.microsoft.com/office/drawing/2014/main" id="{8411F325-4CE2-C9B0-AE79-3A19CF0F5067}"/>
+              </a:ext>
+            </a:extLst>
+          </p:cNvPr>
+          <p:cNvSpPr>
+            <a:spLocks noGrp="1"/>
+          </p:cNvSpPr>
+          <p:nvPr>
+            <p:ph type="sldNum" sz="quarter" idx="5"/>
+          </p:nvPr>
+        </p:nvSpPr>
+        <p:spPr/>
+        <p:txBody>
+          <a:bodyPr/>
+          <a:lstStyle/>
+          <a:p>
+            <a:fld id="{EFEC6C8B-BE8F-47B7-AB4D-01360EFA917A}" type="slidenum">
+              <a:rPr lang="en-US" smtClean="0"/>
+              <a:t>7</a:t>
+            </a:fld>
+            <a:endParaRPr lang="en-US"/>
+          </a:p>
+        </p:txBody>
+      </p:sp>
+    </p:spTree>
+    <p:extLst>
+      <p:ext uri="{BB962C8B-B14F-4D97-AF65-F5344CB8AC3E}">
+        <p14:creationId xmlns:p14="http://schemas.microsoft.com/office/powerpoint/2010/main" val="3219294040"/>
       </p:ext>
     </p:extLst>
   </p:cSld>
@@ -5467,7 +9700,7 @@
         </p:spPr>
         <p:txBody>
           <a:bodyPr vert="horz" lIns="91440" tIns="45720" rIns="91440" bIns="45720" rtlCol="0">
-            <a:normAutofit/>
+            <a:normAutofit fontScale="92500" lnSpcReduction="10000"/>
           </a:bodyPr>
           <a:lstStyle>
             <a:lvl1pPr marL="228600" indent="-228600" algn="l" defTabSz="914400" rtl="0" eaLnBrk="1" latinLnBrk="0" hangingPunct="1">
@@ -5647,15 +9880,20 @@
             <a:pPr lvl="1"/>
             <a:r>
               <a:rPr lang="en-US" sz="1300" dirty="0"/>
-              <a:t>Company-level survey data across industries and countries</a:t>
+              <a:t>Company-level data across industries and countries</a:t>
             </a:r>
           </a:p>
           <a:p>
             <a:pPr lvl="1"/>
             <a:r>
               <a:rPr lang="en-US" sz="1300" dirty="0"/>
-              <a:t>Maturity level, adoption rates, investment, and productivity outcomes</a:t>
-            </a:r>
+              <a:t>Includes adoption maturity, workforce, and business metrics</a:t>
+            </a:r>
+          </a:p>
+          <a:p>
+            <a:pPr marL="457200" lvl="1" indent="0">
+              <a:buNone/>
+            </a:pPr>
             <a:endParaRPr lang="en-US" sz="1600" dirty="0"/>
           </a:p>
           <a:p>
@@ -5672,22 +9910,21 @@
             <a:pPr lvl="1"/>
             <a:r>
               <a:rPr lang="en-US" sz="1300" dirty="0"/>
-              <a:t>Identify Industries and regions leading AI adoption</a:t>
+              <a:t>Compare adoption patterns across industries and regions</a:t>
             </a:r>
           </a:p>
           <a:p>
             <a:pPr lvl="1"/>
             <a:r>
               <a:rPr lang="en-US" sz="1300" dirty="0"/>
-              <a:t>Analyze relationships between AI maturity, investment, and business outcomes</a:t>
-            </a:r>
-          </a:p>
-          <a:p>
-            <a:pPr lvl="1"/>
-            <a:r>
-              <a:rPr lang="en-US" sz="1300" dirty="0"/>
-              <a:t>Assess workforce impacts including displacement and reskilling</a:t>
-            </a:r>
+              <a:t>Analyze relationships between maturity, workforce, and outcomes</a:t>
+            </a:r>
+          </a:p>
+          <a:p>
+            <a:pPr marL="457200" lvl="1" indent="0">
+              <a:buNone/>
+            </a:pPr>
+            <a:endParaRPr lang="en-US" sz="1300" dirty="0"/>
           </a:p>
           <a:p>
             <a:r>
@@ -5706,8 +9943,14 @@
             <a:pPr lvl="1"/>
             <a:r>
               <a:rPr lang="en-US" sz="1300" dirty="0"/>
-              <a:t>Correlation analysis to evaluate relationships</a:t>
-            </a:r>
+              <a:t>Comparative analysis with correlation testing</a:t>
+            </a:r>
+          </a:p>
+          <a:p>
+            <a:pPr marL="457200" lvl="1" indent="0">
+              <a:buNone/>
+            </a:pPr>
+            <a:endParaRPr lang="en-US" sz="1300" dirty="0"/>
           </a:p>
           <a:p>
             <a:r>
@@ -5734,14 +9977,21 @@
             <a:pPr lvl="1"/>
             <a:r>
               <a:rPr lang="en-US" sz="1300" dirty="0"/>
-              <a:t>Finding identify trends, not direct causation</a:t>
+              <a:t>Findings identify trends, not direct causation</a:t>
             </a:r>
           </a:p>
           <a:p>
             <a:pPr lvl="1"/>
             <a:r>
               <a:rPr lang="en-US" sz="1300" dirty="0"/>
-              <a:t>Some dataset definitions lack documentation (maturity scoring methodology)</a:t>
+              <a:t>Dataset definitions lack full documentation</a:t>
+            </a:r>
+            <a:br>
+              <a:rPr lang="en-US" sz="1300" dirty="0"/>
+            </a:br>
+            <a:r>
+              <a:rPr lang="en-US" sz="1300" dirty="0"/>
+              <a:t> (maturity scoring methodology)</a:t>
             </a:r>
           </a:p>
           <a:p>
@@ -6122,7 +10372,7 @@
           <a:p>
             <a:r>
               <a:rPr lang="en-US" sz="3600" dirty="0"/>
-              <a:t>AI Adoption Landscape: </a:t>
+              <a:t>AI Adoption Landscape </a:t>
             </a:r>
             <a:r>
               <a:rPr lang="en-US" sz="2000" dirty="0"/>
@@ -6165,7 +10415,14 @@
             </a:pPr>
             <a:r>
               <a:rPr lang="en-US" sz="1800" dirty="0"/>
-              <a:t>Before evaluating outcomes, the first step was understanding where adoption is occurring</a:t>
+              <a:t>Understanding where AI </a:t>
+            </a:r>
+            <a:br>
+              <a:rPr lang="en-US" sz="1800" dirty="0"/>
+            </a:br>
+            <a:r>
+              <a:rPr lang="en-US" sz="1800" dirty="0"/>
+              <a:t>implementation is occurring</a:t>
             </a:r>
           </a:p>
         </p:txBody>
@@ -6370,7 +10627,7 @@
         <p:spPr>
           <a:xfrm>
             <a:off x="0" y="2099968"/>
-            <a:ext cx="12192000" cy="3229678"/>
+            <a:ext cx="12192000" cy="3867366"/>
           </a:xfrm>
           <a:prstGeom prst="rect">
             <a:avLst/>
@@ -6429,7 +10686,7 @@
         </p:blipFill>
         <p:spPr>
           <a:xfrm>
-            <a:off x="6003241" y="2182753"/>
+            <a:off x="6003241" y="2416433"/>
             <a:ext cx="5965677" cy="3146893"/>
           </a:xfrm>
           <a:prstGeom prst="rect">
@@ -6451,10 +10708,10 @@
         </p:nvGrpSpPr>
         <p:grpSpPr>
           <a:xfrm>
-            <a:off x="934360" y="5551663"/>
-            <a:ext cx="10331734" cy="1077737"/>
+            <a:off x="934360" y="6079948"/>
+            <a:ext cx="10331734" cy="597310"/>
             <a:chOff x="1222401" y="5993992"/>
-            <a:chExt cx="9978013" cy="727810"/>
+            <a:chExt cx="9978013" cy="403373"/>
           </a:xfrm>
         </p:grpSpPr>
         <p:sp>
@@ -6472,7 +10729,7 @@
           <p:spPr>
             <a:xfrm>
               <a:off x="1222401" y="5993992"/>
-              <a:ext cx="9978013" cy="727810"/>
+              <a:ext cx="9978013" cy="395204"/>
             </a:xfrm>
             <a:prstGeom prst="rect">
               <a:avLst/>
@@ -6523,8 +10780,8 @@
           </p:nvSpPr>
           <p:spPr>
             <a:xfrm>
-              <a:off x="1306286" y="6139683"/>
-              <a:ext cx="9817239" cy="436476"/>
+              <a:off x="1306286" y="6002459"/>
+              <a:ext cx="9817239" cy="394906"/>
             </a:xfrm>
             <a:prstGeom prst="rect">
               <a:avLst/>
@@ -6541,11 +10798,11 @@
             <a:lstStyle/>
             <a:p>
               <a:r>
-                <a:rPr lang="en-US" b="1" dirty="0"/>
+                <a:rPr lang="en-US" sz="1600" b="1" dirty="0"/>
                 <a:t>Key Finding: </a:t>
               </a:r>
               <a:r>
-                <a:rPr lang="en-US" dirty="0"/>
+                <a:rPr lang="en-US" sz="1600" dirty="0"/>
                 <a:t>AI adoption showed a broad global footprint with clear industry differences. Technology and Finance led average adoption rates, highlighting variation in AI implementation across sectors.</a:t>
               </a:r>
             </a:p>
@@ -6574,8 +10831,8 @@
         </p:blipFill>
         <p:spPr>
           <a:xfrm>
-            <a:off x="558792" y="2354703"/>
-            <a:ext cx="5198174" cy="2865135"/>
+            <a:off x="558791" y="2588383"/>
+            <a:ext cx="5397397" cy="2974943"/>
           </a:xfrm>
           <a:prstGeom prst="rect">
             <a:avLst/>
@@ -6596,7 +10853,7 @@
         </p:nvSpPr>
         <p:spPr>
           <a:xfrm>
-            <a:off x="622800" y="2773063"/>
+            <a:off x="622800" y="3006743"/>
             <a:ext cx="103550" cy="301732"/>
           </a:xfrm>
           <a:prstGeom prst="leftBrace">
@@ -6645,7 +10902,7 @@
         </p:nvSpPr>
         <p:spPr>
           <a:xfrm>
-            <a:off x="36481" y="2662471"/>
+            <a:off x="36481" y="2896151"/>
             <a:ext cx="750157" cy="507831"/>
           </a:xfrm>
           <a:prstGeom prst="rect">
@@ -6680,7 +10937,7 @@
         </p:nvSpPr>
         <p:spPr>
           <a:xfrm>
-            <a:off x="6382512" y="4962144"/>
+            <a:off x="6382512" y="5195824"/>
             <a:ext cx="4553712" cy="246221"/>
           </a:xfrm>
           <a:prstGeom prst="rect">
@@ -7147,8 +11404,8 @@
         </p:blipFill>
         <p:spPr>
           <a:xfrm>
-            <a:off x="2676282" y="1971072"/>
-            <a:ext cx="6494348" cy="3991990"/>
+            <a:off x="2407920" y="1971071"/>
+            <a:ext cx="6762710" cy="4156949"/>
           </a:xfrm>
           <a:prstGeom prst="rect">
             <a:avLst/>
@@ -7169,10 +11426,10 @@
         </p:nvGrpSpPr>
         <p:grpSpPr>
           <a:xfrm>
-            <a:off x="934360" y="5913119"/>
-            <a:ext cx="10331734" cy="813817"/>
-            <a:chOff x="1222401" y="5468089"/>
-            <a:chExt cx="9978013" cy="1253713"/>
+            <a:off x="934360" y="6142163"/>
+            <a:ext cx="10331734" cy="606770"/>
+            <a:chOff x="1222401" y="5820936"/>
+            <a:chExt cx="9978013" cy="934750"/>
           </a:xfrm>
         </p:grpSpPr>
         <p:sp>
@@ -7189,8 +11446,8 @@
           </p:nvSpPr>
           <p:spPr>
             <a:xfrm>
-              <a:off x="1222401" y="5468089"/>
-              <a:ext cx="9978013" cy="1253713"/>
+              <a:off x="1222401" y="5820936"/>
+              <a:ext cx="9978013" cy="900866"/>
             </a:xfrm>
             <a:prstGeom prst="rect">
               <a:avLst/>
@@ -7241,8 +11498,8 @@
           </p:nvSpPr>
           <p:spPr>
             <a:xfrm>
-              <a:off x="1306286" y="5557435"/>
-              <a:ext cx="9817239" cy="995694"/>
+              <a:off x="1306286" y="5854820"/>
+              <a:ext cx="9817239" cy="900866"/>
             </a:xfrm>
             <a:prstGeom prst="rect">
               <a:avLst/>
@@ -7259,19 +11516,19 @@
             <a:lstStyle/>
             <a:p>
               <a:r>
-                <a:rPr lang="en-US" b="1" dirty="0"/>
+                <a:rPr lang="en-US" sz="1600" b="1" dirty="0"/>
                 <a:t>Key Finding: </a:t>
               </a:r>
               <a:r>
-                <a:rPr lang="en-US" dirty="0"/>
+                <a:rPr lang="en-US" sz="1600" dirty="0"/>
                 <a:t>Higher AI maturity was associated with stronger business outcomes, with </a:t>
               </a:r>
               <a:r>
-                <a:rPr lang="en-US" b="1" dirty="0"/>
+                <a:rPr lang="en-US" sz="1600" b="1" dirty="0"/>
                 <a:t>full adoption associated with the greatest improvements</a:t>
               </a:r>
               <a:r>
-                <a:rPr lang="en-US" dirty="0"/>
+                <a:rPr lang="en-US" sz="1600" dirty="0"/>
                 <a:t> across productivity, revenue, and cost efficiency</a:t>
               </a:r>
             </a:p>
@@ -7292,10 +11549,10 @@
         </p:nvGrpSpPr>
         <p:grpSpPr>
           <a:xfrm>
-            <a:off x="9265916" y="2182752"/>
-            <a:ext cx="2021840" cy="1032858"/>
+            <a:off x="9265922" y="2182752"/>
+            <a:ext cx="2032002" cy="1495168"/>
             <a:chOff x="9990435" y="2182752"/>
-            <a:chExt cx="1131565" cy="1032858"/>
+            <a:chExt cx="1137252" cy="1495168"/>
           </a:xfrm>
         </p:grpSpPr>
         <p:sp>
@@ -7313,7 +11570,7 @@
           <p:spPr>
             <a:xfrm>
               <a:off x="9990435" y="2182752"/>
-              <a:ext cx="1114506" cy="1027807"/>
+              <a:ext cx="1114506" cy="1495168"/>
             </a:xfrm>
             <a:prstGeom prst="rect">
               <a:avLst/>
@@ -7364,8 +11621,8 @@
           </p:nvSpPr>
           <p:spPr>
             <a:xfrm>
-              <a:off x="10007494" y="2261503"/>
-              <a:ext cx="1114506" cy="954107"/>
+              <a:off x="10013181" y="2261503"/>
+              <a:ext cx="1114506" cy="1338828"/>
             </a:xfrm>
             <a:prstGeom prst="rect">
               <a:avLst/>
@@ -7384,6 +11641,9 @@
               </a:r>
             </a:p>
             <a:p>
+              <a:endParaRPr lang="en-US" sz="1200" dirty="0"/>
+            </a:p>
+            <a:p>
               <a:pPr algn="ctr"/>
               <a:r>
                 <a:rPr lang="en-US" sz="1500" dirty="0"/>
@@ -7396,6 +11656,10 @@
                 <a:rPr lang="en-US" sz="1500" dirty="0"/>
                 <a:t>p &lt; 0.001</a:t>
               </a:r>
+            </a:p>
+            <a:p>
+              <a:pPr algn="ctr"/>
+              <a:endParaRPr lang="en-US" sz="1500" dirty="0"/>
             </a:p>
             <a:p>
               <a:r>
@@ -7469,6 +11733,14 @@
 <file path=ppt/slides/slide6.xml><?xml version="1.0" encoding="utf-8"?>
 <p:sld xmlns:a="http://schemas.openxmlformats.org/drawingml/2006/main" xmlns:r="http://schemas.openxmlformats.org/officeDocument/2006/relationships" xmlns:p="http://schemas.openxmlformats.org/presentationml/2006/main">
   <p:cSld>
+    <p:bg>
+      <p:bgPr>
+        <a:solidFill>
+          <a:schemeClr val="bg1"/>
+        </a:solidFill>
+        <a:effectLst/>
+      </p:bgPr>
+    </p:bg>
     <p:spTree>
       <p:nvGrpSpPr>
         <p:cNvPr id="1" name=""/>
@@ -7483,6 +11755,165 @@
           <a:chExt cx="0" cy="0"/>
         </a:xfrm>
       </p:grpSpPr>
+      <p:sp useBgFill="1">
+        <p:nvSpPr>
+          <p:cNvPr id="54" name="Rectangle 53">
+            <a:extLst>
+              <a:ext uri="{FF2B5EF4-FFF2-40B4-BE49-F238E27FC236}">
+                <a16:creationId xmlns:a16="http://schemas.microsoft.com/office/drawing/2014/main" id="{017517EF-BD4D-4055-BDB4-A322C53568AD}"/>
+              </a:ext>
+              <a:ext uri="{C183D7F6-B498-43B3-948B-1728B52AA6E4}">
+                <adec:decorative xmlns:adec="http://schemas.microsoft.com/office/drawing/2017/decorative" val="1"/>
+              </a:ext>
+            </a:extLst>
+          </p:cNvPr>
+          <p:cNvSpPr>
+            <a:spLocks noGrp="1" noRot="1" noChangeAspect="1" noMove="1" noResize="1" noEditPoints="1" noAdjustHandles="1" noChangeArrowheads="1" noChangeShapeType="1" noTextEdit="1"/>
+          </p:cNvSpPr>
+          <p:nvPr>
+            <p:extLst>
+              <p:ext uri="{386F3935-93C4-4BCD-93E2-E3B085C9AB24}">
+                <p16:designElem xmlns:p16="http://schemas.microsoft.com/office/powerpoint/2015/main" val="1"/>
+              </p:ext>
+            </p:extLst>
+          </p:nvPr>
+        </p:nvSpPr>
+        <p:spPr>
+          <a:xfrm>
+            <a:off x="0" y="0"/>
+            <a:ext cx="12192000" cy="6858000"/>
+          </a:xfrm>
+          <a:prstGeom prst="rect">
+            <a:avLst/>
+          </a:prstGeom>
+          <a:ln>
+            <a:noFill/>
+          </a:ln>
+        </p:spPr>
+        <p:style>
+          <a:lnRef idx="2">
+            <a:schemeClr val="accent1">
+              <a:shade val="50000"/>
+            </a:schemeClr>
+          </a:lnRef>
+          <a:fillRef idx="1">
+            <a:schemeClr val="accent1"/>
+          </a:fillRef>
+          <a:effectRef idx="0">
+            <a:schemeClr val="accent1"/>
+          </a:effectRef>
+          <a:fontRef idx="minor">
+            <a:schemeClr val="lt1"/>
+          </a:fontRef>
+        </p:style>
+        <p:txBody>
+          <a:bodyPr rtlCol="0" anchor="ctr"/>
+          <a:lstStyle/>
+          <a:p>
+            <a:pPr algn="ctr"/>
+            <a:endParaRPr lang="en-US"/>
+          </a:p>
+        </p:txBody>
+      </p:sp>
+      <p:sp useBgFill="1">
+        <p:nvSpPr>
+          <p:cNvPr id="56" name="Rectangle 55">
+            <a:extLst>
+              <a:ext uri="{FF2B5EF4-FFF2-40B4-BE49-F238E27FC236}">
+                <a16:creationId xmlns:a16="http://schemas.microsoft.com/office/drawing/2014/main" id="{0ADDB668-2CA4-4D2B-9C34-3487CA330BA8}"/>
+              </a:ext>
+              <a:ext uri="{C183D7F6-B498-43B3-948B-1728B52AA6E4}">
+                <adec:decorative xmlns:adec="http://schemas.microsoft.com/office/drawing/2017/decorative" val="1"/>
+              </a:ext>
+            </a:extLst>
+          </p:cNvPr>
+          <p:cNvSpPr>
+            <a:spLocks noGrp="1" noRot="1" noChangeAspect="1" noMove="1" noResize="1" noEditPoints="1" noAdjustHandles="1" noChangeArrowheads="1" noChangeShapeType="1" noTextEdit="1"/>
+          </p:cNvSpPr>
+          <p:nvPr>
+            <p:extLst>
+              <p:ext uri="{386F3935-93C4-4BCD-93E2-E3B085C9AB24}">
+                <p16:designElem xmlns:p16="http://schemas.microsoft.com/office/powerpoint/2015/main" val="1"/>
+              </p:ext>
+            </p:extLst>
+          </p:nvPr>
+        </p:nvSpPr>
+        <p:spPr>
+          <a:xfrm>
+            <a:off x="551553" y="304802"/>
+            <a:ext cx="11097349" cy="1573149"/>
+          </a:xfrm>
+          <a:prstGeom prst="rect">
+            <a:avLst/>
+          </a:prstGeom>
+          <a:ln w="12700">
+            <a:solidFill>
+              <a:srgbClr val="DEDEDE"/>
+            </a:solidFill>
+          </a:ln>
+          <a:effectLst>
+            <a:outerShdw blurRad="50800" dist="38100" dir="2700000" algn="tl" rotWithShape="0">
+              <a:schemeClr val="bg2">
+                <a:lumMod val="85000"/>
+                <a:alpha val="50000"/>
+              </a:schemeClr>
+            </a:outerShdw>
+          </a:effectLst>
+        </p:spPr>
+        <p:style>
+          <a:lnRef idx="2">
+            <a:schemeClr val="accent1">
+              <a:shade val="50000"/>
+            </a:schemeClr>
+          </a:lnRef>
+          <a:fillRef idx="1">
+            <a:schemeClr val="accent1"/>
+          </a:fillRef>
+          <a:effectRef idx="0">
+            <a:schemeClr val="accent1"/>
+          </a:effectRef>
+          <a:fontRef idx="minor">
+            <a:schemeClr val="lt1"/>
+          </a:fontRef>
+        </p:style>
+        <p:txBody>
+          <a:bodyPr rtlCol="0" anchor="ctr"/>
+          <a:lstStyle/>
+          <a:p>
+            <a:pPr marL="0" marR="0" lvl="0" indent="0" algn="ctr" defTabSz="914400" rtl="0" eaLnBrk="1" fontAlgn="auto" latinLnBrk="0" hangingPunct="1">
+              <a:lnSpc>
+                <a:spcPct val="100000"/>
+              </a:lnSpc>
+              <a:spcBef>
+                <a:spcPts val="0"/>
+              </a:spcBef>
+              <a:spcAft>
+                <a:spcPts val="0"/>
+              </a:spcAft>
+              <a:buClrTx/>
+              <a:buSzTx/>
+              <a:buFontTx/>
+              <a:buNone/>
+              <a:tabLst/>
+              <a:defRPr/>
+            </a:pPr>
+            <a:endParaRPr kumimoji="0" lang="en-US" sz="1800" b="0" i="0" u="none" strike="noStrike" kern="1200" cap="none" spc="0" normalizeH="0" baseline="0" noProof="0">
+              <a:ln>
+                <a:noFill/>
+              </a:ln>
+              <a:solidFill>
+                <a:prstClr val="white"/>
+              </a:solidFill>
+              <a:effectLst/>
+              <a:uLnTx/>
+              <a:uFillTx/>
+              <a:latin typeface="Calibri" panose="020F0502020204030204"/>
+              <a:ea typeface="+mn-ea"/>
+              <a:cs typeface="+mn-cs"/>
+            </a:endParaRPr>
+          </a:p>
+        </p:txBody>
+      </p:sp>
       <p:sp>
         <p:nvSpPr>
           <p:cNvPr id="2" name="Title 1">
@@ -7501,26 +11932,56 @@
         </p:nvSpPr>
         <p:spPr>
           <a:xfrm>
-            <a:off x="0" y="21804"/>
-            <a:ext cx="10515600" cy="1325563"/>
+            <a:off x="901690" y="405575"/>
+            <a:ext cx="6430414" cy="1371600"/>
           </a:xfrm>
         </p:spPr>
         <p:txBody>
-          <a:bodyPr/>
+          <a:bodyPr vert="horz" lIns="91440" tIns="45720" rIns="91440" bIns="45720" rtlCol="0" anchor="ctr">
+            <a:normAutofit/>
+          </a:bodyPr>
           <a:lstStyle/>
           <a:p>
             <a:r>
-              <a:rPr lang="en-US" dirty="0"/>
-              <a:t>Workforce Impact- </a:t>
+              <a:rPr lang="en-US" sz="3600" kern="1200" dirty="0">
+                <a:solidFill>
+                  <a:schemeClr val="tx1"/>
+                </a:solidFill>
+                <a:latin typeface="+mj-lt"/>
+                <a:ea typeface="+mj-ea"/>
+                <a:cs typeface="+mj-cs"/>
+              </a:rPr>
+              <a:t>AI Workforce Impact  </a:t>
             </a:r>
             <a:br>
-              <a:rPr lang="en-US" dirty="0"/>
+              <a:rPr lang="en-US" sz="4000" kern="1200" dirty="0">
+                <a:solidFill>
+                  <a:schemeClr val="tx1"/>
+                </a:solidFill>
+                <a:latin typeface="+mj-lt"/>
+                <a:ea typeface="+mj-ea"/>
+                <a:cs typeface="+mj-cs"/>
+              </a:rPr>
             </a:br>
             <a:r>
-              <a:rPr lang="en-US" sz="2800" dirty="0"/>
-              <a:t>Company Size and Workforce Transformation</a:t>
-            </a:r>
-            <a:endParaRPr lang="en-US" dirty="0"/>
+              <a:rPr lang="en-US" sz="2000" kern="1200" dirty="0">
+                <a:solidFill>
+                  <a:schemeClr val="tx1"/>
+                </a:solidFill>
+                <a:latin typeface="+mj-lt"/>
+                <a:ea typeface="+mj-ea"/>
+                <a:cs typeface="+mj-cs"/>
+              </a:rPr>
+              <a:t>Scale vs Relative Impact</a:t>
+            </a:r>
+            <a:endParaRPr lang="en-US" sz="4000" kern="1200" dirty="0">
+              <a:solidFill>
+                <a:schemeClr val="tx1"/>
+              </a:solidFill>
+              <a:latin typeface="+mj-lt"/>
+              <a:ea typeface="+mj-ea"/>
+              <a:cs typeface="+mj-cs"/>
+            </a:endParaRPr>
           </a:p>
         </p:txBody>
       </p:sp>
@@ -7542,59 +12003,177 @@
         </p:nvSpPr>
         <p:spPr>
           <a:xfrm>
-            <a:off x="952174" y="5897621"/>
-            <a:ext cx="10515600" cy="828136"/>
+            <a:off x="7924796" y="498698"/>
+            <a:ext cx="2893382" cy="1185353"/>
           </a:xfrm>
         </p:spPr>
         <p:txBody>
-          <a:bodyPr>
-            <a:normAutofit fontScale="55000" lnSpcReduction="20000"/>
+          <a:bodyPr vert="horz" lIns="91440" tIns="45720" rIns="91440" bIns="45720" rtlCol="0" anchor="ctr">
+            <a:normAutofit/>
           </a:bodyPr>
           <a:lstStyle/>
           <a:p>
-            <a:r>
-              <a:rPr lang="en-US" dirty="0"/>
-              <a:t>The left chart explains the correlation between company size and workforce transformation. The larger the company, the more change there is. The right chart expands on this by normalizing the data and displaying that the transformation happens at similar scales, despite larger companies appearing to be more impacted. The net change for each is slightly positive, with the majority of companies reporting high workforce reskilling. </a:t>
-            </a:r>
+            <a:pPr marL="0" indent="0">
+              <a:buNone/>
+            </a:pPr>
+            <a:r>
+              <a:rPr lang="en-US" sz="1800" dirty="0"/>
+              <a:t>Comparing AI-Driven Workforce Changes Across Company Sizes</a:t>
+            </a:r>
+            <a:endParaRPr lang="en-US" sz="1800" kern="1200" dirty="0">
+              <a:solidFill>
+                <a:schemeClr val="tx1"/>
+              </a:solidFill>
+              <a:latin typeface="+mn-lt"/>
+              <a:ea typeface="+mn-ea"/>
+              <a:cs typeface="+mn-cs"/>
+            </a:endParaRPr>
+          </a:p>
+        </p:txBody>
+      </p:sp>
+      <p:sp>
+        <p:nvSpPr>
+          <p:cNvPr id="58" name="Rectangle 57">
+            <a:extLst>
+              <a:ext uri="{FF2B5EF4-FFF2-40B4-BE49-F238E27FC236}">
+                <a16:creationId xmlns:a16="http://schemas.microsoft.com/office/drawing/2014/main" id="{2568BC19-F052-4108-93E1-6A3D1DEC072F}"/>
+              </a:ext>
+              <a:ext uri="{C183D7F6-B498-43B3-948B-1728B52AA6E4}">
+                <adec:decorative xmlns:adec="http://schemas.microsoft.com/office/drawing/2017/decorative" val="1"/>
+              </a:ext>
+            </a:extLst>
+          </p:cNvPr>
+          <p:cNvSpPr>
+            <a:spLocks noGrp="1" noRot="1" noChangeAspect="1" noMove="1" noResize="1" noEditPoints="1" noAdjustHandles="1" noChangeArrowheads="1" noChangeShapeType="1" noTextEdit="1"/>
+          </p:cNvSpPr>
+          <p:nvPr>
+            <p:extLst>
+              <p:ext uri="{386F3935-93C4-4BCD-93E2-E3B085C9AB24}">
+                <p16:designElem xmlns:p16="http://schemas.microsoft.com/office/powerpoint/2015/main" val="1"/>
+              </p:ext>
+            </p:extLst>
+          </p:nvPr>
+        </p:nvSpPr>
+        <p:spPr>
+          <a:xfrm>
+            <a:off x="494784" y="764424"/>
+            <a:ext cx="128016" cy="653903"/>
+          </a:xfrm>
+          <a:prstGeom prst="rect">
+            <a:avLst/>
+          </a:prstGeom>
+          <a:solidFill>
+            <a:schemeClr val="accent2"/>
+          </a:solidFill>
+          <a:ln>
+            <a:noFill/>
+          </a:ln>
+        </p:spPr>
+        <p:style>
+          <a:lnRef idx="2">
+            <a:schemeClr val="accent1">
+              <a:shade val="50000"/>
+            </a:schemeClr>
+          </a:lnRef>
+          <a:fillRef idx="1">
+            <a:schemeClr val="accent1"/>
+          </a:fillRef>
+          <a:effectRef idx="0">
+            <a:schemeClr val="accent1"/>
+          </a:effectRef>
+          <a:fontRef idx="minor">
+            <a:schemeClr val="lt1"/>
+          </a:fontRef>
+        </p:style>
+        <p:txBody>
+          <a:bodyPr rtlCol="0" anchor="ctr"/>
+          <a:lstStyle/>
+          <a:p>
+            <a:pPr algn="ctr"/>
+            <a:endParaRPr lang="en-US">
+              <a:solidFill>
+                <a:prstClr val="white"/>
+              </a:solidFill>
+              <a:latin typeface="Calibri" panose="020F0502020204030204"/>
+            </a:endParaRPr>
+          </a:p>
+        </p:txBody>
+      </p:sp>
+      <p:sp>
+        <p:nvSpPr>
+          <p:cNvPr id="60" name="Rectangle 59">
+            <a:extLst>
+              <a:ext uri="{FF2B5EF4-FFF2-40B4-BE49-F238E27FC236}">
+                <a16:creationId xmlns:a16="http://schemas.microsoft.com/office/drawing/2014/main" id="{D5FD337D-4D6B-4C8B-B6F5-121097E09881}"/>
+              </a:ext>
+              <a:ext uri="{C183D7F6-B498-43B3-948B-1728B52AA6E4}">
+                <adec:decorative xmlns:adec="http://schemas.microsoft.com/office/drawing/2017/decorative" val="1"/>
+              </a:ext>
+            </a:extLst>
+          </p:cNvPr>
+          <p:cNvSpPr>
+            <a:spLocks noGrp="1" noRot="1" noChangeAspect="1" noMove="1" noResize="1" noEditPoints="1" noAdjustHandles="1" noChangeArrowheads="1" noChangeShapeType="1" noTextEdit="1"/>
+          </p:cNvSpPr>
+          <p:nvPr>
+            <p:extLst>
+              <p:ext uri="{386F3935-93C4-4BCD-93E2-E3B085C9AB24}">
+                <p16:designElem xmlns:p16="http://schemas.microsoft.com/office/powerpoint/2015/main" val="1"/>
+              </p:ext>
+            </p:extLst>
+          </p:nvPr>
+        </p:nvSpPr>
+        <p:spPr>
+          <a:xfrm rot="5400000">
+            <a:off x="7126032" y="1067264"/>
+            <a:ext cx="1021458" cy="18288"/>
+          </a:xfrm>
+          <a:prstGeom prst="rect">
+            <a:avLst/>
+          </a:prstGeom>
+          <a:solidFill>
+            <a:srgbClr val="D5D5D5"/>
+          </a:solidFill>
+          <a:ln w="3175">
+            <a:noFill/>
+          </a:ln>
+          <a:effectLst/>
+        </p:spPr>
+        <p:style>
+          <a:lnRef idx="2">
+            <a:schemeClr val="accent1">
+              <a:shade val="50000"/>
+            </a:schemeClr>
+          </a:lnRef>
+          <a:fillRef idx="1">
+            <a:schemeClr val="accent1"/>
+          </a:fillRef>
+          <a:effectRef idx="0">
+            <a:schemeClr val="accent1"/>
+          </a:effectRef>
+          <a:fontRef idx="minor">
+            <a:schemeClr val="lt1"/>
+          </a:fontRef>
+        </p:style>
+        <p:txBody>
+          <a:bodyPr rtlCol="0" anchor="ctr"/>
+          <a:lstStyle/>
+          <a:p>
+            <a:pPr algn="ctr"/>
+            <a:endParaRPr lang="en-US">
+              <a:solidFill>
+                <a:prstClr val="white"/>
+              </a:solidFill>
+              <a:latin typeface="Calibri" panose="020F0502020204030204"/>
+            </a:endParaRPr>
           </a:p>
         </p:txBody>
       </p:sp>
       <p:pic>
         <p:nvPicPr>
-          <p:cNvPr id="5" name="Picture 4">
+          <p:cNvPr id="9" name="Picture 8">
             <a:extLst>
               <a:ext uri="{FF2B5EF4-FFF2-40B4-BE49-F238E27FC236}">
-                <a16:creationId xmlns:a16="http://schemas.microsoft.com/office/drawing/2014/main" id="{16D0A72B-13D3-A10A-CAAD-75A1AD0A4F6C}"/>
-              </a:ext>
-            </a:extLst>
-          </p:cNvPr>
-          <p:cNvPicPr>
-            <a:picLocks noChangeAspect="1"/>
-          </p:cNvPicPr>
-          <p:nvPr/>
-        </p:nvPicPr>
-        <p:blipFill>
-          <a:blip r:embed="rId2"/>
-          <a:stretch>
-            <a:fillRect/>
-          </a:stretch>
-        </p:blipFill>
-        <p:spPr>
-          <a:xfrm>
-            <a:off x="0" y="1316941"/>
-            <a:ext cx="12192000" cy="4560045"/>
-          </a:xfrm>
-          <a:prstGeom prst="rect">
-            <a:avLst/>
-          </a:prstGeom>
-        </p:spPr>
-      </p:pic>
-      <p:pic>
-        <p:nvPicPr>
-          <p:cNvPr id="7" name="Picture 6">
-            <a:extLst>
-              <a:ext uri="{FF2B5EF4-FFF2-40B4-BE49-F238E27FC236}">
-                <a16:creationId xmlns:a16="http://schemas.microsoft.com/office/drawing/2014/main" id="{BF9A1AC2-4BF2-79A5-6E18-AE2BD1C9DA72}"/>
+                <a16:creationId xmlns:a16="http://schemas.microsoft.com/office/drawing/2014/main" id="{F5571C5E-0ADE-2A1E-D9E9-9DD6FFDA5ECB}"/>
               </a:ext>
             </a:extLst>
           </p:cNvPr>
@@ -7611,14 +12190,129 @@
         </p:blipFill>
         <p:spPr>
           <a:xfrm>
-            <a:off x="-3093873" y="2989577"/>
-            <a:ext cx="3529890" cy="2908044"/>
+            <a:off x="398482" y="1978724"/>
+            <a:ext cx="11219384" cy="4151172"/>
           </a:xfrm>
           <a:prstGeom prst="rect">
             <a:avLst/>
           </a:prstGeom>
         </p:spPr>
       </p:pic>
+      <p:grpSp>
+        <p:nvGrpSpPr>
+          <p:cNvPr id="10" name="Group 9">
+            <a:extLst>
+              <a:ext uri="{FF2B5EF4-FFF2-40B4-BE49-F238E27FC236}">
+                <a16:creationId xmlns:a16="http://schemas.microsoft.com/office/drawing/2014/main" id="{AB84D7B7-D8A9-7DFA-54DD-AF16F0B0011E}"/>
+              </a:ext>
+            </a:extLst>
+          </p:cNvPr>
+          <p:cNvGrpSpPr/>
+          <p:nvPr/>
+        </p:nvGrpSpPr>
+        <p:grpSpPr>
+          <a:xfrm>
+            <a:off x="934360" y="6136651"/>
+            <a:ext cx="10331734" cy="591972"/>
+            <a:chOff x="1222401" y="5468091"/>
+            <a:chExt cx="9978013" cy="911951"/>
+          </a:xfrm>
+        </p:grpSpPr>
+        <p:sp>
+          <p:nvSpPr>
+            <p:cNvPr id="11" name="Rectangle 10">
+              <a:extLst>
+                <a:ext uri="{FF2B5EF4-FFF2-40B4-BE49-F238E27FC236}">
+                  <a16:creationId xmlns:a16="http://schemas.microsoft.com/office/drawing/2014/main" id="{B7EF099A-E86B-4479-99AE-D73EF4840EE5}"/>
+                </a:ext>
+              </a:extLst>
+            </p:cNvPr>
+            <p:cNvSpPr/>
+            <p:nvPr/>
+          </p:nvSpPr>
+          <p:spPr>
+            <a:xfrm>
+              <a:off x="1222401" y="5468091"/>
+              <a:ext cx="9978013" cy="901545"/>
+            </a:xfrm>
+            <a:prstGeom prst="rect">
+              <a:avLst/>
+            </a:prstGeom>
+            <a:solidFill>
+              <a:srgbClr val="C7D7D7"/>
+            </a:solidFill>
+            <a:ln>
+              <a:noFill/>
+            </a:ln>
+          </p:spPr>
+          <p:style>
+            <a:lnRef idx="2">
+              <a:schemeClr val="accent1">
+                <a:shade val="15000"/>
+              </a:schemeClr>
+            </a:lnRef>
+            <a:fillRef idx="1">
+              <a:schemeClr val="accent1"/>
+            </a:fillRef>
+            <a:effectRef idx="0">
+              <a:schemeClr val="accent1"/>
+            </a:effectRef>
+            <a:fontRef idx="minor">
+              <a:schemeClr val="lt1"/>
+            </a:fontRef>
+          </p:style>
+          <p:txBody>
+            <a:bodyPr rtlCol="0" anchor="ctr"/>
+            <a:lstStyle/>
+            <a:p>
+              <a:pPr algn="ctr"/>
+              <a:endParaRPr lang="en-US" dirty="0"/>
+            </a:p>
+          </p:txBody>
+        </p:sp>
+        <p:sp>
+          <p:nvSpPr>
+            <p:cNvPr id="12" name="TextBox 11">
+              <a:extLst>
+                <a:ext uri="{FF2B5EF4-FFF2-40B4-BE49-F238E27FC236}">
+                  <a16:creationId xmlns:a16="http://schemas.microsoft.com/office/drawing/2014/main" id="{A760B44A-0DC3-58D4-308A-42EFA8F36C5D}"/>
+                </a:ext>
+              </a:extLst>
+            </p:cNvPr>
+            <p:cNvSpPr txBox="1"/>
+            <p:nvPr/>
+          </p:nvSpPr>
+          <p:spPr>
+            <a:xfrm>
+              <a:off x="1306286" y="5479177"/>
+              <a:ext cx="9817239" cy="900865"/>
+            </a:xfrm>
+            <a:prstGeom prst="rect">
+              <a:avLst/>
+            </a:prstGeom>
+            <a:noFill/>
+            <a:ln>
+              <a:noFill/>
+            </a:ln>
+          </p:spPr>
+          <p:txBody>
+            <a:bodyPr wrap="square" rtlCol="0">
+              <a:spAutoFit/>
+            </a:bodyPr>
+            <a:lstStyle/>
+            <a:p>
+              <a:r>
+                <a:rPr lang="en-US" sz="1600" b="1" dirty="0"/>
+                <a:t>Key Finding: </a:t>
+              </a:r>
+              <a:r>
+                <a:rPr lang="en-US" sz="1600" dirty="0"/>
+                <a:t>Enterprise organizations show the largest workforce shifts by volume, but normalized analysis reveals reskilling is a consistent response across company sizes.</a:t>
+              </a:r>
+            </a:p>
+          </p:txBody>
+        </p:sp>
+      </p:grpSp>
     </p:spTree>
     <p:extLst>
       <p:ext uri="{BB962C8B-B14F-4D97-AF65-F5344CB8AC3E}">
@@ -7635,9 +12329,23 @@
 <file path=ppt/slides/slide7.xml><?xml version="1.0" encoding="utf-8"?>
 <p:sld xmlns:a="http://schemas.openxmlformats.org/drawingml/2006/main" xmlns:r="http://schemas.openxmlformats.org/officeDocument/2006/relationships" xmlns:p="http://schemas.openxmlformats.org/presentationml/2006/main">
   <p:cSld>
+    <p:bg>
+      <p:bgPr>
+        <a:solidFill>
+          <a:schemeClr val="bg1"/>
+        </a:solidFill>
+        <a:effectLst/>
+      </p:bgPr>
+    </p:bg>
     <p:spTree>
       <p:nvGrpSpPr>
-        <p:cNvPr id="1" name=""/>
+        <p:cNvPr id="1" name="">
+          <a:extLst>
+            <a:ext uri="{FF2B5EF4-FFF2-40B4-BE49-F238E27FC236}">
+              <a16:creationId xmlns:a16="http://schemas.microsoft.com/office/drawing/2014/main" id="{54BF26DA-96B4-3909-7137-2099AF35FA7A}"/>
+            </a:ext>
+          </a:extLst>
+        </p:cNvPr>
         <p:cNvGrpSpPr/>
         <p:nvPr/>
       </p:nvGrpSpPr>
@@ -7649,12 +12357,171 @@
           <a:chExt cx="0" cy="0"/>
         </a:xfrm>
       </p:grpSpPr>
+      <p:sp useBgFill="1">
+        <p:nvSpPr>
+          <p:cNvPr id="54" name="Rectangle 53">
+            <a:extLst>
+              <a:ext uri="{FF2B5EF4-FFF2-40B4-BE49-F238E27FC236}">
+                <a16:creationId xmlns:a16="http://schemas.microsoft.com/office/drawing/2014/main" id="{31B4B701-F5CB-01F6-7403-1CED722D86AC}"/>
+              </a:ext>
+              <a:ext uri="{C183D7F6-B498-43B3-948B-1728B52AA6E4}">
+                <adec:decorative xmlns:adec="http://schemas.microsoft.com/office/drawing/2017/decorative" val="1"/>
+              </a:ext>
+            </a:extLst>
+          </p:cNvPr>
+          <p:cNvSpPr>
+            <a:spLocks noGrp="1" noRot="1" noChangeAspect="1" noMove="1" noResize="1" noEditPoints="1" noAdjustHandles="1" noChangeArrowheads="1" noChangeShapeType="1" noTextEdit="1"/>
+          </p:cNvSpPr>
+          <p:nvPr>
+            <p:extLst>
+              <p:ext uri="{386F3935-93C4-4BCD-93E2-E3B085C9AB24}">
+                <p16:designElem xmlns:p16="http://schemas.microsoft.com/office/powerpoint/2015/main" val="1"/>
+              </p:ext>
+            </p:extLst>
+          </p:nvPr>
+        </p:nvSpPr>
+        <p:spPr>
+          <a:xfrm>
+            <a:off x="0" y="0"/>
+            <a:ext cx="12192000" cy="6858000"/>
+          </a:xfrm>
+          <a:prstGeom prst="rect">
+            <a:avLst/>
+          </a:prstGeom>
+          <a:ln>
+            <a:noFill/>
+          </a:ln>
+        </p:spPr>
+        <p:style>
+          <a:lnRef idx="2">
+            <a:schemeClr val="accent1">
+              <a:shade val="50000"/>
+            </a:schemeClr>
+          </a:lnRef>
+          <a:fillRef idx="1">
+            <a:schemeClr val="accent1"/>
+          </a:fillRef>
+          <a:effectRef idx="0">
+            <a:schemeClr val="accent1"/>
+          </a:effectRef>
+          <a:fontRef idx="minor">
+            <a:schemeClr val="lt1"/>
+          </a:fontRef>
+        </p:style>
+        <p:txBody>
+          <a:bodyPr rtlCol="0" anchor="ctr"/>
+          <a:lstStyle/>
+          <a:p>
+            <a:pPr algn="ctr"/>
+            <a:endParaRPr lang="en-US"/>
+          </a:p>
+        </p:txBody>
+      </p:sp>
+      <p:sp useBgFill="1">
+        <p:nvSpPr>
+          <p:cNvPr id="56" name="Rectangle 55">
+            <a:extLst>
+              <a:ext uri="{FF2B5EF4-FFF2-40B4-BE49-F238E27FC236}">
+                <a16:creationId xmlns:a16="http://schemas.microsoft.com/office/drawing/2014/main" id="{5B84C6F8-02F2-3B88-01AC-10601DD969FB}"/>
+              </a:ext>
+              <a:ext uri="{C183D7F6-B498-43B3-948B-1728B52AA6E4}">
+                <adec:decorative xmlns:adec="http://schemas.microsoft.com/office/drawing/2017/decorative" val="1"/>
+              </a:ext>
+            </a:extLst>
+          </p:cNvPr>
+          <p:cNvSpPr>
+            <a:spLocks noGrp="1" noRot="1" noChangeAspect="1" noMove="1" noResize="1" noEditPoints="1" noAdjustHandles="1" noChangeArrowheads="1" noChangeShapeType="1" noTextEdit="1"/>
+          </p:cNvSpPr>
+          <p:nvPr>
+            <p:extLst>
+              <p:ext uri="{386F3935-93C4-4BCD-93E2-E3B085C9AB24}">
+                <p16:designElem xmlns:p16="http://schemas.microsoft.com/office/powerpoint/2015/main" val="1"/>
+              </p:ext>
+            </p:extLst>
+          </p:nvPr>
+        </p:nvSpPr>
+        <p:spPr>
+          <a:xfrm>
+            <a:off x="551553" y="304802"/>
+            <a:ext cx="11097349" cy="1573149"/>
+          </a:xfrm>
+          <a:prstGeom prst="rect">
+            <a:avLst/>
+          </a:prstGeom>
+          <a:ln w="12700">
+            <a:solidFill>
+              <a:srgbClr val="DEDEDE"/>
+            </a:solidFill>
+          </a:ln>
+          <a:effectLst>
+            <a:outerShdw blurRad="50800" dist="38100" dir="2700000" algn="tl" rotWithShape="0">
+              <a:schemeClr val="bg2">
+                <a:lumMod val="85000"/>
+                <a:alpha val="50000"/>
+              </a:schemeClr>
+            </a:outerShdw>
+          </a:effectLst>
+        </p:spPr>
+        <p:style>
+          <a:lnRef idx="2">
+            <a:schemeClr val="accent1">
+              <a:shade val="50000"/>
+            </a:schemeClr>
+          </a:lnRef>
+          <a:fillRef idx="1">
+            <a:schemeClr val="accent1"/>
+          </a:fillRef>
+          <a:effectRef idx="0">
+            <a:schemeClr val="accent1"/>
+          </a:effectRef>
+          <a:fontRef idx="minor">
+            <a:schemeClr val="lt1"/>
+          </a:fontRef>
+        </p:style>
+        <p:txBody>
+          <a:bodyPr rtlCol="0" anchor="ctr"/>
+          <a:lstStyle/>
+          <a:p>
+            <a:pPr marL="0" marR="0" lvl="0" indent="0" algn="ctr" defTabSz="914400" rtl="0" eaLnBrk="1" fontAlgn="auto" latinLnBrk="0" hangingPunct="1">
+              <a:lnSpc>
+                <a:spcPct val="100000"/>
+              </a:lnSpc>
+              <a:spcBef>
+                <a:spcPts val="0"/>
+              </a:spcBef>
+              <a:spcAft>
+                <a:spcPts val="0"/>
+              </a:spcAft>
+              <a:buClrTx/>
+              <a:buSzTx/>
+              <a:buFontTx/>
+              <a:buNone/>
+              <a:tabLst/>
+              <a:defRPr/>
+            </a:pPr>
+            <a:endParaRPr kumimoji="0" lang="en-US" sz="1800" b="0" i="0" u="none" strike="noStrike" kern="1200" cap="none" spc="0" normalizeH="0" baseline="0" noProof="0">
+              <a:ln>
+                <a:noFill/>
+              </a:ln>
+              <a:solidFill>
+                <a:prstClr val="white"/>
+              </a:solidFill>
+              <a:effectLst/>
+              <a:uLnTx/>
+              <a:uFillTx/>
+              <a:latin typeface="Calibri" panose="020F0502020204030204"/>
+              <a:ea typeface="+mn-ea"/>
+              <a:cs typeface="+mn-cs"/>
+            </a:endParaRPr>
+          </a:p>
+        </p:txBody>
+      </p:sp>
       <p:sp>
         <p:nvSpPr>
           <p:cNvPr id="2" name="Title 1">
             <a:extLst>
               <a:ext uri="{FF2B5EF4-FFF2-40B4-BE49-F238E27FC236}">
-                <a16:creationId xmlns:a16="http://schemas.microsoft.com/office/drawing/2014/main" id="{1A4D5854-B4D0-4DD5-8A4A-F946AF856786}"/>
+                <a16:creationId xmlns:a16="http://schemas.microsoft.com/office/drawing/2014/main" id="{D258F58C-112F-E8BB-68F3-DBDBD46A085F}"/>
               </a:ext>
             </a:extLst>
           </p:cNvPr>
@@ -7665,15 +12532,37 @@
             <p:ph type="title"/>
           </p:nvPr>
         </p:nvSpPr>
-        <p:spPr/>
+        <p:spPr>
+          <a:xfrm>
+            <a:off x="901689" y="405575"/>
+            <a:ext cx="6725927" cy="1371600"/>
+          </a:xfrm>
+        </p:spPr>
         <p:txBody>
-          <a:bodyPr/>
+          <a:bodyPr vert="horz" lIns="91440" tIns="45720" rIns="91440" bIns="45720" rtlCol="0" anchor="ctr">
+            <a:normAutofit/>
+          </a:bodyPr>
           <a:lstStyle/>
           <a:p>
             <a:r>
-              <a:rPr lang="en-US" dirty="0"/>
-              <a:t>Recommendation and Way Forward</a:t>
-            </a:r>
+              <a:rPr lang="en-US" sz="3600" kern="1200" dirty="0">
+                <a:solidFill>
+                  <a:schemeClr val="tx1"/>
+                </a:solidFill>
+                <a:latin typeface="+mj-lt"/>
+                <a:ea typeface="+mj-ea"/>
+                <a:cs typeface="+mj-cs"/>
+              </a:rPr>
+              <a:t>Recommendations &amp; Way Forward</a:t>
+            </a:r>
+            <a:endParaRPr lang="en-US" sz="4000" kern="1200" dirty="0">
+              <a:solidFill>
+                <a:schemeClr val="tx1"/>
+              </a:solidFill>
+              <a:latin typeface="+mj-lt"/>
+              <a:ea typeface="+mj-ea"/>
+              <a:cs typeface="+mj-cs"/>
+            </a:endParaRPr>
           </a:p>
         </p:txBody>
       </p:sp>
@@ -7682,7 +12571,7 @@
           <p:cNvPr id="3" name="Content Placeholder 2">
             <a:extLst>
               <a:ext uri="{FF2B5EF4-FFF2-40B4-BE49-F238E27FC236}">
-                <a16:creationId xmlns:a16="http://schemas.microsoft.com/office/drawing/2014/main" id="{EBF325F0-63EA-4B60-67CF-5972F3A46B02}"/>
+                <a16:creationId xmlns:a16="http://schemas.microsoft.com/office/drawing/2014/main" id="{BCE89ECC-7037-BC2E-C6B1-F9D57EF9D40F}"/>
               </a:ext>
             </a:extLst>
           </p:cNvPr>
@@ -7693,22 +12582,205 @@
             <p:ph idx="1"/>
           </p:nvPr>
         </p:nvSpPr>
-        <p:spPr/>
+        <p:spPr>
+          <a:xfrm>
+            <a:off x="7924796" y="498698"/>
+            <a:ext cx="3365514" cy="1185353"/>
+          </a:xfrm>
+        </p:spPr>
         <p:txBody>
-          <a:bodyPr/>
+          <a:bodyPr vert="horz" lIns="91440" tIns="45720" rIns="91440" bIns="45720" rtlCol="0" anchor="ctr">
+            <a:normAutofit/>
+          </a:bodyPr>
           <a:lstStyle/>
           <a:p>
-            <a:r>
-              <a:rPr lang="en-US" dirty="0"/>
-              <a:t>AI is super rad, people should take a minute to learn about it</a:t>
-            </a:r>
+            <a:pPr marL="0" indent="0">
+              <a:buNone/>
+            </a:pPr>
+            <a:r>
+              <a:rPr lang="en-US" sz="1800" dirty="0"/>
+              <a:t>Identifying actions to improve AI maturity, workforce readiness, and organizational outcomes</a:t>
+            </a:r>
+            <a:endParaRPr lang="en-US" sz="1800" kern="1200" dirty="0">
+              <a:solidFill>
+                <a:schemeClr val="tx1"/>
+              </a:solidFill>
+              <a:latin typeface="+mn-lt"/>
+              <a:ea typeface="+mn-ea"/>
+              <a:cs typeface="+mn-cs"/>
+            </a:endParaRPr>
           </a:p>
         </p:txBody>
       </p:sp>
+      <p:sp>
+        <p:nvSpPr>
+          <p:cNvPr id="58" name="Rectangle 57">
+            <a:extLst>
+              <a:ext uri="{FF2B5EF4-FFF2-40B4-BE49-F238E27FC236}">
+                <a16:creationId xmlns:a16="http://schemas.microsoft.com/office/drawing/2014/main" id="{CF2BDDFB-5D54-06C1-AA8D-D1BEE748DE95}"/>
+              </a:ext>
+              <a:ext uri="{C183D7F6-B498-43B3-948B-1728B52AA6E4}">
+                <adec:decorative xmlns:adec="http://schemas.microsoft.com/office/drawing/2017/decorative" val="1"/>
+              </a:ext>
+            </a:extLst>
+          </p:cNvPr>
+          <p:cNvSpPr>
+            <a:spLocks noGrp="1" noRot="1" noChangeAspect="1" noMove="1" noResize="1" noEditPoints="1" noAdjustHandles="1" noChangeArrowheads="1" noChangeShapeType="1" noTextEdit="1"/>
+          </p:cNvSpPr>
+          <p:nvPr>
+            <p:extLst>
+              <p:ext uri="{386F3935-93C4-4BCD-93E2-E3B085C9AB24}">
+                <p16:designElem xmlns:p16="http://schemas.microsoft.com/office/powerpoint/2015/main" val="1"/>
+              </p:ext>
+            </p:extLst>
+          </p:nvPr>
+        </p:nvSpPr>
+        <p:spPr>
+          <a:xfrm>
+            <a:off x="494784" y="764424"/>
+            <a:ext cx="128016" cy="653903"/>
+          </a:xfrm>
+          <a:prstGeom prst="rect">
+            <a:avLst/>
+          </a:prstGeom>
+          <a:solidFill>
+            <a:schemeClr val="accent2"/>
+          </a:solidFill>
+          <a:ln>
+            <a:noFill/>
+          </a:ln>
+        </p:spPr>
+        <p:style>
+          <a:lnRef idx="2">
+            <a:schemeClr val="accent1">
+              <a:shade val="50000"/>
+            </a:schemeClr>
+          </a:lnRef>
+          <a:fillRef idx="1">
+            <a:schemeClr val="accent1"/>
+          </a:fillRef>
+          <a:effectRef idx="0">
+            <a:schemeClr val="accent1"/>
+          </a:effectRef>
+          <a:fontRef idx="minor">
+            <a:schemeClr val="lt1"/>
+          </a:fontRef>
+        </p:style>
+        <p:txBody>
+          <a:bodyPr rtlCol="0" anchor="ctr"/>
+          <a:lstStyle/>
+          <a:p>
+            <a:pPr algn="ctr"/>
+            <a:endParaRPr lang="en-US">
+              <a:solidFill>
+                <a:prstClr val="white"/>
+              </a:solidFill>
+              <a:latin typeface="Calibri" panose="020F0502020204030204"/>
+            </a:endParaRPr>
+          </a:p>
+        </p:txBody>
+      </p:sp>
+      <p:sp>
+        <p:nvSpPr>
+          <p:cNvPr id="60" name="Rectangle 59">
+            <a:extLst>
+              <a:ext uri="{FF2B5EF4-FFF2-40B4-BE49-F238E27FC236}">
+                <a16:creationId xmlns:a16="http://schemas.microsoft.com/office/drawing/2014/main" id="{0AB88907-17AB-C310-B286-F0A3ADCF5F2C}"/>
+              </a:ext>
+              <a:ext uri="{C183D7F6-B498-43B3-948B-1728B52AA6E4}">
+                <adec:decorative xmlns:adec="http://schemas.microsoft.com/office/drawing/2017/decorative" val="1"/>
+              </a:ext>
+            </a:extLst>
+          </p:cNvPr>
+          <p:cNvSpPr>
+            <a:spLocks noGrp="1" noRot="1" noChangeAspect="1" noMove="1" noResize="1" noEditPoints="1" noAdjustHandles="1" noChangeArrowheads="1" noChangeShapeType="1" noTextEdit="1"/>
+          </p:cNvSpPr>
+          <p:nvPr>
+            <p:extLst>
+              <p:ext uri="{386F3935-93C4-4BCD-93E2-E3B085C9AB24}">
+                <p16:designElem xmlns:p16="http://schemas.microsoft.com/office/powerpoint/2015/main" val="1"/>
+              </p:ext>
+            </p:extLst>
+          </p:nvPr>
+        </p:nvSpPr>
+        <p:spPr>
+          <a:xfrm rot="5400000">
+            <a:off x="7126032" y="1067264"/>
+            <a:ext cx="1021458" cy="18288"/>
+          </a:xfrm>
+          <a:prstGeom prst="rect">
+            <a:avLst/>
+          </a:prstGeom>
+          <a:solidFill>
+            <a:srgbClr val="D5D5D5"/>
+          </a:solidFill>
+          <a:ln w="3175">
+            <a:noFill/>
+          </a:ln>
+          <a:effectLst/>
+        </p:spPr>
+        <p:style>
+          <a:lnRef idx="2">
+            <a:schemeClr val="accent1">
+              <a:shade val="50000"/>
+            </a:schemeClr>
+          </a:lnRef>
+          <a:fillRef idx="1">
+            <a:schemeClr val="accent1"/>
+          </a:fillRef>
+          <a:effectRef idx="0">
+            <a:schemeClr val="accent1"/>
+          </a:effectRef>
+          <a:fontRef idx="minor">
+            <a:schemeClr val="lt1"/>
+          </a:fontRef>
+        </p:style>
+        <p:txBody>
+          <a:bodyPr rtlCol="0" anchor="ctr"/>
+          <a:lstStyle/>
+          <a:p>
+            <a:pPr algn="ctr"/>
+            <a:endParaRPr lang="en-US">
+              <a:solidFill>
+                <a:prstClr val="white"/>
+              </a:solidFill>
+              <a:latin typeface="Calibri" panose="020F0502020204030204"/>
+            </a:endParaRPr>
+          </a:p>
+        </p:txBody>
+      </p:sp>
+      <p:graphicFrame>
+        <p:nvGraphicFramePr>
+          <p:cNvPr id="4" name="Diagram 3">
+            <a:extLst>
+              <a:ext uri="{FF2B5EF4-FFF2-40B4-BE49-F238E27FC236}">
+                <a16:creationId xmlns:a16="http://schemas.microsoft.com/office/drawing/2014/main" id="{A672B9A4-53FD-6645-1D81-D5C6283CAFA9}"/>
+              </a:ext>
+            </a:extLst>
+          </p:cNvPr>
+          <p:cNvGraphicFramePr/>
+          <p:nvPr>
+            <p:extLst>
+              <p:ext uri="{D42A27DB-BD31-4B8C-83A1-F6EECF244321}">
+                <p14:modId xmlns:p14="http://schemas.microsoft.com/office/powerpoint/2010/main" val="320899661"/>
+              </p:ext>
+            </p:extLst>
+          </p:nvPr>
+        </p:nvGraphicFramePr>
+        <p:xfrm>
+          <a:off x="494784" y="2396967"/>
+          <a:ext cx="11097349" cy="3280506"/>
+        </p:xfrm>
+        <a:graphic>
+          <a:graphicData uri="http://schemas.openxmlformats.org/drawingml/2006/diagram">
+            <dgm:relIds xmlns:dgm="http://schemas.openxmlformats.org/drawingml/2006/diagram" xmlns:r="http://schemas.openxmlformats.org/officeDocument/2006/relationships" r:dm="rId3" r:lo="rId4" r:qs="rId5" r:cs="rId6"/>
+          </a:graphicData>
+        </a:graphic>
+      </p:graphicFrame>
     </p:spTree>
     <p:extLst>
       <p:ext uri="{BB962C8B-B14F-4D97-AF65-F5344CB8AC3E}">
-        <p14:creationId xmlns:p14="http://schemas.microsoft.com/office/powerpoint/2010/main" val="2406880652"/>
+        <p14:creationId xmlns:p14="http://schemas.microsoft.com/office/powerpoint/2010/main" val="474153153"/>
       </p:ext>
     </p:extLst>
   </p:cSld>
@@ -7726,7 +12798,7 @@
         <p:cNvPr id="1" name="">
           <a:extLst>
             <a:ext uri="{FF2B5EF4-FFF2-40B4-BE49-F238E27FC236}">
-              <a16:creationId xmlns:a16="http://schemas.microsoft.com/office/drawing/2014/main" id="{4FD4AF51-9155-2367-71DB-28709DBB1D91}"/>
+              <a16:creationId xmlns:a16="http://schemas.microsoft.com/office/drawing/2014/main" id="{0BF9790D-C34F-A7CD-B670-DAB65106B48D}"/>
             </a:ext>
           </a:extLst>
         </p:cNvPr>
@@ -7746,7 +12818,7 @@
           <p:cNvPr id="2" name="Title 1">
             <a:extLst>
               <a:ext uri="{FF2B5EF4-FFF2-40B4-BE49-F238E27FC236}">
-                <a16:creationId xmlns:a16="http://schemas.microsoft.com/office/drawing/2014/main" id="{F6891E60-D219-B860-6ED5-E0A4308602A7}"/>
+                <a16:creationId xmlns:a16="http://schemas.microsoft.com/office/drawing/2014/main" id="{59BBF8EC-7D79-8209-055C-37D2E61A5A6B}"/>
               </a:ext>
             </a:extLst>
           </p:cNvPr>
@@ -7757,24 +12829,70 @@
             <p:ph type="title"/>
           </p:nvPr>
         </p:nvSpPr>
-        <p:spPr/>
+        <p:spPr>
+          <a:xfrm>
+            <a:off x="2187363" y="1671569"/>
+            <a:ext cx="5801917" cy="2228760"/>
+          </a:xfrm>
+        </p:spPr>
         <p:txBody>
-          <a:bodyPr/>
+          <a:bodyPr anchor="b">
+            <a:normAutofit/>
+          </a:bodyPr>
           <a:lstStyle/>
           <a:p>
             <a:r>
-              <a:rPr lang="en-US" dirty="0"/>
+              <a:rPr lang="en-US" sz="4000" dirty="0"/>
               <a:t>Summary</a:t>
             </a:r>
           </a:p>
         </p:txBody>
       </p:sp>
+      <p:pic>
+        <p:nvPicPr>
+          <p:cNvPr id="22" name="Graphic 21" descr="Head with Gears">
+            <a:extLst>
+              <a:ext uri="{FF2B5EF4-FFF2-40B4-BE49-F238E27FC236}">
+                <a16:creationId xmlns:a16="http://schemas.microsoft.com/office/drawing/2014/main" id="{CFE1C145-8195-EB4B-5B4A-2DC4F121BF5B}"/>
+              </a:ext>
+            </a:extLst>
+          </p:cNvPr>
+          <p:cNvPicPr>
+            <a:picLocks noChangeAspect="1"/>
+          </p:cNvPicPr>
+          <p:nvPr/>
+        </p:nvPicPr>
+        <p:blipFill>
+          <a:blip>
+            <a:extLst>
+              <a:ext uri="{28A0092B-C50C-407E-A947-70E740481C1C}">
+                <a14:useLocalDpi xmlns:a14="http://schemas.microsoft.com/office/drawing/2010/main" val="0"/>
+              </a:ext>
+              <a:ext uri="{96DAC541-7B7A-43D3-8B79-37D633B846F1}">
+                <asvg:svgBlip xmlns:asvg="http://schemas.microsoft.com/office/drawing/2016/SVG/main" r:embed="rId2"/>
+              </a:ext>
+            </a:extLst>
+          </a:blip>
+          <a:stretch>
+            <a:fillRect/>
+          </a:stretch>
+        </p:blipFill>
+        <p:spPr>
+          <a:xfrm>
+            <a:off x="736948" y="2694018"/>
+            <a:ext cx="1198532" cy="1198532"/>
+          </a:xfrm>
+          <a:prstGeom prst="rect">
+            <a:avLst/>
+          </a:prstGeom>
+        </p:spPr>
+      </p:pic>
       <p:sp>
         <p:nvSpPr>
           <p:cNvPr id="3" name="Content Placeholder 2">
             <a:extLst>
               <a:ext uri="{FF2B5EF4-FFF2-40B4-BE49-F238E27FC236}">
-                <a16:creationId xmlns:a16="http://schemas.microsoft.com/office/drawing/2014/main" id="{17C5E115-2D3F-7102-FB24-551ED6B6FE7E}"/>
+                <a16:creationId xmlns:a16="http://schemas.microsoft.com/office/drawing/2014/main" id="{78B14071-0148-F0BE-619A-CD36A7A08FA8}"/>
               </a:ext>
             </a:extLst>
           </p:cNvPr>
@@ -7785,32 +12903,87 @@
             <p:ph idx="1"/>
           </p:nvPr>
         </p:nvSpPr>
-        <p:spPr/>
+        <p:spPr>
+          <a:xfrm>
+            <a:off x="2187364" y="4072044"/>
+            <a:ext cx="5801917" cy="2057045"/>
+          </a:xfrm>
+        </p:spPr>
         <p:txBody>
-          <a:bodyPr/>
+          <a:bodyPr>
+            <a:normAutofit/>
+          </a:bodyPr>
           <a:lstStyle/>
           <a:p>
             <a:r>
-              <a:rPr lang="en-US" dirty="0"/>
-              <a:t>Study Summary</a:t>
-            </a:r>
-          </a:p>
-          <a:p>
-            <a:r>
-              <a:rPr lang="en-US" dirty="0"/>
-              <a:t>AI Adoption Data Distribution Summary</a:t>
-            </a:r>
-          </a:p>
-          <a:p>
-            <a:r>
-              <a:rPr lang="en-US" dirty="0"/>
-              <a:t>Results</a:t>
-            </a:r>
-          </a:p>
-          <a:p>
-            <a:endParaRPr lang="en-US" dirty="0"/>
-          </a:p>
-          <a:p>
+              <a:rPr lang="en-US" sz="2000" dirty="0"/>
+              <a:t>Study Overview</a:t>
+            </a:r>
+          </a:p>
+          <a:p>
+            <a:r>
+              <a:rPr lang="en-US" sz="2000" dirty="0"/>
+              <a:t>AI Adoption Landscape</a:t>
+            </a:r>
+          </a:p>
+          <a:p>
+            <a:r>
+              <a:rPr lang="en-US" sz="2000" dirty="0"/>
+              <a:t>AI Maturity &amp; Business Outcomes</a:t>
+            </a:r>
+          </a:p>
+          <a:p>
+            <a:r>
+              <a:rPr lang="en-US" sz="2000" dirty="0"/>
+              <a:t>Workforce Impacts</a:t>
+            </a:r>
+          </a:p>
+          <a:p>
+            <a:r>
+              <a:rPr lang="en-US" sz="2000" dirty="0"/>
+              <a:t>Recommendations and Way Forward</a:t>
+            </a:r>
+          </a:p>
+          <a:p>
+            <a:endParaRPr lang="en-US" sz="2000" dirty="0"/>
+          </a:p>
+          <a:p>
+            <a:endParaRPr lang="en-US" sz="2000" dirty="0"/>
+          </a:p>
+        </p:txBody>
+      </p:sp>
+      <p:sp>
+        <p:nvSpPr>
+          <p:cNvPr id="5" name="TextBox 4">
+            <a:extLst>
+              <a:ext uri="{FF2B5EF4-FFF2-40B4-BE49-F238E27FC236}">
+                <a16:creationId xmlns:a16="http://schemas.microsoft.com/office/drawing/2014/main" id="{B21542F2-7FE7-1F5C-F970-D21C40E7830B}"/>
+              </a:ext>
+            </a:extLst>
+          </p:cNvPr>
+          <p:cNvSpPr txBox="1"/>
+          <p:nvPr/>
+        </p:nvSpPr>
+        <p:spPr>
+          <a:xfrm>
+            <a:off x="8646160" y="812800"/>
+            <a:ext cx="2458720" cy="523220"/>
+          </a:xfrm>
+          <a:prstGeom prst="rect">
+            <a:avLst/>
+          </a:prstGeom>
+          <a:noFill/>
+        </p:spPr>
+        <p:txBody>
+          <a:bodyPr wrap="square" rtlCol="0">
+            <a:spAutoFit/>
+          </a:bodyPr>
+          <a:lstStyle/>
+          <a:p>
+            <a:r>
+              <a:rPr lang="en-US" sz="2800" dirty="0"/>
+              <a:t>Questions?</a:t>
+            </a:r>
             <a:endParaRPr lang="en-US" dirty="0"/>
           </a:p>
         </p:txBody>
@@ -7818,7 +12991,7 @@
     </p:spTree>
     <p:extLst>
       <p:ext uri="{BB962C8B-B14F-4D97-AF65-F5344CB8AC3E}">
-        <p14:creationId xmlns:p14="http://schemas.microsoft.com/office/powerpoint/2010/main" val="3846943167"/>
+        <p14:creationId xmlns:p14="http://schemas.microsoft.com/office/powerpoint/2010/main" val="848280131"/>
       </p:ext>
     </p:extLst>
   </p:cSld>
